--- a/decks/LabMgmt_04_Informatics-and-LIS.pptx
+++ b/decks/LabMgmt_04_Informatics-and-LIS.pptx
@@ -25,9 +25,14 @@
     <p:sldId id="273" r:id="rId19"/>
     <p:sldId id="274" r:id="rId20"/>
     <p:sldId id="275" r:id="rId21"/>
+    <p:sldId id="276" r:id="rId22"/>
+    <p:sldId id="277" r:id="rId23"/>
+    <p:sldId id="278" r:id="rId24"/>
+    <p:sldId id="279" r:id="rId25"/>
+    <p:sldId id="280" r:id="rId26"/>
   </p:sldIdLst>
   <p:notesMasterIdLst>
-    <p:notesMasterId r:id="rId22"/>
+    <p:notesMasterId r:id="rId27"/>
   </p:notesMasterIdLst>
   <p:sldSz cx="12191695" cy="6858000"/>
   <p:notesSz cx="6858000" cy="12191695"/>
@@ -1601,6 +1606,446 @@
             <a:fld id="{F7021451-1387-4CA6-816F-3879F97B5CBC}" type="slidenum">
               <a:rPr lang="en-US"/>
               <a:t>20</a:t>
+            </a:fld>
+            <a:endParaRPr lang="en-US"/>
+          </a:p>
+        </p:txBody>
+      </p:sp>
+    </p:spTree>
+    <p:extLst>
+      <p:ext uri="{BB962C8B-B14F-4D97-AF65-F5344CB8AC3E}">
+        <p14:creationId xmlns:p14="http://schemas.microsoft.com/office/powerpoint/2010/main" val="1024086991"/>
+      </p:ext>
+    </p:extLst>
+  </p:cSld>
+  <p:clrMapOvr>
+    <a:masterClrMapping/>
+  </p:clrMapOvr>
+</p:notes>
+</file>
+
+<file path=ppt/notesSlides/notesSlide21.xml><?xml version="1.0" encoding="utf-8"?>
+<p:notes xmlns:a="http://schemas.openxmlformats.org/drawingml/2006/main" xmlns:r="http://schemas.openxmlformats.org/officeDocument/2006/relationships" xmlns:p="http://schemas.openxmlformats.org/presentationml/2006/main">
+  <p:cSld>
+    <p:spTree>
+      <p:nvGrpSpPr>
+        <p:cNvPr id="1" name=""/>
+        <p:cNvGrpSpPr/>
+        <p:nvPr/>
+      </p:nvGrpSpPr>
+      <p:grpSpPr>
+        <a:xfrm>
+          <a:off x="0" y="0"/>
+          <a:ext cx="0" cy="0"/>
+          <a:chOff x="0" y="0"/>
+          <a:chExt cx="0" cy="0"/>
+        </a:xfrm>
+      </p:grpSpPr>
+      <p:sp>
+        <p:nvSpPr>
+          <p:cNvPr id="2" name="Slide Image Placeholder 1"/>
+          <p:cNvSpPr>
+            <a:spLocks noGrp="1" noRot="1" noChangeAspect="1"/>
+          </p:cNvSpPr>
+          <p:nvPr>
+            <p:ph type="sldImg"/>
+          </p:nvPr>
+        </p:nvSpPr>
+        <p:spPr/>
+      </p:sp>
+      <p:sp>
+        <p:nvSpPr>
+          <p:cNvPr id="3" name="Notes Placeholder 2"/>
+          <p:cNvSpPr>
+            <a:spLocks noGrp="1"/>
+          </p:cNvSpPr>
+          <p:nvPr>
+            <p:ph type="body" idx="1"/>
+          </p:nvPr>
+        </p:nvSpPr>
+        <p:spPr/>
+        <p:txBody>
+          <a:bodyPr/>
+          <a:lstStyle/>
+          <a:p>
+            <a:r>
+              <a:rPr lang="en-US" dirty="0"/>
+              <a:t/>
+            </a:r>
+            <a:endParaRPr lang="en-US" dirty="0"/>
+          </a:p>
+        </p:txBody>
+      </p:sp>
+      <p:sp>
+        <p:nvSpPr>
+          <p:cNvPr id="4" name="Slide Number Placeholder 3"/>
+          <p:cNvSpPr>
+            <a:spLocks noGrp="1"/>
+          </p:cNvSpPr>
+          <p:nvPr>
+            <p:ph type="sldNum" sz="quarter" idx="10"/>
+          </p:nvPr>
+        </p:nvSpPr>
+        <p:spPr/>
+        <p:txBody>
+          <a:bodyPr/>
+          <a:lstStyle/>
+          <a:p>
+            <a:fld id="{F7021451-1387-4CA6-816F-3879F97B5CBC}" type="slidenum">
+              <a:rPr lang="en-US"/>
+              <a:t>21</a:t>
+            </a:fld>
+            <a:endParaRPr lang="en-US"/>
+          </a:p>
+        </p:txBody>
+      </p:sp>
+    </p:spTree>
+    <p:extLst>
+      <p:ext uri="{BB962C8B-B14F-4D97-AF65-F5344CB8AC3E}">
+        <p14:creationId xmlns:p14="http://schemas.microsoft.com/office/powerpoint/2010/main" val="1024086991"/>
+      </p:ext>
+    </p:extLst>
+  </p:cSld>
+  <p:clrMapOvr>
+    <a:masterClrMapping/>
+  </p:clrMapOvr>
+</p:notes>
+</file>
+
+<file path=ppt/notesSlides/notesSlide22.xml><?xml version="1.0" encoding="utf-8"?>
+<p:notes xmlns:a="http://schemas.openxmlformats.org/drawingml/2006/main" xmlns:r="http://schemas.openxmlformats.org/officeDocument/2006/relationships" xmlns:p="http://schemas.openxmlformats.org/presentationml/2006/main">
+  <p:cSld>
+    <p:spTree>
+      <p:nvGrpSpPr>
+        <p:cNvPr id="1" name=""/>
+        <p:cNvGrpSpPr/>
+        <p:nvPr/>
+      </p:nvGrpSpPr>
+      <p:grpSpPr>
+        <a:xfrm>
+          <a:off x="0" y="0"/>
+          <a:ext cx="0" cy="0"/>
+          <a:chOff x="0" y="0"/>
+          <a:chExt cx="0" cy="0"/>
+        </a:xfrm>
+      </p:grpSpPr>
+      <p:sp>
+        <p:nvSpPr>
+          <p:cNvPr id="2" name="Slide Image Placeholder 1"/>
+          <p:cNvSpPr>
+            <a:spLocks noGrp="1" noRot="1" noChangeAspect="1"/>
+          </p:cNvSpPr>
+          <p:nvPr>
+            <p:ph type="sldImg"/>
+          </p:nvPr>
+        </p:nvSpPr>
+        <p:spPr/>
+      </p:sp>
+      <p:sp>
+        <p:nvSpPr>
+          <p:cNvPr id="3" name="Notes Placeholder 2"/>
+          <p:cNvSpPr>
+            <a:spLocks noGrp="1"/>
+          </p:cNvSpPr>
+          <p:nvPr>
+            <p:ph type="body" idx="1"/>
+          </p:nvPr>
+        </p:nvSpPr>
+        <p:spPr/>
+        <p:txBody>
+          <a:bodyPr/>
+          <a:lstStyle/>
+          <a:p>
+            <a:r>
+              <a:rPr lang="en-US" dirty="0"/>
+              <a:t/>
+            </a:r>
+            <a:endParaRPr lang="en-US" dirty="0"/>
+          </a:p>
+        </p:txBody>
+      </p:sp>
+      <p:sp>
+        <p:nvSpPr>
+          <p:cNvPr id="4" name="Slide Number Placeholder 3"/>
+          <p:cNvSpPr>
+            <a:spLocks noGrp="1"/>
+          </p:cNvSpPr>
+          <p:nvPr>
+            <p:ph type="sldNum" sz="quarter" idx="10"/>
+          </p:nvPr>
+        </p:nvSpPr>
+        <p:spPr/>
+        <p:txBody>
+          <a:bodyPr/>
+          <a:lstStyle/>
+          <a:p>
+            <a:fld id="{F7021451-1387-4CA6-816F-3879F97B5CBC}" type="slidenum">
+              <a:rPr lang="en-US"/>
+              <a:t>22</a:t>
+            </a:fld>
+            <a:endParaRPr lang="en-US"/>
+          </a:p>
+        </p:txBody>
+      </p:sp>
+    </p:spTree>
+    <p:extLst>
+      <p:ext uri="{BB962C8B-B14F-4D97-AF65-F5344CB8AC3E}">
+        <p14:creationId xmlns:p14="http://schemas.microsoft.com/office/powerpoint/2010/main" val="1024086991"/>
+      </p:ext>
+    </p:extLst>
+  </p:cSld>
+  <p:clrMapOvr>
+    <a:masterClrMapping/>
+  </p:clrMapOvr>
+</p:notes>
+</file>
+
+<file path=ppt/notesSlides/notesSlide23.xml><?xml version="1.0" encoding="utf-8"?>
+<p:notes xmlns:a="http://schemas.openxmlformats.org/drawingml/2006/main" xmlns:r="http://schemas.openxmlformats.org/officeDocument/2006/relationships" xmlns:p="http://schemas.openxmlformats.org/presentationml/2006/main">
+  <p:cSld>
+    <p:spTree>
+      <p:nvGrpSpPr>
+        <p:cNvPr id="1" name=""/>
+        <p:cNvGrpSpPr/>
+        <p:nvPr/>
+      </p:nvGrpSpPr>
+      <p:grpSpPr>
+        <a:xfrm>
+          <a:off x="0" y="0"/>
+          <a:ext cx="0" cy="0"/>
+          <a:chOff x="0" y="0"/>
+          <a:chExt cx="0" cy="0"/>
+        </a:xfrm>
+      </p:grpSpPr>
+      <p:sp>
+        <p:nvSpPr>
+          <p:cNvPr id="2" name="Slide Image Placeholder 1"/>
+          <p:cNvSpPr>
+            <a:spLocks noGrp="1" noRot="1" noChangeAspect="1"/>
+          </p:cNvSpPr>
+          <p:nvPr>
+            <p:ph type="sldImg"/>
+          </p:nvPr>
+        </p:nvSpPr>
+        <p:spPr/>
+      </p:sp>
+      <p:sp>
+        <p:nvSpPr>
+          <p:cNvPr id="3" name="Notes Placeholder 2"/>
+          <p:cNvSpPr>
+            <a:spLocks noGrp="1"/>
+          </p:cNvSpPr>
+          <p:nvPr>
+            <p:ph type="body" idx="1"/>
+          </p:nvPr>
+        </p:nvSpPr>
+        <p:spPr/>
+        <p:txBody>
+          <a:bodyPr/>
+          <a:lstStyle/>
+          <a:p>
+            <a:r>
+              <a:rPr lang="en-US" dirty="0"/>
+              <a:t/>
+            </a:r>
+            <a:endParaRPr lang="en-US" dirty="0"/>
+          </a:p>
+        </p:txBody>
+      </p:sp>
+      <p:sp>
+        <p:nvSpPr>
+          <p:cNvPr id="4" name="Slide Number Placeholder 3"/>
+          <p:cNvSpPr>
+            <a:spLocks noGrp="1"/>
+          </p:cNvSpPr>
+          <p:nvPr>
+            <p:ph type="sldNum" sz="quarter" idx="10"/>
+          </p:nvPr>
+        </p:nvSpPr>
+        <p:spPr/>
+        <p:txBody>
+          <a:bodyPr/>
+          <a:lstStyle/>
+          <a:p>
+            <a:fld id="{F7021451-1387-4CA6-816F-3879F97B5CBC}" type="slidenum">
+              <a:rPr lang="en-US"/>
+              <a:t>23</a:t>
+            </a:fld>
+            <a:endParaRPr lang="en-US"/>
+          </a:p>
+        </p:txBody>
+      </p:sp>
+    </p:spTree>
+    <p:extLst>
+      <p:ext uri="{BB962C8B-B14F-4D97-AF65-F5344CB8AC3E}">
+        <p14:creationId xmlns:p14="http://schemas.microsoft.com/office/powerpoint/2010/main" val="1024086991"/>
+      </p:ext>
+    </p:extLst>
+  </p:cSld>
+  <p:clrMapOvr>
+    <a:masterClrMapping/>
+  </p:clrMapOvr>
+</p:notes>
+</file>
+
+<file path=ppt/notesSlides/notesSlide24.xml><?xml version="1.0" encoding="utf-8"?>
+<p:notes xmlns:a="http://schemas.openxmlformats.org/drawingml/2006/main" xmlns:r="http://schemas.openxmlformats.org/officeDocument/2006/relationships" xmlns:p="http://schemas.openxmlformats.org/presentationml/2006/main">
+  <p:cSld>
+    <p:spTree>
+      <p:nvGrpSpPr>
+        <p:cNvPr id="1" name=""/>
+        <p:cNvGrpSpPr/>
+        <p:nvPr/>
+      </p:nvGrpSpPr>
+      <p:grpSpPr>
+        <a:xfrm>
+          <a:off x="0" y="0"/>
+          <a:ext cx="0" cy="0"/>
+          <a:chOff x="0" y="0"/>
+          <a:chExt cx="0" cy="0"/>
+        </a:xfrm>
+      </p:grpSpPr>
+      <p:sp>
+        <p:nvSpPr>
+          <p:cNvPr id="2" name="Slide Image Placeholder 1"/>
+          <p:cNvSpPr>
+            <a:spLocks noGrp="1" noRot="1" noChangeAspect="1"/>
+          </p:cNvSpPr>
+          <p:nvPr>
+            <p:ph type="sldImg"/>
+          </p:nvPr>
+        </p:nvSpPr>
+        <p:spPr/>
+      </p:sp>
+      <p:sp>
+        <p:nvSpPr>
+          <p:cNvPr id="3" name="Notes Placeholder 2"/>
+          <p:cNvSpPr>
+            <a:spLocks noGrp="1"/>
+          </p:cNvSpPr>
+          <p:nvPr>
+            <p:ph type="body" idx="1"/>
+          </p:nvPr>
+        </p:nvSpPr>
+        <p:spPr/>
+        <p:txBody>
+          <a:bodyPr/>
+          <a:lstStyle/>
+          <a:p>
+            <a:r>
+              <a:rPr lang="en-US" dirty="0"/>
+              <a:t/>
+            </a:r>
+            <a:endParaRPr lang="en-US" dirty="0"/>
+          </a:p>
+        </p:txBody>
+      </p:sp>
+      <p:sp>
+        <p:nvSpPr>
+          <p:cNvPr id="4" name="Slide Number Placeholder 3"/>
+          <p:cNvSpPr>
+            <a:spLocks noGrp="1"/>
+          </p:cNvSpPr>
+          <p:nvPr>
+            <p:ph type="sldNum" sz="quarter" idx="10"/>
+          </p:nvPr>
+        </p:nvSpPr>
+        <p:spPr/>
+        <p:txBody>
+          <a:bodyPr/>
+          <a:lstStyle/>
+          <a:p>
+            <a:fld id="{F7021451-1387-4CA6-816F-3879F97B5CBC}" type="slidenum">
+              <a:rPr lang="en-US"/>
+              <a:t>24</a:t>
+            </a:fld>
+            <a:endParaRPr lang="en-US"/>
+          </a:p>
+        </p:txBody>
+      </p:sp>
+    </p:spTree>
+    <p:extLst>
+      <p:ext uri="{BB962C8B-B14F-4D97-AF65-F5344CB8AC3E}">
+        <p14:creationId xmlns:p14="http://schemas.microsoft.com/office/powerpoint/2010/main" val="1024086991"/>
+      </p:ext>
+    </p:extLst>
+  </p:cSld>
+  <p:clrMapOvr>
+    <a:masterClrMapping/>
+  </p:clrMapOvr>
+</p:notes>
+</file>
+
+<file path=ppt/notesSlides/notesSlide25.xml><?xml version="1.0" encoding="utf-8"?>
+<p:notes xmlns:a="http://schemas.openxmlformats.org/drawingml/2006/main" xmlns:r="http://schemas.openxmlformats.org/officeDocument/2006/relationships" xmlns:p="http://schemas.openxmlformats.org/presentationml/2006/main">
+  <p:cSld>
+    <p:spTree>
+      <p:nvGrpSpPr>
+        <p:cNvPr id="1" name=""/>
+        <p:cNvGrpSpPr/>
+        <p:nvPr/>
+      </p:nvGrpSpPr>
+      <p:grpSpPr>
+        <a:xfrm>
+          <a:off x="0" y="0"/>
+          <a:ext cx="0" cy="0"/>
+          <a:chOff x="0" y="0"/>
+          <a:chExt cx="0" cy="0"/>
+        </a:xfrm>
+      </p:grpSpPr>
+      <p:sp>
+        <p:nvSpPr>
+          <p:cNvPr id="2" name="Slide Image Placeholder 1"/>
+          <p:cNvSpPr>
+            <a:spLocks noGrp="1" noRot="1" noChangeAspect="1"/>
+          </p:cNvSpPr>
+          <p:nvPr>
+            <p:ph type="sldImg"/>
+          </p:nvPr>
+        </p:nvSpPr>
+        <p:spPr/>
+      </p:sp>
+      <p:sp>
+        <p:nvSpPr>
+          <p:cNvPr id="3" name="Notes Placeholder 2"/>
+          <p:cNvSpPr>
+            <a:spLocks noGrp="1"/>
+          </p:cNvSpPr>
+          <p:nvPr>
+            <p:ph type="body" idx="1"/>
+          </p:nvPr>
+        </p:nvSpPr>
+        <p:spPr/>
+        <p:txBody>
+          <a:bodyPr/>
+          <a:lstStyle/>
+          <a:p>
+            <a:r>
+              <a:rPr lang="en-US" dirty="0"/>
+              <a:t/>
+            </a:r>
+            <a:endParaRPr lang="en-US" dirty="0"/>
+          </a:p>
+        </p:txBody>
+      </p:sp>
+      <p:sp>
+        <p:nvSpPr>
+          <p:cNvPr id="4" name="Slide Number Placeholder 3"/>
+          <p:cNvSpPr>
+            <a:spLocks noGrp="1"/>
+          </p:cNvSpPr>
+          <p:nvPr>
+            <p:ph type="sldNum" sz="quarter" idx="10"/>
+          </p:nvPr>
+        </p:nvSpPr>
+        <p:spPr/>
+        <p:txBody>
+          <a:bodyPr/>
+          <a:lstStyle/>
+          <a:p>
+            <a:fld id="{F7021451-1387-4CA6-816F-3879F97B5CBC}" type="slidenum">
+              <a:rPr lang="en-US"/>
+              <a:t>25</a:t>
             </a:fld>
             <a:endParaRPr lang="en-US"/>
           </a:p>
@@ -2726,7 +3171,7 @@
                 <a:ea typeface="Calibri" pitchFamily="34" charset="-122"/>
                 <a:cs typeface="Calibri" pitchFamily="34" charset="-120"/>
               </a:rPr>
-              <a:t>LAB MANAGEMENT &amp; QUALITY  ·  LECTURE 4 OF 5</a:t>
+              <a:t>LABORATORY MANAGEMENT  ·  LECTURE 4 OF 5</a:t>
             </a:r>
             <a:endParaRPr lang="en-US" sz="1300" dirty="0"/>
           </a:p>
@@ -2765,7 +3210,7 @@
                 <a:ea typeface="Calibri" pitchFamily="34" charset="-122"/>
                 <a:cs typeface="Calibri" pitchFamily="34" charset="-120"/>
               </a:rPr>
-              <a:t>Laboratory Informatics &amp; LIS Fundamentals</a:t>
+              <a:t>Informatics &amp; the LIS</a:t>
             </a:r>
             <a:endParaRPr lang="en-US" sz="4600" dirty="0"/>
           </a:p>
@@ -2804,7 +3249,7 @@
                 <a:ea typeface="Calibri" pitchFamily="34" charset="-122"/>
                 <a:cs typeface="Calibri" pitchFamily="34" charset="-120"/>
               </a:rPr>
-              <a:t>Result Routing, Middleware, Autoverification, and Data Integrity</a:t>
+              <a:t>Data Flow, Interfaces, Middleware, and Result Integrity</a:t>
             </a:r>
             <a:endParaRPr lang="en-US" sz="1900" dirty="0"/>
           </a:p>
@@ -2996,7 +3441,7 @@
                 <a:ea typeface="Calibri" pitchFamily="34" charset="-122"/>
                 <a:cs typeface="Calibri" pitchFamily="34" charset="-120"/>
               </a:rPr>
-              <a:t>LAB MANAGEMENT &amp; QUALITY   ·   INTEGRITY</a:t>
+              <a:t>LAB MANAGEMENT &amp; QUALITY   ·   MIDDLEWARE</a:t>
             </a:r>
             <a:endParaRPr lang="en-US" sz="1100" dirty="0"/>
           </a:p>
@@ -3035,7 +3480,7 @@
                 <a:ea typeface="Calibri" pitchFamily="34" charset="-122"/>
                 <a:cs typeface="Calibri" pitchFamily="34" charset="-120"/>
               </a:rPr>
-              <a:t>Data Integrity and Downtime</a:t>
+              <a:t>Middleware &amp; Autoverification</a:t>
             </a:r>
             <a:endParaRPr lang="en-US" sz="3000" dirty="0"/>
           </a:p>
@@ -3103,7 +3548,7 @@
                 <a:ea typeface="Calibri" pitchFamily="34" charset="-122"/>
                 <a:cs typeface="Calibri" pitchFamily="34" charset="-120"/>
               </a:rPr>
-              <a:t>PROTECTING INTEGRITY</a:t>
+              <a:t>MIDDLEWARE</a:t>
             </a:r>
             <a:endParaRPr lang="en-US" sz="1200" dirty="0"/>
           </a:p>
@@ -3146,7 +3591,7 @@
                 <a:ea typeface="Calibri" pitchFamily="34" charset="-122"/>
                 <a:cs typeface="Calibri" pitchFamily="34" charset="-120"/>
               </a:rPr>
-              <a:t>Audit trails, access controls, and change control protect the record.</a:t>
+              <a:t>Sits between instruments and the LIS to apply rules, manage QC, and route results.</a:t>
             </a:r>
             <a:endParaRPr lang="en-US" sz="1250" dirty="0"/>
           </a:p>
@@ -3167,7 +3612,7 @@
                 <a:ea typeface="Calibri" pitchFamily="34" charset="-122"/>
                 <a:cs typeface="Calibri" pitchFamily="34" charset="-120"/>
               </a:rPr>
-              <a:t>Unit and reference-range errors are dangerous and easy to miss — validate them.</a:t>
+              <a:t>Enables delta checks and reflex rules.</a:t>
             </a:r>
             <a:endParaRPr lang="en-US" sz="1250" dirty="0"/>
           </a:p>
@@ -3188,7 +3633,7 @@
                 <a:ea typeface="Calibri" pitchFamily="34" charset="-122"/>
                 <a:cs typeface="Calibri" pitchFamily="34" charset="-120"/>
               </a:rPr>
-              <a:t>Result truncation/rounding and special-character handling can corrupt data.</a:t>
+              <a:t>Centralizes multi-instrument management.</a:t>
             </a:r>
             <a:endParaRPr lang="en-US" sz="1250" dirty="0"/>
           </a:p>
@@ -3209,7 +3654,7 @@
                 <a:ea typeface="Calibri" pitchFamily="34" charset="-122"/>
                 <a:cs typeface="Calibri" pitchFamily="34" charset="-120"/>
               </a:rPr>
-              <a:t>Monitor for interface failures (queued/stuck messages).</a:t>
+              <a:t>Adds flexibility but also complexity.</a:t>
             </a:r>
             <a:endParaRPr lang="en-US" sz="1250" dirty="0"/>
           </a:p>
@@ -3232,7 +3677,7 @@
             </a:avLst>
           </a:prstGeom>
           <a:solidFill>
-            <a:srgbClr val="ECEFF1"/>
+            <a:srgbClr val="E6EAED"/>
           </a:solidFill>
           <a:ln/>
           <a:effectLst>
@@ -3277,7 +3722,7 @@
                 <a:ea typeface="Calibri" pitchFamily="34" charset="-122"/>
                 <a:cs typeface="Calibri" pitchFamily="34" charset="-120"/>
               </a:rPr>
-              <a:t>DOWNTIME PLANNING</a:t>
+              <a:t>AUTOVERIFICATION</a:t>
             </a:r>
             <a:endParaRPr lang="en-US" sz="1200" dirty="0"/>
           </a:p>
@@ -3320,7 +3765,7 @@
                 <a:ea typeface="Calibri" pitchFamily="34" charset="-122"/>
                 <a:cs typeface="Calibri" pitchFamily="34" charset="-120"/>
               </a:rPr>
-              <a:t>Have tested downtime procedures: manual workflows, paper backups, and recovery steps.</a:t>
+              <a:t>Rules auto-release results meeting defined criteria, flagging exceptions for review.</a:t>
             </a:r>
             <a:endParaRPr lang="en-US" sz="1250" dirty="0"/>
           </a:p>
@@ -3341,7 +3786,7 @@
                 <a:ea typeface="Calibri" pitchFamily="34" charset="-122"/>
                 <a:cs typeface="Calibri" pitchFamily="34" charset="-120"/>
               </a:rPr>
-              <a:t>Reconcile results entered during downtime when systems return.</a:t>
+              <a:t>Improves turnaround and consistency.</a:t>
             </a:r>
             <a:endParaRPr lang="en-US" sz="1250" dirty="0"/>
           </a:p>
@@ -3362,7 +3807,7 @@
                 <a:ea typeface="Calibri" pitchFamily="34" charset="-122"/>
                 <a:cs typeface="Calibri" pitchFamily="34" charset="-120"/>
               </a:rPr>
-              <a:t>Plan for both planned (upgrades) and unplanned outages.</a:t>
+              <a:t>Rules must be validated and monitored.</a:t>
             </a:r>
             <a:endParaRPr lang="en-US" sz="1250" dirty="0"/>
           </a:p>
@@ -3383,7 +3828,7 @@
                 <a:ea typeface="Calibri" pitchFamily="34" charset="-122"/>
                 <a:cs typeface="Calibri" pitchFamily="34" charset="-120"/>
               </a:rPr>
-              <a:t>Cybersecurity incidents are an increasingly important downtime cause.</a:t>
+              <a:t>Define what gets held for human review.</a:t>
             </a:r>
             <a:endParaRPr lang="en-US" sz="1250" dirty="0"/>
           </a:p>
@@ -3509,7 +3954,7 @@
     <p:bg>
       <p:bgPr>
         <a:solidFill>
-          <a:srgbClr val="2C3A41"/>
+          <a:srgbClr val="FFFFFF"/>
         </a:solidFill>
       </p:bgPr>
     </p:bg>
@@ -3529,58 +3974,295 @@
       </p:grpSpPr>
       <p:sp>
         <p:nvSpPr>
-          <p:cNvPr id="2" name="Shape 0"/>
-          <p:cNvSpPr/>
-          <p:nvPr/>
-        </p:nvSpPr>
-        <p:spPr>
-          <a:xfrm>
-            <a:off x="9509760" y="-1280160"/>
-            <a:ext cx="4754880" cy="4754880"/>
-          </a:xfrm>
-          <a:prstGeom prst="ellipse">
-            <a:avLst/>
+          <p:cNvPr id="2" name="Text 0"/>
+          <p:cNvSpPr/>
+          <p:nvPr/>
+        </p:nvSpPr>
+        <p:spPr>
+          <a:xfrm>
+            <a:off x="566928" y="329184"/>
+            <a:ext cx="10515600" cy="310896"/>
+          </a:xfrm>
+          <a:prstGeom prst="rect">
+            <a:avLst/>
+          </a:prstGeom>
+          <a:noFill/>
+          <a:ln/>
+        </p:spPr>
+        <p:txBody>
+          <a:bodyPr wrap="square" lIns="0" tIns="0" rIns="0" bIns="0" rtlCol="0" anchor="ctr"/>
+          <a:lstStyle/>
+          <a:p>
+            <a:pPr algn="l" indent="0" marL="0">
+              <a:buNone/>
+            </a:pPr>
+            <a:r>
+              <a:rPr lang="en-US" sz="1100" b="1" spc="150" kern="0" dirty="0">
+                <a:solidFill>
+                  <a:srgbClr val="455A64"/>
+                </a:solidFill>
+                <a:latin typeface="Calibri" pitchFamily="34" charset="0"/>
+                <a:ea typeface="Calibri" pitchFamily="34" charset="-122"/>
+                <a:cs typeface="Calibri" pitchFamily="34" charset="-120"/>
+              </a:rPr>
+              <a:t>LAB MANAGEMENT &amp; QUALITY   ·   INTEGRITY</a:t>
+            </a:r>
+            <a:endParaRPr lang="en-US" sz="1100" dirty="0"/>
+          </a:p>
+        </p:txBody>
+      </p:sp>
+      <p:sp>
+        <p:nvSpPr>
+          <p:cNvPr id="3" name="Text 1"/>
+          <p:cNvSpPr/>
+          <p:nvPr/>
+        </p:nvSpPr>
+        <p:spPr>
+          <a:xfrm>
+            <a:off x="566928" y="713232"/>
+            <a:ext cx="11064240" cy="749808"/>
+          </a:xfrm>
+          <a:prstGeom prst="rect">
+            <a:avLst/>
+          </a:prstGeom>
+          <a:noFill/>
+          <a:ln/>
+        </p:spPr>
+        <p:txBody>
+          <a:bodyPr wrap="square" lIns="0" tIns="0" rIns="0" bIns="0" rtlCol="0" anchor="ctr"/>
+          <a:lstStyle/>
+          <a:p>
+            <a:pPr algn="l" indent="0" marL="0">
+              <a:buNone/>
+            </a:pPr>
+            <a:r>
+              <a:rPr lang="en-US" sz="3000" b="1" dirty="0">
+                <a:solidFill>
+                  <a:srgbClr val="0E3A5F"/>
+                </a:solidFill>
+                <a:latin typeface="Calibri" pitchFamily="34" charset="0"/>
+                <a:ea typeface="Calibri" pitchFamily="34" charset="-122"/>
+                <a:cs typeface="Calibri" pitchFamily="34" charset="-120"/>
+              </a:rPr>
+              <a:t>Result Integrity &amp; Critical Values</a:t>
+            </a:r>
+            <a:endParaRPr lang="en-US" sz="3000" dirty="0"/>
+          </a:p>
+        </p:txBody>
+      </p:sp>
+      <p:sp>
+        <p:nvSpPr>
+          <p:cNvPr id="4" name="Shape 2"/>
+          <p:cNvSpPr/>
+          <p:nvPr/>
+        </p:nvSpPr>
+        <p:spPr>
+          <a:xfrm>
+            <a:off x="566928" y="1517904"/>
+            <a:ext cx="5346040" cy="4114800"/>
+          </a:xfrm>
+          <a:prstGeom prst="roundRect">
+            <a:avLst>
+              <a:gd name="adj" fmla="val 2000"/>
+            </a:avLst>
           </a:prstGeom>
           <a:solidFill>
-            <a:srgbClr val="FFFFFF">
-              <a:alpha val="8000"/>
-            </a:srgbClr>
+            <a:srgbClr val="ECEFF1"/>
           </a:solidFill>
           <a:ln/>
-        </p:spPr>
-      </p:sp>
-      <p:sp>
-        <p:nvSpPr>
-          <p:cNvPr id="3" name="Shape 1"/>
-          <p:cNvSpPr/>
-          <p:nvPr/>
-        </p:nvSpPr>
-        <p:spPr>
-          <a:xfrm>
-            <a:off x="10607040" y="3931920"/>
-            <a:ext cx="3108960" cy="3108960"/>
-          </a:xfrm>
-          <a:prstGeom prst="ellipse">
-            <a:avLst/>
+          <a:effectLst>
+            <a:outerShdw sx="100000" sy="100000" kx="0" ky="0" algn="bl" rotWithShape="0" blurRad="88900" dist="25400" dir="5400000">
+              <a:srgbClr val="22303C">
+                <a:alpha val="12000"/>
+              </a:srgbClr>
+            </a:outerShdw>
+          </a:effectLst>
+        </p:spPr>
+      </p:sp>
+      <p:sp>
+        <p:nvSpPr>
+          <p:cNvPr id="5" name="Text 3"/>
+          <p:cNvSpPr/>
+          <p:nvPr/>
+        </p:nvSpPr>
+        <p:spPr>
+          <a:xfrm>
+            <a:off x="804672" y="1682496"/>
+            <a:ext cx="4888840" cy="274320"/>
+          </a:xfrm>
+          <a:prstGeom prst="rect">
+            <a:avLst/>
+          </a:prstGeom>
+          <a:noFill/>
+          <a:ln/>
+        </p:spPr>
+        <p:txBody>
+          <a:bodyPr wrap="square" lIns="0" tIns="0" rIns="0" bIns="0" rtlCol="0" anchor="ctr"/>
+          <a:lstStyle/>
+          <a:p>
+            <a:pPr indent="0" marL="0">
+              <a:buNone/>
+            </a:pPr>
+            <a:r>
+              <a:rPr lang="en-US" sz="1200" b="1" spc="100" kern="0" dirty="0">
+                <a:solidFill>
+                  <a:srgbClr val="2C3A41"/>
+                </a:solidFill>
+                <a:latin typeface="Calibri" pitchFamily="34" charset="0"/>
+                <a:ea typeface="Calibri" pitchFamily="34" charset="-122"/>
+                <a:cs typeface="Calibri" pitchFamily="34" charset="-120"/>
+              </a:rPr>
+              <a:t>DELTA &amp; CRITICAL-VALUE CHECKS</a:t>
+            </a:r>
+            <a:endParaRPr lang="en-US" sz="1200" dirty="0"/>
+          </a:p>
+        </p:txBody>
+      </p:sp>
+      <p:sp>
+        <p:nvSpPr>
+          <p:cNvPr id="6" name="Text 4"/>
+          <p:cNvSpPr/>
+          <p:nvPr/>
+        </p:nvSpPr>
+        <p:spPr>
+          <a:xfrm>
+            <a:off x="804672" y="2029968"/>
+            <a:ext cx="4870552" cy="3474720"/>
+          </a:xfrm>
+          <a:prstGeom prst="rect">
+            <a:avLst/>
+          </a:prstGeom>
+          <a:noFill/>
+          <a:ln/>
+        </p:spPr>
+        <p:txBody>
+          <a:bodyPr wrap="square" lIns="0" tIns="0" rIns="0" bIns="0" rtlCol="0" anchor="t"/>
+          <a:lstStyle/>
+          <a:p>
+            <a:pPr algn="l" marL="177800" indent="-177800">
+              <a:spcAft>
+                <a:spcPts val="900"/>
+              </a:spcAft>
+              <a:buSzPct val="100000"/>
+              <a:buChar char="•"/>
+            </a:pPr>
+            <a:r>
+              <a:rPr lang="en-US" sz="1250" b="1" dirty="0">
+                <a:solidFill>
+                  <a:srgbClr val="1B2A38"/>
+                </a:solidFill>
+                <a:latin typeface="Calibri" pitchFamily="34" charset="0"/>
+                <a:ea typeface="Calibri" pitchFamily="34" charset="-122"/>
+                <a:cs typeface="Calibri" pitchFamily="34" charset="-120"/>
+              </a:rPr>
+              <a:t>Delta checks flag implausible changes from prior results (possible mislabel/error).</a:t>
+            </a:r>
+            <a:endParaRPr lang="en-US" sz="1250" dirty="0"/>
+          </a:p>
+          <a:p>
+            <a:pPr algn="l" marL="177800" indent="-177800">
+              <a:spcAft>
+                <a:spcPts val="900"/>
+              </a:spcAft>
+              <a:buSzPct val="100000"/>
+              <a:buChar char="•"/>
+            </a:pPr>
+            <a:r>
+              <a:rPr lang="en-US" sz="1250" dirty="0">
+                <a:solidFill>
+                  <a:srgbClr val="33444F"/>
+                </a:solidFill>
+                <a:latin typeface="Calibri" pitchFamily="34" charset="0"/>
+                <a:ea typeface="Calibri" pitchFamily="34" charset="-122"/>
+                <a:cs typeface="Calibri" pitchFamily="34" charset="-120"/>
+              </a:rPr>
+              <a:t>Critical-value workflows ensure timely, documented notification.</a:t>
+            </a:r>
+            <a:endParaRPr lang="en-US" sz="1250" dirty="0"/>
+          </a:p>
+          <a:p>
+            <a:pPr algn="l" marL="177800" indent="-177800">
+              <a:spcAft>
+                <a:spcPts val="900"/>
+              </a:spcAft>
+              <a:buSzPct val="100000"/>
+              <a:buChar char="•"/>
+            </a:pPr>
+            <a:r>
+              <a:rPr lang="en-US" sz="1250" dirty="0">
+                <a:solidFill>
+                  <a:srgbClr val="33444F"/>
+                </a:solidFill>
+                <a:latin typeface="Calibri" pitchFamily="34" charset="0"/>
+                <a:ea typeface="Calibri" pitchFamily="34" charset="-122"/>
+                <a:cs typeface="Calibri" pitchFamily="34" charset="-120"/>
+              </a:rPr>
+              <a:t>Reference ranges must match method and population.</a:t>
+            </a:r>
+            <a:endParaRPr lang="en-US" sz="1250" dirty="0"/>
+          </a:p>
+          <a:p>
+            <a:pPr algn="l" marL="177800" indent="-177800">
+              <a:spcAft>
+                <a:spcPts val="900"/>
+              </a:spcAft>
+              <a:buSzPct val="100000"/>
+              <a:buChar char="•"/>
+            </a:pPr>
+            <a:r>
+              <a:rPr lang="en-US" sz="1250" dirty="0">
+                <a:solidFill>
+                  <a:srgbClr val="33444F"/>
+                </a:solidFill>
+                <a:latin typeface="Calibri" pitchFamily="34" charset="0"/>
+                <a:ea typeface="Calibri" pitchFamily="34" charset="-122"/>
+                <a:cs typeface="Calibri" pitchFamily="34" charset="-120"/>
+              </a:rPr>
+              <a:t>Reconcile corrected results carefully.</a:t>
+            </a:r>
+            <a:endParaRPr lang="en-US" sz="1250" dirty="0"/>
+          </a:p>
+        </p:txBody>
+      </p:sp>
+      <p:sp>
+        <p:nvSpPr>
+          <p:cNvPr id="7" name="Shape 5"/>
+          <p:cNvSpPr/>
+          <p:nvPr/>
+        </p:nvSpPr>
+        <p:spPr>
+          <a:xfrm>
+            <a:off x="6278728" y="1517904"/>
+            <a:ext cx="5346040" cy="4114800"/>
+          </a:xfrm>
+          <a:prstGeom prst="roundRect">
+            <a:avLst>
+              <a:gd name="adj" fmla="val 2000"/>
+            </a:avLst>
           </a:prstGeom>
           <a:solidFill>
-            <a:srgbClr val="FFFFFF">
-              <a:alpha val="6000"/>
-            </a:srgbClr>
+            <a:srgbClr val="E6EAED"/>
           </a:solidFill>
           <a:ln/>
-        </p:spPr>
-      </p:sp>
-      <p:sp>
-        <p:nvSpPr>
-          <p:cNvPr id="4" name="Text 2"/>
-          <p:cNvSpPr/>
-          <p:nvPr/>
-        </p:nvSpPr>
-        <p:spPr>
-          <a:xfrm>
-            <a:off x="566928" y="1783080"/>
-            <a:ext cx="2743200" cy="1463040"/>
+          <a:effectLst>
+            <a:outerShdw sx="100000" sy="100000" kx="0" ky="0" algn="bl" rotWithShape="0" blurRad="88900" dist="25400" dir="5400000">
+              <a:srgbClr val="22303C">
+                <a:alpha val="12000"/>
+              </a:srgbClr>
+            </a:outerShdw>
+          </a:effectLst>
+        </p:spPr>
+      </p:sp>
+      <p:sp>
+        <p:nvSpPr>
+          <p:cNvPr id="8" name="Text 6"/>
+          <p:cNvSpPr/>
+          <p:nvPr/>
+        </p:nvSpPr>
+        <p:spPr>
+          <a:xfrm>
+            <a:off x="6516472" y="1682496"/>
+            <a:ext cx="4888840" cy="274320"/>
           </a:xfrm>
           <a:prstGeom prst="rect">
             <a:avLst/>
@@ -3592,34 +4274,179 @@
           <a:bodyPr wrap="square" lIns="0" tIns="0" rIns="0" bIns="0" rtlCol="0" anchor="ctr"/>
           <a:lstStyle/>
           <a:p>
+            <a:pPr indent="0" marL="0">
+              <a:buNone/>
+            </a:pPr>
+            <a:r>
+              <a:rPr lang="en-US" sz="1200" b="1" spc="100" kern="0" dirty="0">
+                <a:solidFill>
+                  <a:srgbClr val="2C3A41"/>
+                </a:solidFill>
+                <a:latin typeface="Calibri" pitchFamily="34" charset="0"/>
+                <a:ea typeface="Calibri" pitchFamily="34" charset="-122"/>
+                <a:cs typeface="Calibri" pitchFamily="34" charset="-120"/>
+              </a:rPr>
+              <a:t>CORRECTED REPORTS</a:t>
+            </a:r>
+            <a:endParaRPr lang="en-US" sz="1200" dirty="0"/>
+          </a:p>
+        </p:txBody>
+      </p:sp>
+      <p:sp>
+        <p:nvSpPr>
+          <p:cNvPr id="9" name="Text 7"/>
+          <p:cNvSpPr/>
+          <p:nvPr/>
+        </p:nvSpPr>
+        <p:spPr>
+          <a:xfrm>
+            <a:off x="6516472" y="2029968"/>
+            <a:ext cx="4870552" cy="3474720"/>
+          </a:xfrm>
+          <a:prstGeom prst="rect">
+            <a:avLst/>
+          </a:prstGeom>
+          <a:noFill/>
+          <a:ln/>
+        </p:spPr>
+        <p:txBody>
+          <a:bodyPr wrap="square" lIns="0" tIns="0" rIns="0" bIns="0" rtlCol="0" anchor="t"/>
+          <a:lstStyle/>
+          <a:p>
+            <a:pPr algn="l" marL="177800" indent="-177800">
+              <a:spcAft>
+                <a:spcPts val="900"/>
+              </a:spcAft>
+              <a:buSzPct val="100000"/>
+              <a:buChar char="•"/>
+            </a:pPr>
+            <a:r>
+              <a:rPr lang="en-US" sz="1250" b="1" dirty="0">
+                <a:solidFill>
+                  <a:srgbClr val="1B2A38"/>
+                </a:solidFill>
+                <a:latin typeface="Calibri" pitchFamily="34" charset="0"/>
+                <a:ea typeface="Calibri" pitchFamily="34" charset="-122"/>
+                <a:cs typeface="Calibri" pitchFamily="34" charset="-120"/>
+              </a:rPr>
+              <a:t>Amended/corrected results must be clearly flagged and tracked.</a:t>
+            </a:r>
+            <a:endParaRPr lang="en-US" sz="1250" dirty="0"/>
+          </a:p>
+          <a:p>
+            <a:pPr algn="l" marL="177800" indent="-177800">
+              <a:spcAft>
+                <a:spcPts val="900"/>
+              </a:spcAft>
+              <a:buSzPct val="100000"/>
+              <a:buChar char="•"/>
+            </a:pPr>
+            <a:r>
+              <a:rPr lang="en-US" sz="1250" dirty="0">
+                <a:solidFill>
+                  <a:srgbClr val="33444F"/>
+                </a:solidFill>
+                <a:latin typeface="Calibri" pitchFamily="34" charset="0"/>
+                <a:ea typeface="Calibri" pitchFamily="34" charset="-122"/>
+                <a:cs typeface="Calibri" pitchFamily="34" charset="-120"/>
+              </a:rPr>
+              <a:t>Notify clinicians of significant corrections.</a:t>
+            </a:r>
+            <a:endParaRPr lang="en-US" sz="1250" dirty="0"/>
+          </a:p>
+          <a:p>
+            <a:pPr algn="l" marL="177800" indent="-177800">
+              <a:spcAft>
+                <a:spcPts val="900"/>
+              </a:spcAft>
+              <a:buSzPct val="100000"/>
+              <a:buChar char="•"/>
+            </a:pPr>
+            <a:r>
+              <a:rPr lang="en-US" sz="1250" dirty="0">
+                <a:solidFill>
+                  <a:srgbClr val="33444F"/>
+                </a:solidFill>
+                <a:latin typeface="Calibri" pitchFamily="34" charset="0"/>
+                <a:ea typeface="Calibri" pitchFamily="34" charset="-122"/>
+                <a:cs typeface="Calibri" pitchFamily="34" charset="-120"/>
+              </a:rPr>
+              <a:t>Maintain an audit trail.</a:t>
+            </a:r>
+            <a:endParaRPr lang="en-US" sz="1250" dirty="0"/>
+          </a:p>
+          <a:p>
+            <a:pPr algn="l" marL="177800" indent="-177800">
+              <a:spcAft>
+                <a:spcPts val="900"/>
+              </a:spcAft>
+              <a:buSzPct val="100000"/>
+              <a:buChar char="•"/>
+            </a:pPr>
+            <a:r>
+              <a:rPr lang="en-US" sz="1250" dirty="0">
+                <a:solidFill>
+                  <a:srgbClr val="33444F"/>
+                </a:solidFill>
+                <a:latin typeface="Calibri" pitchFamily="34" charset="0"/>
+                <a:ea typeface="Calibri" pitchFamily="34" charset="-122"/>
+                <a:cs typeface="Calibri" pitchFamily="34" charset="-120"/>
+              </a:rPr>
+              <a:t>Monitor amended-report rates as an indicator.</a:t>
+            </a:r>
+            <a:endParaRPr lang="en-US" sz="1250" dirty="0"/>
+          </a:p>
+        </p:txBody>
+      </p:sp>
+      <p:sp>
+        <p:nvSpPr>
+          <p:cNvPr id="10" name="Text 8"/>
+          <p:cNvSpPr/>
+          <p:nvPr/>
+        </p:nvSpPr>
+        <p:spPr>
+          <a:xfrm>
+            <a:off x="566928" y="6473952"/>
+            <a:ext cx="7772400" cy="274320"/>
+          </a:xfrm>
+          <a:prstGeom prst="rect">
+            <a:avLst/>
+          </a:prstGeom>
+          <a:noFill/>
+          <a:ln/>
+        </p:spPr>
+        <p:txBody>
+          <a:bodyPr wrap="square" lIns="0" tIns="0" rIns="0" bIns="0" rtlCol="0" anchor="ctr"/>
+          <a:lstStyle/>
+          <a:p>
             <a:pPr algn="l" indent="0" marL="0">
               <a:buNone/>
             </a:pPr>
             <a:r>
-              <a:rPr lang="en-US" sz="6400" b="1" dirty="0">
-                <a:solidFill>
-                  <a:srgbClr val="ECEFF1"/>
-                </a:solidFill>
-                <a:latin typeface="Calibri" pitchFamily="34" charset="0"/>
-                <a:ea typeface="Calibri" pitchFamily="34" charset="-122"/>
-                <a:cs typeface="Calibri" pitchFamily="34" charset="-120"/>
-              </a:rPr>
-              <a:t>03</a:t>
-            </a:r>
-            <a:endParaRPr lang="en-US" sz="6400" dirty="0"/>
-          </a:p>
-        </p:txBody>
-      </p:sp>
-      <p:sp>
-        <p:nvSpPr>
-          <p:cNvPr id="5" name="Text 3"/>
-          <p:cNvSpPr/>
-          <p:nvPr/>
-        </p:nvSpPr>
-        <p:spPr>
-          <a:xfrm>
-            <a:off x="566928" y="3246120"/>
-            <a:ext cx="10058400" cy="365760"/>
+              <a:rPr lang="en-US" sz="850" dirty="0">
+                <a:solidFill>
+                  <a:srgbClr val="9AA8B4"/>
+                </a:solidFill>
+                <a:latin typeface="Calibri" pitchFamily="34" charset="0"/>
+                <a:ea typeface="Calibri" pitchFamily="34" charset="-122"/>
+                <a:cs typeface="Calibri" pitchFamily="34" charset="-120"/>
+              </a:rPr>
+              <a:t>Makassed General Hospital  ·  Department of Laboratory Medicine</a:t>
+            </a:r>
+            <a:endParaRPr lang="en-US" sz="850" dirty="0"/>
+          </a:p>
+        </p:txBody>
+      </p:sp>
+      <p:sp>
+        <p:nvSpPr>
+          <p:cNvPr id="11" name="Text 9"/>
+          <p:cNvSpPr/>
+          <p:nvPr/>
+        </p:nvSpPr>
+        <p:spPr>
+          <a:xfrm>
+            <a:off x="9814255" y="6473952"/>
+            <a:ext cx="1828800" cy="274320"/>
           </a:xfrm>
           <a:prstGeom prst="rect">
             <a:avLst/>
@@ -3631,60 +4458,49 @@
           <a:bodyPr wrap="square" lIns="0" tIns="0" rIns="0" bIns="0" rtlCol="0" anchor="ctr"/>
           <a:lstStyle/>
           <a:p>
-            <a:pPr algn="l" indent="0" marL="0">
-              <a:buNone/>
-            </a:pPr>
-            <a:r>
-              <a:rPr lang="en-US" sz="1300" b="1" spc="250" kern="0" dirty="0">
-                <a:solidFill>
-                  <a:srgbClr val="F2C9D9"/>
-                </a:solidFill>
-                <a:latin typeface="Calibri" pitchFamily="34" charset="0"/>
-                <a:ea typeface="Calibri" pitchFamily="34" charset="-122"/>
-                <a:cs typeface="Calibri" pitchFamily="34" charset="-120"/>
-              </a:rPr>
-              <a:t>PART THREE</a:t>
-            </a:r>
-            <a:endParaRPr lang="en-US" sz="1300" dirty="0"/>
-          </a:p>
-        </p:txBody>
-      </p:sp>
-      <p:sp>
-        <p:nvSpPr>
-          <p:cNvPr id="6" name="Text 4"/>
-          <p:cNvSpPr/>
-          <p:nvPr/>
-        </p:nvSpPr>
-        <p:spPr>
-          <a:xfrm>
-            <a:off x="566928" y="3611880"/>
-            <a:ext cx="10607040" cy="1463040"/>
-          </a:xfrm>
-          <a:prstGeom prst="rect">
-            <a:avLst/>
-          </a:prstGeom>
-          <a:noFill/>
-          <a:ln/>
-        </p:spPr>
-        <p:txBody>
-          <a:bodyPr wrap="square" lIns="0" tIns="0" rIns="0" bIns="0" rtlCol="0" anchor="t"/>
-          <a:lstStyle/>
-          <a:p>
-            <a:pPr algn="l" indent="0" marL="0">
-              <a:buNone/>
-            </a:pPr>
-            <a:r>
-              <a:rPr lang="en-US" sz="3800" b="1" dirty="0">
-                <a:solidFill>
-                  <a:srgbClr val="FFFFFF"/>
-                </a:solidFill>
-                <a:latin typeface="Calibri" pitchFamily="34" charset="0"/>
-                <a:ea typeface="Calibri" pitchFamily="34" charset="-122"/>
-                <a:cs typeface="Calibri" pitchFamily="34" charset="-120"/>
-              </a:rPr>
-              <a:t>Cases &amp; Board Review</a:t>
-            </a:r>
-            <a:endParaRPr lang="en-US" sz="3800" dirty="0"/>
+            <a:pPr algn="r" indent="0" marL="0">
+              <a:buNone/>
+            </a:pPr>
+            <a:r>
+              <a:rPr lang="en-US" sz="850" dirty="0">
+                <a:solidFill>
+                  <a:srgbClr val="9AA8B4"/>
+                </a:solidFill>
+                <a:latin typeface="Calibri" pitchFamily="34" charset="0"/>
+                <a:ea typeface="Calibri" pitchFamily="34" charset="-122"/>
+                <a:cs typeface="Calibri" pitchFamily="34" charset="-120"/>
+              </a:rPr>
+              <a:t>CP Lecture Series</a:t>
+            </a:r>
+            <a:pPr algn="r" indent="0" marL="0">
+              <a:buNone/>
+            </a:pPr>
+            <a:r>
+              <a:rPr lang="en-US" sz="850" dirty="0">
+                <a:solidFill>
+                  <a:srgbClr val="DCE4EC"/>
+                </a:solidFill>
+                <a:latin typeface="Calibri" pitchFamily="34" charset="0"/>
+                <a:ea typeface="Calibri" pitchFamily="34" charset="-122"/>
+                <a:cs typeface="Calibri" pitchFamily="34" charset="-120"/>
+              </a:rPr>
+              <a:t>   ·   </a:t>
+            </a:r>
+            <a:pPr algn="r" indent="0" marL="0">
+              <a:buNone/>
+            </a:pPr>
+            <a:r>
+              <a:rPr lang="en-US" sz="850" b="1" dirty="0">
+                <a:solidFill>
+                  <a:srgbClr val="455A64"/>
+                </a:solidFill>
+                <a:latin typeface="Calibri" pitchFamily="34" charset="0"/>
+                <a:ea typeface="Calibri" pitchFamily="34" charset="-122"/>
+                <a:cs typeface="Calibri" pitchFamily="34" charset="-120"/>
+              </a:rPr>
+              <a:t>9</a:t>
+            </a:r>
+            <a:endParaRPr lang="en-US" sz="850" dirty="0"/>
           </a:p>
         </p:txBody>
       </p:sp>
@@ -3753,7 +4569,7 @@
                 <a:ea typeface="Calibri" pitchFamily="34" charset="-122"/>
                 <a:cs typeface="Calibri" pitchFamily="34" charset="-120"/>
               </a:rPr>
-              <a:t>LAB MANAGEMENT &amp; QUALITY   ·   CASE 1</a:t>
+              <a:t>LAB MANAGEMENT &amp; QUALITY   ·   SECURITY</a:t>
             </a:r>
             <a:endParaRPr lang="en-US" sz="1100" dirty="0"/>
           </a:p>
@@ -3792,7 +4608,7 @@
                 <a:ea typeface="Calibri" pitchFamily="34" charset="-122"/>
                 <a:cs typeface="Calibri" pitchFamily="34" charset="-120"/>
               </a:rPr>
-              <a:t>Case 1</a:t>
+              <a:t>Data Security &amp; Continuity</a:t>
             </a:r>
             <a:endParaRPr lang="en-US" sz="3000" dirty="0"/>
           </a:p>
@@ -3807,11 +4623,11 @@
         <p:spPr>
           <a:xfrm>
             <a:off x="566928" y="1517904"/>
-            <a:ext cx="11057839" cy="2788920"/>
+            <a:ext cx="5346040" cy="4114800"/>
           </a:xfrm>
           <a:prstGeom prst="roundRect">
             <a:avLst>
-              <a:gd name="adj" fmla="val 2951"/>
+              <a:gd name="adj" fmla="val 2000"/>
             </a:avLst>
           </a:prstGeom>
           <a:solidFill>
@@ -3835,8 +4651,8 @@
         </p:nvSpPr>
         <p:spPr>
           <a:xfrm>
-            <a:off x="841248" y="1700784"/>
-            <a:ext cx="5486400" cy="292608"/>
+            <a:off x="804672" y="1682496"/>
+            <a:ext cx="4888840" cy="274320"/>
           </a:xfrm>
           <a:prstGeom prst="rect">
             <a:avLst/>
@@ -3852,17 +4668,17 @@
               <a:buNone/>
             </a:pPr>
             <a:r>
-              <a:rPr lang="en-US" sz="1100" b="1" spc="150" kern="0" dirty="0">
-                <a:solidFill>
-                  <a:srgbClr val="455A64"/>
-                </a:solidFill>
-                <a:latin typeface="Calibri" pitchFamily="34" charset="0"/>
-                <a:ea typeface="Calibri" pitchFamily="34" charset="-122"/>
-                <a:cs typeface="Calibri" pitchFamily="34" charset="-120"/>
-              </a:rPr>
-              <a:t>CLINICAL VIGNETTE</a:t>
-            </a:r>
-            <a:endParaRPr lang="en-US" sz="1100" dirty="0"/>
+              <a:rPr lang="en-US" sz="1200" b="1" spc="100" kern="0" dirty="0">
+                <a:solidFill>
+                  <a:srgbClr val="2C3A41"/>
+                </a:solidFill>
+                <a:latin typeface="Calibri" pitchFamily="34" charset="0"/>
+                <a:ea typeface="Calibri" pitchFamily="34" charset="-122"/>
+                <a:cs typeface="Calibri" pitchFamily="34" charset="-120"/>
+              </a:rPr>
+              <a:t>SECURITY &amp; PRIVACY</a:t>
+            </a:r>
+            <a:endParaRPr lang="en-US" sz="1200" dirty="0"/>
           </a:p>
         </p:txBody>
       </p:sp>
@@ -3874,8 +4690,8 @@
         </p:nvSpPr>
         <p:spPr>
           <a:xfrm>
-            <a:off x="841248" y="2029968"/>
-            <a:ext cx="10509199" cy="2148840"/>
+            <a:off x="804672" y="2029968"/>
+            <a:ext cx="4870552" cy="3474720"/>
           </a:xfrm>
           <a:prstGeom prst="rect">
             <a:avLst/>
@@ -3887,14 +4703,36 @@
           <a:bodyPr wrap="square" lIns="0" tIns="0" rIns="0" bIns="0" rtlCol="0" anchor="t"/>
           <a:lstStyle/>
           <a:p>
-            <a:pPr algn="l" indent="0" marL="0">
-              <a:lnSpc>
-                <a:spcPct val="108000"/>
-              </a:lnSpc>
-              <a:buNone/>
-            </a:pPr>
-            <a:r>
-              <a:rPr lang="en-US" sz="1450" dirty="0">
+            <a:pPr algn="l" marL="177800" indent="-177800">
+              <a:spcAft>
+                <a:spcPts val="900"/>
+              </a:spcAft>
+              <a:buSzPct val="100000"/>
+              <a:buChar char="•"/>
+            </a:pPr>
+            <a:r>
+              <a:rPr lang="en-US" sz="1250" b="1" dirty="0">
+                <a:solidFill>
+                  <a:srgbClr val="1B2A38"/>
+                </a:solidFill>
+                <a:latin typeface="Calibri" pitchFamily="34" charset="0"/>
+                <a:ea typeface="Calibri" pitchFamily="34" charset="-122"/>
+                <a:cs typeface="Calibri" pitchFamily="34" charset="-120"/>
+              </a:rPr>
+              <a:t>Protect patient data with access controls, audit trails, and encryption.</a:t>
+            </a:r>
+            <a:endParaRPr lang="en-US" sz="1250" dirty="0"/>
+          </a:p>
+          <a:p>
+            <a:pPr algn="l" marL="177800" indent="-177800">
+              <a:spcAft>
+                <a:spcPts val="900"/>
+              </a:spcAft>
+              <a:buSzPct val="100000"/>
+              <a:buChar char="•"/>
+            </a:pPr>
+            <a:r>
+              <a:rPr lang="en-US" sz="1250" dirty="0">
                 <a:solidFill>
                   <a:srgbClr val="33444F"/>
                 </a:solidFill>
@@ -3902,9 +4740,51 @@
                 <a:ea typeface="Calibri" pitchFamily="34" charset="-122"/>
                 <a:cs typeface="Calibri" pitchFamily="34" charset="-120"/>
               </a:rPr>
-              <a:t>After an interface upgrade, potassium results begin posting to the EHR under the wrong reference range, so normal values are flagged as low. No analytic problem exists.</a:t>
-            </a:r>
-            <a:endParaRPr lang="en-US" sz="1450" dirty="0"/>
+              <a:t>Role-based access limits exposure.</a:t>
+            </a:r>
+            <a:endParaRPr lang="en-US" sz="1250" dirty="0"/>
+          </a:p>
+          <a:p>
+            <a:pPr algn="l" marL="177800" indent="-177800">
+              <a:spcAft>
+                <a:spcPts val="900"/>
+              </a:spcAft>
+              <a:buSzPct val="100000"/>
+              <a:buChar char="•"/>
+            </a:pPr>
+            <a:r>
+              <a:rPr lang="en-US" sz="1250" dirty="0">
+                <a:solidFill>
+                  <a:srgbClr val="33444F"/>
+                </a:solidFill>
+                <a:latin typeface="Calibri" pitchFamily="34" charset="0"/>
+                <a:ea typeface="Calibri" pitchFamily="34" charset="-122"/>
+                <a:cs typeface="Calibri" pitchFamily="34" charset="-120"/>
+              </a:rPr>
+              <a:t>Comply with privacy regulations.</a:t>
+            </a:r>
+            <a:endParaRPr lang="en-US" sz="1250" dirty="0"/>
+          </a:p>
+          <a:p>
+            <a:pPr algn="l" marL="177800" indent="-177800">
+              <a:spcAft>
+                <a:spcPts val="900"/>
+              </a:spcAft>
+              <a:buSzPct val="100000"/>
+              <a:buChar char="•"/>
+            </a:pPr>
+            <a:r>
+              <a:rPr lang="en-US" sz="1250" dirty="0">
+                <a:solidFill>
+                  <a:srgbClr val="33444F"/>
+                </a:solidFill>
+                <a:latin typeface="Calibri" pitchFamily="34" charset="0"/>
+                <a:ea typeface="Calibri" pitchFamily="34" charset="-122"/>
+                <a:cs typeface="Calibri" pitchFamily="34" charset="-120"/>
+              </a:rPr>
+              <a:t>Log and review access.</a:t>
+            </a:r>
+            <a:endParaRPr lang="en-US" sz="1250" dirty="0"/>
           </a:p>
         </p:txBody>
       </p:sp>
@@ -3916,16 +4796,16 @@
         </p:nvSpPr>
         <p:spPr>
           <a:xfrm>
-            <a:off x="566928" y="4553712"/>
-            <a:ext cx="11057839" cy="1325880"/>
+            <a:off x="6278728" y="1517904"/>
+            <a:ext cx="5346040" cy="4114800"/>
           </a:xfrm>
           <a:prstGeom prst="roundRect">
             <a:avLst>
-              <a:gd name="adj" fmla="val 6207"/>
+              <a:gd name="adj" fmla="val 2000"/>
             </a:avLst>
           </a:prstGeom>
           <a:solidFill>
-            <a:srgbClr val="0E3A5F"/>
+            <a:srgbClr val="E6EAED"/>
           </a:solidFill>
           <a:ln/>
           <a:effectLst>
@@ -3945,8 +4825,8 @@
         </p:nvSpPr>
         <p:spPr>
           <a:xfrm>
-            <a:off x="822960" y="4681728"/>
-            <a:ext cx="640080" cy="960120"/>
+            <a:off x="6516472" y="1682496"/>
+            <a:ext cx="4888840" cy="274320"/>
           </a:xfrm>
           <a:prstGeom prst="rect">
             <a:avLst/>
@@ -3958,21 +4838,21 @@
           <a:bodyPr wrap="square" lIns="0" tIns="0" rIns="0" bIns="0" rtlCol="0" anchor="ctr"/>
           <a:lstStyle/>
           <a:p>
-            <a:pPr algn="ctr" indent="0" marL="0">
-              <a:buNone/>
-            </a:pPr>
-            <a:r>
-              <a:rPr lang="en-US" sz="4000" b="1" dirty="0">
-                <a:solidFill>
-                  <a:srgbClr val="455A64"/>
-                </a:solidFill>
-                <a:latin typeface="Calibri" pitchFamily="34" charset="0"/>
-                <a:ea typeface="Calibri" pitchFamily="34" charset="-122"/>
-                <a:cs typeface="Calibri" pitchFamily="34" charset="-120"/>
-              </a:rPr>
-              <a:t>?</a:t>
-            </a:r>
-            <a:endParaRPr lang="en-US" sz="4000" dirty="0"/>
+            <a:pPr indent="0" marL="0">
+              <a:buNone/>
+            </a:pPr>
+            <a:r>
+              <a:rPr lang="en-US" sz="1200" b="1" spc="100" kern="0" dirty="0">
+                <a:solidFill>
+                  <a:srgbClr val="2C3A41"/>
+                </a:solidFill>
+                <a:latin typeface="Calibri" pitchFamily="34" charset="0"/>
+                <a:ea typeface="Calibri" pitchFamily="34" charset="-122"/>
+                <a:cs typeface="Calibri" pitchFamily="34" charset="-120"/>
+              </a:rPr>
+              <a:t>DOWNTIME PLANNING</a:t>
+            </a:r>
+            <a:endParaRPr lang="en-US" sz="1200" dirty="0"/>
           </a:p>
         </p:txBody>
       </p:sp>
@@ -3984,34 +4864,101 @@
         </p:nvSpPr>
         <p:spPr>
           <a:xfrm>
-            <a:off x="1618488" y="4553712"/>
-            <a:ext cx="9686239" cy="1325880"/>
-          </a:xfrm>
-          <a:prstGeom prst="rect">
-            <a:avLst/>
-          </a:prstGeom>
-          <a:noFill/>
-          <a:ln/>
-        </p:spPr>
-        <p:txBody>
-          <a:bodyPr wrap="square" lIns="0" tIns="0" rIns="0" bIns="0" rtlCol="0" anchor="ctr"/>
-          <a:lstStyle/>
-          <a:p>
-            <a:pPr algn="l" indent="0" marL="0">
-              <a:buNone/>
-            </a:pPr>
-            <a:r>
-              <a:rPr lang="en-US" sz="1500" b="1" dirty="0">
-                <a:solidFill>
-                  <a:srgbClr val="FFFFFF"/>
-                </a:solidFill>
-                <a:latin typeface="Calibri" pitchFamily="34" charset="0"/>
-                <a:ea typeface="Calibri" pitchFamily="34" charset="-122"/>
-                <a:cs typeface="Calibri" pitchFamily="34" charset="-120"/>
-              </a:rPr>
-              <a:t>Where is the failure, and how should it be prevented?</a:t>
-            </a:r>
-            <a:endParaRPr lang="en-US" sz="1500" dirty="0"/>
+            <a:off x="6516472" y="2029968"/>
+            <a:ext cx="4870552" cy="3474720"/>
+          </a:xfrm>
+          <a:prstGeom prst="rect">
+            <a:avLst/>
+          </a:prstGeom>
+          <a:noFill/>
+          <a:ln/>
+        </p:spPr>
+        <p:txBody>
+          <a:bodyPr wrap="square" lIns="0" tIns="0" rIns="0" bIns="0" rtlCol="0" anchor="t"/>
+          <a:lstStyle/>
+          <a:p>
+            <a:pPr algn="l" marL="177800" indent="-177800">
+              <a:spcAft>
+                <a:spcPts val="900"/>
+              </a:spcAft>
+              <a:buSzPct val="100000"/>
+              <a:buChar char="•"/>
+            </a:pPr>
+            <a:r>
+              <a:rPr lang="en-US" sz="1250" b="1" dirty="0">
+                <a:solidFill>
+                  <a:srgbClr val="1B2A38"/>
+                </a:solidFill>
+                <a:latin typeface="Calibri" pitchFamily="34" charset="0"/>
+                <a:ea typeface="Calibri" pitchFamily="34" charset="-122"/>
+                <a:cs typeface="Calibri" pitchFamily="34" charset="-120"/>
+              </a:rPr>
+              <a:t>Have validated downtime procedures so testing and reporting continue during outages.</a:t>
+            </a:r>
+            <a:endParaRPr lang="en-US" sz="1250" dirty="0"/>
+          </a:p>
+          <a:p>
+            <a:pPr algn="l" marL="177800" indent="-177800">
+              <a:spcAft>
+                <a:spcPts val="900"/>
+              </a:spcAft>
+              <a:buSzPct val="100000"/>
+              <a:buChar char="•"/>
+            </a:pPr>
+            <a:r>
+              <a:rPr lang="en-US" sz="1250" dirty="0">
+                <a:solidFill>
+                  <a:srgbClr val="33444F"/>
+                </a:solidFill>
+                <a:latin typeface="Calibri" pitchFamily="34" charset="0"/>
+                <a:ea typeface="Calibri" pitchFamily="34" charset="-122"/>
+                <a:cs typeface="Calibri" pitchFamily="34" charset="-120"/>
+              </a:rPr>
+              <a:t>Backups and disaster recovery.</a:t>
+            </a:r>
+            <a:endParaRPr lang="en-US" sz="1250" dirty="0"/>
+          </a:p>
+          <a:p>
+            <a:pPr algn="l" marL="177800" indent="-177800">
+              <a:spcAft>
+                <a:spcPts val="900"/>
+              </a:spcAft>
+              <a:buSzPct val="100000"/>
+              <a:buChar char="•"/>
+            </a:pPr>
+            <a:r>
+              <a:rPr lang="en-US" sz="1250" dirty="0">
+                <a:solidFill>
+                  <a:srgbClr val="33444F"/>
+                </a:solidFill>
+                <a:latin typeface="Calibri" pitchFamily="34" charset="0"/>
+                <a:ea typeface="Calibri" pitchFamily="34" charset="-122"/>
+                <a:cs typeface="Calibri" pitchFamily="34" charset="-120"/>
+              </a:rPr>
+              <a:t>Reconcile data after downtime.</a:t>
+            </a:r>
+            <a:endParaRPr lang="en-US" sz="1250" dirty="0"/>
+          </a:p>
+          <a:p>
+            <a:pPr algn="l" marL="177800" indent="-177800">
+              <a:spcAft>
+                <a:spcPts val="900"/>
+              </a:spcAft>
+              <a:buSzPct val="100000"/>
+              <a:buChar char="•"/>
+            </a:pPr>
+            <a:r>
+              <a:rPr lang="en-US" sz="1250" dirty="0">
+                <a:solidFill>
+                  <a:srgbClr val="33444F"/>
+                </a:solidFill>
+                <a:latin typeface="Calibri" pitchFamily="34" charset="0"/>
+                <a:ea typeface="Calibri" pitchFamily="34" charset="-122"/>
+                <a:cs typeface="Calibri" pitchFamily="34" charset="-120"/>
+              </a:rPr>
+              <a:t>Test the plan regularly.</a:t>
+            </a:r>
+            <a:endParaRPr lang="en-US" sz="1250" dirty="0"/>
           </a:p>
         </p:txBody>
       </p:sp>
@@ -4115,7 +5062,7 @@
                 <a:ea typeface="Calibri" pitchFamily="34" charset="-122"/>
                 <a:cs typeface="Calibri" pitchFamily="34" charset="-120"/>
               </a:rPr>
-              <a:t>9</a:t>
+              <a:t>10</a:t>
             </a:r>
             <a:endParaRPr lang="en-US" sz="850" dirty="0"/>
           </a:p>
@@ -4135,7 +5082,7 @@
     <p:bg>
       <p:bgPr>
         <a:solidFill>
-          <a:srgbClr val="FFFFFF"/>
+          <a:srgbClr val="2C3A41"/>
         </a:solidFill>
       </p:bgPr>
     </p:bg>
@@ -4155,14 +5102,58 @@
       </p:grpSpPr>
       <p:sp>
         <p:nvSpPr>
-          <p:cNvPr id="2" name="Text 0"/>
-          <p:cNvSpPr/>
-          <p:nvPr/>
-        </p:nvSpPr>
-        <p:spPr>
-          <a:xfrm>
-            <a:off x="566928" y="329184"/>
-            <a:ext cx="10515600" cy="310896"/>
+          <p:cNvPr id="2" name="Shape 0"/>
+          <p:cNvSpPr/>
+          <p:nvPr/>
+        </p:nvSpPr>
+        <p:spPr>
+          <a:xfrm>
+            <a:off x="9509760" y="-1280160"/>
+            <a:ext cx="4754880" cy="4754880"/>
+          </a:xfrm>
+          <a:prstGeom prst="ellipse">
+            <a:avLst/>
+          </a:prstGeom>
+          <a:solidFill>
+            <a:srgbClr val="FFFFFF">
+              <a:alpha val="8000"/>
+            </a:srgbClr>
+          </a:solidFill>
+          <a:ln/>
+        </p:spPr>
+      </p:sp>
+      <p:sp>
+        <p:nvSpPr>
+          <p:cNvPr id="3" name="Shape 1"/>
+          <p:cNvSpPr/>
+          <p:nvPr/>
+        </p:nvSpPr>
+        <p:spPr>
+          <a:xfrm>
+            <a:off x="10607040" y="3931920"/>
+            <a:ext cx="3108960" cy="3108960"/>
+          </a:xfrm>
+          <a:prstGeom prst="ellipse">
+            <a:avLst/>
+          </a:prstGeom>
+          <a:solidFill>
+            <a:srgbClr val="FFFFFF">
+              <a:alpha val="6000"/>
+            </a:srgbClr>
+          </a:solidFill>
+          <a:ln/>
+        </p:spPr>
+      </p:sp>
+      <p:sp>
+        <p:nvSpPr>
+          <p:cNvPr id="4" name="Text 2"/>
+          <p:cNvSpPr/>
+          <p:nvPr/>
+        </p:nvSpPr>
+        <p:spPr>
+          <a:xfrm>
+            <a:off x="566928" y="1783080"/>
+            <a:ext cx="2743200" cy="1463040"/>
           </a:xfrm>
           <a:prstGeom prst="rect">
             <a:avLst/>
@@ -4178,30 +5169,30 @@
               <a:buNone/>
             </a:pPr>
             <a:r>
-              <a:rPr lang="en-US" sz="1100" b="1" spc="150" kern="0" dirty="0">
-                <a:solidFill>
-                  <a:srgbClr val="455A64"/>
-                </a:solidFill>
-                <a:latin typeface="Calibri" pitchFamily="34" charset="0"/>
-                <a:ea typeface="Calibri" pitchFamily="34" charset="-122"/>
-                <a:cs typeface="Calibri" pitchFamily="34" charset="-120"/>
-              </a:rPr>
-              <a:t>LAB MANAGEMENT &amp; QUALITY   ·   CASE 1  ·  RESOLUTION</a:t>
-            </a:r>
-            <a:endParaRPr lang="en-US" sz="1100" dirty="0"/>
-          </a:p>
-        </p:txBody>
-      </p:sp>
-      <p:sp>
-        <p:nvSpPr>
-          <p:cNvPr id="3" name="Text 1"/>
-          <p:cNvSpPr/>
-          <p:nvPr/>
-        </p:nvSpPr>
-        <p:spPr>
-          <a:xfrm>
-            <a:off x="566928" y="713232"/>
-            <a:ext cx="11064240" cy="749808"/>
+              <a:rPr lang="en-US" sz="6400" b="1" dirty="0">
+                <a:solidFill>
+                  <a:srgbClr val="ECEFF1"/>
+                </a:solidFill>
+                <a:latin typeface="Calibri" pitchFamily="34" charset="0"/>
+                <a:ea typeface="Calibri" pitchFamily="34" charset="-122"/>
+                <a:cs typeface="Calibri" pitchFamily="34" charset="-120"/>
+              </a:rPr>
+              <a:t>03</a:t>
+            </a:r>
+            <a:endParaRPr lang="en-US" sz="6400" dirty="0"/>
+          </a:p>
+        </p:txBody>
+      </p:sp>
+      <p:sp>
+        <p:nvSpPr>
+          <p:cNvPr id="5" name="Text 3"/>
+          <p:cNvSpPr/>
+          <p:nvPr/>
+        </p:nvSpPr>
+        <p:spPr>
+          <a:xfrm>
+            <a:off x="566928" y="3246120"/>
+            <a:ext cx="10058400" cy="365760"/>
           </a:xfrm>
           <a:prstGeom prst="rect">
             <a:avLst/>
@@ -4217,30 +5208,30 @@
               <a:buNone/>
             </a:pPr>
             <a:r>
-              <a:rPr lang="en-US" sz="3000" b="1" dirty="0">
-                <a:solidFill>
-                  <a:srgbClr val="0E3A5F"/>
-                </a:solidFill>
-                <a:latin typeface="Calibri" pitchFamily="34" charset="0"/>
-                <a:ea typeface="Calibri" pitchFamily="34" charset="-122"/>
-                <a:cs typeface="Calibri" pitchFamily="34" charset="-120"/>
-              </a:rPr>
-              <a:t>Case 1: Interface Mapping Error</a:t>
-            </a:r>
-            <a:endParaRPr lang="en-US" sz="3000" dirty="0"/>
-          </a:p>
-        </p:txBody>
-      </p:sp>
-      <p:sp>
-        <p:nvSpPr>
-          <p:cNvPr id="4" name="Text 2"/>
-          <p:cNvSpPr/>
-          <p:nvPr/>
-        </p:nvSpPr>
-        <p:spPr>
-          <a:xfrm>
-            <a:off x="566928" y="1554480"/>
-            <a:ext cx="6413547" cy="4023360"/>
+              <a:rPr lang="en-US" sz="1300" b="1" spc="250" kern="0" dirty="0">
+                <a:solidFill>
+                  <a:srgbClr val="F2C9D9"/>
+                </a:solidFill>
+                <a:latin typeface="Calibri" pitchFamily="34" charset="0"/>
+                <a:ea typeface="Calibri" pitchFamily="34" charset="-122"/>
+                <a:cs typeface="Calibri" pitchFamily="34" charset="-120"/>
+              </a:rPr>
+              <a:t>PART THREE</a:t>
+            </a:r>
+            <a:endParaRPr lang="en-US" sz="1300" dirty="0"/>
+          </a:p>
+        </p:txBody>
+      </p:sp>
+      <p:sp>
+        <p:nvSpPr>
+          <p:cNvPr id="6" name="Text 4"/>
+          <p:cNvSpPr/>
+          <p:nvPr/>
+        </p:nvSpPr>
+        <p:spPr>
+          <a:xfrm>
+            <a:off x="566928" y="3611880"/>
+            <a:ext cx="10607040" cy="1463040"/>
           </a:xfrm>
           <a:prstGeom prst="rect">
             <a:avLst/>
@@ -4252,304 +5243,21 @@
           <a:bodyPr wrap="square" lIns="0" tIns="0" rIns="0" bIns="0" rtlCol="0" anchor="t"/>
           <a:lstStyle/>
           <a:p>
-            <a:pPr algn="l" marL="177800" indent="-177800">
-              <a:spcAft>
-                <a:spcPts val="900"/>
-              </a:spcAft>
-              <a:buSzPct val="100000"/>
-              <a:buChar char="•"/>
-            </a:pPr>
-            <a:r>
-              <a:rPr lang="en-US" sz="1400" b="1" dirty="0">
-                <a:solidFill>
-                  <a:srgbClr val="1B2A38"/>
-                </a:solidFill>
-                <a:latin typeface="Calibri" pitchFamily="34" charset="0"/>
-                <a:ea typeface="Calibri" pitchFamily="34" charset="-122"/>
-                <a:cs typeface="Calibri" pitchFamily="34" charset="-120"/>
-              </a:rPr>
-              <a:t>A postanalytic informatics failure — the interface mapped the wrong reference range, not an analytic error.</a:t>
-            </a:r>
-            <a:endParaRPr lang="en-US" sz="1400" dirty="0"/>
-          </a:p>
-          <a:p>
-            <a:pPr algn="l" marL="177800" indent="-177800">
-              <a:spcAft>
-                <a:spcPts val="900"/>
-              </a:spcAft>
-              <a:buSzPct val="100000"/>
-              <a:buChar char="•"/>
-            </a:pPr>
-            <a:r>
-              <a:rPr lang="en-US" sz="1400" dirty="0">
-                <a:solidFill>
-                  <a:srgbClr val="33444F"/>
-                </a:solidFill>
-                <a:latin typeface="Calibri" pitchFamily="34" charset="0"/>
-                <a:ea typeface="Calibri" pitchFamily="34" charset="-122"/>
-                <a:cs typeface="Calibri" pitchFamily="34" charset="-120"/>
-              </a:rPr>
-              <a:t>Mapping/unit errors can affect every result for that analyte invisibly.</a:t>
-            </a:r>
-            <a:endParaRPr lang="en-US" sz="1400" dirty="0"/>
-          </a:p>
-          <a:p>
-            <a:pPr algn="l" marL="177800" indent="-177800">
-              <a:spcAft>
-                <a:spcPts val="900"/>
-              </a:spcAft>
-              <a:buSzPct val="100000"/>
-              <a:buChar char="•"/>
-            </a:pPr>
-            <a:r>
-              <a:rPr lang="en-US" sz="1400" dirty="0">
-                <a:solidFill>
-                  <a:srgbClr val="33444F"/>
-                </a:solidFill>
-                <a:latin typeface="Calibri" pitchFamily="34" charset="0"/>
-                <a:ea typeface="Calibri" pitchFamily="34" charset="-122"/>
-                <a:cs typeface="Calibri" pitchFamily="34" charset="-120"/>
-              </a:rPr>
-              <a:t>Fix the mapping and re-validate the interface end-to-end.</a:t>
-            </a:r>
-            <a:endParaRPr lang="en-US" sz="1400" dirty="0"/>
-          </a:p>
-          <a:p>
-            <a:pPr algn="l" marL="177800" indent="-177800">
-              <a:spcAft>
-                <a:spcPts val="900"/>
-              </a:spcAft>
-              <a:buSzPct val="100000"/>
-              <a:buChar char="•"/>
-            </a:pPr>
-            <a:r>
-              <a:rPr lang="en-US" sz="1400" dirty="0">
-                <a:solidFill>
-                  <a:srgbClr val="33444F"/>
-                </a:solidFill>
-                <a:latin typeface="Calibri" pitchFamily="34" charset="0"/>
-                <a:ea typeface="Calibri" pitchFamily="34" charset="-122"/>
-                <a:cs typeface="Calibri" pitchFamily="34" charset="-120"/>
-              </a:rPr>
-              <a:t>Prevent with controlled change management and pre-production interface testing.</a:t>
-            </a:r>
-            <a:endParaRPr lang="en-US" sz="1400" dirty="0"/>
-          </a:p>
-        </p:txBody>
-      </p:sp>
-      <p:sp>
-        <p:nvSpPr>
-          <p:cNvPr id="5" name="Shape 3"/>
-          <p:cNvSpPr/>
-          <p:nvPr/>
-        </p:nvSpPr>
-        <p:spPr>
-          <a:xfrm>
-            <a:off x="7422788" y="1554480"/>
-            <a:ext cx="4201979" cy="3977640"/>
-          </a:xfrm>
-          <a:prstGeom prst="roundRect">
-            <a:avLst>
-              <a:gd name="adj" fmla="val 2069"/>
-            </a:avLst>
-          </a:prstGeom>
-          <a:solidFill>
-            <a:srgbClr val="ECEFF1"/>
-          </a:solidFill>
-          <a:ln/>
-          <a:effectLst>
-            <a:outerShdw sx="100000" sy="100000" kx="0" ky="0" algn="bl" rotWithShape="0" blurRad="88900" dist="25400" dir="5400000">
-              <a:srgbClr val="22303C">
-                <a:alpha val="12000"/>
-              </a:srgbClr>
-            </a:outerShdw>
-          </a:effectLst>
-        </p:spPr>
-      </p:sp>
-      <p:sp>
-        <p:nvSpPr>
-          <p:cNvPr id="6" name="Text 4"/>
-          <p:cNvSpPr/>
-          <p:nvPr/>
-        </p:nvSpPr>
-        <p:spPr>
-          <a:xfrm>
-            <a:off x="7660532" y="1755648"/>
-            <a:ext cx="3744779" cy="310896"/>
-          </a:xfrm>
-          <a:prstGeom prst="rect">
-            <a:avLst/>
-          </a:prstGeom>
-          <a:noFill/>
-          <a:ln/>
-        </p:spPr>
-        <p:txBody>
-          <a:bodyPr wrap="square" lIns="0" tIns="0" rIns="0" bIns="0" rtlCol="0" anchor="ctr"/>
-          <a:lstStyle/>
-          <a:p>
-            <a:pPr indent="0" marL="0">
-              <a:buNone/>
-            </a:pPr>
-            <a:r>
-              <a:rPr lang="en-US" sz="1100" b="1" spc="140" kern="0" dirty="0">
-                <a:solidFill>
-                  <a:srgbClr val="455A64"/>
-                </a:solidFill>
-                <a:latin typeface="Calibri" pitchFamily="34" charset="0"/>
-                <a:ea typeface="Calibri" pitchFamily="34" charset="-122"/>
-                <a:cs typeface="Calibri" pitchFamily="34" charset="-120"/>
-              </a:rPr>
-              <a:t>TEACHING POINT</a:t>
-            </a:r>
-            <a:endParaRPr lang="en-US" sz="1100" dirty="0"/>
-          </a:p>
-        </p:txBody>
-      </p:sp>
-      <p:sp>
-        <p:nvSpPr>
-          <p:cNvPr id="7" name="Text 5"/>
-          <p:cNvSpPr/>
-          <p:nvPr/>
-        </p:nvSpPr>
-        <p:spPr>
-          <a:xfrm>
-            <a:off x="7660532" y="2121408"/>
-            <a:ext cx="3726491" cy="3291840"/>
-          </a:xfrm>
-          <a:prstGeom prst="rect">
-            <a:avLst/>
-          </a:prstGeom>
-          <a:noFill/>
-          <a:ln/>
-        </p:spPr>
-        <p:txBody>
-          <a:bodyPr wrap="square" lIns="0" tIns="0" rIns="0" bIns="0" rtlCol="0" anchor="t"/>
-          <a:lstStyle/>
-          <a:p>
             <a:pPr algn="l" indent="0" marL="0">
-              <a:lnSpc>
-                <a:spcPct val="110000"/>
-              </a:lnSpc>
-              <a:buNone/>
-            </a:pPr>
-            <a:r>
-              <a:rPr lang="en-US" sz="1350" dirty="0">
-                <a:solidFill>
-                  <a:srgbClr val="33444F"/>
-                </a:solidFill>
-                <a:latin typeface="Calibri" pitchFamily="34" charset="0"/>
-                <a:ea typeface="Calibri" pitchFamily="34" charset="-122"/>
-                <a:cs typeface="Calibri" pitchFamily="34" charset="-120"/>
-              </a:rPr>
-              <a:t>Interface and mapping changes must be validated end-to-end before go-live — a single mis-mapped field can corrupt all results for an analyte.</a:t>
-            </a:r>
-            <a:endParaRPr lang="en-US" sz="1350" dirty="0"/>
-          </a:p>
-        </p:txBody>
-      </p:sp>
-      <p:sp>
-        <p:nvSpPr>
-          <p:cNvPr id="8" name="Text 6"/>
-          <p:cNvSpPr/>
-          <p:nvPr/>
-        </p:nvSpPr>
-        <p:spPr>
-          <a:xfrm>
-            <a:off x="566928" y="6473952"/>
-            <a:ext cx="7772400" cy="274320"/>
-          </a:xfrm>
-          <a:prstGeom prst="rect">
-            <a:avLst/>
-          </a:prstGeom>
-          <a:noFill/>
-          <a:ln/>
-        </p:spPr>
-        <p:txBody>
-          <a:bodyPr wrap="square" lIns="0" tIns="0" rIns="0" bIns="0" rtlCol="0" anchor="ctr"/>
-          <a:lstStyle/>
-          <a:p>
-            <a:pPr algn="l" indent="0" marL="0">
-              <a:buNone/>
-            </a:pPr>
-            <a:r>
-              <a:rPr lang="en-US" sz="850" dirty="0">
-                <a:solidFill>
-                  <a:srgbClr val="9AA8B4"/>
-                </a:solidFill>
-                <a:latin typeface="Calibri" pitchFamily="34" charset="0"/>
-                <a:ea typeface="Calibri" pitchFamily="34" charset="-122"/>
-                <a:cs typeface="Calibri" pitchFamily="34" charset="-120"/>
-              </a:rPr>
-              <a:t>Makassed General Hospital  ·  Department of Laboratory Medicine</a:t>
-            </a:r>
-            <a:endParaRPr lang="en-US" sz="850" dirty="0"/>
-          </a:p>
-        </p:txBody>
-      </p:sp>
-      <p:sp>
-        <p:nvSpPr>
-          <p:cNvPr id="9" name="Text 7"/>
-          <p:cNvSpPr/>
-          <p:nvPr/>
-        </p:nvSpPr>
-        <p:spPr>
-          <a:xfrm>
-            <a:off x="9814255" y="6473952"/>
-            <a:ext cx="1828800" cy="274320"/>
-          </a:xfrm>
-          <a:prstGeom prst="rect">
-            <a:avLst/>
-          </a:prstGeom>
-          <a:noFill/>
-          <a:ln/>
-        </p:spPr>
-        <p:txBody>
-          <a:bodyPr wrap="square" lIns="0" tIns="0" rIns="0" bIns="0" rtlCol="0" anchor="ctr"/>
-          <a:lstStyle/>
-          <a:p>
-            <a:pPr algn="r" indent="0" marL="0">
-              <a:buNone/>
-            </a:pPr>
-            <a:r>
-              <a:rPr lang="en-US" sz="850" dirty="0">
-                <a:solidFill>
-                  <a:srgbClr val="9AA8B4"/>
-                </a:solidFill>
-                <a:latin typeface="Calibri" pitchFamily="34" charset="0"/>
-                <a:ea typeface="Calibri" pitchFamily="34" charset="-122"/>
-                <a:cs typeface="Calibri" pitchFamily="34" charset="-120"/>
-              </a:rPr>
-              <a:t>CP Lecture Series</a:t>
-            </a:r>
-            <a:pPr algn="r" indent="0" marL="0">
-              <a:buNone/>
-            </a:pPr>
-            <a:r>
-              <a:rPr lang="en-US" sz="850" dirty="0">
-                <a:solidFill>
-                  <a:srgbClr val="DCE4EC"/>
-                </a:solidFill>
-                <a:latin typeface="Calibri" pitchFamily="34" charset="0"/>
-                <a:ea typeface="Calibri" pitchFamily="34" charset="-122"/>
-                <a:cs typeface="Calibri" pitchFamily="34" charset="-120"/>
-              </a:rPr>
-              <a:t>   ·   </a:t>
-            </a:r>
-            <a:pPr algn="r" indent="0" marL="0">
-              <a:buNone/>
-            </a:pPr>
-            <a:r>
-              <a:rPr lang="en-US" sz="850" b="1" dirty="0">
-                <a:solidFill>
-                  <a:srgbClr val="455A64"/>
-                </a:solidFill>
-                <a:latin typeface="Calibri" pitchFamily="34" charset="0"/>
-                <a:ea typeface="Calibri" pitchFamily="34" charset="-122"/>
-                <a:cs typeface="Calibri" pitchFamily="34" charset="-120"/>
-              </a:rPr>
-              <a:t>10</a:t>
-            </a:r>
-            <a:endParaRPr lang="en-US" sz="850" dirty="0"/>
+              <a:buNone/>
+            </a:pPr>
+            <a:r>
+              <a:rPr lang="en-US" sz="3800" b="1" dirty="0">
+                <a:solidFill>
+                  <a:srgbClr val="FFFFFF"/>
+                </a:solidFill>
+                <a:latin typeface="Calibri" pitchFamily="34" charset="0"/>
+                <a:ea typeface="Calibri" pitchFamily="34" charset="-122"/>
+                <a:cs typeface="Calibri" pitchFamily="34" charset="-120"/>
+              </a:rPr>
+              <a:t>Cases &amp; Board Review</a:t>
+            </a:r>
+            <a:endParaRPr lang="en-US" sz="3800" dirty="0"/>
           </a:p>
         </p:txBody>
       </p:sp>
@@ -4618,7 +5326,7 @@
                 <a:ea typeface="Calibri" pitchFamily="34" charset="-122"/>
                 <a:cs typeface="Calibri" pitchFamily="34" charset="-120"/>
               </a:rPr>
-              <a:t>LAB MANAGEMENT &amp; QUALITY   ·   CASE 2</a:t>
+              <a:t>LAB MANAGEMENT &amp; QUALITY   ·   CASE 1</a:t>
             </a:r>
             <a:endParaRPr lang="en-US" sz="1100" dirty="0"/>
           </a:p>
@@ -4657,7 +5365,7 @@
                 <a:ea typeface="Calibri" pitchFamily="34" charset="-122"/>
                 <a:cs typeface="Calibri" pitchFamily="34" charset="-120"/>
               </a:rPr>
-              <a:t>Case 2</a:t>
+              <a:t>Case 1</a:t>
             </a:r>
             <a:endParaRPr lang="en-US" sz="3000" dirty="0"/>
           </a:p>
@@ -4767,7 +5475,7 @@
                 <a:ea typeface="Calibri" pitchFamily="34" charset="-122"/>
                 <a:cs typeface="Calibri" pitchFamily="34" charset="-120"/>
               </a:rPr>
-              <a:t>A ransomware incident takes the LIS offline for two days. The laboratory must keep reporting critical results safely.</a:t>
+              <a:t>After an interface update, potassium results post to the EHR with the wrong units, but values look numerically plausible.</a:t>
             </a:r>
             <a:endParaRPr lang="en-US" sz="1450" dirty="0"/>
           </a:p>
@@ -4874,7 +5582,7 @@
                 <a:ea typeface="Calibri" pitchFamily="34" charset="-122"/>
                 <a:cs typeface="Calibri" pitchFamily="34" charset="-120"/>
               </a:rPr>
-              <a:t>What should have been in place, and what are the priorities during downtime?</a:t>
+              <a:t>What failure occurred and how is it prevented?</a:t>
             </a:r>
             <a:endParaRPr lang="en-US" sz="1500" dirty="0"/>
           </a:p>
@@ -5051,7 +5759,7 @@
                 <a:ea typeface="Calibri" pitchFamily="34" charset="-122"/>
                 <a:cs typeface="Calibri" pitchFamily="34" charset="-120"/>
               </a:rPr>
-              <a:t>LAB MANAGEMENT &amp; QUALITY   ·   CASE 2  ·  RESOLUTION</a:t>
+              <a:t>LAB MANAGEMENT &amp; QUALITY   ·   CASE 1  ·  RESOLUTION</a:t>
             </a:r>
             <a:endParaRPr lang="en-US" sz="1100" dirty="0"/>
           </a:p>
@@ -5090,7 +5798,7 @@
                 <a:ea typeface="Calibri" pitchFamily="34" charset="-122"/>
                 <a:cs typeface="Calibri" pitchFamily="34" charset="-120"/>
               </a:rPr>
-              <a:t>Case 2: Downtime Response</a:t>
+              <a:t>Case 1: Interface Mapping Error</a:t>
             </a:r>
             <a:endParaRPr lang="en-US" sz="3000" dirty="0"/>
           </a:p>
@@ -5133,7 +5841,7 @@
                 <a:ea typeface="Calibri" pitchFamily="34" charset="-122"/>
                 <a:cs typeface="Calibri" pitchFamily="34" charset="-120"/>
               </a:rPr>
-              <a:t>Activate tested downtime procedures: manual result delivery, paper/backup workflows, and critical-value pathways.</a:t>
+              <a:t>A unit-mapping error corrupted results despite plausible numbers — a classic silent interface failure.</a:t>
             </a:r>
             <a:endParaRPr lang="en-US" sz="1400" dirty="0"/>
           </a:p>
@@ -5154,7 +5862,7 @@
                 <a:ea typeface="Calibri" pitchFamily="34" charset="-122"/>
                 <a:cs typeface="Calibri" pitchFamily="34" charset="-120"/>
               </a:rPr>
-              <a:t>Prioritize critical results and time-sensitive testing.</a:t>
+              <a:t>Validate interfaces thoroughly before go-live and after any change.</a:t>
             </a:r>
             <a:endParaRPr lang="en-US" sz="1400" dirty="0"/>
           </a:p>
@@ -5175,7 +5883,7 @@
                 <a:ea typeface="Calibri" pitchFamily="34" charset="-122"/>
                 <a:cs typeface="Calibri" pitchFamily="34" charset="-120"/>
               </a:rPr>
-              <a:t>Maintain specimen and result traceability for later reconciliation.</a:t>
+              <a:t>Test units, codes, and reference ranges across the message set.</a:t>
             </a:r>
             <a:endParaRPr lang="en-US" sz="1400" dirty="0"/>
           </a:p>
@@ -5196,7 +5904,7 @@
                 <a:ea typeface="Calibri" pitchFamily="34" charset="-122"/>
                 <a:cs typeface="Calibri" pitchFamily="34" charset="-120"/>
               </a:rPr>
-              <a:t>Reconcile and verify all downtime results when systems are restored; review cybersecurity safeguards.</a:t>
+              <a:t>Change control prevents silent corruption.</a:t>
             </a:r>
             <a:endParaRPr lang="en-US" sz="1400" dirty="0"/>
           </a:p>
@@ -5306,7 +6014,7 @@
                 <a:ea typeface="Calibri" pitchFamily="34" charset="-122"/>
                 <a:cs typeface="Calibri" pitchFamily="34" charset="-120"/>
               </a:rPr>
-              <a:t>Downtime readiness is a safety requirement — rehearsed manual workflows and reconciliation protect patients when systems fail.</a:t>
+              <a:t>Interface changes must be fully revalidated — mapping errors (units/codes/ranges) corrupt results invisibly.</a:t>
             </a:r>
             <a:endParaRPr lang="en-US" sz="1350" dirty="0"/>
           </a:p>
@@ -5483,7 +6191,7 @@
                 <a:ea typeface="Calibri" pitchFamily="34" charset="-122"/>
                 <a:cs typeface="Calibri" pitchFamily="34" charset="-120"/>
               </a:rPr>
-              <a:t>LAB MANAGEMENT &amp; QUALITY   ·   BOARD REVIEW  ·  Q1</a:t>
+              <a:t>LAB MANAGEMENT &amp; QUALITY   ·   CASE 2</a:t>
             </a:r>
             <a:endParaRPr lang="en-US" sz="1100" dirty="0"/>
           </a:p>
@@ -5514,7 +6222,7 @@
               <a:buNone/>
             </a:pPr>
             <a:r>
-              <a:rPr lang="en-US" sz="2600" b="1" dirty="0">
+              <a:rPr lang="en-US" sz="3000" b="1" dirty="0">
                 <a:solidFill>
                   <a:srgbClr val="0E3A5F"/>
                 </a:solidFill>
@@ -5522,190 +6230,26 @@
                 <a:ea typeface="Calibri" pitchFamily="34" charset="-122"/>
                 <a:cs typeface="Calibri" pitchFamily="34" charset="-120"/>
               </a:rPr>
-              <a:t>Board-Style Review</a:t>
-            </a:r>
-            <a:endParaRPr lang="en-US" sz="2600" dirty="0"/>
-          </a:p>
-        </p:txBody>
-      </p:sp>
-      <p:sp>
-        <p:nvSpPr>
-          <p:cNvPr id="4" name="Text 2"/>
-          <p:cNvSpPr/>
-          <p:nvPr/>
-        </p:nvSpPr>
-        <p:spPr>
-          <a:xfrm>
-            <a:off x="566928" y="1417320"/>
-            <a:ext cx="11057839" cy="914400"/>
-          </a:xfrm>
-          <a:prstGeom prst="rect">
-            <a:avLst/>
-          </a:prstGeom>
-          <a:noFill/>
-          <a:ln/>
-        </p:spPr>
-        <p:txBody>
-          <a:bodyPr wrap="square" lIns="0" tIns="0" rIns="0" bIns="0" rtlCol="0" anchor="t"/>
-          <a:lstStyle/>
-          <a:p>
-            <a:pPr algn="l" indent="0" marL="0">
-              <a:lnSpc>
-                <a:spcPct val="105000"/>
-              </a:lnSpc>
-              <a:buNone/>
-            </a:pPr>
-            <a:r>
-              <a:rPr lang="en-US" sz="1450" b="1" dirty="0">
-                <a:solidFill>
-                  <a:srgbClr val="1B2A38"/>
-                </a:solidFill>
-                <a:latin typeface="Calibri" pitchFamily="34" charset="0"/>
-                <a:ea typeface="Calibri" pitchFamily="34" charset="-122"/>
-                <a:cs typeface="Calibri" pitchFamily="34" charset="-120"/>
-              </a:rPr>
-              <a:t>After a software change, all results for one analyte post with an incorrect reference range. This is best classified as:</a:t>
-            </a:r>
-            <a:endParaRPr lang="en-US" sz="1450" dirty="0"/>
-          </a:p>
-        </p:txBody>
-      </p:sp>
-      <p:sp>
-        <p:nvSpPr>
-          <p:cNvPr id="5" name="Text 3"/>
-          <p:cNvSpPr/>
-          <p:nvPr/>
-        </p:nvSpPr>
-        <p:spPr>
-          <a:xfrm>
-            <a:off x="658368" y="2395728"/>
-            <a:ext cx="6192390" cy="3017520"/>
-          </a:xfrm>
-          <a:prstGeom prst="rect">
-            <a:avLst/>
-          </a:prstGeom>
-          <a:noFill/>
-          <a:ln/>
-        </p:spPr>
-        <p:txBody>
-          <a:bodyPr wrap="square" lIns="0" tIns="0" rIns="0" bIns="0" rtlCol="0" anchor="t"/>
-          <a:lstStyle/>
-          <a:p>
-            <a:pPr algn="l" indent="0" marL="0">
-              <a:spcAft>
-                <a:spcPts val="600"/>
-              </a:spcAft>
-              <a:buNone/>
-            </a:pPr>
-            <a:r>
-              <a:rPr lang="en-US" sz="1350" dirty="0">
-                <a:solidFill>
-                  <a:srgbClr val="33444F"/>
-                </a:solidFill>
-                <a:latin typeface="Calibri" pitchFamily="34" charset="0"/>
-                <a:ea typeface="Calibri" pitchFamily="34" charset="-122"/>
-                <a:cs typeface="Calibri" pitchFamily="34" charset="-120"/>
-              </a:rPr>
-              <a:t>A. Analytic error</a:t>
-            </a:r>
-            <a:endParaRPr lang="en-US" sz="1350" dirty="0"/>
-          </a:p>
-          <a:p>
-            <a:pPr algn="l" indent="0" marL="0">
-              <a:spcAft>
-                <a:spcPts val="600"/>
-              </a:spcAft>
-              <a:buNone/>
-            </a:pPr>
-            <a:r>
-              <a:rPr lang="en-US" sz="1350" dirty="0">
-                <a:solidFill>
-                  <a:srgbClr val="33444F"/>
-                </a:solidFill>
-                <a:latin typeface="Calibri" pitchFamily="34" charset="0"/>
-                <a:ea typeface="Calibri" pitchFamily="34" charset="-122"/>
-                <a:cs typeface="Calibri" pitchFamily="34" charset="-120"/>
-              </a:rPr>
-              <a:t>B. Preanalytic error</a:t>
-            </a:r>
-            <a:endParaRPr lang="en-US" sz="1350" dirty="0"/>
-          </a:p>
-          <a:p>
-            <a:pPr algn="l" indent="0" marL="0">
-              <a:spcAft>
-                <a:spcPts val="600"/>
-              </a:spcAft>
-              <a:buNone/>
-            </a:pPr>
-            <a:r>
-              <a:rPr lang="en-US" sz="1350" b="1" dirty="0">
-                <a:solidFill>
-                  <a:srgbClr val="2C3A41"/>
-                </a:solidFill>
-                <a:latin typeface="Calibri" pitchFamily="34" charset="0"/>
-                <a:ea typeface="Calibri" pitchFamily="34" charset="-122"/>
-                <a:cs typeface="Calibri" pitchFamily="34" charset="-120"/>
-              </a:rPr>
-              <a:t>C. Postanalytic (informatics/interface) error</a:t>
-            </a:r>
-            <a:endParaRPr lang="en-US" sz="1350" dirty="0"/>
-          </a:p>
-          <a:p>
-            <a:pPr algn="l" indent="0" marL="0">
-              <a:spcAft>
-                <a:spcPts val="600"/>
-              </a:spcAft>
-              <a:buNone/>
-            </a:pPr>
-            <a:r>
-              <a:rPr lang="en-US" sz="1350" dirty="0">
-                <a:solidFill>
-                  <a:srgbClr val="33444F"/>
-                </a:solidFill>
-                <a:latin typeface="Calibri" pitchFamily="34" charset="0"/>
-                <a:ea typeface="Calibri" pitchFamily="34" charset="-122"/>
-                <a:cs typeface="Calibri" pitchFamily="34" charset="-120"/>
-              </a:rPr>
-              <a:t>D. Random error</a:t>
-            </a:r>
-            <a:endParaRPr lang="en-US" sz="1350" dirty="0"/>
-          </a:p>
-          <a:p>
-            <a:pPr algn="l" indent="0" marL="0">
-              <a:spcAft>
-                <a:spcPts val="600"/>
-              </a:spcAft>
-              <a:buNone/>
-            </a:pPr>
-            <a:r>
-              <a:rPr lang="en-US" sz="1350" dirty="0">
-                <a:solidFill>
-                  <a:srgbClr val="33444F"/>
-                </a:solidFill>
-                <a:latin typeface="Calibri" pitchFamily="34" charset="0"/>
-                <a:ea typeface="Calibri" pitchFamily="34" charset="-122"/>
-                <a:cs typeface="Calibri" pitchFamily="34" charset="-120"/>
-              </a:rPr>
-              <a:t>E. Proficiency testing failure</a:t>
-            </a:r>
-            <a:endParaRPr lang="en-US" sz="1350" dirty="0"/>
-          </a:p>
-        </p:txBody>
-      </p:sp>
-      <p:sp>
-        <p:nvSpPr>
-          <p:cNvPr id="6" name="Shape 4"/>
-          <p:cNvSpPr/>
-          <p:nvPr/>
-        </p:nvSpPr>
-        <p:spPr>
-          <a:xfrm>
-            <a:off x="7201632" y="2395728"/>
-            <a:ext cx="4423136" cy="3246120"/>
+              <a:t>Case 2</a:t>
+            </a:r>
+            <a:endParaRPr lang="en-US" sz="3000" dirty="0"/>
+          </a:p>
+        </p:txBody>
+      </p:sp>
+      <p:sp>
+        <p:nvSpPr>
+          <p:cNvPr id="4" name="Shape 2"/>
+          <p:cNvSpPr/>
+          <p:nvPr/>
+        </p:nvSpPr>
+        <p:spPr>
+          <a:xfrm>
+            <a:off x="566928" y="1517904"/>
+            <a:ext cx="11057839" cy="2788920"/>
           </a:xfrm>
           <a:prstGeom prst="roundRect">
             <a:avLst>
-              <a:gd name="adj" fmla="val 2535"/>
+              <a:gd name="adj" fmla="val 2951"/>
             </a:avLst>
           </a:prstGeom>
           <a:solidFill>
@@ -5723,14 +6267,14 @@
       </p:sp>
       <p:sp>
         <p:nvSpPr>
-          <p:cNvPr id="7" name="Text 5"/>
-          <p:cNvSpPr/>
-          <p:nvPr/>
-        </p:nvSpPr>
-        <p:spPr>
-          <a:xfrm>
-            <a:off x="7439376" y="2578608"/>
-            <a:ext cx="3965936" cy="457200"/>
+          <p:cNvPr id="5" name="Text 3"/>
+          <p:cNvSpPr/>
+          <p:nvPr/>
+        </p:nvSpPr>
+        <p:spPr>
+          <a:xfrm>
+            <a:off x="841248" y="1700784"/>
+            <a:ext cx="5486400" cy="292608"/>
           </a:xfrm>
           <a:prstGeom prst="rect">
             <a:avLst/>
@@ -5746,7 +6290,7 @@
               <a:buNone/>
             </a:pPr>
             <a:r>
-              <a:rPr lang="en-US" sz="1500" b="1" dirty="0">
+              <a:rPr lang="en-US" sz="1100" b="1" spc="150" kern="0" dirty="0">
                 <a:solidFill>
                   <a:srgbClr val="455A64"/>
                 </a:solidFill>
@@ -5754,36 +6298,22 @@
                 <a:ea typeface="Calibri" pitchFamily="34" charset="-122"/>
                 <a:cs typeface="Calibri" pitchFamily="34" charset="-120"/>
               </a:rPr>
-              <a:t>ANSWER  </a:t>
-            </a:r>
-            <a:pPr indent="0" marL="0">
-              <a:buNone/>
-            </a:pPr>
-            <a:r>
-              <a:rPr lang="en-US" sz="1500" b="1" dirty="0">
-                <a:solidFill>
-                  <a:srgbClr val="1B2A38"/>
-                </a:solidFill>
-                <a:latin typeface="Calibri" pitchFamily="34" charset="0"/>
-                <a:ea typeface="Calibri" pitchFamily="34" charset="-122"/>
-                <a:cs typeface="Calibri" pitchFamily="34" charset="-120"/>
-              </a:rPr>
-              <a:t>C — Postanalytic informatics error</a:t>
-            </a:r>
-            <a:endParaRPr lang="en-US" sz="1500" dirty="0"/>
-          </a:p>
-        </p:txBody>
-      </p:sp>
-      <p:sp>
-        <p:nvSpPr>
-          <p:cNvPr id="8" name="Text 6"/>
-          <p:cNvSpPr/>
-          <p:nvPr/>
-        </p:nvSpPr>
-        <p:spPr>
-          <a:xfrm>
-            <a:off x="7439376" y="3127248"/>
-            <a:ext cx="3947648" cy="2377440"/>
+              <a:t>CLINICAL VIGNETTE</a:t>
+            </a:r>
+            <a:endParaRPr lang="en-US" sz="1100" dirty="0"/>
+          </a:p>
+        </p:txBody>
+      </p:sp>
+      <p:sp>
+        <p:nvSpPr>
+          <p:cNvPr id="6" name="Text 4"/>
+          <p:cNvSpPr/>
+          <p:nvPr/>
+        </p:nvSpPr>
+        <p:spPr>
+          <a:xfrm>
+            <a:off x="841248" y="2029968"/>
+            <a:ext cx="10509199" cy="2148840"/>
           </a:xfrm>
           <a:prstGeom prst="rect">
             <a:avLst/>
@@ -5802,7 +6332,7 @@
               <a:buNone/>
             </a:pPr>
             <a:r>
-              <a:rPr lang="en-US" sz="1250" dirty="0">
+              <a:rPr lang="en-US" sz="1450" dirty="0">
                 <a:solidFill>
                   <a:srgbClr val="33444F"/>
                 </a:solidFill>
@@ -5810,15 +6340,122 @@
                 <a:ea typeface="Calibri" pitchFamily="34" charset="-122"/>
                 <a:cs typeface="Calibri" pitchFamily="34" charset="-120"/>
               </a:rPr>
-              <a:t>The measurement is correct; the result/range mapping in the interface is wrong — a postanalytic informatics failure requiring interface re-validation.</a:t>
-            </a:r>
-            <a:endParaRPr lang="en-US" sz="1250" dirty="0"/>
+              <a:t>A markedly different hemoglobin from the prior day triggers a delta-check flag in a stable patient.</a:t>
+            </a:r>
+            <a:endParaRPr lang="en-US" sz="1450" dirty="0"/>
+          </a:p>
+        </p:txBody>
+      </p:sp>
+      <p:sp>
+        <p:nvSpPr>
+          <p:cNvPr id="7" name="Shape 5"/>
+          <p:cNvSpPr/>
+          <p:nvPr/>
+        </p:nvSpPr>
+        <p:spPr>
+          <a:xfrm>
+            <a:off x="566928" y="4553712"/>
+            <a:ext cx="11057839" cy="1325880"/>
+          </a:xfrm>
+          <a:prstGeom prst="roundRect">
+            <a:avLst>
+              <a:gd name="adj" fmla="val 6207"/>
+            </a:avLst>
+          </a:prstGeom>
+          <a:solidFill>
+            <a:srgbClr val="0E3A5F"/>
+          </a:solidFill>
+          <a:ln/>
+          <a:effectLst>
+            <a:outerShdw sx="100000" sy="100000" kx="0" ky="0" algn="bl" rotWithShape="0" blurRad="88900" dist="25400" dir="5400000">
+              <a:srgbClr val="22303C">
+                <a:alpha val="12000"/>
+              </a:srgbClr>
+            </a:outerShdw>
+          </a:effectLst>
+        </p:spPr>
+      </p:sp>
+      <p:sp>
+        <p:nvSpPr>
+          <p:cNvPr id="8" name="Text 6"/>
+          <p:cNvSpPr/>
+          <p:nvPr/>
+        </p:nvSpPr>
+        <p:spPr>
+          <a:xfrm>
+            <a:off x="822960" y="4681728"/>
+            <a:ext cx="640080" cy="960120"/>
+          </a:xfrm>
+          <a:prstGeom prst="rect">
+            <a:avLst/>
+          </a:prstGeom>
+          <a:noFill/>
+          <a:ln/>
+        </p:spPr>
+        <p:txBody>
+          <a:bodyPr wrap="square" lIns="0" tIns="0" rIns="0" bIns="0" rtlCol="0" anchor="ctr"/>
+          <a:lstStyle/>
+          <a:p>
+            <a:pPr algn="ctr" indent="0" marL="0">
+              <a:buNone/>
+            </a:pPr>
+            <a:r>
+              <a:rPr lang="en-US" sz="4000" b="1" dirty="0">
+                <a:solidFill>
+                  <a:srgbClr val="455A64"/>
+                </a:solidFill>
+                <a:latin typeface="Calibri" pitchFamily="34" charset="0"/>
+                <a:ea typeface="Calibri" pitchFamily="34" charset="-122"/>
+                <a:cs typeface="Calibri" pitchFamily="34" charset="-120"/>
+              </a:rPr>
+              <a:t>?</a:t>
+            </a:r>
+            <a:endParaRPr lang="en-US" sz="4000" dirty="0"/>
           </a:p>
         </p:txBody>
       </p:sp>
       <p:sp>
         <p:nvSpPr>
           <p:cNvPr id="9" name="Text 7"/>
+          <p:cNvSpPr/>
+          <p:nvPr/>
+        </p:nvSpPr>
+        <p:spPr>
+          <a:xfrm>
+            <a:off x="1618488" y="4553712"/>
+            <a:ext cx="9686239" cy="1325880"/>
+          </a:xfrm>
+          <a:prstGeom prst="rect">
+            <a:avLst/>
+          </a:prstGeom>
+          <a:noFill/>
+          <a:ln/>
+        </p:spPr>
+        <p:txBody>
+          <a:bodyPr wrap="square" lIns="0" tIns="0" rIns="0" bIns="0" rtlCol="0" anchor="ctr"/>
+          <a:lstStyle/>
+          <a:p>
+            <a:pPr algn="l" indent="0" marL="0">
+              <a:buNone/>
+            </a:pPr>
+            <a:r>
+              <a:rPr lang="en-US" sz="1500" b="1" dirty="0">
+                <a:solidFill>
+                  <a:srgbClr val="FFFFFF"/>
+                </a:solidFill>
+                <a:latin typeface="Calibri" pitchFamily="34" charset="0"/>
+                <a:ea typeface="Calibri" pitchFamily="34" charset="-122"/>
+                <a:cs typeface="Calibri" pitchFamily="34" charset="-120"/>
+              </a:rPr>
+              <a:t>What does the delta check protect against?</a:t>
+            </a:r>
+            <a:endParaRPr lang="en-US" sz="1500" dirty="0"/>
+          </a:p>
+        </p:txBody>
+      </p:sp>
+      <p:sp>
+        <p:nvSpPr>
+          <p:cNvPr id="10" name="Text 8"/>
           <p:cNvSpPr/>
           <p:nvPr/>
         </p:nvSpPr>
@@ -5857,7 +6494,7 @@
       </p:sp>
       <p:sp>
         <p:nvSpPr>
-          <p:cNvPr id="10" name="Text 8"/>
+          <p:cNvPr id="11" name="Text 9"/>
           <p:cNvSpPr/>
           <p:nvPr/>
         </p:nvSpPr>
@@ -5987,7 +6624,7 @@
                 <a:ea typeface="Calibri" pitchFamily="34" charset="-122"/>
                 <a:cs typeface="Calibri" pitchFamily="34" charset="-120"/>
               </a:rPr>
-              <a:t>LAB MANAGEMENT &amp; QUALITY   ·   BOARD REVIEW  ·  Q2</a:t>
+              <a:t>LAB MANAGEMENT &amp; QUALITY   ·   CASE 2  ·  RESOLUTION</a:t>
             </a:r>
             <a:endParaRPr lang="en-US" sz="1100" dirty="0"/>
           </a:p>
@@ -6018,7 +6655,7 @@
               <a:buNone/>
             </a:pPr>
             <a:r>
-              <a:rPr lang="en-US" sz="2600" b="1" dirty="0">
+              <a:rPr lang="en-US" sz="3000" b="1" dirty="0">
                 <a:solidFill>
                   <a:srgbClr val="0E3A5F"/>
                 </a:solidFill>
@@ -6026,9 +6663,9 @@
                 <a:ea typeface="Calibri" pitchFamily="34" charset="-122"/>
                 <a:cs typeface="Calibri" pitchFamily="34" charset="-120"/>
               </a:rPr>
-              <a:t>Board-Style Review</a:t>
-            </a:r>
-            <a:endParaRPr lang="en-US" sz="2600" dirty="0"/>
+              <a:t>Case 2: Delta Check</a:t>
+            </a:r>
+            <a:endParaRPr lang="en-US" sz="3000" dirty="0"/>
           </a:p>
         </p:txBody>
       </p:sp>
@@ -6040,8 +6677,8 @@
         </p:nvSpPr>
         <p:spPr>
           <a:xfrm>
-            <a:off x="566928" y="1417320"/>
-            <a:ext cx="11057839" cy="914400"/>
+            <a:off x="566928" y="1554480"/>
+            <a:ext cx="6413547" cy="4023360"/>
           </a:xfrm>
           <a:prstGeom prst="rect">
             <a:avLst/>
@@ -6053,14 +6690,15 @@
           <a:bodyPr wrap="square" lIns="0" tIns="0" rIns="0" bIns="0" rtlCol="0" anchor="t"/>
           <a:lstStyle/>
           <a:p>
-            <a:pPr algn="l" indent="0" marL="0">
-              <a:lnSpc>
-                <a:spcPct val="105000"/>
-              </a:lnSpc>
-              <a:buNone/>
-            </a:pPr>
-            <a:r>
-              <a:rPr lang="en-US" sz="1450" b="1" dirty="0">
+            <a:pPr algn="l" marL="177800" indent="-177800">
+              <a:spcAft>
+                <a:spcPts val="900"/>
+              </a:spcAft>
+              <a:buSzPct val="100000"/>
+              <a:buChar char="•"/>
+            </a:pPr>
+            <a:r>
+              <a:rPr lang="en-US" sz="1400" b="1" dirty="0">
                 <a:solidFill>
                   <a:srgbClr val="1B2A38"/>
                 </a:solidFill>
@@ -6068,41 +6706,20 @@
                 <a:ea typeface="Calibri" pitchFamily="34" charset="-122"/>
                 <a:cs typeface="Calibri" pitchFamily="34" charset="-120"/>
               </a:rPr>
-              <a:t>Which standard vocabulary encodes the laboratory test/observation for interoperability?</a:t>
-            </a:r>
-            <a:endParaRPr lang="en-US" sz="1450" dirty="0"/>
-          </a:p>
-        </p:txBody>
-      </p:sp>
-      <p:sp>
-        <p:nvSpPr>
-          <p:cNvPr id="5" name="Text 3"/>
-          <p:cNvSpPr/>
-          <p:nvPr/>
-        </p:nvSpPr>
-        <p:spPr>
-          <a:xfrm>
-            <a:off x="658368" y="2395728"/>
-            <a:ext cx="6192390" cy="3017520"/>
-          </a:xfrm>
-          <a:prstGeom prst="rect">
-            <a:avLst/>
-          </a:prstGeom>
-          <a:noFill/>
-          <a:ln/>
-        </p:spPr>
-        <p:txBody>
-          <a:bodyPr wrap="square" lIns="0" tIns="0" rIns="0" bIns="0" rtlCol="0" anchor="t"/>
-          <a:lstStyle/>
-          <a:p>
-            <a:pPr algn="l" indent="0" marL="0">
+              <a:t>A large unexplained change from a prior result may indicate a mislabeled specimen or analytic error.</a:t>
+            </a:r>
+            <a:endParaRPr lang="en-US" sz="1400" dirty="0"/>
+          </a:p>
+          <a:p>
+            <a:pPr algn="l" marL="177800" indent="-177800">
               <a:spcAft>
-                <a:spcPts val="600"/>
+                <a:spcPts val="900"/>
               </a:spcAft>
-              <a:buNone/>
-            </a:pPr>
-            <a:r>
-              <a:rPr lang="en-US" sz="1350" dirty="0">
+              <a:buSzPct val="100000"/>
+              <a:buChar char="•"/>
+            </a:pPr>
+            <a:r>
+              <a:rPr lang="en-US" sz="1400" dirty="0">
                 <a:solidFill>
                   <a:srgbClr val="33444F"/>
                 </a:solidFill>
@@ -6110,19 +6727,20 @@
                 <a:ea typeface="Calibri" pitchFamily="34" charset="-122"/>
                 <a:cs typeface="Calibri" pitchFamily="34" charset="-120"/>
               </a:rPr>
-              <a:t>A. SNOMED CT only</a:t>
-            </a:r>
-            <a:endParaRPr lang="en-US" sz="1350" dirty="0"/>
-          </a:p>
-          <a:p>
-            <a:pPr algn="l" indent="0" marL="0">
+              <a:t>Delta checks catch identity and pre-analytic errors.</a:t>
+            </a:r>
+            <a:endParaRPr lang="en-US" sz="1400" dirty="0"/>
+          </a:p>
+          <a:p>
+            <a:pPr algn="l" marL="177800" indent="-177800">
               <a:spcAft>
-                <a:spcPts val="600"/>
+                <a:spcPts val="900"/>
               </a:spcAft>
-              <a:buNone/>
-            </a:pPr>
-            <a:r>
-              <a:rPr lang="en-US" sz="1350" dirty="0">
+              <a:buSzPct val="100000"/>
+              <a:buChar char="•"/>
+            </a:pPr>
+            <a:r>
+              <a:rPr lang="en-US" sz="1400" dirty="0">
                 <a:solidFill>
                   <a:srgbClr val="33444F"/>
                 </a:solidFill>
@@ -6130,39 +6748,20 @@
                 <a:ea typeface="Calibri" pitchFamily="34" charset="-122"/>
                 <a:cs typeface="Calibri" pitchFamily="34" charset="-120"/>
               </a:rPr>
-              <a:t>B. ICD-10</a:t>
-            </a:r>
-            <a:endParaRPr lang="en-US" sz="1350" dirty="0"/>
-          </a:p>
-          <a:p>
-            <a:pPr algn="l" indent="0" marL="0">
+              <a:t>Investigate before releasing — verify specimen identity.</a:t>
+            </a:r>
+            <a:endParaRPr lang="en-US" sz="1400" dirty="0"/>
+          </a:p>
+          <a:p>
+            <a:pPr algn="l" marL="177800" indent="-177800">
               <a:spcAft>
-                <a:spcPts val="600"/>
+                <a:spcPts val="900"/>
               </a:spcAft>
-              <a:buNone/>
-            </a:pPr>
-            <a:r>
-              <a:rPr lang="en-US" sz="1350" b="1" dirty="0">
-                <a:solidFill>
-                  <a:srgbClr val="2C3A41"/>
-                </a:solidFill>
-                <a:latin typeface="Calibri" pitchFamily="34" charset="0"/>
-                <a:ea typeface="Calibri" pitchFamily="34" charset="-122"/>
-                <a:cs typeface="Calibri" pitchFamily="34" charset="-120"/>
-              </a:rPr>
-              <a:t>C. LOINC</a:t>
-            </a:r>
-            <a:endParaRPr lang="en-US" sz="1350" dirty="0"/>
-          </a:p>
-          <a:p>
-            <a:pPr algn="l" indent="0" marL="0">
-              <a:spcAft>
-                <a:spcPts val="600"/>
-              </a:spcAft>
-              <a:buNone/>
-            </a:pPr>
-            <a:r>
-              <a:rPr lang="en-US" sz="1350" dirty="0">
+              <a:buSzPct val="100000"/>
+              <a:buChar char="•"/>
+            </a:pPr>
+            <a:r>
+              <a:rPr lang="en-US" sz="1400" dirty="0">
                 <a:solidFill>
                   <a:srgbClr val="33444F"/>
                 </a:solidFill>
@@ -6170,46 +6769,26 @@
                 <a:ea typeface="Calibri" pitchFamily="34" charset="-122"/>
                 <a:cs typeface="Calibri" pitchFamily="34" charset="-120"/>
               </a:rPr>
-              <a:t>D. CPT</a:t>
-            </a:r>
-            <a:endParaRPr lang="en-US" sz="1350" dirty="0"/>
-          </a:p>
-          <a:p>
-            <a:pPr algn="l" indent="0" marL="0">
-              <a:spcAft>
-                <a:spcPts val="600"/>
-              </a:spcAft>
-              <a:buNone/>
-            </a:pPr>
-            <a:r>
-              <a:rPr lang="en-US" sz="1350" dirty="0">
-                <a:solidFill>
-                  <a:srgbClr val="33444F"/>
-                </a:solidFill>
-                <a:latin typeface="Calibri" pitchFamily="34" charset="0"/>
-                <a:ea typeface="Calibri" pitchFamily="34" charset="-122"/>
-                <a:cs typeface="Calibri" pitchFamily="34" charset="-120"/>
-              </a:rPr>
-              <a:t>E. HL7 segments</a:t>
-            </a:r>
-            <a:endParaRPr lang="en-US" sz="1350" dirty="0"/>
-          </a:p>
-        </p:txBody>
-      </p:sp>
-      <p:sp>
-        <p:nvSpPr>
-          <p:cNvPr id="6" name="Shape 4"/>
-          <p:cNvSpPr/>
-          <p:nvPr/>
-        </p:nvSpPr>
-        <p:spPr>
-          <a:xfrm>
-            <a:off x="7201632" y="2395728"/>
-            <a:ext cx="4423136" cy="3246120"/>
+              <a:t>Document the resolution.</a:t>
+            </a:r>
+            <a:endParaRPr lang="en-US" sz="1400" dirty="0"/>
+          </a:p>
+        </p:txBody>
+      </p:sp>
+      <p:sp>
+        <p:nvSpPr>
+          <p:cNvPr id="5" name="Shape 3"/>
+          <p:cNvSpPr/>
+          <p:nvPr/>
+        </p:nvSpPr>
+        <p:spPr>
+          <a:xfrm>
+            <a:off x="7422788" y="1554480"/>
+            <a:ext cx="4201979" cy="3977640"/>
           </a:xfrm>
           <a:prstGeom prst="roundRect">
             <a:avLst>
-              <a:gd name="adj" fmla="val 2535"/>
+              <a:gd name="adj" fmla="val 2069"/>
             </a:avLst>
           </a:prstGeom>
           <a:solidFill>
@@ -6227,67 +6806,53 @@
       </p:sp>
       <p:sp>
         <p:nvSpPr>
+          <p:cNvPr id="6" name="Text 4"/>
+          <p:cNvSpPr/>
+          <p:nvPr/>
+        </p:nvSpPr>
+        <p:spPr>
+          <a:xfrm>
+            <a:off x="7660532" y="1755648"/>
+            <a:ext cx="3744779" cy="310896"/>
+          </a:xfrm>
+          <a:prstGeom prst="rect">
+            <a:avLst/>
+          </a:prstGeom>
+          <a:noFill/>
+          <a:ln/>
+        </p:spPr>
+        <p:txBody>
+          <a:bodyPr wrap="square" lIns="0" tIns="0" rIns="0" bIns="0" rtlCol="0" anchor="ctr"/>
+          <a:lstStyle/>
+          <a:p>
+            <a:pPr indent="0" marL="0">
+              <a:buNone/>
+            </a:pPr>
+            <a:r>
+              <a:rPr lang="en-US" sz="1100" b="1" spc="140" kern="0" dirty="0">
+                <a:solidFill>
+                  <a:srgbClr val="455A64"/>
+                </a:solidFill>
+                <a:latin typeface="Calibri" pitchFamily="34" charset="0"/>
+                <a:ea typeface="Calibri" pitchFamily="34" charset="-122"/>
+                <a:cs typeface="Calibri" pitchFamily="34" charset="-120"/>
+              </a:rPr>
+              <a:t>TEACHING POINT</a:t>
+            </a:r>
+            <a:endParaRPr lang="en-US" sz="1100" dirty="0"/>
+          </a:p>
+        </p:txBody>
+      </p:sp>
+      <p:sp>
+        <p:nvSpPr>
           <p:cNvPr id="7" name="Text 5"/>
           <p:cNvSpPr/>
           <p:nvPr/>
         </p:nvSpPr>
         <p:spPr>
           <a:xfrm>
-            <a:off x="7439376" y="2578608"/>
-            <a:ext cx="3965936" cy="457200"/>
-          </a:xfrm>
-          <a:prstGeom prst="rect">
-            <a:avLst/>
-          </a:prstGeom>
-          <a:noFill/>
-          <a:ln/>
-        </p:spPr>
-        <p:txBody>
-          <a:bodyPr wrap="square" lIns="0" tIns="0" rIns="0" bIns="0" rtlCol="0" anchor="ctr"/>
-          <a:lstStyle/>
-          <a:p>
-            <a:pPr indent="0" marL="0">
-              <a:buNone/>
-            </a:pPr>
-            <a:r>
-              <a:rPr lang="en-US" sz="1500" b="1" dirty="0">
-                <a:solidFill>
-                  <a:srgbClr val="455A64"/>
-                </a:solidFill>
-                <a:latin typeface="Calibri" pitchFamily="34" charset="0"/>
-                <a:ea typeface="Calibri" pitchFamily="34" charset="-122"/>
-                <a:cs typeface="Calibri" pitchFamily="34" charset="-120"/>
-              </a:rPr>
-              <a:t>ANSWER  </a:t>
-            </a:r>
-            <a:pPr indent="0" marL="0">
-              <a:buNone/>
-            </a:pPr>
-            <a:r>
-              <a:rPr lang="en-US" sz="1500" b="1" dirty="0">
-                <a:solidFill>
-                  <a:srgbClr val="1B2A38"/>
-                </a:solidFill>
-                <a:latin typeface="Calibri" pitchFamily="34" charset="0"/>
-                <a:ea typeface="Calibri" pitchFamily="34" charset="-122"/>
-                <a:cs typeface="Calibri" pitchFamily="34" charset="-120"/>
-              </a:rPr>
-              <a:t>C — LOINC</a:t>
-            </a:r>
-            <a:endParaRPr lang="en-US" sz="1500" dirty="0"/>
-          </a:p>
-        </p:txBody>
-      </p:sp>
-      <p:sp>
-        <p:nvSpPr>
-          <p:cNvPr id="8" name="Text 6"/>
-          <p:cNvSpPr/>
-          <p:nvPr/>
-        </p:nvSpPr>
-        <p:spPr>
-          <a:xfrm>
-            <a:off x="7439376" y="3127248"/>
-            <a:ext cx="3947648" cy="2377440"/>
+            <a:off x="7660532" y="2121408"/>
+            <a:ext cx="3726491" cy="3291840"/>
           </a:xfrm>
           <a:prstGeom prst="rect">
             <a:avLst/>
@@ -6301,12 +6866,12 @@
           <a:p>
             <a:pPr algn="l" indent="0" marL="0">
               <a:lnSpc>
-                <a:spcPct val="108000"/>
+                <a:spcPct val="110000"/>
               </a:lnSpc>
               <a:buNone/>
             </a:pPr>
             <a:r>
-              <a:rPr lang="en-US" sz="1250" dirty="0">
+              <a:rPr lang="en-US" sz="1350" dirty="0">
                 <a:solidFill>
                   <a:srgbClr val="33444F"/>
                 </a:solidFill>
@@ -6314,15 +6879,15 @@
                 <a:ea typeface="Calibri" pitchFamily="34" charset="-122"/>
                 <a:cs typeface="Calibri" pitchFamily="34" charset="-120"/>
               </a:rPr>
-              <a:t>LOINC encodes tests/observations; SNOMED CT encodes clinical results/diagnoses. HL7 is the messaging format that carries them.</a:t>
-            </a:r>
-            <a:endParaRPr lang="en-US" sz="1250" dirty="0"/>
-          </a:p>
-        </p:txBody>
-      </p:sp>
-      <p:sp>
-        <p:nvSpPr>
-          <p:cNvPr id="9" name="Text 7"/>
+              <a:t>Delta checks are a safety net for specimen mix-ups and errors — investigate implausible changes before releasing results.</a:t>
+            </a:r>
+            <a:endParaRPr lang="en-US" sz="1350" dirty="0"/>
+          </a:p>
+        </p:txBody>
+      </p:sp>
+      <p:sp>
+        <p:nvSpPr>
+          <p:cNvPr id="8" name="Text 6"/>
           <p:cNvSpPr/>
           <p:nvPr/>
         </p:nvSpPr>
@@ -6361,7 +6926,7 @@
       </p:sp>
       <p:sp>
         <p:nvSpPr>
-          <p:cNvPr id="10" name="Text 8"/>
+          <p:cNvPr id="9" name="Text 7"/>
           <p:cNvSpPr/>
           <p:nvPr/>
         </p:nvSpPr>
@@ -6491,7 +7056,7 @@
                 <a:ea typeface="Calibri" pitchFamily="34" charset="-122"/>
                 <a:cs typeface="Calibri" pitchFamily="34" charset="-120"/>
               </a:rPr>
-              <a:t>LAB MANAGEMENT &amp; QUALITY   ·   BOARD REVIEW  ·  Q3</a:t>
+              <a:t>LAB MANAGEMENT &amp; QUALITY   ·   CASE 3</a:t>
             </a:r>
             <a:endParaRPr lang="en-US" sz="1100" dirty="0"/>
           </a:p>
@@ -6522,7 +7087,7 @@
               <a:buNone/>
             </a:pPr>
             <a:r>
-              <a:rPr lang="en-US" sz="2600" b="1" dirty="0">
+              <a:rPr lang="en-US" sz="3000" b="1" dirty="0">
                 <a:solidFill>
                   <a:srgbClr val="0E3A5F"/>
                 </a:solidFill>
@@ -6530,190 +7095,26 @@
                 <a:ea typeface="Calibri" pitchFamily="34" charset="-122"/>
                 <a:cs typeface="Calibri" pitchFamily="34" charset="-120"/>
               </a:rPr>
-              <a:t>Board-Style Review</a:t>
-            </a:r>
-            <a:endParaRPr lang="en-US" sz="2600" dirty="0"/>
-          </a:p>
-        </p:txBody>
-      </p:sp>
-      <p:sp>
-        <p:nvSpPr>
-          <p:cNvPr id="4" name="Text 2"/>
-          <p:cNvSpPr/>
-          <p:nvPr/>
-        </p:nvSpPr>
-        <p:spPr>
-          <a:xfrm>
-            <a:off x="566928" y="1417320"/>
-            <a:ext cx="11057839" cy="914400"/>
-          </a:xfrm>
-          <a:prstGeom prst="rect">
-            <a:avLst/>
-          </a:prstGeom>
-          <a:noFill/>
-          <a:ln/>
-        </p:spPr>
-        <p:txBody>
-          <a:bodyPr wrap="square" lIns="0" tIns="0" rIns="0" bIns="0" rtlCol="0" anchor="t"/>
-          <a:lstStyle/>
-          <a:p>
-            <a:pPr algn="l" indent="0" marL="0">
-              <a:lnSpc>
-                <a:spcPct val="105000"/>
-              </a:lnSpc>
-              <a:buNone/>
-            </a:pPr>
-            <a:r>
-              <a:rPr lang="en-US" sz="1450" b="1" dirty="0">
-                <a:solidFill>
-                  <a:srgbClr val="1B2A38"/>
-                </a:solidFill>
-                <a:latin typeface="Calibri" pitchFamily="34" charset="0"/>
-                <a:ea typeface="Calibri" pitchFamily="34" charset="-122"/>
-                <a:cs typeface="Calibri" pitchFamily="34" charset="-120"/>
-              </a:rPr>
-              <a:t>Autoverification should release a result only when:</a:t>
-            </a:r>
-            <a:endParaRPr lang="en-US" sz="1450" dirty="0"/>
-          </a:p>
-        </p:txBody>
-      </p:sp>
-      <p:sp>
-        <p:nvSpPr>
-          <p:cNvPr id="5" name="Text 3"/>
-          <p:cNvSpPr/>
-          <p:nvPr/>
-        </p:nvSpPr>
-        <p:spPr>
-          <a:xfrm>
-            <a:off x="658368" y="2395728"/>
-            <a:ext cx="6192390" cy="3017520"/>
-          </a:xfrm>
-          <a:prstGeom prst="rect">
-            <a:avLst/>
-          </a:prstGeom>
-          <a:noFill/>
-          <a:ln/>
-        </p:spPr>
-        <p:txBody>
-          <a:bodyPr wrap="square" lIns="0" tIns="0" rIns="0" bIns="0" rtlCol="0" anchor="t"/>
-          <a:lstStyle/>
-          <a:p>
-            <a:pPr algn="l" indent="0" marL="0">
-              <a:spcAft>
-                <a:spcPts val="600"/>
-              </a:spcAft>
-              <a:buNone/>
-            </a:pPr>
-            <a:r>
-              <a:rPr lang="en-US" sz="1350" dirty="0">
-                <a:solidFill>
-                  <a:srgbClr val="33444F"/>
-                </a:solidFill>
-                <a:latin typeface="Calibri" pitchFamily="34" charset="0"/>
-                <a:ea typeface="Calibri" pitchFamily="34" charset="-122"/>
-                <a:cs typeface="Calibri" pitchFamily="34" charset="-120"/>
-              </a:rPr>
-              <a:t>A. It is abnormal</a:t>
-            </a:r>
-            <a:endParaRPr lang="en-US" sz="1350" dirty="0"/>
-          </a:p>
-          <a:p>
-            <a:pPr algn="l" indent="0" marL="0">
-              <a:spcAft>
-                <a:spcPts val="600"/>
-              </a:spcAft>
-              <a:buNone/>
-            </a:pPr>
-            <a:r>
-              <a:rPr lang="en-US" sz="1350" b="1" dirty="0">
-                <a:solidFill>
-                  <a:srgbClr val="2C3A41"/>
-                </a:solidFill>
-                <a:latin typeface="Calibri" pitchFamily="34" charset="0"/>
-                <a:ea typeface="Calibri" pitchFamily="34" charset="-122"/>
-                <a:cs typeface="Calibri" pitchFamily="34" charset="-120"/>
-              </a:rPr>
-              <a:t>B. QC has passed, the value is within defined limits, and no flags are present</a:t>
-            </a:r>
-            <a:endParaRPr lang="en-US" sz="1350" dirty="0"/>
-          </a:p>
-          <a:p>
-            <a:pPr algn="l" indent="0" marL="0">
-              <a:spcAft>
-                <a:spcPts val="600"/>
-              </a:spcAft>
-              <a:buNone/>
-            </a:pPr>
-            <a:r>
-              <a:rPr lang="en-US" sz="1350" dirty="0">
-                <a:solidFill>
-                  <a:srgbClr val="33444F"/>
-                </a:solidFill>
-                <a:latin typeface="Calibri" pitchFamily="34" charset="0"/>
-                <a:ea typeface="Calibri" pitchFamily="34" charset="-122"/>
-                <a:cs typeface="Calibri" pitchFamily="34" charset="-120"/>
-              </a:rPr>
-              <a:t>C. A technologist is unavailable</a:t>
-            </a:r>
-            <a:endParaRPr lang="en-US" sz="1350" dirty="0"/>
-          </a:p>
-          <a:p>
-            <a:pPr algn="l" indent="0" marL="0">
-              <a:spcAft>
-                <a:spcPts val="600"/>
-              </a:spcAft>
-              <a:buNone/>
-            </a:pPr>
-            <a:r>
-              <a:rPr lang="en-US" sz="1350" dirty="0">
-                <a:solidFill>
-                  <a:srgbClr val="33444F"/>
-                </a:solidFill>
-                <a:latin typeface="Calibri" pitchFamily="34" charset="0"/>
-                <a:ea typeface="Calibri" pitchFamily="34" charset="-122"/>
-                <a:cs typeface="Calibri" pitchFamily="34" charset="-120"/>
-              </a:rPr>
-              <a:t>D. It is a critical value</a:t>
-            </a:r>
-            <a:endParaRPr lang="en-US" sz="1350" dirty="0"/>
-          </a:p>
-          <a:p>
-            <a:pPr algn="l" indent="0" marL="0">
-              <a:spcAft>
-                <a:spcPts val="600"/>
-              </a:spcAft>
-              <a:buNone/>
-            </a:pPr>
-            <a:r>
-              <a:rPr lang="en-US" sz="1350" dirty="0">
-                <a:solidFill>
-                  <a:srgbClr val="33444F"/>
-                </a:solidFill>
-                <a:latin typeface="Calibri" pitchFamily="34" charset="0"/>
-                <a:ea typeface="Calibri" pitchFamily="34" charset="-122"/>
-                <a:cs typeface="Calibri" pitchFamily="34" charset="-120"/>
-              </a:rPr>
-              <a:t>E. The interface is down</a:t>
-            </a:r>
-            <a:endParaRPr lang="en-US" sz="1350" dirty="0"/>
-          </a:p>
-        </p:txBody>
-      </p:sp>
-      <p:sp>
-        <p:nvSpPr>
-          <p:cNvPr id="6" name="Shape 4"/>
-          <p:cNvSpPr/>
-          <p:nvPr/>
-        </p:nvSpPr>
-        <p:spPr>
-          <a:xfrm>
-            <a:off x="7201632" y="2395728"/>
-            <a:ext cx="4423136" cy="3246120"/>
+              <a:t>Case 3</a:t>
+            </a:r>
+            <a:endParaRPr lang="en-US" sz="3000" dirty="0"/>
+          </a:p>
+        </p:txBody>
+      </p:sp>
+      <p:sp>
+        <p:nvSpPr>
+          <p:cNvPr id="4" name="Shape 2"/>
+          <p:cNvSpPr/>
+          <p:nvPr/>
+        </p:nvSpPr>
+        <p:spPr>
+          <a:xfrm>
+            <a:off x="566928" y="1517904"/>
+            <a:ext cx="11057839" cy="2788920"/>
           </a:xfrm>
           <a:prstGeom prst="roundRect">
             <a:avLst>
-              <a:gd name="adj" fmla="val 2535"/>
+              <a:gd name="adj" fmla="val 2951"/>
             </a:avLst>
           </a:prstGeom>
           <a:solidFill>
@@ -6731,14 +7132,14 @@
       </p:sp>
       <p:sp>
         <p:nvSpPr>
-          <p:cNvPr id="7" name="Text 5"/>
-          <p:cNvSpPr/>
-          <p:nvPr/>
-        </p:nvSpPr>
-        <p:spPr>
-          <a:xfrm>
-            <a:off x="7439376" y="2578608"/>
-            <a:ext cx="3965936" cy="457200"/>
+          <p:cNvPr id="5" name="Text 3"/>
+          <p:cNvSpPr/>
+          <p:nvPr/>
+        </p:nvSpPr>
+        <p:spPr>
+          <a:xfrm>
+            <a:off x="841248" y="1700784"/>
+            <a:ext cx="5486400" cy="292608"/>
           </a:xfrm>
           <a:prstGeom prst="rect">
             <a:avLst/>
@@ -6754,7 +7155,7 @@
               <a:buNone/>
             </a:pPr>
             <a:r>
-              <a:rPr lang="en-US" sz="1500" b="1" dirty="0">
+              <a:rPr lang="en-US" sz="1100" b="1" spc="150" kern="0" dirty="0">
                 <a:solidFill>
                   <a:srgbClr val="455A64"/>
                 </a:solidFill>
@@ -6762,36 +7163,22 @@
                 <a:ea typeface="Calibri" pitchFamily="34" charset="-122"/>
                 <a:cs typeface="Calibri" pitchFamily="34" charset="-120"/>
               </a:rPr>
-              <a:t>ANSWER  </a:t>
-            </a:r>
-            <a:pPr indent="0" marL="0">
-              <a:buNone/>
-            </a:pPr>
-            <a:r>
-              <a:rPr lang="en-US" sz="1500" b="1" dirty="0">
-                <a:solidFill>
-                  <a:srgbClr val="1B2A38"/>
-                </a:solidFill>
-                <a:latin typeface="Calibri" pitchFamily="34" charset="0"/>
-                <a:ea typeface="Calibri" pitchFamily="34" charset="-122"/>
-                <a:cs typeface="Calibri" pitchFamily="34" charset="-120"/>
-              </a:rPr>
-              <a:t>B — QC passed, within limits, no flags</a:t>
-            </a:r>
-            <a:endParaRPr lang="en-US" sz="1500" dirty="0"/>
-          </a:p>
-        </p:txBody>
-      </p:sp>
-      <p:sp>
-        <p:nvSpPr>
-          <p:cNvPr id="8" name="Text 6"/>
-          <p:cNvSpPr/>
-          <p:nvPr/>
-        </p:nvSpPr>
-        <p:spPr>
-          <a:xfrm>
-            <a:off x="7439376" y="3127248"/>
-            <a:ext cx="3947648" cy="2377440"/>
+              <a:t>CLINICAL VIGNETTE</a:t>
+            </a:r>
+            <a:endParaRPr lang="en-US" sz="1100" dirty="0"/>
+          </a:p>
+        </p:txBody>
+      </p:sp>
+      <p:sp>
+        <p:nvSpPr>
+          <p:cNvPr id="6" name="Text 4"/>
+          <p:cNvSpPr/>
+          <p:nvPr/>
+        </p:nvSpPr>
+        <p:spPr>
+          <a:xfrm>
+            <a:off x="841248" y="2029968"/>
+            <a:ext cx="10509199" cy="2148840"/>
           </a:xfrm>
           <a:prstGeom prst="rect">
             <a:avLst/>
@@ -6810,7 +7197,7 @@
               <a:buNone/>
             </a:pPr>
             <a:r>
-              <a:rPr lang="en-US" sz="1250" dirty="0">
+              <a:rPr lang="en-US" sz="1450" dirty="0">
                 <a:solidFill>
                   <a:srgbClr val="33444F"/>
                 </a:solidFill>
@@ -6818,15 +7205,122 @@
                 <a:ea typeface="Calibri" pitchFamily="34" charset="-122"/>
                 <a:cs typeface="Calibri" pitchFamily="34" charset="-120"/>
               </a:rPr>
-              <a:t>Autoverification auto-releases results meeting validated criteria (QC passed, within limits, no flags/delta failures) and holds the rest for human review.</a:t>
-            </a:r>
-            <a:endParaRPr lang="en-US" sz="1250" dirty="0"/>
+              <a:t>An autoverification rule set releases a result that should have been held due to a failed QC condition.</a:t>
+            </a:r>
+            <a:endParaRPr lang="en-US" sz="1450" dirty="0"/>
+          </a:p>
+        </p:txBody>
+      </p:sp>
+      <p:sp>
+        <p:nvSpPr>
+          <p:cNvPr id="7" name="Shape 5"/>
+          <p:cNvSpPr/>
+          <p:nvPr/>
+        </p:nvSpPr>
+        <p:spPr>
+          <a:xfrm>
+            <a:off x="566928" y="4553712"/>
+            <a:ext cx="11057839" cy="1325880"/>
+          </a:xfrm>
+          <a:prstGeom prst="roundRect">
+            <a:avLst>
+              <a:gd name="adj" fmla="val 6207"/>
+            </a:avLst>
+          </a:prstGeom>
+          <a:solidFill>
+            <a:srgbClr val="0E3A5F"/>
+          </a:solidFill>
+          <a:ln/>
+          <a:effectLst>
+            <a:outerShdw sx="100000" sy="100000" kx="0" ky="0" algn="bl" rotWithShape="0" blurRad="88900" dist="25400" dir="5400000">
+              <a:srgbClr val="22303C">
+                <a:alpha val="12000"/>
+              </a:srgbClr>
+            </a:outerShdw>
+          </a:effectLst>
+        </p:spPr>
+      </p:sp>
+      <p:sp>
+        <p:nvSpPr>
+          <p:cNvPr id="8" name="Text 6"/>
+          <p:cNvSpPr/>
+          <p:nvPr/>
+        </p:nvSpPr>
+        <p:spPr>
+          <a:xfrm>
+            <a:off x="822960" y="4681728"/>
+            <a:ext cx="640080" cy="960120"/>
+          </a:xfrm>
+          <a:prstGeom prst="rect">
+            <a:avLst/>
+          </a:prstGeom>
+          <a:noFill/>
+          <a:ln/>
+        </p:spPr>
+        <p:txBody>
+          <a:bodyPr wrap="square" lIns="0" tIns="0" rIns="0" bIns="0" rtlCol="0" anchor="ctr"/>
+          <a:lstStyle/>
+          <a:p>
+            <a:pPr algn="ctr" indent="0" marL="0">
+              <a:buNone/>
+            </a:pPr>
+            <a:r>
+              <a:rPr lang="en-US" sz="4000" b="1" dirty="0">
+                <a:solidFill>
+                  <a:srgbClr val="455A64"/>
+                </a:solidFill>
+                <a:latin typeface="Calibri" pitchFamily="34" charset="0"/>
+                <a:ea typeface="Calibri" pitchFamily="34" charset="-122"/>
+                <a:cs typeface="Calibri" pitchFamily="34" charset="-120"/>
+              </a:rPr>
+              <a:t>?</a:t>
+            </a:r>
+            <a:endParaRPr lang="en-US" sz="4000" dirty="0"/>
           </a:p>
         </p:txBody>
       </p:sp>
       <p:sp>
         <p:nvSpPr>
           <p:cNvPr id="9" name="Text 7"/>
+          <p:cNvSpPr/>
+          <p:nvPr/>
+        </p:nvSpPr>
+        <p:spPr>
+          <a:xfrm>
+            <a:off x="1618488" y="4553712"/>
+            <a:ext cx="9686239" cy="1325880"/>
+          </a:xfrm>
+          <a:prstGeom prst="rect">
+            <a:avLst/>
+          </a:prstGeom>
+          <a:noFill/>
+          <a:ln/>
+        </p:spPr>
+        <p:txBody>
+          <a:bodyPr wrap="square" lIns="0" tIns="0" rIns="0" bIns="0" rtlCol="0" anchor="ctr"/>
+          <a:lstStyle/>
+          <a:p>
+            <a:pPr algn="l" indent="0" marL="0">
+              <a:buNone/>
+            </a:pPr>
+            <a:r>
+              <a:rPr lang="en-US" sz="1500" b="1" dirty="0">
+                <a:solidFill>
+                  <a:srgbClr val="FFFFFF"/>
+                </a:solidFill>
+                <a:latin typeface="Calibri" pitchFamily="34" charset="0"/>
+                <a:ea typeface="Calibri" pitchFamily="34" charset="-122"/>
+                <a:cs typeface="Calibri" pitchFamily="34" charset="-120"/>
+              </a:rPr>
+              <a:t>What went wrong and what is the fix?</a:t>
+            </a:r>
+            <a:endParaRPr lang="en-US" sz="1500" dirty="0"/>
+          </a:p>
+        </p:txBody>
+      </p:sp>
+      <p:sp>
+        <p:nvSpPr>
+          <p:cNvPr id="10" name="Text 8"/>
           <p:cNvSpPr/>
           <p:nvPr/>
         </p:nvSpPr>
@@ -6865,7 +7359,7 @@
       </p:sp>
       <p:sp>
         <p:nvSpPr>
-          <p:cNvPr id="10" name="Text 8"/>
+          <p:cNvPr id="11" name="Text 9"/>
           <p:cNvSpPr/>
           <p:nvPr/>
         </p:nvSpPr>
@@ -6944,7 +7438,7 @@
     <p:bg>
       <p:bgPr>
         <a:solidFill>
-          <a:srgbClr val="0A2A45"/>
+          <a:srgbClr val="FFFFFF"/>
         </a:solidFill>
       </p:bgPr>
     </p:bg>
@@ -6971,7 +7465,7 @@
         <p:spPr>
           <a:xfrm>
             <a:off x="566928" y="329184"/>
-            <a:ext cx="10058400" cy="310896"/>
+            <a:ext cx="10515600" cy="310896"/>
           </a:xfrm>
           <a:prstGeom prst="rect">
             <a:avLst/>
@@ -6983,7 +7477,7 @@
           <a:bodyPr wrap="square" lIns="0" tIns="0" rIns="0" bIns="0" rtlCol="0" anchor="ctr"/>
           <a:lstStyle/>
           <a:p>
-            <a:pPr indent="0" marL="0">
+            <a:pPr algn="l" indent="0" marL="0">
               <a:buNone/>
             </a:pPr>
             <a:r>
@@ -6995,7 +7489,7 @@
                 <a:ea typeface="Calibri" pitchFamily="34" charset="-122"/>
                 <a:cs typeface="Calibri" pitchFamily="34" charset="-120"/>
               </a:rPr>
-              <a:t>LAB MANAGEMENT &amp; QUALITY</a:t>
+              <a:t>LAB MANAGEMENT &amp; QUALITY   ·   CASE 3  ·  RESOLUTION</a:t>
             </a:r>
             <a:endParaRPr lang="en-US" sz="1100" dirty="0"/>
           </a:p>
@@ -7009,8 +7503,8 @@
         </p:nvSpPr>
         <p:spPr>
           <a:xfrm>
-            <a:off x="566928" y="676656"/>
-            <a:ext cx="10972800" cy="749808"/>
+            <a:off x="566928" y="713232"/>
+            <a:ext cx="11064240" cy="749808"/>
           </a:xfrm>
           <a:prstGeom prst="rect">
             <a:avLst/>
@@ -7022,19 +7516,19 @@
           <a:bodyPr wrap="square" lIns="0" tIns="0" rIns="0" bIns="0" rtlCol="0" anchor="ctr"/>
           <a:lstStyle/>
           <a:p>
-            <a:pPr indent="0" marL="0">
+            <a:pPr algn="l" indent="0" marL="0">
               <a:buNone/>
             </a:pPr>
             <a:r>
               <a:rPr lang="en-US" sz="3000" b="1" dirty="0">
                 <a:solidFill>
-                  <a:srgbClr val="FFFFFF"/>
-                </a:solidFill>
-                <a:latin typeface="Calibri" pitchFamily="34" charset="0"/>
-                <a:ea typeface="Calibri" pitchFamily="34" charset="-122"/>
-                <a:cs typeface="Calibri" pitchFamily="34" charset="-120"/>
-              </a:rPr>
-              <a:t>Key Take-Home Points</a:t>
+                  <a:srgbClr val="0E3A5F"/>
+                </a:solidFill>
+                <a:latin typeface="Calibri" pitchFamily="34" charset="0"/>
+                <a:ea typeface="Calibri" pitchFamily="34" charset="-122"/>
+                <a:cs typeface="Calibri" pitchFamily="34" charset="-120"/>
+              </a:rPr>
+              <a:t>Case 3: Autoverification Gap</a:t>
             </a:r>
             <a:endParaRPr lang="en-US" sz="3000" dirty="0"/>
           </a:p>
@@ -7042,42 +7536,128 @@
       </p:sp>
       <p:sp>
         <p:nvSpPr>
-          <p:cNvPr id="4" name="Shape 2"/>
-          <p:cNvSpPr/>
-          <p:nvPr/>
-        </p:nvSpPr>
-        <p:spPr>
-          <a:xfrm>
-            <a:off x="566928" y="1517904"/>
-            <a:ext cx="11057839" cy="841248"/>
+          <p:cNvPr id="4" name="Text 2"/>
+          <p:cNvSpPr/>
+          <p:nvPr/>
+        </p:nvSpPr>
+        <p:spPr>
+          <a:xfrm>
+            <a:off x="566928" y="1554480"/>
+            <a:ext cx="6413547" cy="4023360"/>
+          </a:xfrm>
+          <a:prstGeom prst="rect">
+            <a:avLst/>
+          </a:prstGeom>
+          <a:noFill/>
+          <a:ln/>
+        </p:spPr>
+        <p:txBody>
+          <a:bodyPr wrap="square" lIns="0" tIns="0" rIns="0" bIns="0" rtlCol="0" anchor="t"/>
+          <a:lstStyle/>
+          <a:p>
+            <a:pPr algn="l" marL="177800" indent="-177800">
+              <a:spcAft>
+                <a:spcPts val="900"/>
+              </a:spcAft>
+              <a:buSzPct val="100000"/>
+              <a:buChar char="•"/>
+            </a:pPr>
+            <a:r>
+              <a:rPr lang="en-US" sz="1400" b="1" dirty="0">
+                <a:solidFill>
+                  <a:srgbClr val="1B2A38"/>
+                </a:solidFill>
+                <a:latin typeface="Calibri" pitchFamily="34" charset="0"/>
+                <a:ea typeface="Calibri" pitchFamily="34" charset="-122"/>
+                <a:cs typeface="Calibri" pitchFamily="34" charset="-120"/>
+              </a:rPr>
+              <a:t>The autoverification rules did not capture the exception, so a result was released that should have been held.</a:t>
+            </a:r>
+            <a:endParaRPr lang="en-US" sz="1400" dirty="0"/>
+          </a:p>
+          <a:p>
+            <a:pPr algn="l" marL="177800" indent="-177800">
+              <a:spcAft>
+                <a:spcPts val="900"/>
+              </a:spcAft>
+              <a:buSzPct val="100000"/>
+              <a:buChar char="•"/>
+            </a:pPr>
+            <a:r>
+              <a:rPr lang="en-US" sz="1400" dirty="0">
+                <a:solidFill>
+                  <a:srgbClr val="33444F"/>
+                </a:solidFill>
+                <a:latin typeface="Calibri" pitchFamily="34" charset="0"/>
+                <a:ea typeface="Calibri" pitchFamily="34" charset="-122"/>
+                <a:cs typeface="Calibri" pitchFamily="34" charset="-120"/>
+              </a:rPr>
+              <a:t>Rules must be validated against edge cases and monitored.</a:t>
+            </a:r>
+            <a:endParaRPr lang="en-US" sz="1400" dirty="0"/>
+          </a:p>
+          <a:p>
+            <a:pPr algn="l" marL="177800" indent="-177800">
+              <a:spcAft>
+                <a:spcPts val="900"/>
+              </a:spcAft>
+              <a:buSzPct val="100000"/>
+              <a:buChar char="•"/>
+            </a:pPr>
+            <a:r>
+              <a:rPr lang="en-US" sz="1400" dirty="0">
+                <a:solidFill>
+                  <a:srgbClr val="33444F"/>
+                </a:solidFill>
+                <a:latin typeface="Calibri" pitchFamily="34" charset="0"/>
+                <a:ea typeface="Calibri" pitchFamily="34" charset="-122"/>
+                <a:cs typeface="Calibri" pitchFamily="34" charset="-120"/>
+              </a:rPr>
+              <a:t>Add the missed condition and revalidate.</a:t>
+            </a:r>
+            <a:endParaRPr lang="en-US" sz="1400" dirty="0"/>
+          </a:p>
+          <a:p>
+            <a:pPr algn="l" marL="177800" indent="-177800">
+              <a:spcAft>
+                <a:spcPts val="900"/>
+              </a:spcAft>
+              <a:buSzPct val="100000"/>
+              <a:buChar char="•"/>
+            </a:pPr>
+            <a:r>
+              <a:rPr lang="en-US" sz="1400" dirty="0">
+                <a:solidFill>
+                  <a:srgbClr val="33444F"/>
+                </a:solidFill>
+                <a:latin typeface="Calibri" pitchFamily="34" charset="0"/>
+                <a:ea typeface="Calibri" pitchFamily="34" charset="-122"/>
+                <a:cs typeface="Calibri" pitchFamily="34" charset="-120"/>
+              </a:rPr>
+              <a:t>Periodically audit autoverification performance.</a:t>
+            </a:r>
+            <a:endParaRPr lang="en-US" sz="1400" dirty="0"/>
+          </a:p>
+        </p:txBody>
+      </p:sp>
+      <p:sp>
+        <p:nvSpPr>
+          <p:cNvPr id="5" name="Shape 3"/>
+          <p:cNvSpPr/>
+          <p:nvPr/>
+        </p:nvSpPr>
+        <p:spPr>
+          <a:xfrm>
+            <a:off x="7422788" y="1554480"/>
+            <a:ext cx="4201979" cy="3977640"/>
           </a:xfrm>
           <a:prstGeom prst="roundRect">
             <a:avLst>
-              <a:gd name="adj" fmla="val 7609"/>
+              <a:gd name="adj" fmla="val 2069"/>
             </a:avLst>
           </a:prstGeom>
           <a:solidFill>
-            <a:srgbClr val="143651"/>
-          </a:solidFill>
-          <a:ln/>
-        </p:spPr>
-      </p:sp>
-      <p:sp>
-        <p:nvSpPr>
-          <p:cNvPr id="5" name="Shape 3"/>
-          <p:cNvSpPr/>
-          <p:nvPr/>
-        </p:nvSpPr>
-        <p:spPr>
-          <a:xfrm>
-            <a:off x="749808" y="1755648"/>
-            <a:ext cx="365760" cy="365760"/>
-          </a:xfrm>
-          <a:prstGeom prst="ellipse">
-            <a:avLst/>
-          </a:prstGeom>
-          <a:solidFill>
-            <a:srgbClr val="455A64"/>
+            <a:srgbClr val="ECEFF1"/>
           </a:solidFill>
           <a:ln/>
           <a:effectLst>
@@ -7097,8 +7677,8 @@
         </p:nvSpPr>
         <p:spPr>
           <a:xfrm>
-            <a:off x="749808" y="1755648"/>
-            <a:ext cx="365760" cy="365760"/>
+            <a:off x="7660532" y="1755648"/>
+            <a:ext cx="3744779" cy="310896"/>
           </a:xfrm>
           <a:prstGeom prst="rect">
             <a:avLst/>
@@ -7110,21 +7690,21 @@
           <a:bodyPr wrap="square" lIns="0" tIns="0" rIns="0" bIns="0" rtlCol="0" anchor="ctr"/>
           <a:lstStyle/>
           <a:p>
-            <a:pPr algn="ctr" indent="0" marL="0">
-              <a:buNone/>
-            </a:pPr>
-            <a:r>
-              <a:rPr lang="en-US" sz="1500" b="1" dirty="0">
-                <a:solidFill>
-                  <a:srgbClr val="FFFFFF"/>
-                </a:solidFill>
-                <a:latin typeface="Calibri" pitchFamily="34" charset="0"/>
-                <a:ea typeface="Calibri" pitchFamily="34" charset="-122"/>
-                <a:cs typeface="Calibri" pitchFamily="34" charset="-120"/>
-              </a:rPr>
-              <a:t>1</a:t>
-            </a:r>
-            <a:endParaRPr lang="en-US" sz="1500" dirty="0"/>
+            <a:pPr indent="0" marL="0">
+              <a:buNone/>
+            </a:pPr>
+            <a:r>
+              <a:rPr lang="en-US" sz="1100" b="1" spc="140" kern="0" dirty="0">
+                <a:solidFill>
+                  <a:srgbClr val="455A64"/>
+                </a:solidFill>
+                <a:latin typeface="Calibri" pitchFamily="34" charset="0"/>
+                <a:ea typeface="Calibri" pitchFamily="34" charset="-122"/>
+                <a:cs typeface="Calibri" pitchFamily="34" charset="-120"/>
+              </a:rPr>
+              <a:t>TEACHING POINT</a:t>
+            </a:r>
+            <a:endParaRPr lang="en-US" sz="1100" dirty="0"/>
           </a:p>
         </p:txBody>
       </p:sp>
@@ -7136,8 +7716,50 @@
         </p:nvSpPr>
         <p:spPr>
           <a:xfrm>
-            <a:off x="1280160" y="1517904"/>
-            <a:ext cx="10143439" cy="841248"/>
+            <a:off x="7660532" y="2121408"/>
+            <a:ext cx="3726491" cy="3291840"/>
+          </a:xfrm>
+          <a:prstGeom prst="rect">
+            <a:avLst/>
+          </a:prstGeom>
+          <a:noFill/>
+          <a:ln/>
+        </p:spPr>
+        <p:txBody>
+          <a:bodyPr wrap="square" lIns="0" tIns="0" rIns="0" bIns="0" rtlCol="0" anchor="t"/>
+          <a:lstStyle/>
+          <a:p>
+            <a:pPr algn="l" indent="0" marL="0">
+              <a:lnSpc>
+                <a:spcPct val="110000"/>
+              </a:lnSpc>
+              <a:buNone/>
+            </a:pPr>
+            <a:r>
+              <a:rPr lang="en-US" sz="1350" dirty="0">
+                <a:solidFill>
+                  <a:srgbClr val="33444F"/>
+                </a:solidFill>
+                <a:latin typeface="Calibri" pitchFamily="34" charset="0"/>
+                <a:ea typeface="Calibri" pitchFamily="34" charset="-122"/>
+                <a:cs typeface="Calibri" pitchFamily="34" charset="-120"/>
+              </a:rPr>
+              <a:t>Autoverification is only as safe as its rules — validate against exceptions and monitor that holds fire when they should.</a:t>
+            </a:r>
+            <a:endParaRPr lang="en-US" sz="1350" dirty="0"/>
+          </a:p>
+        </p:txBody>
+      </p:sp>
+      <p:sp>
+        <p:nvSpPr>
+          <p:cNvPr id="8" name="Text 6"/>
+          <p:cNvSpPr/>
+          <p:nvPr/>
+        </p:nvSpPr>
+        <p:spPr>
+          <a:xfrm>
+            <a:off x="566928" y="6473952"/>
+            <a:ext cx="7772400" cy="274320"/>
           </a:xfrm>
           <a:prstGeom prst="rect">
             <a:avLst/>
@@ -7153,79 +7775,30 @@
               <a:buNone/>
             </a:pPr>
             <a:r>
-              <a:rPr lang="en-US" sz="1350" dirty="0">
-                <a:solidFill>
-                  <a:srgbClr val="E7EEF4"/>
-                </a:solidFill>
-                <a:latin typeface="Calibri" pitchFamily="34" charset="0"/>
-                <a:ea typeface="Calibri" pitchFamily="34" charset="-122"/>
-                <a:cs typeface="Calibri" pitchFamily="34" charset="-120"/>
-              </a:rPr>
-              <a:t>Results flow instrument → middleware → LIS → EHR; each interface is both a risk and a control point.</a:t>
-            </a:r>
-            <a:endParaRPr lang="en-US" sz="1350" dirty="0"/>
-          </a:p>
-        </p:txBody>
-      </p:sp>
-      <p:sp>
-        <p:nvSpPr>
-          <p:cNvPr id="8" name="Shape 6"/>
-          <p:cNvSpPr/>
-          <p:nvPr/>
-        </p:nvSpPr>
-        <p:spPr>
-          <a:xfrm>
-            <a:off x="566928" y="2505456"/>
-            <a:ext cx="11057839" cy="841248"/>
-          </a:xfrm>
-          <a:prstGeom prst="roundRect">
-            <a:avLst>
-              <a:gd name="adj" fmla="val 7609"/>
-            </a:avLst>
-          </a:prstGeom>
-          <a:solidFill>
-            <a:srgbClr val="143651"/>
-          </a:solidFill>
-          <a:ln/>
-        </p:spPr>
-      </p:sp>
-      <p:sp>
-        <p:nvSpPr>
-          <p:cNvPr id="9" name="Shape 7"/>
-          <p:cNvSpPr/>
-          <p:nvPr/>
-        </p:nvSpPr>
-        <p:spPr>
-          <a:xfrm>
-            <a:off x="749808" y="2743200"/>
-            <a:ext cx="365760" cy="365760"/>
-          </a:xfrm>
-          <a:prstGeom prst="ellipse">
-            <a:avLst/>
-          </a:prstGeom>
-          <a:solidFill>
-            <a:srgbClr val="455A64"/>
-          </a:solidFill>
-          <a:ln/>
-          <a:effectLst>
-            <a:outerShdw sx="100000" sy="100000" kx="0" ky="0" algn="bl" rotWithShape="0" blurRad="88900" dist="25400" dir="5400000">
-              <a:srgbClr val="22303C">
-                <a:alpha val="12000"/>
-              </a:srgbClr>
-            </a:outerShdw>
-          </a:effectLst>
-        </p:spPr>
-      </p:sp>
-      <p:sp>
-        <p:nvSpPr>
-          <p:cNvPr id="10" name="Text 8"/>
-          <p:cNvSpPr/>
-          <p:nvPr/>
-        </p:nvSpPr>
-        <p:spPr>
-          <a:xfrm>
-            <a:off x="749808" y="2743200"/>
-            <a:ext cx="365760" cy="365760"/>
+              <a:rPr lang="en-US" sz="850" dirty="0">
+                <a:solidFill>
+                  <a:srgbClr val="9AA8B4"/>
+                </a:solidFill>
+                <a:latin typeface="Calibri" pitchFamily="34" charset="0"/>
+                <a:ea typeface="Calibri" pitchFamily="34" charset="-122"/>
+                <a:cs typeface="Calibri" pitchFamily="34" charset="-120"/>
+              </a:rPr>
+              <a:t>Makassed General Hospital  ·  Department of Laboratory Medicine</a:t>
+            </a:r>
+            <a:endParaRPr lang="en-US" sz="850" dirty="0"/>
+          </a:p>
+        </p:txBody>
+      </p:sp>
+      <p:sp>
+        <p:nvSpPr>
+          <p:cNvPr id="9" name="Text 7"/>
+          <p:cNvSpPr/>
+          <p:nvPr/>
+        </p:nvSpPr>
+        <p:spPr>
+          <a:xfrm>
+            <a:off x="9814255" y="6473952"/>
+            <a:ext cx="1828800" cy="274320"/>
           </a:xfrm>
           <a:prstGeom prst="rect">
             <a:avLst/>
@@ -7237,504 +7810,34 @@
           <a:bodyPr wrap="square" lIns="0" tIns="0" rIns="0" bIns="0" rtlCol="0" anchor="ctr"/>
           <a:lstStyle/>
           <a:p>
-            <a:pPr algn="ctr" indent="0" marL="0">
-              <a:buNone/>
-            </a:pPr>
-            <a:r>
-              <a:rPr lang="en-US" sz="1500" b="1" dirty="0">
-                <a:solidFill>
-                  <a:srgbClr val="FFFFFF"/>
-                </a:solidFill>
-                <a:latin typeface="Calibri" pitchFamily="34" charset="0"/>
-                <a:ea typeface="Calibri" pitchFamily="34" charset="-122"/>
-                <a:cs typeface="Calibri" pitchFamily="34" charset="-120"/>
-              </a:rPr>
-              <a:t>2</a:t>
-            </a:r>
-            <a:endParaRPr lang="en-US" sz="1500" dirty="0"/>
-          </a:p>
-        </p:txBody>
-      </p:sp>
-      <p:sp>
-        <p:nvSpPr>
-          <p:cNvPr id="11" name="Text 9"/>
-          <p:cNvSpPr/>
-          <p:nvPr/>
-        </p:nvSpPr>
-        <p:spPr>
-          <a:xfrm>
-            <a:off x="1280160" y="2505456"/>
-            <a:ext cx="10143439" cy="841248"/>
-          </a:xfrm>
-          <a:prstGeom prst="rect">
-            <a:avLst/>
-          </a:prstGeom>
-          <a:noFill/>
-          <a:ln/>
-        </p:spPr>
-        <p:txBody>
-          <a:bodyPr wrap="square" lIns="0" tIns="0" rIns="0" bIns="0" rtlCol="0" anchor="ctr"/>
-          <a:lstStyle/>
-          <a:p>
-            <a:pPr algn="l" indent="0" marL="0">
-              <a:buNone/>
-            </a:pPr>
-            <a:r>
-              <a:rPr lang="en-US" sz="1350" dirty="0">
-                <a:solidFill>
-                  <a:srgbClr val="E7EEF4"/>
-                </a:solidFill>
-                <a:latin typeface="Calibri" pitchFamily="34" charset="0"/>
-                <a:ea typeface="Calibri" pitchFamily="34" charset="-122"/>
-                <a:cs typeface="Calibri" pitchFamily="34" charset="-120"/>
-              </a:rPr>
-              <a:t>Autoverification releases results meeting validated rules and holds exceptions for review — validate the rules.</a:t>
-            </a:r>
-            <a:endParaRPr lang="en-US" sz="1350" dirty="0"/>
-          </a:p>
-        </p:txBody>
-      </p:sp>
-      <p:sp>
-        <p:nvSpPr>
-          <p:cNvPr id="12" name="Shape 10"/>
-          <p:cNvSpPr/>
-          <p:nvPr/>
-        </p:nvSpPr>
-        <p:spPr>
-          <a:xfrm>
-            <a:off x="566928" y="3493008"/>
-            <a:ext cx="11057839" cy="841248"/>
-          </a:xfrm>
-          <a:prstGeom prst="roundRect">
-            <a:avLst>
-              <a:gd name="adj" fmla="val 7609"/>
-            </a:avLst>
-          </a:prstGeom>
-          <a:solidFill>
-            <a:srgbClr val="143651"/>
-          </a:solidFill>
-          <a:ln/>
-        </p:spPr>
-      </p:sp>
-      <p:sp>
-        <p:nvSpPr>
-          <p:cNvPr id="13" name="Shape 11"/>
-          <p:cNvSpPr/>
-          <p:nvPr/>
-        </p:nvSpPr>
-        <p:spPr>
-          <a:xfrm>
-            <a:off x="749808" y="3730752"/>
-            <a:ext cx="365760" cy="365760"/>
-          </a:xfrm>
-          <a:prstGeom prst="ellipse">
-            <a:avLst/>
-          </a:prstGeom>
-          <a:solidFill>
-            <a:srgbClr val="455A64"/>
-          </a:solidFill>
-          <a:ln/>
-          <a:effectLst>
-            <a:outerShdw sx="100000" sy="100000" kx="0" ky="0" algn="bl" rotWithShape="0" blurRad="88900" dist="25400" dir="5400000">
-              <a:srgbClr val="22303C">
-                <a:alpha val="12000"/>
-              </a:srgbClr>
-            </a:outerShdw>
-          </a:effectLst>
-        </p:spPr>
-      </p:sp>
-      <p:sp>
-        <p:nvSpPr>
-          <p:cNvPr id="14" name="Text 12"/>
-          <p:cNvSpPr/>
-          <p:nvPr/>
-        </p:nvSpPr>
-        <p:spPr>
-          <a:xfrm>
-            <a:off x="749808" y="3730752"/>
-            <a:ext cx="365760" cy="365760"/>
-          </a:xfrm>
-          <a:prstGeom prst="rect">
-            <a:avLst/>
-          </a:prstGeom>
-          <a:noFill/>
-          <a:ln/>
-        </p:spPr>
-        <p:txBody>
-          <a:bodyPr wrap="square" lIns="0" tIns="0" rIns="0" bIns="0" rtlCol="0" anchor="ctr"/>
-          <a:lstStyle/>
-          <a:p>
-            <a:pPr algn="ctr" indent="0" marL="0">
-              <a:buNone/>
-            </a:pPr>
-            <a:r>
-              <a:rPr lang="en-US" sz="1500" b="1" dirty="0">
-                <a:solidFill>
-                  <a:srgbClr val="FFFFFF"/>
-                </a:solidFill>
-                <a:latin typeface="Calibri" pitchFamily="34" charset="0"/>
-                <a:ea typeface="Calibri" pitchFamily="34" charset="-122"/>
-                <a:cs typeface="Calibri" pitchFamily="34" charset="-120"/>
-              </a:rPr>
-              <a:t>3</a:t>
-            </a:r>
-            <a:endParaRPr lang="en-US" sz="1500" dirty="0"/>
-          </a:p>
-        </p:txBody>
-      </p:sp>
-      <p:sp>
-        <p:nvSpPr>
-          <p:cNvPr id="15" name="Text 13"/>
-          <p:cNvSpPr/>
-          <p:nvPr/>
-        </p:nvSpPr>
-        <p:spPr>
-          <a:xfrm>
-            <a:off x="1280160" y="3493008"/>
-            <a:ext cx="10143439" cy="841248"/>
-          </a:xfrm>
-          <a:prstGeom prst="rect">
-            <a:avLst/>
-          </a:prstGeom>
-          <a:noFill/>
-          <a:ln/>
-        </p:spPr>
-        <p:txBody>
-          <a:bodyPr wrap="square" lIns="0" tIns="0" rIns="0" bIns="0" rtlCol="0" anchor="ctr"/>
-          <a:lstStyle/>
-          <a:p>
-            <a:pPr algn="l" indent="0" marL="0">
-              <a:buNone/>
-            </a:pPr>
-            <a:r>
-              <a:rPr lang="en-US" sz="1350" dirty="0">
-                <a:solidFill>
-                  <a:srgbClr val="E7EEF4"/>
-                </a:solidFill>
-                <a:latin typeface="Calibri" pitchFamily="34" charset="0"/>
-                <a:ea typeface="Calibri" pitchFamily="34" charset="-122"/>
-                <a:cs typeface="Calibri" pitchFamily="34" charset="-120"/>
-              </a:rPr>
-              <a:t>Validate every interface, unit, and reference-range mapping; a single mis-map silently corrupts an analyte’s results.</a:t>
-            </a:r>
-            <a:endParaRPr lang="en-US" sz="1350" dirty="0"/>
-          </a:p>
-        </p:txBody>
-      </p:sp>
-      <p:sp>
-        <p:nvSpPr>
-          <p:cNvPr id="16" name="Shape 14"/>
-          <p:cNvSpPr/>
-          <p:nvPr/>
-        </p:nvSpPr>
-        <p:spPr>
-          <a:xfrm>
-            <a:off x="566928" y="4480560"/>
-            <a:ext cx="11057839" cy="841248"/>
-          </a:xfrm>
-          <a:prstGeom prst="roundRect">
-            <a:avLst>
-              <a:gd name="adj" fmla="val 7609"/>
-            </a:avLst>
-          </a:prstGeom>
-          <a:solidFill>
-            <a:srgbClr val="143651"/>
-          </a:solidFill>
-          <a:ln/>
-        </p:spPr>
-      </p:sp>
-      <p:sp>
-        <p:nvSpPr>
-          <p:cNvPr id="17" name="Shape 15"/>
-          <p:cNvSpPr/>
-          <p:nvPr/>
-        </p:nvSpPr>
-        <p:spPr>
-          <a:xfrm>
-            <a:off x="749808" y="4718304"/>
-            <a:ext cx="365760" cy="365760"/>
-          </a:xfrm>
-          <a:prstGeom prst="ellipse">
-            <a:avLst/>
-          </a:prstGeom>
-          <a:solidFill>
-            <a:srgbClr val="455A64"/>
-          </a:solidFill>
-          <a:ln/>
-          <a:effectLst>
-            <a:outerShdw sx="100000" sy="100000" kx="0" ky="0" algn="bl" rotWithShape="0" blurRad="88900" dist="25400" dir="5400000">
-              <a:srgbClr val="22303C">
-                <a:alpha val="12000"/>
-              </a:srgbClr>
-            </a:outerShdw>
-          </a:effectLst>
-        </p:spPr>
-      </p:sp>
-      <p:sp>
-        <p:nvSpPr>
-          <p:cNvPr id="18" name="Text 16"/>
-          <p:cNvSpPr/>
-          <p:nvPr/>
-        </p:nvSpPr>
-        <p:spPr>
-          <a:xfrm>
-            <a:off x="749808" y="4718304"/>
-            <a:ext cx="365760" cy="365760"/>
-          </a:xfrm>
-          <a:prstGeom prst="rect">
-            <a:avLst/>
-          </a:prstGeom>
-          <a:noFill/>
-          <a:ln/>
-        </p:spPr>
-        <p:txBody>
-          <a:bodyPr wrap="square" lIns="0" tIns="0" rIns="0" bIns="0" rtlCol="0" anchor="ctr"/>
-          <a:lstStyle/>
-          <a:p>
-            <a:pPr algn="ctr" indent="0" marL="0">
-              <a:buNone/>
-            </a:pPr>
-            <a:r>
-              <a:rPr lang="en-US" sz="1500" b="1" dirty="0">
-                <a:solidFill>
-                  <a:srgbClr val="FFFFFF"/>
-                </a:solidFill>
-                <a:latin typeface="Calibri" pitchFamily="34" charset="0"/>
-                <a:ea typeface="Calibri" pitchFamily="34" charset="-122"/>
-                <a:cs typeface="Calibri" pitchFamily="34" charset="-120"/>
-              </a:rPr>
-              <a:t>4</a:t>
-            </a:r>
-            <a:endParaRPr lang="en-US" sz="1500" dirty="0"/>
-          </a:p>
-        </p:txBody>
-      </p:sp>
-      <p:sp>
-        <p:nvSpPr>
-          <p:cNvPr id="19" name="Text 17"/>
-          <p:cNvSpPr/>
-          <p:nvPr/>
-        </p:nvSpPr>
-        <p:spPr>
-          <a:xfrm>
-            <a:off x="1280160" y="4480560"/>
-            <a:ext cx="10143439" cy="841248"/>
-          </a:xfrm>
-          <a:prstGeom prst="rect">
-            <a:avLst/>
-          </a:prstGeom>
-          <a:noFill/>
-          <a:ln/>
-        </p:spPr>
-        <p:txBody>
-          <a:bodyPr wrap="square" lIns="0" tIns="0" rIns="0" bIns="0" rtlCol="0" anchor="ctr"/>
-          <a:lstStyle/>
-          <a:p>
-            <a:pPr algn="l" indent="0" marL="0">
-              <a:buNone/>
-            </a:pPr>
-            <a:r>
-              <a:rPr lang="en-US" sz="1350" dirty="0">
-                <a:solidFill>
-                  <a:srgbClr val="E7EEF4"/>
-                </a:solidFill>
-                <a:latin typeface="Calibri" pitchFamily="34" charset="0"/>
-                <a:ea typeface="Calibri" pitchFamily="34" charset="-122"/>
-                <a:cs typeface="Calibri" pitchFamily="34" charset="-120"/>
-              </a:rPr>
-              <a:t>Use LOINC (tests) and SNOMED CT (results/diagnoses) for interoperability; HL7 carries the messages.</a:t>
-            </a:r>
-            <a:endParaRPr lang="en-US" sz="1350" dirty="0"/>
-          </a:p>
-        </p:txBody>
-      </p:sp>
-      <p:sp>
-        <p:nvSpPr>
-          <p:cNvPr id="20" name="Shape 18"/>
-          <p:cNvSpPr/>
-          <p:nvPr/>
-        </p:nvSpPr>
-        <p:spPr>
-          <a:xfrm>
-            <a:off x="566928" y="5468112"/>
-            <a:ext cx="11057839" cy="841248"/>
-          </a:xfrm>
-          <a:prstGeom prst="roundRect">
-            <a:avLst>
-              <a:gd name="adj" fmla="val 7609"/>
-            </a:avLst>
-          </a:prstGeom>
-          <a:solidFill>
-            <a:srgbClr val="143651"/>
-          </a:solidFill>
-          <a:ln/>
-        </p:spPr>
-      </p:sp>
-      <p:sp>
-        <p:nvSpPr>
-          <p:cNvPr id="21" name="Shape 19"/>
-          <p:cNvSpPr/>
-          <p:nvPr/>
-        </p:nvSpPr>
-        <p:spPr>
-          <a:xfrm>
-            <a:off x="749808" y="5705856"/>
-            <a:ext cx="365760" cy="365760"/>
-          </a:xfrm>
-          <a:prstGeom prst="ellipse">
-            <a:avLst/>
-          </a:prstGeom>
-          <a:solidFill>
-            <a:srgbClr val="455A64"/>
-          </a:solidFill>
-          <a:ln/>
-          <a:effectLst>
-            <a:outerShdw sx="100000" sy="100000" kx="0" ky="0" algn="bl" rotWithShape="0" blurRad="88900" dist="25400" dir="5400000">
-              <a:srgbClr val="22303C">
-                <a:alpha val="12000"/>
-              </a:srgbClr>
-            </a:outerShdw>
-          </a:effectLst>
-        </p:spPr>
-      </p:sp>
-      <p:sp>
-        <p:nvSpPr>
-          <p:cNvPr id="22" name="Text 20"/>
-          <p:cNvSpPr/>
-          <p:nvPr/>
-        </p:nvSpPr>
-        <p:spPr>
-          <a:xfrm>
-            <a:off x="749808" y="5705856"/>
-            <a:ext cx="365760" cy="365760"/>
-          </a:xfrm>
-          <a:prstGeom prst="rect">
-            <a:avLst/>
-          </a:prstGeom>
-          <a:noFill/>
-          <a:ln/>
-        </p:spPr>
-        <p:txBody>
-          <a:bodyPr wrap="square" lIns="0" tIns="0" rIns="0" bIns="0" rtlCol="0" anchor="ctr"/>
-          <a:lstStyle/>
-          <a:p>
-            <a:pPr algn="ctr" indent="0" marL="0">
-              <a:buNone/>
-            </a:pPr>
-            <a:r>
-              <a:rPr lang="en-US" sz="1500" b="1" dirty="0">
-                <a:solidFill>
-                  <a:srgbClr val="FFFFFF"/>
-                </a:solidFill>
-                <a:latin typeface="Calibri" pitchFamily="34" charset="0"/>
-                <a:ea typeface="Calibri" pitchFamily="34" charset="-122"/>
-                <a:cs typeface="Calibri" pitchFamily="34" charset="-120"/>
-              </a:rPr>
-              <a:t>5</a:t>
-            </a:r>
-            <a:endParaRPr lang="en-US" sz="1500" dirty="0"/>
-          </a:p>
-        </p:txBody>
-      </p:sp>
-      <p:sp>
-        <p:nvSpPr>
-          <p:cNvPr id="23" name="Text 21"/>
-          <p:cNvSpPr/>
-          <p:nvPr/>
-        </p:nvSpPr>
-        <p:spPr>
-          <a:xfrm>
-            <a:off x="1280160" y="5468112"/>
-            <a:ext cx="10143439" cy="841248"/>
-          </a:xfrm>
-          <a:prstGeom prst="rect">
-            <a:avLst/>
-          </a:prstGeom>
-          <a:noFill/>
-          <a:ln/>
-        </p:spPr>
-        <p:txBody>
-          <a:bodyPr wrap="square" lIns="0" tIns="0" rIns="0" bIns="0" rtlCol="0" anchor="ctr"/>
-          <a:lstStyle/>
-          <a:p>
-            <a:pPr algn="l" indent="0" marL="0">
-              <a:buNone/>
-            </a:pPr>
-            <a:r>
-              <a:rPr lang="en-US" sz="1350" dirty="0">
-                <a:solidFill>
-                  <a:srgbClr val="E7EEF4"/>
-                </a:solidFill>
-                <a:latin typeface="Calibri" pitchFamily="34" charset="0"/>
-                <a:ea typeface="Calibri" pitchFamily="34" charset="-122"/>
-                <a:cs typeface="Calibri" pitchFamily="34" charset="-120"/>
-              </a:rPr>
-              <a:t>Maintain audit trails, change control, and rehearsed downtime/cybersecurity procedures with post-event reconciliation.</a:t>
-            </a:r>
-            <a:endParaRPr lang="en-US" sz="1350" dirty="0"/>
-          </a:p>
-        </p:txBody>
-      </p:sp>
-      <p:sp>
-        <p:nvSpPr>
-          <p:cNvPr id="24" name="Text 22"/>
-          <p:cNvSpPr/>
-          <p:nvPr/>
-        </p:nvSpPr>
-        <p:spPr>
-          <a:xfrm>
-            <a:off x="566928" y="6473952"/>
-            <a:ext cx="8229600" cy="274320"/>
-          </a:xfrm>
-          <a:prstGeom prst="rect">
-            <a:avLst/>
-          </a:prstGeom>
-          <a:noFill/>
-          <a:ln/>
-        </p:spPr>
-        <p:txBody>
-          <a:bodyPr wrap="square" lIns="0" tIns="0" rIns="0" bIns="0" rtlCol="0" anchor="ctr"/>
-          <a:lstStyle/>
-          <a:p>
-            <a:pPr indent="0" marL="0">
+            <a:pPr algn="r" indent="0" marL="0">
               <a:buNone/>
             </a:pPr>
             <a:r>
               <a:rPr lang="en-US" sz="850" dirty="0">
                 <a:solidFill>
-                  <a:srgbClr val="5E7488"/>
-                </a:solidFill>
-                <a:latin typeface="Calibri" pitchFamily="34" charset="0"/>
-                <a:ea typeface="Calibri" pitchFamily="34" charset="-122"/>
-                <a:cs typeface="Calibri" pitchFamily="34" charset="-120"/>
-              </a:rPr>
-              <a:t>Makassed General Hospital  ·  Department of Laboratory Medicine</a:t>
-            </a:r>
-            <a:endParaRPr lang="en-US" sz="850" dirty="0"/>
-          </a:p>
-        </p:txBody>
-      </p:sp>
-      <p:sp>
-        <p:nvSpPr>
-          <p:cNvPr id="25" name="Text 23"/>
-          <p:cNvSpPr/>
-          <p:nvPr/>
-        </p:nvSpPr>
-        <p:spPr>
-          <a:xfrm>
-            <a:off x="11002975" y="6473952"/>
-            <a:ext cx="640080" cy="274320"/>
-          </a:xfrm>
-          <a:prstGeom prst="rect">
-            <a:avLst/>
-          </a:prstGeom>
-          <a:noFill/>
-          <a:ln/>
-        </p:spPr>
-        <p:txBody>
-          <a:bodyPr wrap="square" lIns="0" tIns="0" rIns="0" bIns="0" rtlCol="0" anchor="ctr"/>
-          <a:lstStyle/>
-          <a:p>
+                  <a:srgbClr val="9AA8B4"/>
+                </a:solidFill>
+                <a:latin typeface="Calibri" pitchFamily="34" charset="0"/>
+                <a:ea typeface="Calibri" pitchFamily="34" charset="-122"/>
+                <a:cs typeface="Calibri" pitchFamily="34" charset="-120"/>
+              </a:rPr>
+              <a:t>CP Lecture Series</a:t>
+            </a:r>
+            <a:pPr algn="r" indent="0" marL="0">
+              <a:buNone/>
+            </a:pPr>
+            <a:r>
+              <a:rPr lang="en-US" sz="850" dirty="0">
+                <a:solidFill>
+                  <a:srgbClr val="DCE4EC"/>
+                </a:solidFill>
+                <a:latin typeface="Calibri" pitchFamily="34" charset="0"/>
+                <a:ea typeface="Calibri" pitchFamily="34" charset="-122"/>
+                <a:cs typeface="Calibri" pitchFamily="34" charset="-120"/>
+              </a:rPr>
+              <a:t>   ·   </a:t>
+            </a:r>
             <a:pPr algn="r" indent="0" marL="0">
               <a:buNone/>
             </a:pPr>
@@ -7925,7 +8028,7 @@
                 <a:ea typeface="Calibri" pitchFamily="34" charset="-122"/>
                 <a:cs typeface="Calibri" pitchFamily="34" charset="-120"/>
               </a:rPr>
-              <a:t>HL7</a:t>
+              <a:t>LIS</a:t>
             </a:r>
             <a:endParaRPr lang="en-US" sz="3600" dirty="0"/>
           </a:p>
@@ -7964,7 +8067,7 @@
                 <a:ea typeface="Calibri" pitchFamily="34" charset="-122"/>
                 <a:cs typeface="Calibri" pitchFamily="34" charset="-120"/>
               </a:rPr>
-              <a:t>The messaging standard that moves results between systems</a:t>
+              <a:t>The backbone connecting orders to results</a:t>
             </a:r>
             <a:endParaRPr lang="en-US" sz="1150" dirty="0"/>
           </a:p>
@@ -8032,7 +8135,7 @@
                 <a:ea typeface="Calibri" pitchFamily="34" charset="-122"/>
                 <a:cs typeface="Calibri" pitchFamily="34" charset="-120"/>
               </a:rPr>
-              <a:t>Auto</a:t>
+              <a:t>Interfaces</a:t>
             </a:r>
             <a:endParaRPr lang="en-US" sz="3600" dirty="0"/>
           </a:p>
@@ -8071,7 +8174,7 @@
                 <a:ea typeface="Calibri" pitchFamily="34" charset="-122"/>
                 <a:cs typeface="Calibri" pitchFamily="34" charset="-120"/>
               </a:rPr>
-              <a:t>Autoverification releases normal results and flags the rest</a:t>
+              <a:t>Most data errors hide at the seams</a:t>
             </a:r>
             <a:endParaRPr lang="en-US" sz="1150" dirty="0"/>
           </a:p>
@@ -8178,7 +8281,7 @@
                 <a:ea typeface="Calibri" pitchFamily="34" charset="-122"/>
                 <a:cs typeface="Calibri" pitchFamily="34" charset="-120"/>
               </a:rPr>
-              <a:t>Interface and mapping errors silently corrupt data</a:t>
+              <a:t>The right result must reach the right chart, correctly</a:t>
             </a:r>
             <a:endParaRPr lang="en-US" sz="1150" dirty="0"/>
           </a:p>
@@ -8249,7 +8352,7 @@
                 <a:ea typeface="Calibri" pitchFamily="34" charset="-122"/>
                 <a:cs typeface="Calibri" pitchFamily="34" charset="-120"/>
               </a:rPr>
-              <a:t>Modern laboratories run on information systems. Understanding the LIS, middleware, interfaces, and autoverification — and the ways data integrity fails — is now core to safe laboratory practice.</a:t>
+              <a:t>Laboratory informatics governs how data moves from order to result to action. Understanding the LIS, interfaces, and middleware — and where they fail — is now core to safe practice.</a:t>
             </a:r>
             <a:endParaRPr lang="en-US" sz="1450" dirty="0"/>
           </a:p>
@@ -8292,7 +8395,7 @@
                 <a:ea typeface="Calibri" pitchFamily="34" charset="-122"/>
                 <a:cs typeface="Calibri" pitchFamily="34" charset="-120"/>
               </a:rPr>
-              <a:t>A single mis-mapped interface field can corrupt thousands of results invisibly — informatics is a patient-safety discipline.</a:t>
+              <a:t>A correct result is worthless if the interface drops it, maps it wrong, or delivers it to the wrong record — integrity lives at the seams.</a:t>
             </a:r>
             <a:endParaRPr lang="en-US" sz="1300" dirty="0"/>
           </a:p>
@@ -8469,6 +8572,2845 @@
                 <a:ea typeface="Calibri" pitchFamily="34" charset="-122"/>
                 <a:cs typeface="Calibri" pitchFamily="34" charset="-120"/>
               </a:rPr>
+              <a:t>LAB MANAGEMENT &amp; QUALITY   ·   BOARD REVIEW  ·  Q1</a:t>
+            </a:r>
+            <a:endParaRPr lang="en-US" sz="1100" dirty="0"/>
+          </a:p>
+        </p:txBody>
+      </p:sp>
+      <p:sp>
+        <p:nvSpPr>
+          <p:cNvPr id="3" name="Text 1"/>
+          <p:cNvSpPr/>
+          <p:nvPr/>
+        </p:nvSpPr>
+        <p:spPr>
+          <a:xfrm>
+            <a:off x="566928" y="713232"/>
+            <a:ext cx="11064240" cy="749808"/>
+          </a:xfrm>
+          <a:prstGeom prst="rect">
+            <a:avLst/>
+          </a:prstGeom>
+          <a:noFill/>
+          <a:ln/>
+        </p:spPr>
+        <p:txBody>
+          <a:bodyPr wrap="square" lIns="0" tIns="0" rIns="0" bIns="0" rtlCol="0" anchor="ctr"/>
+          <a:lstStyle/>
+          <a:p>
+            <a:pPr algn="l" indent="0" marL="0">
+              <a:buNone/>
+            </a:pPr>
+            <a:r>
+              <a:rPr lang="en-US" sz="2600" b="1" dirty="0">
+                <a:solidFill>
+                  <a:srgbClr val="0E3A5F"/>
+                </a:solidFill>
+                <a:latin typeface="Calibri" pitchFamily="34" charset="0"/>
+                <a:ea typeface="Calibri" pitchFamily="34" charset="-122"/>
+                <a:cs typeface="Calibri" pitchFamily="34" charset="-120"/>
+              </a:rPr>
+              <a:t>Board-Style Review</a:t>
+            </a:r>
+            <a:endParaRPr lang="en-US" sz="2600" dirty="0"/>
+          </a:p>
+        </p:txBody>
+      </p:sp>
+      <p:sp>
+        <p:nvSpPr>
+          <p:cNvPr id="4" name="Text 2"/>
+          <p:cNvSpPr/>
+          <p:nvPr/>
+        </p:nvSpPr>
+        <p:spPr>
+          <a:xfrm>
+            <a:off x="566928" y="1417320"/>
+            <a:ext cx="11057839" cy="914400"/>
+          </a:xfrm>
+          <a:prstGeom prst="rect">
+            <a:avLst/>
+          </a:prstGeom>
+          <a:noFill/>
+          <a:ln/>
+        </p:spPr>
+        <p:txBody>
+          <a:bodyPr wrap="square" lIns="0" tIns="0" rIns="0" bIns="0" rtlCol="0" anchor="t"/>
+          <a:lstStyle/>
+          <a:p>
+            <a:pPr algn="l" indent="0" marL="0">
+              <a:lnSpc>
+                <a:spcPct val="105000"/>
+              </a:lnSpc>
+              <a:buNone/>
+            </a:pPr>
+            <a:r>
+              <a:rPr lang="en-US" sz="1450" b="1" dirty="0">
+                <a:solidFill>
+                  <a:srgbClr val="1B2A38"/>
+                </a:solidFill>
+                <a:latin typeface="Calibri" pitchFamily="34" charset="0"/>
+                <a:ea typeface="Calibri" pitchFamily="34" charset="-122"/>
+                <a:cs typeface="Calibri" pitchFamily="34" charset="-120"/>
+              </a:rPr>
+              <a:t>Which standard is used to uniquely identify laboratory tests for interoperability?</a:t>
+            </a:r>
+            <a:endParaRPr lang="en-US" sz="1450" dirty="0"/>
+          </a:p>
+        </p:txBody>
+      </p:sp>
+      <p:sp>
+        <p:nvSpPr>
+          <p:cNvPr id="5" name="Text 3"/>
+          <p:cNvSpPr/>
+          <p:nvPr/>
+        </p:nvSpPr>
+        <p:spPr>
+          <a:xfrm>
+            <a:off x="658368" y="2395728"/>
+            <a:ext cx="6192390" cy="3017520"/>
+          </a:xfrm>
+          <a:prstGeom prst="rect">
+            <a:avLst/>
+          </a:prstGeom>
+          <a:noFill/>
+          <a:ln/>
+        </p:spPr>
+        <p:txBody>
+          <a:bodyPr wrap="square" lIns="0" tIns="0" rIns="0" bIns="0" rtlCol="0" anchor="t"/>
+          <a:lstStyle/>
+          <a:p>
+            <a:pPr algn="l" indent="0" marL="0">
+              <a:spcAft>
+                <a:spcPts val="600"/>
+              </a:spcAft>
+              <a:buNone/>
+            </a:pPr>
+            <a:r>
+              <a:rPr lang="en-US" sz="1350" dirty="0">
+                <a:solidFill>
+                  <a:srgbClr val="33444F"/>
+                </a:solidFill>
+                <a:latin typeface="Calibri" pitchFamily="34" charset="0"/>
+                <a:ea typeface="Calibri" pitchFamily="34" charset="-122"/>
+                <a:cs typeface="Calibri" pitchFamily="34" charset="-120"/>
+              </a:rPr>
+              <a:t>A. HL7 only</a:t>
+            </a:r>
+            <a:endParaRPr lang="en-US" sz="1350" dirty="0"/>
+          </a:p>
+          <a:p>
+            <a:pPr algn="l" indent="0" marL="0">
+              <a:spcAft>
+                <a:spcPts val="600"/>
+              </a:spcAft>
+              <a:buNone/>
+            </a:pPr>
+            <a:r>
+              <a:rPr lang="en-US" sz="1350" b="1" dirty="0">
+                <a:solidFill>
+                  <a:srgbClr val="2C3A41"/>
+                </a:solidFill>
+                <a:latin typeface="Calibri" pitchFamily="34" charset="0"/>
+                <a:ea typeface="Calibri" pitchFamily="34" charset="-122"/>
+                <a:cs typeface="Calibri" pitchFamily="34" charset="-120"/>
+              </a:rPr>
+              <a:t>B. LOINC</a:t>
+            </a:r>
+            <a:endParaRPr lang="en-US" sz="1350" dirty="0"/>
+          </a:p>
+          <a:p>
+            <a:pPr algn="l" indent="0" marL="0">
+              <a:spcAft>
+                <a:spcPts val="600"/>
+              </a:spcAft>
+              <a:buNone/>
+            </a:pPr>
+            <a:r>
+              <a:rPr lang="en-US" sz="1350" dirty="0">
+                <a:solidFill>
+                  <a:srgbClr val="33444F"/>
+                </a:solidFill>
+                <a:latin typeface="Calibri" pitchFamily="34" charset="0"/>
+                <a:ea typeface="Calibri" pitchFamily="34" charset="-122"/>
+                <a:cs typeface="Calibri" pitchFamily="34" charset="-120"/>
+              </a:rPr>
+              <a:t>C. ICD-10</a:t>
+            </a:r>
+            <a:endParaRPr lang="en-US" sz="1350" dirty="0"/>
+          </a:p>
+          <a:p>
+            <a:pPr algn="l" indent="0" marL="0">
+              <a:spcAft>
+                <a:spcPts val="600"/>
+              </a:spcAft>
+              <a:buNone/>
+            </a:pPr>
+            <a:r>
+              <a:rPr lang="en-US" sz="1350" dirty="0">
+                <a:solidFill>
+                  <a:srgbClr val="33444F"/>
+                </a:solidFill>
+                <a:latin typeface="Calibri" pitchFamily="34" charset="0"/>
+                <a:ea typeface="Calibri" pitchFamily="34" charset="-122"/>
+                <a:cs typeface="Calibri" pitchFamily="34" charset="-120"/>
+              </a:rPr>
+              <a:t>D. CPT</a:t>
+            </a:r>
+            <a:endParaRPr lang="en-US" sz="1350" dirty="0"/>
+          </a:p>
+          <a:p>
+            <a:pPr algn="l" indent="0" marL="0">
+              <a:spcAft>
+                <a:spcPts val="600"/>
+              </a:spcAft>
+              <a:buNone/>
+            </a:pPr>
+            <a:r>
+              <a:rPr lang="en-US" sz="1350" dirty="0">
+                <a:solidFill>
+                  <a:srgbClr val="33444F"/>
+                </a:solidFill>
+                <a:latin typeface="Calibri" pitchFamily="34" charset="0"/>
+                <a:ea typeface="Calibri" pitchFamily="34" charset="-122"/>
+                <a:cs typeface="Calibri" pitchFamily="34" charset="-120"/>
+              </a:rPr>
+              <a:t>E. SNOMED procedures</a:t>
+            </a:r>
+            <a:endParaRPr lang="en-US" sz="1350" dirty="0"/>
+          </a:p>
+        </p:txBody>
+      </p:sp>
+      <p:sp>
+        <p:nvSpPr>
+          <p:cNvPr id="6" name="Shape 4"/>
+          <p:cNvSpPr/>
+          <p:nvPr/>
+        </p:nvSpPr>
+        <p:spPr>
+          <a:xfrm>
+            <a:off x="7201632" y="2395728"/>
+            <a:ext cx="4423136" cy="3246120"/>
+          </a:xfrm>
+          <a:prstGeom prst="roundRect">
+            <a:avLst>
+              <a:gd name="adj" fmla="val 2535"/>
+            </a:avLst>
+          </a:prstGeom>
+          <a:solidFill>
+            <a:srgbClr val="ECEFF1"/>
+          </a:solidFill>
+          <a:ln/>
+          <a:effectLst>
+            <a:outerShdw sx="100000" sy="100000" kx="0" ky="0" algn="bl" rotWithShape="0" blurRad="88900" dist="25400" dir="5400000">
+              <a:srgbClr val="22303C">
+                <a:alpha val="12000"/>
+              </a:srgbClr>
+            </a:outerShdw>
+          </a:effectLst>
+        </p:spPr>
+      </p:sp>
+      <p:sp>
+        <p:nvSpPr>
+          <p:cNvPr id="7" name="Text 5"/>
+          <p:cNvSpPr/>
+          <p:nvPr/>
+        </p:nvSpPr>
+        <p:spPr>
+          <a:xfrm>
+            <a:off x="7439376" y="2578608"/>
+            <a:ext cx="3965936" cy="457200"/>
+          </a:xfrm>
+          <a:prstGeom prst="rect">
+            <a:avLst/>
+          </a:prstGeom>
+          <a:noFill/>
+          <a:ln/>
+        </p:spPr>
+        <p:txBody>
+          <a:bodyPr wrap="square" lIns="0" tIns="0" rIns="0" bIns="0" rtlCol="0" anchor="ctr"/>
+          <a:lstStyle/>
+          <a:p>
+            <a:pPr indent="0" marL="0">
+              <a:buNone/>
+            </a:pPr>
+            <a:r>
+              <a:rPr lang="en-US" sz="1500" b="1" dirty="0">
+                <a:solidFill>
+                  <a:srgbClr val="455A64"/>
+                </a:solidFill>
+                <a:latin typeface="Calibri" pitchFamily="34" charset="0"/>
+                <a:ea typeface="Calibri" pitchFamily="34" charset="-122"/>
+                <a:cs typeface="Calibri" pitchFamily="34" charset="-120"/>
+              </a:rPr>
+              <a:t>ANSWER  </a:t>
+            </a:r>
+            <a:pPr indent="0" marL="0">
+              <a:buNone/>
+            </a:pPr>
+            <a:r>
+              <a:rPr lang="en-US" sz="1500" b="1" dirty="0">
+                <a:solidFill>
+                  <a:srgbClr val="1B2A38"/>
+                </a:solidFill>
+                <a:latin typeface="Calibri" pitchFamily="34" charset="0"/>
+                <a:ea typeface="Calibri" pitchFamily="34" charset="-122"/>
+                <a:cs typeface="Calibri" pitchFamily="34" charset="-120"/>
+              </a:rPr>
+              <a:t>B — LOINC</a:t>
+            </a:r>
+            <a:endParaRPr lang="en-US" sz="1500" dirty="0"/>
+          </a:p>
+        </p:txBody>
+      </p:sp>
+      <p:sp>
+        <p:nvSpPr>
+          <p:cNvPr id="8" name="Text 6"/>
+          <p:cNvSpPr/>
+          <p:nvPr/>
+        </p:nvSpPr>
+        <p:spPr>
+          <a:xfrm>
+            <a:off x="7439376" y="3127248"/>
+            <a:ext cx="3947648" cy="2377440"/>
+          </a:xfrm>
+          <a:prstGeom prst="rect">
+            <a:avLst/>
+          </a:prstGeom>
+          <a:noFill/>
+          <a:ln/>
+        </p:spPr>
+        <p:txBody>
+          <a:bodyPr wrap="square" lIns="0" tIns="0" rIns="0" bIns="0" rtlCol="0" anchor="t"/>
+          <a:lstStyle/>
+          <a:p>
+            <a:pPr algn="l" indent="0" marL="0">
+              <a:lnSpc>
+                <a:spcPct val="108000"/>
+              </a:lnSpc>
+              <a:buNone/>
+            </a:pPr>
+            <a:r>
+              <a:rPr lang="en-US" sz="1250" dirty="0">
+                <a:solidFill>
+                  <a:srgbClr val="33444F"/>
+                </a:solidFill>
+                <a:latin typeface="Calibri" pitchFamily="34" charset="0"/>
+                <a:ea typeface="Calibri" pitchFamily="34" charset="-122"/>
+                <a:cs typeface="Calibri" pitchFamily="34" charset="-120"/>
+              </a:rPr>
+              <a:t>LOINC provides standardized identifiers for laboratory tests; HL7 is the messaging standard that carries them.</a:t>
+            </a:r>
+            <a:endParaRPr lang="en-US" sz="1250" dirty="0"/>
+          </a:p>
+        </p:txBody>
+      </p:sp>
+      <p:sp>
+        <p:nvSpPr>
+          <p:cNvPr id="9" name="Text 7"/>
+          <p:cNvSpPr/>
+          <p:nvPr/>
+        </p:nvSpPr>
+        <p:spPr>
+          <a:xfrm>
+            <a:off x="566928" y="6473952"/>
+            <a:ext cx="7772400" cy="274320"/>
+          </a:xfrm>
+          <a:prstGeom prst="rect">
+            <a:avLst/>
+          </a:prstGeom>
+          <a:noFill/>
+          <a:ln/>
+        </p:spPr>
+        <p:txBody>
+          <a:bodyPr wrap="square" lIns="0" tIns="0" rIns="0" bIns="0" rtlCol="0" anchor="ctr"/>
+          <a:lstStyle/>
+          <a:p>
+            <a:pPr algn="l" indent="0" marL="0">
+              <a:buNone/>
+            </a:pPr>
+            <a:r>
+              <a:rPr lang="en-US" sz="850" dirty="0">
+                <a:solidFill>
+                  <a:srgbClr val="9AA8B4"/>
+                </a:solidFill>
+                <a:latin typeface="Calibri" pitchFamily="34" charset="0"/>
+                <a:ea typeface="Calibri" pitchFamily="34" charset="-122"/>
+                <a:cs typeface="Calibri" pitchFamily="34" charset="-120"/>
+              </a:rPr>
+              <a:t>Makassed General Hospital  ·  Department of Laboratory Medicine</a:t>
+            </a:r>
+            <a:endParaRPr lang="en-US" sz="850" dirty="0"/>
+          </a:p>
+        </p:txBody>
+      </p:sp>
+      <p:sp>
+        <p:nvSpPr>
+          <p:cNvPr id="10" name="Text 8"/>
+          <p:cNvSpPr/>
+          <p:nvPr/>
+        </p:nvSpPr>
+        <p:spPr>
+          <a:xfrm>
+            <a:off x="9814255" y="6473952"/>
+            <a:ext cx="1828800" cy="274320"/>
+          </a:xfrm>
+          <a:prstGeom prst="rect">
+            <a:avLst/>
+          </a:prstGeom>
+          <a:noFill/>
+          <a:ln/>
+        </p:spPr>
+        <p:txBody>
+          <a:bodyPr wrap="square" lIns="0" tIns="0" rIns="0" bIns="0" rtlCol="0" anchor="ctr"/>
+          <a:lstStyle/>
+          <a:p>
+            <a:pPr algn="r" indent="0" marL="0">
+              <a:buNone/>
+            </a:pPr>
+            <a:r>
+              <a:rPr lang="en-US" sz="850" dirty="0">
+                <a:solidFill>
+                  <a:srgbClr val="9AA8B4"/>
+                </a:solidFill>
+                <a:latin typeface="Calibri" pitchFamily="34" charset="0"/>
+                <a:ea typeface="Calibri" pitchFamily="34" charset="-122"/>
+                <a:cs typeface="Calibri" pitchFamily="34" charset="-120"/>
+              </a:rPr>
+              <a:t>CP Lecture Series</a:t>
+            </a:r>
+            <a:pPr algn="r" indent="0" marL="0">
+              <a:buNone/>
+            </a:pPr>
+            <a:r>
+              <a:rPr lang="en-US" sz="850" dirty="0">
+                <a:solidFill>
+                  <a:srgbClr val="DCE4EC"/>
+                </a:solidFill>
+                <a:latin typeface="Calibri" pitchFamily="34" charset="0"/>
+                <a:ea typeface="Calibri" pitchFamily="34" charset="-122"/>
+                <a:cs typeface="Calibri" pitchFamily="34" charset="-120"/>
+              </a:rPr>
+              <a:t>   ·   </a:t>
+            </a:r>
+            <a:pPr algn="r" indent="0" marL="0">
+              <a:buNone/>
+            </a:pPr>
+            <a:r>
+              <a:rPr lang="en-US" sz="850" b="1" dirty="0">
+                <a:solidFill>
+                  <a:srgbClr val="455A64"/>
+                </a:solidFill>
+                <a:latin typeface="Calibri" pitchFamily="34" charset="0"/>
+                <a:ea typeface="Calibri" pitchFamily="34" charset="-122"/>
+                <a:cs typeface="Calibri" pitchFamily="34" charset="-120"/>
+              </a:rPr>
+              <a:t>17</a:t>
+            </a:r>
+            <a:endParaRPr lang="en-US" sz="850" dirty="0"/>
+          </a:p>
+        </p:txBody>
+      </p:sp>
+    </p:spTree>
+  </p:cSld>
+  <p:clrMapOvr>
+    <a:masterClrMapping/>
+  </p:clrMapOvr>
+</p:sld>
+</file>
+
+<file path=ppt/slides/slide21.xml><?xml version="1.0" encoding="utf-8"?>
+<p:sld xmlns:a="http://schemas.openxmlformats.org/drawingml/2006/main" xmlns:r="http://schemas.openxmlformats.org/officeDocument/2006/relationships" xmlns:p="http://schemas.openxmlformats.org/presentationml/2006/main">
+  <p:cSld name="Slide 21">
+    <p:bg>
+      <p:bgPr>
+        <a:solidFill>
+          <a:srgbClr val="FFFFFF"/>
+        </a:solidFill>
+      </p:bgPr>
+    </p:bg>
+    <p:spTree>
+      <p:nvGrpSpPr>
+        <p:cNvPr id="1" name=""/>
+        <p:cNvGrpSpPr/>
+        <p:nvPr/>
+      </p:nvGrpSpPr>
+      <p:grpSpPr>
+        <a:xfrm>
+          <a:off x="0" y="0"/>
+          <a:ext cx="0" cy="0"/>
+          <a:chOff x="0" y="0"/>
+          <a:chExt cx="0" cy="0"/>
+        </a:xfrm>
+      </p:grpSpPr>
+      <p:sp>
+        <p:nvSpPr>
+          <p:cNvPr id="2" name="Text 0"/>
+          <p:cNvSpPr/>
+          <p:nvPr/>
+        </p:nvSpPr>
+        <p:spPr>
+          <a:xfrm>
+            <a:off x="566928" y="329184"/>
+            <a:ext cx="10515600" cy="310896"/>
+          </a:xfrm>
+          <a:prstGeom prst="rect">
+            <a:avLst/>
+          </a:prstGeom>
+          <a:noFill/>
+          <a:ln/>
+        </p:spPr>
+        <p:txBody>
+          <a:bodyPr wrap="square" lIns="0" tIns="0" rIns="0" bIns="0" rtlCol="0" anchor="ctr"/>
+          <a:lstStyle/>
+          <a:p>
+            <a:pPr algn="l" indent="0" marL="0">
+              <a:buNone/>
+            </a:pPr>
+            <a:r>
+              <a:rPr lang="en-US" sz="1100" b="1" spc="150" kern="0" dirty="0">
+                <a:solidFill>
+                  <a:srgbClr val="455A64"/>
+                </a:solidFill>
+                <a:latin typeface="Calibri" pitchFamily="34" charset="0"/>
+                <a:ea typeface="Calibri" pitchFamily="34" charset="-122"/>
+                <a:cs typeface="Calibri" pitchFamily="34" charset="-120"/>
+              </a:rPr>
+              <a:t>LAB MANAGEMENT &amp; QUALITY   ·   BOARD REVIEW  ·  Q2</a:t>
+            </a:r>
+            <a:endParaRPr lang="en-US" sz="1100" dirty="0"/>
+          </a:p>
+        </p:txBody>
+      </p:sp>
+      <p:sp>
+        <p:nvSpPr>
+          <p:cNvPr id="3" name="Text 1"/>
+          <p:cNvSpPr/>
+          <p:nvPr/>
+        </p:nvSpPr>
+        <p:spPr>
+          <a:xfrm>
+            <a:off x="566928" y="713232"/>
+            <a:ext cx="11064240" cy="749808"/>
+          </a:xfrm>
+          <a:prstGeom prst="rect">
+            <a:avLst/>
+          </a:prstGeom>
+          <a:noFill/>
+          <a:ln/>
+        </p:spPr>
+        <p:txBody>
+          <a:bodyPr wrap="square" lIns="0" tIns="0" rIns="0" bIns="0" rtlCol="0" anchor="ctr"/>
+          <a:lstStyle/>
+          <a:p>
+            <a:pPr algn="l" indent="0" marL="0">
+              <a:buNone/>
+            </a:pPr>
+            <a:r>
+              <a:rPr lang="en-US" sz="2600" b="1" dirty="0">
+                <a:solidFill>
+                  <a:srgbClr val="0E3A5F"/>
+                </a:solidFill>
+                <a:latin typeface="Calibri" pitchFamily="34" charset="0"/>
+                <a:ea typeface="Calibri" pitchFamily="34" charset="-122"/>
+                <a:cs typeface="Calibri" pitchFamily="34" charset="-120"/>
+              </a:rPr>
+              <a:t>Board-Style Review</a:t>
+            </a:r>
+            <a:endParaRPr lang="en-US" sz="2600" dirty="0"/>
+          </a:p>
+        </p:txBody>
+      </p:sp>
+      <p:sp>
+        <p:nvSpPr>
+          <p:cNvPr id="4" name="Text 2"/>
+          <p:cNvSpPr/>
+          <p:nvPr/>
+        </p:nvSpPr>
+        <p:spPr>
+          <a:xfrm>
+            <a:off x="566928" y="1417320"/>
+            <a:ext cx="11057839" cy="914400"/>
+          </a:xfrm>
+          <a:prstGeom prst="rect">
+            <a:avLst/>
+          </a:prstGeom>
+          <a:noFill/>
+          <a:ln/>
+        </p:spPr>
+        <p:txBody>
+          <a:bodyPr wrap="square" lIns="0" tIns="0" rIns="0" bIns="0" rtlCol="0" anchor="t"/>
+          <a:lstStyle/>
+          <a:p>
+            <a:pPr algn="l" indent="0" marL="0">
+              <a:lnSpc>
+                <a:spcPct val="105000"/>
+              </a:lnSpc>
+              <a:buNone/>
+            </a:pPr>
+            <a:r>
+              <a:rPr lang="en-US" sz="1450" b="1" dirty="0">
+                <a:solidFill>
+                  <a:srgbClr val="1B2A38"/>
+                </a:solidFill>
+                <a:latin typeface="Calibri" pitchFamily="34" charset="0"/>
+                <a:ea typeface="Calibri" pitchFamily="34" charset="-122"/>
+                <a:cs typeface="Calibri" pitchFamily="34" charset="-120"/>
+              </a:rPr>
+              <a:t>A delta check primarily detects:</a:t>
+            </a:r>
+            <a:endParaRPr lang="en-US" sz="1450" dirty="0"/>
+          </a:p>
+        </p:txBody>
+      </p:sp>
+      <p:sp>
+        <p:nvSpPr>
+          <p:cNvPr id="5" name="Text 3"/>
+          <p:cNvSpPr/>
+          <p:nvPr/>
+        </p:nvSpPr>
+        <p:spPr>
+          <a:xfrm>
+            <a:off x="658368" y="2395728"/>
+            <a:ext cx="6192390" cy="3017520"/>
+          </a:xfrm>
+          <a:prstGeom prst="rect">
+            <a:avLst/>
+          </a:prstGeom>
+          <a:noFill/>
+          <a:ln/>
+        </p:spPr>
+        <p:txBody>
+          <a:bodyPr wrap="square" lIns="0" tIns="0" rIns="0" bIns="0" rtlCol="0" anchor="t"/>
+          <a:lstStyle/>
+          <a:p>
+            <a:pPr algn="l" indent="0" marL="0">
+              <a:spcAft>
+                <a:spcPts val="600"/>
+              </a:spcAft>
+              <a:buNone/>
+            </a:pPr>
+            <a:r>
+              <a:rPr lang="en-US" sz="1350" dirty="0">
+                <a:solidFill>
+                  <a:srgbClr val="33444F"/>
+                </a:solidFill>
+                <a:latin typeface="Calibri" pitchFamily="34" charset="0"/>
+                <a:ea typeface="Calibri" pitchFamily="34" charset="-122"/>
+                <a:cs typeface="Calibri" pitchFamily="34" charset="-120"/>
+              </a:rPr>
+              <a:t>A. Calibration drift</a:t>
+            </a:r>
+            <a:endParaRPr lang="en-US" sz="1350" dirty="0"/>
+          </a:p>
+          <a:p>
+            <a:pPr algn="l" indent="0" marL="0">
+              <a:spcAft>
+                <a:spcPts val="600"/>
+              </a:spcAft>
+              <a:buNone/>
+            </a:pPr>
+            <a:r>
+              <a:rPr lang="en-US" sz="1350" b="1" dirty="0">
+                <a:solidFill>
+                  <a:srgbClr val="2C3A41"/>
+                </a:solidFill>
+                <a:latin typeface="Calibri" pitchFamily="34" charset="0"/>
+                <a:ea typeface="Calibri" pitchFamily="34" charset="-122"/>
+                <a:cs typeface="Calibri" pitchFamily="34" charset="-120"/>
+              </a:rPr>
+              <a:t>B. Implausible changes from a patient’s prior result (e.g., mislabeling)</a:t>
+            </a:r>
+            <a:endParaRPr lang="en-US" sz="1350" dirty="0"/>
+          </a:p>
+          <a:p>
+            <a:pPr algn="l" indent="0" marL="0">
+              <a:spcAft>
+                <a:spcPts val="600"/>
+              </a:spcAft>
+              <a:buNone/>
+            </a:pPr>
+            <a:r>
+              <a:rPr lang="en-US" sz="1350" dirty="0">
+                <a:solidFill>
+                  <a:srgbClr val="33444F"/>
+                </a:solidFill>
+                <a:latin typeface="Calibri" pitchFamily="34" charset="0"/>
+                <a:ea typeface="Calibri" pitchFamily="34" charset="-122"/>
+                <a:cs typeface="Calibri" pitchFamily="34" charset="-120"/>
+              </a:rPr>
+              <a:t>C. Reagent expiration</a:t>
+            </a:r>
+            <a:endParaRPr lang="en-US" sz="1350" dirty="0"/>
+          </a:p>
+          <a:p>
+            <a:pPr algn="l" indent="0" marL="0">
+              <a:spcAft>
+                <a:spcPts val="600"/>
+              </a:spcAft>
+              <a:buNone/>
+            </a:pPr>
+            <a:r>
+              <a:rPr lang="en-US" sz="1350" dirty="0">
+                <a:solidFill>
+                  <a:srgbClr val="33444F"/>
+                </a:solidFill>
+                <a:latin typeface="Calibri" pitchFamily="34" charset="0"/>
+                <a:ea typeface="Calibri" pitchFamily="34" charset="-122"/>
+                <a:cs typeface="Calibri" pitchFamily="34" charset="-120"/>
+              </a:rPr>
+              <a:t>D. Interface downtime</a:t>
+            </a:r>
+            <a:endParaRPr lang="en-US" sz="1350" dirty="0"/>
+          </a:p>
+          <a:p>
+            <a:pPr algn="l" indent="0" marL="0">
+              <a:spcAft>
+                <a:spcPts val="600"/>
+              </a:spcAft>
+              <a:buNone/>
+            </a:pPr>
+            <a:r>
+              <a:rPr lang="en-US" sz="1350" dirty="0">
+                <a:solidFill>
+                  <a:srgbClr val="33444F"/>
+                </a:solidFill>
+                <a:latin typeface="Calibri" pitchFamily="34" charset="0"/>
+                <a:ea typeface="Calibri" pitchFamily="34" charset="-122"/>
+                <a:cs typeface="Calibri" pitchFamily="34" charset="-120"/>
+              </a:rPr>
+              <a:t>E. Billing errors</a:t>
+            </a:r>
+            <a:endParaRPr lang="en-US" sz="1350" dirty="0"/>
+          </a:p>
+        </p:txBody>
+      </p:sp>
+      <p:sp>
+        <p:nvSpPr>
+          <p:cNvPr id="6" name="Shape 4"/>
+          <p:cNvSpPr/>
+          <p:nvPr/>
+        </p:nvSpPr>
+        <p:spPr>
+          <a:xfrm>
+            <a:off x="7201632" y="2395728"/>
+            <a:ext cx="4423136" cy="3246120"/>
+          </a:xfrm>
+          <a:prstGeom prst="roundRect">
+            <a:avLst>
+              <a:gd name="adj" fmla="val 2535"/>
+            </a:avLst>
+          </a:prstGeom>
+          <a:solidFill>
+            <a:srgbClr val="ECEFF1"/>
+          </a:solidFill>
+          <a:ln/>
+          <a:effectLst>
+            <a:outerShdw sx="100000" sy="100000" kx="0" ky="0" algn="bl" rotWithShape="0" blurRad="88900" dist="25400" dir="5400000">
+              <a:srgbClr val="22303C">
+                <a:alpha val="12000"/>
+              </a:srgbClr>
+            </a:outerShdw>
+          </a:effectLst>
+        </p:spPr>
+      </p:sp>
+      <p:sp>
+        <p:nvSpPr>
+          <p:cNvPr id="7" name="Text 5"/>
+          <p:cNvSpPr/>
+          <p:nvPr/>
+        </p:nvSpPr>
+        <p:spPr>
+          <a:xfrm>
+            <a:off x="7439376" y="2578608"/>
+            <a:ext cx="3965936" cy="457200"/>
+          </a:xfrm>
+          <a:prstGeom prst="rect">
+            <a:avLst/>
+          </a:prstGeom>
+          <a:noFill/>
+          <a:ln/>
+        </p:spPr>
+        <p:txBody>
+          <a:bodyPr wrap="square" lIns="0" tIns="0" rIns="0" bIns="0" rtlCol="0" anchor="ctr"/>
+          <a:lstStyle/>
+          <a:p>
+            <a:pPr indent="0" marL="0">
+              <a:buNone/>
+            </a:pPr>
+            <a:r>
+              <a:rPr lang="en-US" sz="1500" b="1" dirty="0">
+                <a:solidFill>
+                  <a:srgbClr val="455A64"/>
+                </a:solidFill>
+                <a:latin typeface="Calibri" pitchFamily="34" charset="0"/>
+                <a:ea typeface="Calibri" pitchFamily="34" charset="-122"/>
+                <a:cs typeface="Calibri" pitchFamily="34" charset="-120"/>
+              </a:rPr>
+              <a:t>ANSWER  </a:t>
+            </a:r>
+            <a:pPr indent="0" marL="0">
+              <a:buNone/>
+            </a:pPr>
+            <a:r>
+              <a:rPr lang="en-US" sz="1500" b="1" dirty="0">
+                <a:solidFill>
+                  <a:srgbClr val="1B2A38"/>
+                </a:solidFill>
+                <a:latin typeface="Calibri" pitchFamily="34" charset="0"/>
+                <a:ea typeface="Calibri" pitchFamily="34" charset="-122"/>
+                <a:cs typeface="Calibri" pitchFamily="34" charset="-120"/>
+              </a:rPr>
+              <a:t>B — Implausible change vs prior</a:t>
+            </a:r>
+            <a:endParaRPr lang="en-US" sz="1500" dirty="0"/>
+          </a:p>
+        </p:txBody>
+      </p:sp>
+      <p:sp>
+        <p:nvSpPr>
+          <p:cNvPr id="8" name="Text 6"/>
+          <p:cNvSpPr/>
+          <p:nvPr/>
+        </p:nvSpPr>
+        <p:spPr>
+          <a:xfrm>
+            <a:off x="7439376" y="3127248"/>
+            <a:ext cx="3947648" cy="2377440"/>
+          </a:xfrm>
+          <a:prstGeom prst="rect">
+            <a:avLst/>
+          </a:prstGeom>
+          <a:noFill/>
+          <a:ln/>
+        </p:spPr>
+        <p:txBody>
+          <a:bodyPr wrap="square" lIns="0" tIns="0" rIns="0" bIns="0" rtlCol="0" anchor="t"/>
+          <a:lstStyle/>
+          <a:p>
+            <a:pPr algn="l" indent="0" marL="0">
+              <a:lnSpc>
+                <a:spcPct val="108000"/>
+              </a:lnSpc>
+              <a:buNone/>
+            </a:pPr>
+            <a:r>
+              <a:rPr lang="en-US" sz="1250" dirty="0">
+                <a:solidFill>
+                  <a:srgbClr val="33444F"/>
+                </a:solidFill>
+                <a:latin typeface="Calibri" pitchFamily="34" charset="0"/>
+                <a:ea typeface="Calibri" pitchFamily="34" charset="-122"/>
+                <a:cs typeface="Calibri" pitchFamily="34" charset="-120"/>
+              </a:rPr>
+              <a:t>Delta checks compare current to previous results to flag possible specimen mix-ups or errors.</a:t>
+            </a:r>
+            <a:endParaRPr lang="en-US" sz="1250" dirty="0"/>
+          </a:p>
+        </p:txBody>
+      </p:sp>
+      <p:sp>
+        <p:nvSpPr>
+          <p:cNvPr id="9" name="Text 7"/>
+          <p:cNvSpPr/>
+          <p:nvPr/>
+        </p:nvSpPr>
+        <p:spPr>
+          <a:xfrm>
+            <a:off x="566928" y="6473952"/>
+            <a:ext cx="7772400" cy="274320"/>
+          </a:xfrm>
+          <a:prstGeom prst="rect">
+            <a:avLst/>
+          </a:prstGeom>
+          <a:noFill/>
+          <a:ln/>
+        </p:spPr>
+        <p:txBody>
+          <a:bodyPr wrap="square" lIns="0" tIns="0" rIns="0" bIns="0" rtlCol="0" anchor="ctr"/>
+          <a:lstStyle/>
+          <a:p>
+            <a:pPr algn="l" indent="0" marL="0">
+              <a:buNone/>
+            </a:pPr>
+            <a:r>
+              <a:rPr lang="en-US" sz="850" dirty="0">
+                <a:solidFill>
+                  <a:srgbClr val="9AA8B4"/>
+                </a:solidFill>
+                <a:latin typeface="Calibri" pitchFamily="34" charset="0"/>
+                <a:ea typeface="Calibri" pitchFamily="34" charset="-122"/>
+                <a:cs typeface="Calibri" pitchFamily="34" charset="-120"/>
+              </a:rPr>
+              <a:t>Makassed General Hospital  ·  Department of Laboratory Medicine</a:t>
+            </a:r>
+            <a:endParaRPr lang="en-US" sz="850" dirty="0"/>
+          </a:p>
+        </p:txBody>
+      </p:sp>
+      <p:sp>
+        <p:nvSpPr>
+          <p:cNvPr id="10" name="Text 8"/>
+          <p:cNvSpPr/>
+          <p:nvPr/>
+        </p:nvSpPr>
+        <p:spPr>
+          <a:xfrm>
+            <a:off x="9814255" y="6473952"/>
+            <a:ext cx="1828800" cy="274320"/>
+          </a:xfrm>
+          <a:prstGeom prst="rect">
+            <a:avLst/>
+          </a:prstGeom>
+          <a:noFill/>
+          <a:ln/>
+        </p:spPr>
+        <p:txBody>
+          <a:bodyPr wrap="square" lIns="0" tIns="0" rIns="0" bIns="0" rtlCol="0" anchor="ctr"/>
+          <a:lstStyle/>
+          <a:p>
+            <a:pPr algn="r" indent="0" marL="0">
+              <a:buNone/>
+            </a:pPr>
+            <a:r>
+              <a:rPr lang="en-US" sz="850" dirty="0">
+                <a:solidFill>
+                  <a:srgbClr val="9AA8B4"/>
+                </a:solidFill>
+                <a:latin typeface="Calibri" pitchFamily="34" charset="0"/>
+                <a:ea typeface="Calibri" pitchFamily="34" charset="-122"/>
+                <a:cs typeface="Calibri" pitchFamily="34" charset="-120"/>
+              </a:rPr>
+              <a:t>CP Lecture Series</a:t>
+            </a:r>
+            <a:pPr algn="r" indent="0" marL="0">
+              <a:buNone/>
+            </a:pPr>
+            <a:r>
+              <a:rPr lang="en-US" sz="850" dirty="0">
+                <a:solidFill>
+                  <a:srgbClr val="DCE4EC"/>
+                </a:solidFill>
+                <a:latin typeface="Calibri" pitchFamily="34" charset="0"/>
+                <a:ea typeface="Calibri" pitchFamily="34" charset="-122"/>
+                <a:cs typeface="Calibri" pitchFamily="34" charset="-120"/>
+              </a:rPr>
+              <a:t>   ·   </a:t>
+            </a:r>
+            <a:pPr algn="r" indent="0" marL="0">
+              <a:buNone/>
+            </a:pPr>
+            <a:r>
+              <a:rPr lang="en-US" sz="850" b="1" dirty="0">
+                <a:solidFill>
+                  <a:srgbClr val="455A64"/>
+                </a:solidFill>
+                <a:latin typeface="Calibri" pitchFamily="34" charset="0"/>
+                <a:ea typeface="Calibri" pitchFamily="34" charset="-122"/>
+                <a:cs typeface="Calibri" pitchFamily="34" charset="-120"/>
+              </a:rPr>
+              <a:t>18</a:t>
+            </a:r>
+            <a:endParaRPr lang="en-US" sz="850" dirty="0"/>
+          </a:p>
+        </p:txBody>
+      </p:sp>
+    </p:spTree>
+  </p:cSld>
+  <p:clrMapOvr>
+    <a:masterClrMapping/>
+  </p:clrMapOvr>
+</p:sld>
+</file>
+
+<file path=ppt/slides/slide22.xml><?xml version="1.0" encoding="utf-8"?>
+<p:sld xmlns:a="http://schemas.openxmlformats.org/drawingml/2006/main" xmlns:r="http://schemas.openxmlformats.org/officeDocument/2006/relationships" xmlns:p="http://schemas.openxmlformats.org/presentationml/2006/main">
+  <p:cSld name="Slide 22">
+    <p:bg>
+      <p:bgPr>
+        <a:solidFill>
+          <a:srgbClr val="FFFFFF"/>
+        </a:solidFill>
+      </p:bgPr>
+    </p:bg>
+    <p:spTree>
+      <p:nvGrpSpPr>
+        <p:cNvPr id="1" name=""/>
+        <p:cNvGrpSpPr/>
+        <p:nvPr/>
+      </p:nvGrpSpPr>
+      <p:grpSpPr>
+        <a:xfrm>
+          <a:off x="0" y="0"/>
+          <a:ext cx="0" cy="0"/>
+          <a:chOff x="0" y="0"/>
+          <a:chExt cx="0" cy="0"/>
+        </a:xfrm>
+      </p:grpSpPr>
+      <p:sp>
+        <p:nvSpPr>
+          <p:cNvPr id="2" name="Text 0"/>
+          <p:cNvSpPr/>
+          <p:nvPr/>
+        </p:nvSpPr>
+        <p:spPr>
+          <a:xfrm>
+            <a:off x="566928" y="329184"/>
+            <a:ext cx="10515600" cy="310896"/>
+          </a:xfrm>
+          <a:prstGeom prst="rect">
+            <a:avLst/>
+          </a:prstGeom>
+          <a:noFill/>
+          <a:ln/>
+        </p:spPr>
+        <p:txBody>
+          <a:bodyPr wrap="square" lIns="0" tIns="0" rIns="0" bIns="0" rtlCol="0" anchor="ctr"/>
+          <a:lstStyle/>
+          <a:p>
+            <a:pPr algn="l" indent="0" marL="0">
+              <a:buNone/>
+            </a:pPr>
+            <a:r>
+              <a:rPr lang="en-US" sz="1100" b="1" spc="150" kern="0" dirty="0">
+                <a:solidFill>
+                  <a:srgbClr val="455A64"/>
+                </a:solidFill>
+                <a:latin typeface="Calibri" pitchFamily="34" charset="0"/>
+                <a:ea typeface="Calibri" pitchFamily="34" charset="-122"/>
+                <a:cs typeface="Calibri" pitchFamily="34" charset="-120"/>
+              </a:rPr>
+              <a:t>LAB MANAGEMENT &amp; QUALITY   ·   BOARD REVIEW  ·  Q3</a:t>
+            </a:r>
+            <a:endParaRPr lang="en-US" sz="1100" dirty="0"/>
+          </a:p>
+        </p:txBody>
+      </p:sp>
+      <p:sp>
+        <p:nvSpPr>
+          <p:cNvPr id="3" name="Text 1"/>
+          <p:cNvSpPr/>
+          <p:nvPr/>
+        </p:nvSpPr>
+        <p:spPr>
+          <a:xfrm>
+            <a:off x="566928" y="713232"/>
+            <a:ext cx="11064240" cy="749808"/>
+          </a:xfrm>
+          <a:prstGeom prst="rect">
+            <a:avLst/>
+          </a:prstGeom>
+          <a:noFill/>
+          <a:ln/>
+        </p:spPr>
+        <p:txBody>
+          <a:bodyPr wrap="square" lIns="0" tIns="0" rIns="0" bIns="0" rtlCol="0" anchor="ctr"/>
+          <a:lstStyle/>
+          <a:p>
+            <a:pPr algn="l" indent="0" marL="0">
+              <a:buNone/>
+            </a:pPr>
+            <a:r>
+              <a:rPr lang="en-US" sz="2600" b="1" dirty="0">
+                <a:solidFill>
+                  <a:srgbClr val="0E3A5F"/>
+                </a:solidFill>
+                <a:latin typeface="Calibri" pitchFamily="34" charset="0"/>
+                <a:ea typeface="Calibri" pitchFamily="34" charset="-122"/>
+                <a:cs typeface="Calibri" pitchFamily="34" charset="-120"/>
+              </a:rPr>
+              <a:t>Board-Style Review</a:t>
+            </a:r>
+            <a:endParaRPr lang="en-US" sz="2600" dirty="0"/>
+          </a:p>
+        </p:txBody>
+      </p:sp>
+      <p:sp>
+        <p:nvSpPr>
+          <p:cNvPr id="4" name="Text 2"/>
+          <p:cNvSpPr/>
+          <p:nvPr/>
+        </p:nvSpPr>
+        <p:spPr>
+          <a:xfrm>
+            <a:off x="566928" y="1417320"/>
+            <a:ext cx="11057839" cy="914400"/>
+          </a:xfrm>
+          <a:prstGeom prst="rect">
+            <a:avLst/>
+          </a:prstGeom>
+          <a:noFill/>
+          <a:ln/>
+        </p:spPr>
+        <p:txBody>
+          <a:bodyPr wrap="square" lIns="0" tIns="0" rIns="0" bIns="0" rtlCol="0" anchor="t"/>
+          <a:lstStyle/>
+          <a:p>
+            <a:pPr algn="l" indent="0" marL="0">
+              <a:lnSpc>
+                <a:spcPct val="105000"/>
+              </a:lnSpc>
+              <a:buNone/>
+            </a:pPr>
+            <a:r>
+              <a:rPr lang="en-US" sz="1450" b="1" dirty="0">
+                <a:solidFill>
+                  <a:srgbClr val="1B2A38"/>
+                </a:solidFill>
+                <a:latin typeface="Calibri" pitchFamily="34" charset="0"/>
+                <a:ea typeface="Calibri" pitchFamily="34" charset="-122"/>
+                <a:cs typeface="Calibri" pitchFamily="34" charset="-120"/>
+              </a:rPr>
+              <a:t>The biggest risk after an LIS interface change is:</a:t>
+            </a:r>
+            <a:endParaRPr lang="en-US" sz="1450" dirty="0"/>
+          </a:p>
+        </p:txBody>
+      </p:sp>
+      <p:sp>
+        <p:nvSpPr>
+          <p:cNvPr id="5" name="Text 3"/>
+          <p:cNvSpPr/>
+          <p:nvPr/>
+        </p:nvSpPr>
+        <p:spPr>
+          <a:xfrm>
+            <a:off x="658368" y="2395728"/>
+            <a:ext cx="6192390" cy="3017520"/>
+          </a:xfrm>
+          <a:prstGeom prst="rect">
+            <a:avLst/>
+          </a:prstGeom>
+          <a:noFill/>
+          <a:ln/>
+        </p:spPr>
+        <p:txBody>
+          <a:bodyPr wrap="square" lIns="0" tIns="0" rIns="0" bIns="0" rtlCol="0" anchor="t"/>
+          <a:lstStyle/>
+          <a:p>
+            <a:pPr algn="l" indent="0" marL="0">
+              <a:spcAft>
+                <a:spcPts val="600"/>
+              </a:spcAft>
+              <a:buNone/>
+            </a:pPr>
+            <a:r>
+              <a:rPr lang="en-US" sz="1350" dirty="0">
+                <a:solidFill>
+                  <a:srgbClr val="33444F"/>
+                </a:solidFill>
+                <a:latin typeface="Calibri" pitchFamily="34" charset="0"/>
+                <a:ea typeface="Calibri" pitchFamily="34" charset="-122"/>
+                <a:cs typeface="Calibri" pitchFamily="34" charset="-120"/>
+              </a:rPr>
+              <a:t>A. Faster results</a:t>
+            </a:r>
+            <a:endParaRPr lang="en-US" sz="1350" dirty="0"/>
+          </a:p>
+          <a:p>
+            <a:pPr algn="l" indent="0" marL="0">
+              <a:spcAft>
+                <a:spcPts val="600"/>
+              </a:spcAft>
+              <a:buNone/>
+            </a:pPr>
+            <a:r>
+              <a:rPr lang="en-US" sz="1350" b="1" dirty="0">
+                <a:solidFill>
+                  <a:srgbClr val="2C3A41"/>
+                </a:solidFill>
+                <a:latin typeface="Calibri" pitchFamily="34" charset="0"/>
+                <a:ea typeface="Calibri" pitchFamily="34" charset="-122"/>
+                <a:cs typeface="Calibri" pitchFamily="34" charset="-120"/>
+              </a:rPr>
+              <a:t>B. Silent mapping errors (units/codes/ranges)</a:t>
+            </a:r>
+            <a:endParaRPr lang="en-US" sz="1350" dirty="0"/>
+          </a:p>
+          <a:p>
+            <a:pPr algn="l" indent="0" marL="0">
+              <a:spcAft>
+                <a:spcPts val="600"/>
+              </a:spcAft>
+              <a:buNone/>
+            </a:pPr>
+            <a:r>
+              <a:rPr lang="en-US" sz="1350" dirty="0">
+                <a:solidFill>
+                  <a:srgbClr val="33444F"/>
+                </a:solidFill>
+                <a:latin typeface="Calibri" pitchFamily="34" charset="0"/>
+                <a:ea typeface="Calibri" pitchFamily="34" charset="-122"/>
+                <a:cs typeface="Calibri" pitchFamily="34" charset="-120"/>
+              </a:rPr>
+              <a:t>C. Reduced storage</a:t>
+            </a:r>
+            <a:endParaRPr lang="en-US" sz="1350" dirty="0"/>
+          </a:p>
+          <a:p>
+            <a:pPr algn="l" indent="0" marL="0">
+              <a:spcAft>
+                <a:spcPts val="600"/>
+              </a:spcAft>
+              <a:buNone/>
+            </a:pPr>
+            <a:r>
+              <a:rPr lang="en-US" sz="1350" dirty="0">
+                <a:solidFill>
+                  <a:srgbClr val="33444F"/>
+                </a:solidFill>
+                <a:latin typeface="Calibri" pitchFamily="34" charset="0"/>
+                <a:ea typeface="Calibri" pitchFamily="34" charset="-122"/>
+                <a:cs typeface="Calibri" pitchFamily="34" charset="-120"/>
+              </a:rPr>
+              <a:t>D. Excessive flags</a:t>
+            </a:r>
+            <a:endParaRPr lang="en-US" sz="1350" dirty="0"/>
+          </a:p>
+          <a:p>
+            <a:pPr algn="l" indent="0" marL="0">
+              <a:spcAft>
+                <a:spcPts val="600"/>
+              </a:spcAft>
+              <a:buNone/>
+            </a:pPr>
+            <a:r>
+              <a:rPr lang="en-US" sz="1350" dirty="0">
+                <a:solidFill>
+                  <a:srgbClr val="33444F"/>
+                </a:solidFill>
+                <a:latin typeface="Calibri" pitchFamily="34" charset="0"/>
+                <a:ea typeface="Calibri" pitchFamily="34" charset="-122"/>
+                <a:cs typeface="Calibri" pitchFamily="34" charset="-120"/>
+              </a:rPr>
+              <a:t>E. Lower cost</a:t>
+            </a:r>
+            <a:endParaRPr lang="en-US" sz="1350" dirty="0"/>
+          </a:p>
+        </p:txBody>
+      </p:sp>
+      <p:sp>
+        <p:nvSpPr>
+          <p:cNvPr id="6" name="Shape 4"/>
+          <p:cNvSpPr/>
+          <p:nvPr/>
+        </p:nvSpPr>
+        <p:spPr>
+          <a:xfrm>
+            <a:off x="7201632" y="2395728"/>
+            <a:ext cx="4423136" cy="3246120"/>
+          </a:xfrm>
+          <a:prstGeom prst="roundRect">
+            <a:avLst>
+              <a:gd name="adj" fmla="val 2535"/>
+            </a:avLst>
+          </a:prstGeom>
+          <a:solidFill>
+            <a:srgbClr val="ECEFF1"/>
+          </a:solidFill>
+          <a:ln/>
+          <a:effectLst>
+            <a:outerShdw sx="100000" sy="100000" kx="0" ky="0" algn="bl" rotWithShape="0" blurRad="88900" dist="25400" dir="5400000">
+              <a:srgbClr val="22303C">
+                <a:alpha val="12000"/>
+              </a:srgbClr>
+            </a:outerShdw>
+          </a:effectLst>
+        </p:spPr>
+      </p:sp>
+      <p:sp>
+        <p:nvSpPr>
+          <p:cNvPr id="7" name="Text 5"/>
+          <p:cNvSpPr/>
+          <p:nvPr/>
+        </p:nvSpPr>
+        <p:spPr>
+          <a:xfrm>
+            <a:off x="7439376" y="2578608"/>
+            <a:ext cx="3965936" cy="457200"/>
+          </a:xfrm>
+          <a:prstGeom prst="rect">
+            <a:avLst/>
+          </a:prstGeom>
+          <a:noFill/>
+          <a:ln/>
+        </p:spPr>
+        <p:txBody>
+          <a:bodyPr wrap="square" lIns="0" tIns="0" rIns="0" bIns="0" rtlCol="0" anchor="ctr"/>
+          <a:lstStyle/>
+          <a:p>
+            <a:pPr indent="0" marL="0">
+              <a:buNone/>
+            </a:pPr>
+            <a:r>
+              <a:rPr lang="en-US" sz="1500" b="1" dirty="0">
+                <a:solidFill>
+                  <a:srgbClr val="455A64"/>
+                </a:solidFill>
+                <a:latin typeface="Calibri" pitchFamily="34" charset="0"/>
+                <a:ea typeface="Calibri" pitchFamily="34" charset="-122"/>
+                <a:cs typeface="Calibri" pitchFamily="34" charset="-120"/>
+              </a:rPr>
+              <a:t>ANSWER  </a:t>
+            </a:r>
+            <a:pPr indent="0" marL="0">
+              <a:buNone/>
+            </a:pPr>
+            <a:r>
+              <a:rPr lang="en-US" sz="1500" b="1" dirty="0">
+                <a:solidFill>
+                  <a:srgbClr val="1B2A38"/>
+                </a:solidFill>
+                <a:latin typeface="Calibri" pitchFamily="34" charset="0"/>
+                <a:ea typeface="Calibri" pitchFamily="34" charset="-122"/>
+                <a:cs typeface="Calibri" pitchFamily="34" charset="-120"/>
+              </a:rPr>
+              <a:t>B — Silent mapping errors</a:t>
+            </a:r>
+            <a:endParaRPr lang="en-US" sz="1500" dirty="0"/>
+          </a:p>
+        </p:txBody>
+      </p:sp>
+      <p:sp>
+        <p:nvSpPr>
+          <p:cNvPr id="8" name="Text 6"/>
+          <p:cNvSpPr/>
+          <p:nvPr/>
+        </p:nvSpPr>
+        <p:spPr>
+          <a:xfrm>
+            <a:off x="7439376" y="3127248"/>
+            <a:ext cx="3947648" cy="2377440"/>
+          </a:xfrm>
+          <a:prstGeom prst="rect">
+            <a:avLst/>
+          </a:prstGeom>
+          <a:noFill/>
+          <a:ln/>
+        </p:spPr>
+        <p:txBody>
+          <a:bodyPr wrap="square" lIns="0" tIns="0" rIns="0" bIns="0" rtlCol="0" anchor="t"/>
+          <a:lstStyle/>
+          <a:p>
+            <a:pPr algn="l" indent="0" marL="0">
+              <a:lnSpc>
+                <a:spcPct val="108000"/>
+              </a:lnSpc>
+              <a:buNone/>
+            </a:pPr>
+            <a:r>
+              <a:rPr lang="en-US" sz="1250" dirty="0">
+                <a:solidFill>
+                  <a:srgbClr val="33444F"/>
+                </a:solidFill>
+                <a:latin typeface="Calibri" pitchFamily="34" charset="0"/>
+                <a:ea typeface="Calibri" pitchFamily="34" charset="-122"/>
+                <a:cs typeface="Calibri" pitchFamily="34" charset="-120"/>
+              </a:rPr>
+              <a:t>Mapping errors can corrupt results invisibly; interfaces must be revalidated after any change.</a:t>
+            </a:r>
+            <a:endParaRPr lang="en-US" sz="1250" dirty="0"/>
+          </a:p>
+        </p:txBody>
+      </p:sp>
+      <p:sp>
+        <p:nvSpPr>
+          <p:cNvPr id="9" name="Text 7"/>
+          <p:cNvSpPr/>
+          <p:nvPr/>
+        </p:nvSpPr>
+        <p:spPr>
+          <a:xfrm>
+            <a:off x="566928" y="6473952"/>
+            <a:ext cx="7772400" cy="274320"/>
+          </a:xfrm>
+          <a:prstGeom prst="rect">
+            <a:avLst/>
+          </a:prstGeom>
+          <a:noFill/>
+          <a:ln/>
+        </p:spPr>
+        <p:txBody>
+          <a:bodyPr wrap="square" lIns="0" tIns="0" rIns="0" bIns="0" rtlCol="0" anchor="ctr"/>
+          <a:lstStyle/>
+          <a:p>
+            <a:pPr algn="l" indent="0" marL="0">
+              <a:buNone/>
+            </a:pPr>
+            <a:r>
+              <a:rPr lang="en-US" sz="850" dirty="0">
+                <a:solidFill>
+                  <a:srgbClr val="9AA8B4"/>
+                </a:solidFill>
+                <a:latin typeface="Calibri" pitchFamily="34" charset="0"/>
+                <a:ea typeface="Calibri" pitchFamily="34" charset="-122"/>
+                <a:cs typeface="Calibri" pitchFamily="34" charset="-120"/>
+              </a:rPr>
+              <a:t>Makassed General Hospital  ·  Department of Laboratory Medicine</a:t>
+            </a:r>
+            <a:endParaRPr lang="en-US" sz="850" dirty="0"/>
+          </a:p>
+        </p:txBody>
+      </p:sp>
+      <p:sp>
+        <p:nvSpPr>
+          <p:cNvPr id="10" name="Text 8"/>
+          <p:cNvSpPr/>
+          <p:nvPr/>
+        </p:nvSpPr>
+        <p:spPr>
+          <a:xfrm>
+            <a:off x="9814255" y="6473952"/>
+            <a:ext cx="1828800" cy="274320"/>
+          </a:xfrm>
+          <a:prstGeom prst="rect">
+            <a:avLst/>
+          </a:prstGeom>
+          <a:noFill/>
+          <a:ln/>
+        </p:spPr>
+        <p:txBody>
+          <a:bodyPr wrap="square" lIns="0" tIns="0" rIns="0" bIns="0" rtlCol="0" anchor="ctr"/>
+          <a:lstStyle/>
+          <a:p>
+            <a:pPr algn="r" indent="0" marL="0">
+              <a:buNone/>
+            </a:pPr>
+            <a:r>
+              <a:rPr lang="en-US" sz="850" dirty="0">
+                <a:solidFill>
+                  <a:srgbClr val="9AA8B4"/>
+                </a:solidFill>
+                <a:latin typeface="Calibri" pitchFamily="34" charset="0"/>
+                <a:ea typeface="Calibri" pitchFamily="34" charset="-122"/>
+                <a:cs typeface="Calibri" pitchFamily="34" charset="-120"/>
+              </a:rPr>
+              <a:t>CP Lecture Series</a:t>
+            </a:r>
+            <a:pPr algn="r" indent="0" marL="0">
+              <a:buNone/>
+            </a:pPr>
+            <a:r>
+              <a:rPr lang="en-US" sz="850" dirty="0">
+                <a:solidFill>
+                  <a:srgbClr val="DCE4EC"/>
+                </a:solidFill>
+                <a:latin typeface="Calibri" pitchFamily="34" charset="0"/>
+                <a:ea typeface="Calibri" pitchFamily="34" charset="-122"/>
+                <a:cs typeface="Calibri" pitchFamily="34" charset="-120"/>
+              </a:rPr>
+              <a:t>   ·   </a:t>
+            </a:r>
+            <a:pPr algn="r" indent="0" marL="0">
+              <a:buNone/>
+            </a:pPr>
+            <a:r>
+              <a:rPr lang="en-US" sz="850" b="1" dirty="0">
+                <a:solidFill>
+                  <a:srgbClr val="455A64"/>
+                </a:solidFill>
+                <a:latin typeface="Calibri" pitchFamily="34" charset="0"/>
+                <a:ea typeface="Calibri" pitchFamily="34" charset="-122"/>
+                <a:cs typeface="Calibri" pitchFamily="34" charset="-120"/>
+              </a:rPr>
+              <a:t>19</a:t>
+            </a:r>
+            <a:endParaRPr lang="en-US" sz="850" dirty="0"/>
+          </a:p>
+        </p:txBody>
+      </p:sp>
+    </p:spTree>
+  </p:cSld>
+  <p:clrMapOvr>
+    <a:masterClrMapping/>
+  </p:clrMapOvr>
+</p:sld>
+</file>
+
+<file path=ppt/slides/slide23.xml><?xml version="1.0" encoding="utf-8"?>
+<p:sld xmlns:a="http://schemas.openxmlformats.org/drawingml/2006/main" xmlns:r="http://schemas.openxmlformats.org/officeDocument/2006/relationships" xmlns:p="http://schemas.openxmlformats.org/presentationml/2006/main">
+  <p:cSld name="Slide 23">
+    <p:bg>
+      <p:bgPr>
+        <a:solidFill>
+          <a:srgbClr val="FFFFFF"/>
+        </a:solidFill>
+      </p:bgPr>
+    </p:bg>
+    <p:spTree>
+      <p:nvGrpSpPr>
+        <p:cNvPr id="1" name=""/>
+        <p:cNvGrpSpPr/>
+        <p:nvPr/>
+      </p:nvGrpSpPr>
+      <p:grpSpPr>
+        <a:xfrm>
+          <a:off x="0" y="0"/>
+          <a:ext cx="0" cy="0"/>
+          <a:chOff x="0" y="0"/>
+          <a:chExt cx="0" cy="0"/>
+        </a:xfrm>
+      </p:grpSpPr>
+      <p:sp>
+        <p:nvSpPr>
+          <p:cNvPr id="2" name="Text 0"/>
+          <p:cNvSpPr/>
+          <p:nvPr/>
+        </p:nvSpPr>
+        <p:spPr>
+          <a:xfrm>
+            <a:off x="566928" y="329184"/>
+            <a:ext cx="10515600" cy="310896"/>
+          </a:xfrm>
+          <a:prstGeom prst="rect">
+            <a:avLst/>
+          </a:prstGeom>
+          <a:noFill/>
+          <a:ln/>
+        </p:spPr>
+        <p:txBody>
+          <a:bodyPr wrap="square" lIns="0" tIns="0" rIns="0" bIns="0" rtlCol="0" anchor="ctr"/>
+          <a:lstStyle/>
+          <a:p>
+            <a:pPr algn="l" indent="0" marL="0">
+              <a:buNone/>
+            </a:pPr>
+            <a:r>
+              <a:rPr lang="en-US" sz="1100" b="1" spc="150" kern="0" dirty="0">
+                <a:solidFill>
+                  <a:srgbClr val="455A64"/>
+                </a:solidFill>
+                <a:latin typeface="Calibri" pitchFamily="34" charset="0"/>
+                <a:ea typeface="Calibri" pitchFamily="34" charset="-122"/>
+                <a:cs typeface="Calibri" pitchFamily="34" charset="-120"/>
+              </a:rPr>
+              <a:t>LAB MANAGEMENT &amp; QUALITY   ·   BOARD REVIEW  ·  Q4</a:t>
+            </a:r>
+            <a:endParaRPr lang="en-US" sz="1100" dirty="0"/>
+          </a:p>
+        </p:txBody>
+      </p:sp>
+      <p:sp>
+        <p:nvSpPr>
+          <p:cNvPr id="3" name="Text 1"/>
+          <p:cNvSpPr/>
+          <p:nvPr/>
+        </p:nvSpPr>
+        <p:spPr>
+          <a:xfrm>
+            <a:off x="566928" y="713232"/>
+            <a:ext cx="11064240" cy="749808"/>
+          </a:xfrm>
+          <a:prstGeom prst="rect">
+            <a:avLst/>
+          </a:prstGeom>
+          <a:noFill/>
+          <a:ln/>
+        </p:spPr>
+        <p:txBody>
+          <a:bodyPr wrap="square" lIns="0" tIns="0" rIns="0" bIns="0" rtlCol="0" anchor="ctr"/>
+          <a:lstStyle/>
+          <a:p>
+            <a:pPr algn="l" indent="0" marL="0">
+              <a:buNone/>
+            </a:pPr>
+            <a:r>
+              <a:rPr lang="en-US" sz="2600" b="1" dirty="0">
+                <a:solidFill>
+                  <a:srgbClr val="0E3A5F"/>
+                </a:solidFill>
+                <a:latin typeface="Calibri" pitchFamily="34" charset="0"/>
+                <a:ea typeface="Calibri" pitchFamily="34" charset="-122"/>
+                <a:cs typeface="Calibri" pitchFamily="34" charset="-120"/>
+              </a:rPr>
+              <a:t>Board-Style Review</a:t>
+            </a:r>
+            <a:endParaRPr lang="en-US" sz="2600" dirty="0"/>
+          </a:p>
+        </p:txBody>
+      </p:sp>
+      <p:sp>
+        <p:nvSpPr>
+          <p:cNvPr id="4" name="Text 2"/>
+          <p:cNvSpPr/>
+          <p:nvPr/>
+        </p:nvSpPr>
+        <p:spPr>
+          <a:xfrm>
+            <a:off x="566928" y="1417320"/>
+            <a:ext cx="11057839" cy="914400"/>
+          </a:xfrm>
+          <a:prstGeom prst="rect">
+            <a:avLst/>
+          </a:prstGeom>
+          <a:noFill/>
+          <a:ln/>
+        </p:spPr>
+        <p:txBody>
+          <a:bodyPr wrap="square" lIns="0" tIns="0" rIns="0" bIns="0" rtlCol="0" anchor="t"/>
+          <a:lstStyle/>
+          <a:p>
+            <a:pPr algn="l" indent="0" marL="0">
+              <a:lnSpc>
+                <a:spcPct val="105000"/>
+              </a:lnSpc>
+              <a:buNone/>
+            </a:pPr>
+            <a:r>
+              <a:rPr lang="en-US" sz="1450" b="1" dirty="0">
+                <a:solidFill>
+                  <a:srgbClr val="1B2A38"/>
+                </a:solidFill>
+                <a:latin typeface="Calibri" pitchFamily="34" charset="0"/>
+                <a:ea typeface="Calibri" pitchFamily="34" charset="-122"/>
+                <a:cs typeface="Calibri" pitchFamily="34" charset="-120"/>
+              </a:rPr>
+              <a:t>Autoverification rules must be:</a:t>
+            </a:r>
+            <a:endParaRPr lang="en-US" sz="1450" dirty="0"/>
+          </a:p>
+        </p:txBody>
+      </p:sp>
+      <p:sp>
+        <p:nvSpPr>
+          <p:cNvPr id="5" name="Text 3"/>
+          <p:cNvSpPr/>
+          <p:nvPr/>
+        </p:nvSpPr>
+        <p:spPr>
+          <a:xfrm>
+            <a:off x="658368" y="2395728"/>
+            <a:ext cx="6192390" cy="3017520"/>
+          </a:xfrm>
+          <a:prstGeom prst="rect">
+            <a:avLst/>
+          </a:prstGeom>
+          <a:noFill/>
+          <a:ln/>
+        </p:spPr>
+        <p:txBody>
+          <a:bodyPr wrap="square" lIns="0" tIns="0" rIns="0" bIns="0" rtlCol="0" anchor="t"/>
+          <a:lstStyle/>
+          <a:p>
+            <a:pPr algn="l" indent="0" marL="0">
+              <a:spcAft>
+                <a:spcPts val="600"/>
+              </a:spcAft>
+              <a:buNone/>
+            </a:pPr>
+            <a:r>
+              <a:rPr lang="en-US" sz="1350" dirty="0">
+                <a:solidFill>
+                  <a:srgbClr val="33444F"/>
+                </a:solidFill>
+                <a:latin typeface="Calibri" pitchFamily="34" charset="0"/>
+                <a:ea typeface="Calibri" pitchFamily="34" charset="-122"/>
+                <a:cs typeface="Calibri" pitchFamily="34" charset="-120"/>
+              </a:rPr>
+              <a:t>A. Set once and never changed</a:t>
+            </a:r>
+            <a:endParaRPr lang="en-US" sz="1350" dirty="0"/>
+          </a:p>
+          <a:p>
+            <a:pPr algn="l" indent="0" marL="0">
+              <a:spcAft>
+                <a:spcPts val="600"/>
+              </a:spcAft>
+              <a:buNone/>
+            </a:pPr>
+            <a:r>
+              <a:rPr lang="en-US" sz="1350" b="1" dirty="0">
+                <a:solidFill>
+                  <a:srgbClr val="2C3A41"/>
+                </a:solidFill>
+                <a:latin typeface="Calibri" pitchFamily="34" charset="0"/>
+                <a:ea typeface="Calibri" pitchFamily="34" charset="-122"/>
+                <a:cs typeface="Calibri" pitchFamily="34" charset="-120"/>
+              </a:rPr>
+              <a:t>B. Validated and monitored, with exceptions held for review</a:t>
+            </a:r>
+            <a:endParaRPr lang="en-US" sz="1350" dirty="0"/>
+          </a:p>
+          <a:p>
+            <a:pPr algn="l" indent="0" marL="0">
+              <a:spcAft>
+                <a:spcPts val="600"/>
+              </a:spcAft>
+              <a:buNone/>
+            </a:pPr>
+            <a:r>
+              <a:rPr lang="en-US" sz="1350" dirty="0">
+                <a:solidFill>
+                  <a:srgbClr val="33444F"/>
+                </a:solidFill>
+                <a:latin typeface="Calibri" pitchFamily="34" charset="0"/>
+                <a:ea typeface="Calibri" pitchFamily="34" charset="-122"/>
+                <a:cs typeface="Calibri" pitchFamily="34" charset="-120"/>
+              </a:rPr>
+              <a:t>C. Applied to all results without exception</a:t>
+            </a:r>
+            <a:endParaRPr lang="en-US" sz="1350" dirty="0"/>
+          </a:p>
+          <a:p>
+            <a:pPr algn="l" indent="0" marL="0">
+              <a:spcAft>
+                <a:spcPts val="600"/>
+              </a:spcAft>
+              <a:buNone/>
+            </a:pPr>
+            <a:r>
+              <a:rPr lang="en-US" sz="1350" dirty="0">
+                <a:solidFill>
+                  <a:srgbClr val="33444F"/>
+                </a:solidFill>
+                <a:latin typeface="Calibri" pitchFamily="34" charset="0"/>
+                <a:ea typeface="Calibri" pitchFamily="34" charset="-122"/>
+                <a:cs typeface="Calibri" pitchFamily="34" charset="-120"/>
+              </a:rPr>
+              <a:t>D. Hidden from staff</a:t>
+            </a:r>
+            <a:endParaRPr lang="en-US" sz="1350" dirty="0"/>
+          </a:p>
+          <a:p>
+            <a:pPr algn="l" indent="0" marL="0">
+              <a:spcAft>
+                <a:spcPts val="600"/>
+              </a:spcAft>
+              <a:buNone/>
+            </a:pPr>
+            <a:r>
+              <a:rPr lang="en-US" sz="1350" dirty="0">
+                <a:solidFill>
+                  <a:srgbClr val="33444F"/>
+                </a:solidFill>
+                <a:latin typeface="Calibri" pitchFamily="34" charset="0"/>
+                <a:ea typeface="Calibri" pitchFamily="34" charset="-122"/>
+                <a:cs typeface="Calibri" pitchFamily="34" charset="-120"/>
+              </a:rPr>
+              <a:t>E. Used only for QC</a:t>
+            </a:r>
+            <a:endParaRPr lang="en-US" sz="1350" dirty="0"/>
+          </a:p>
+        </p:txBody>
+      </p:sp>
+      <p:sp>
+        <p:nvSpPr>
+          <p:cNvPr id="6" name="Shape 4"/>
+          <p:cNvSpPr/>
+          <p:nvPr/>
+        </p:nvSpPr>
+        <p:spPr>
+          <a:xfrm>
+            <a:off x="7201632" y="2395728"/>
+            <a:ext cx="4423136" cy="3246120"/>
+          </a:xfrm>
+          <a:prstGeom prst="roundRect">
+            <a:avLst>
+              <a:gd name="adj" fmla="val 2535"/>
+            </a:avLst>
+          </a:prstGeom>
+          <a:solidFill>
+            <a:srgbClr val="ECEFF1"/>
+          </a:solidFill>
+          <a:ln/>
+          <a:effectLst>
+            <a:outerShdw sx="100000" sy="100000" kx="0" ky="0" algn="bl" rotWithShape="0" blurRad="88900" dist="25400" dir="5400000">
+              <a:srgbClr val="22303C">
+                <a:alpha val="12000"/>
+              </a:srgbClr>
+            </a:outerShdw>
+          </a:effectLst>
+        </p:spPr>
+      </p:sp>
+      <p:sp>
+        <p:nvSpPr>
+          <p:cNvPr id="7" name="Text 5"/>
+          <p:cNvSpPr/>
+          <p:nvPr/>
+        </p:nvSpPr>
+        <p:spPr>
+          <a:xfrm>
+            <a:off x="7439376" y="2578608"/>
+            <a:ext cx="3965936" cy="457200"/>
+          </a:xfrm>
+          <a:prstGeom prst="rect">
+            <a:avLst/>
+          </a:prstGeom>
+          <a:noFill/>
+          <a:ln/>
+        </p:spPr>
+        <p:txBody>
+          <a:bodyPr wrap="square" lIns="0" tIns="0" rIns="0" bIns="0" rtlCol="0" anchor="ctr"/>
+          <a:lstStyle/>
+          <a:p>
+            <a:pPr indent="0" marL="0">
+              <a:buNone/>
+            </a:pPr>
+            <a:r>
+              <a:rPr lang="en-US" sz="1500" b="1" dirty="0">
+                <a:solidFill>
+                  <a:srgbClr val="455A64"/>
+                </a:solidFill>
+                <a:latin typeface="Calibri" pitchFamily="34" charset="0"/>
+                <a:ea typeface="Calibri" pitchFamily="34" charset="-122"/>
+                <a:cs typeface="Calibri" pitchFamily="34" charset="-120"/>
+              </a:rPr>
+              <a:t>ANSWER  </a:t>
+            </a:r>
+            <a:pPr indent="0" marL="0">
+              <a:buNone/>
+            </a:pPr>
+            <a:r>
+              <a:rPr lang="en-US" sz="1500" b="1" dirty="0">
+                <a:solidFill>
+                  <a:srgbClr val="1B2A38"/>
+                </a:solidFill>
+                <a:latin typeface="Calibri" pitchFamily="34" charset="0"/>
+                <a:ea typeface="Calibri" pitchFamily="34" charset="-122"/>
+                <a:cs typeface="Calibri" pitchFamily="34" charset="-120"/>
+              </a:rPr>
+              <a:t>B — Validated and monitored</a:t>
+            </a:r>
+            <a:endParaRPr lang="en-US" sz="1500" dirty="0"/>
+          </a:p>
+        </p:txBody>
+      </p:sp>
+      <p:sp>
+        <p:nvSpPr>
+          <p:cNvPr id="8" name="Text 6"/>
+          <p:cNvSpPr/>
+          <p:nvPr/>
+        </p:nvSpPr>
+        <p:spPr>
+          <a:xfrm>
+            <a:off x="7439376" y="3127248"/>
+            <a:ext cx="3947648" cy="2377440"/>
+          </a:xfrm>
+          <a:prstGeom prst="rect">
+            <a:avLst/>
+          </a:prstGeom>
+          <a:noFill/>
+          <a:ln/>
+        </p:spPr>
+        <p:txBody>
+          <a:bodyPr wrap="square" lIns="0" tIns="0" rIns="0" bIns="0" rtlCol="0" anchor="t"/>
+          <a:lstStyle/>
+          <a:p>
+            <a:pPr algn="l" indent="0" marL="0">
+              <a:lnSpc>
+                <a:spcPct val="108000"/>
+              </a:lnSpc>
+              <a:buNone/>
+            </a:pPr>
+            <a:r>
+              <a:rPr lang="en-US" sz="1250" dirty="0">
+                <a:solidFill>
+                  <a:srgbClr val="33444F"/>
+                </a:solidFill>
+                <a:latin typeface="Calibri" pitchFamily="34" charset="0"/>
+                <a:ea typeface="Calibri" pitchFamily="34" charset="-122"/>
+                <a:cs typeface="Calibri" pitchFamily="34" charset="-120"/>
+              </a:rPr>
+              <a:t>Autoverification improves efficiency only if rules are validated against exceptions and continually monitored.</a:t>
+            </a:r>
+            <a:endParaRPr lang="en-US" sz="1250" dirty="0"/>
+          </a:p>
+        </p:txBody>
+      </p:sp>
+      <p:sp>
+        <p:nvSpPr>
+          <p:cNvPr id="9" name="Text 7"/>
+          <p:cNvSpPr/>
+          <p:nvPr/>
+        </p:nvSpPr>
+        <p:spPr>
+          <a:xfrm>
+            <a:off x="566928" y="6473952"/>
+            <a:ext cx="7772400" cy="274320"/>
+          </a:xfrm>
+          <a:prstGeom prst="rect">
+            <a:avLst/>
+          </a:prstGeom>
+          <a:noFill/>
+          <a:ln/>
+        </p:spPr>
+        <p:txBody>
+          <a:bodyPr wrap="square" lIns="0" tIns="0" rIns="0" bIns="0" rtlCol="0" anchor="ctr"/>
+          <a:lstStyle/>
+          <a:p>
+            <a:pPr algn="l" indent="0" marL="0">
+              <a:buNone/>
+            </a:pPr>
+            <a:r>
+              <a:rPr lang="en-US" sz="850" dirty="0">
+                <a:solidFill>
+                  <a:srgbClr val="9AA8B4"/>
+                </a:solidFill>
+                <a:latin typeface="Calibri" pitchFamily="34" charset="0"/>
+                <a:ea typeface="Calibri" pitchFamily="34" charset="-122"/>
+                <a:cs typeface="Calibri" pitchFamily="34" charset="-120"/>
+              </a:rPr>
+              <a:t>Makassed General Hospital  ·  Department of Laboratory Medicine</a:t>
+            </a:r>
+            <a:endParaRPr lang="en-US" sz="850" dirty="0"/>
+          </a:p>
+        </p:txBody>
+      </p:sp>
+      <p:sp>
+        <p:nvSpPr>
+          <p:cNvPr id="10" name="Text 8"/>
+          <p:cNvSpPr/>
+          <p:nvPr/>
+        </p:nvSpPr>
+        <p:spPr>
+          <a:xfrm>
+            <a:off x="9814255" y="6473952"/>
+            <a:ext cx="1828800" cy="274320"/>
+          </a:xfrm>
+          <a:prstGeom prst="rect">
+            <a:avLst/>
+          </a:prstGeom>
+          <a:noFill/>
+          <a:ln/>
+        </p:spPr>
+        <p:txBody>
+          <a:bodyPr wrap="square" lIns="0" tIns="0" rIns="0" bIns="0" rtlCol="0" anchor="ctr"/>
+          <a:lstStyle/>
+          <a:p>
+            <a:pPr algn="r" indent="0" marL="0">
+              <a:buNone/>
+            </a:pPr>
+            <a:r>
+              <a:rPr lang="en-US" sz="850" dirty="0">
+                <a:solidFill>
+                  <a:srgbClr val="9AA8B4"/>
+                </a:solidFill>
+                <a:latin typeface="Calibri" pitchFamily="34" charset="0"/>
+                <a:ea typeface="Calibri" pitchFamily="34" charset="-122"/>
+                <a:cs typeface="Calibri" pitchFamily="34" charset="-120"/>
+              </a:rPr>
+              <a:t>CP Lecture Series</a:t>
+            </a:r>
+            <a:pPr algn="r" indent="0" marL="0">
+              <a:buNone/>
+            </a:pPr>
+            <a:r>
+              <a:rPr lang="en-US" sz="850" dirty="0">
+                <a:solidFill>
+                  <a:srgbClr val="DCE4EC"/>
+                </a:solidFill>
+                <a:latin typeface="Calibri" pitchFamily="34" charset="0"/>
+                <a:ea typeface="Calibri" pitchFamily="34" charset="-122"/>
+                <a:cs typeface="Calibri" pitchFamily="34" charset="-120"/>
+              </a:rPr>
+              <a:t>   ·   </a:t>
+            </a:r>
+            <a:pPr algn="r" indent="0" marL="0">
+              <a:buNone/>
+            </a:pPr>
+            <a:r>
+              <a:rPr lang="en-US" sz="850" b="1" dirty="0">
+                <a:solidFill>
+                  <a:srgbClr val="455A64"/>
+                </a:solidFill>
+                <a:latin typeface="Calibri" pitchFamily="34" charset="0"/>
+                <a:ea typeface="Calibri" pitchFamily="34" charset="-122"/>
+                <a:cs typeface="Calibri" pitchFamily="34" charset="-120"/>
+              </a:rPr>
+              <a:t>20</a:t>
+            </a:r>
+            <a:endParaRPr lang="en-US" sz="850" dirty="0"/>
+          </a:p>
+        </p:txBody>
+      </p:sp>
+    </p:spTree>
+  </p:cSld>
+  <p:clrMapOvr>
+    <a:masterClrMapping/>
+  </p:clrMapOvr>
+</p:sld>
+</file>
+
+<file path=ppt/slides/slide24.xml><?xml version="1.0" encoding="utf-8"?>
+<p:sld xmlns:a="http://schemas.openxmlformats.org/drawingml/2006/main" xmlns:r="http://schemas.openxmlformats.org/officeDocument/2006/relationships" xmlns:p="http://schemas.openxmlformats.org/presentationml/2006/main">
+  <p:cSld name="Slide 24">
+    <p:bg>
+      <p:bgPr>
+        <a:solidFill>
+          <a:srgbClr val="0A2A45"/>
+        </a:solidFill>
+      </p:bgPr>
+    </p:bg>
+    <p:spTree>
+      <p:nvGrpSpPr>
+        <p:cNvPr id="1" name=""/>
+        <p:cNvGrpSpPr/>
+        <p:nvPr/>
+      </p:nvGrpSpPr>
+      <p:grpSpPr>
+        <a:xfrm>
+          <a:off x="0" y="0"/>
+          <a:ext cx="0" cy="0"/>
+          <a:chOff x="0" y="0"/>
+          <a:chExt cx="0" cy="0"/>
+        </a:xfrm>
+      </p:grpSpPr>
+      <p:sp>
+        <p:nvSpPr>
+          <p:cNvPr id="2" name="Text 0"/>
+          <p:cNvSpPr/>
+          <p:nvPr/>
+        </p:nvSpPr>
+        <p:spPr>
+          <a:xfrm>
+            <a:off x="566928" y="329184"/>
+            <a:ext cx="10058400" cy="310896"/>
+          </a:xfrm>
+          <a:prstGeom prst="rect">
+            <a:avLst/>
+          </a:prstGeom>
+          <a:noFill/>
+          <a:ln/>
+        </p:spPr>
+        <p:txBody>
+          <a:bodyPr wrap="square" lIns="0" tIns="0" rIns="0" bIns="0" rtlCol="0" anchor="ctr"/>
+          <a:lstStyle/>
+          <a:p>
+            <a:pPr indent="0" marL="0">
+              <a:buNone/>
+            </a:pPr>
+            <a:r>
+              <a:rPr lang="en-US" sz="1100" b="1" spc="150" kern="0" dirty="0">
+                <a:solidFill>
+                  <a:srgbClr val="455A64"/>
+                </a:solidFill>
+                <a:latin typeface="Calibri" pitchFamily="34" charset="0"/>
+                <a:ea typeface="Calibri" pitchFamily="34" charset="-122"/>
+                <a:cs typeface="Calibri" pitchFamily="34" charset="-120"/>
+              </a:rPr>
+              <a:t>LAB MANAGEMENT &amp; QUALITY</a:t>
+            </a:r>
+            <a:endParaRPr lang="en-US" sz="1100" dirty="0"/>
+          </a:p>
+        </p:txBody>
+      </p:sp>
+      <p:sp>
+        <p:nvSpPr>
+          <p:cNvPr id="3" name="Text 1"/>
+          <p:cNvSpPr/>
+          <p:nvPr/>
+        </p:nvSpPr>
+        <p:spPr>
+          <a:xfrm>
+            <a:off x="566928" y="676656"/>
+            <a:ext cx="10972800" cy="749808"/>
+          </a:xfrm>
+          <a:prstGeom prst="rect">
+            <a:avLst/>
+          </a:prstGeom>
+          <a:noFill/>
+          <a:ln/>
+        </p:spPr>
+        <p:txBody>
+          <a:bodyPr wrap="square" lIns="0" tIns="0" rIns="0" bIns="0" rtlCol="0" anchor="ctr"/>
+          <a:lstStyle/>
+          <a:p>
+            <a:pPr indent="0" marL="0">
+              <a:buNone/>
+            </a:pPr>
+            <a:r>
+              <a:rPr lang="en-US" sz="3000" b="1" dirty="0">
+                <a:solidFill>
+                  <a:srgbClr val="FFFFFF"/>
+                </a:solidFill>
+                <a:latin typeface="Calibri" pitchFamily="34" charset="0"/>
+                <a:ea typeface="Calibri" pitchFamily="34" charset="-122"/>
+                <a:cs typeface="Calibri" pitchFamily="34" charset="-120"/>
+              </a:rPr>
+              <a:t>Key Take-Home Points</a:t>
+            </a:r>
+            <a:endParaRPr lang="en-US" sz="3000" dirty="0"/>
+          </a:p>
+        </p:txBody>
+      </p:sp>
+      <p:sp>
+        <p:nvSpPr>
+          <p:cNvPr id="4" name="Shape 2"/>
+          <p:cNvSpPr/>
+          <p:nvPr/>
+        </p:nvSpPr>
+        <p:spPr>
+          <a:xfrm>
+            <a:off x="566928" y="1517904"/>
+            <a:ext cx="11057839" cy="841248"/>
+          </a:xfrm>
+          <a:prstGeom prst="roundRect">
+            <a:avLst>
+              <a:gd name="adj" fmla="val 7609"/>
+            </a:avLst>
+          </a:prstGeom>
+          <a:solidFill>
+            <a:srgbClr val="143651"/>
+          </a:solidFill>
+          <a:ln/>
+        </p:spPr>
+      </p:sp>
+      <p:sp>
+        <p:nvSpPr>
+          <p:cNvPr id="5" name="Shape 3"/>
+          <p:cNvSpPr/>
+          <p:nvPr/>
+        </p:nvSpPr>
+        <p:spPr>
+          <a:xfrm>
+            <a:off x="749808" y="1755648"/>
+            <a:ext cx="365760" cy="365760"/>
+          </a:xfrm>
+          <a:prstGeom prst="ellipse">
+            <a:avLst/>
+          </a:prstGeom>
+          <a:solidFill>
+            <a:srgbClr val="455A64"/>
+          </a:solidFill>
+          <a:ln/>
+          <a:effectLst>
+            <a:outerShdw sx="100000" sy="100000" kx="0" ky="0" algn="bl" rotWithShape="0" blurRad="88900" dist="25400" dir="5400000">
+              <a:srgbClr val="22303C">
+                <a:alpha val="12000"/>
+              </a:srgbClr>
+            </a:outerShdw>
+          </a:effectLst>
+        </p:spPr>
+      </p:sp>
+      <p:sp>
+        <p:nvSpPr>
+          <p:cNvPr id="6" name="Text 4"/>
+          <p:cNvSpPr/>
+          <p:nvPr/>
+        </p:nvSpPr>
+        <p:spPr>
+          <a:xfrm>
+            <a:off x="749808" y="1755648"/>
+            <a:ext cx="365760" cy="365760"/>
+          </a:xfrm>
+          <a:prstGeom prst="rect">
+            <a:avLst/>
+          </a:prstGeom>
+          <a:noFill/>
+          <a:ln/>
+        </p:spPr>
+        <p:txBody>
+          <a:bodyPr wrap="square" lIns="0" tIns="0" rIns="0" bIns="0" rtlCol="0" anchor="ctr"/>
+          <a:lstStyle/>
+          <a:p>
+            <a:pPr algn="ctr" indent="0" marL="0">
+              <a:buNone/>
+            </a:pPr>
+            <a:r>
+              <a:rPr lang="en-US" sz="1500" b="1" dirty="0">
+                <a:solidFill>
+                  <a:srgbClr val="FFFFFF"/>
+                </a:solidFill>
+                <a:latin typeface="Calibri" pitchFamily="34" charset="0"/>
+                <a:ea typeface="Calibri" pitchFamily="34" charset="-122"/>
+                <a:cs typeface="Calibri" pitchFamily="34" charset="-120"/>
+              </a:rPr>
+              <a:t>1</a:t>
+            </a:r>
+            <a:endParaRPr lang="en-US" sz="1500" dirty="0"/>
+          </a:p>
+        </p:txBody>
+      </p:sp>
+      <p:sp>
+        <p:nvSpPr>
+          <p:cNvPr id="7" name="Text 5"/>
+          <p:cNvSpPr/>
+          <p:nvPr/>
+        </p:nvSpPr>
+        <p:spPr>
+          <a:xfrm>
+            <a:off x="1280160" y="1517904"/>
+            <a:ext cx="10143439" cy="841248"/>
+          </a:xfrm>
+          <a:prstGeom prst="rect">
+            <a:avLst/>
+          </a:prstGeom>
+          <a:noFill/>
+          <a:ln/>
+        </p:spPr>
+        <p:txBody>
+          <a:bodyPr wrap="square" lIns="0" tIns="0" rIns="0" bIns="0" rtlCol="0" anchor="ctr"/>
+          <a:lstStyle/>
+          <a:p>
+            <a:pPr algn="l" indent="0" marL="0">
+              <a:buNone/>
+            </a:pPr>
+            <a:r>
+              <a:rPr lang="en-US" sz="1350" dirty="0">
+                <a:solidFill>
+                  <a:srgbClr val="E7EEF4"/>
+                </a:solidFill>
+                <a:latin typeface="Calibri" pitchFamily="34" charset="0"/>
+                <a:ea typeface="Calibri" pitchFamily="34" charset="-122"/>
+                <a:cs typeface="Calibri" pitchFamily="34" charset="-120"/>
+              </a:rPr>
+              <a:t>The LIS manages the workflow from order to result and connects instruments, middleware, and the EHR.</a:t>
+            </a:r>
+            <a:endParaRPr lang="en-US" sz="1350" dirty="0"/>
+          </a:p>
+        </p:txBody>
+      </p:sp>
+      <p:sp>
+        <p:nvSpPr>
+          <p:cNvPr id="8" name="Shape 6"/>
+          <p:cNvSpPr/>
+          <p:nvPr/>
+        </p:nvSpPr>
+        <p:spPr>
+          <a:xfrm>
+            <a:off x="566928" y="2505456"/>
+            <a:ext cx="11057839" cy="841248"/>
+          </a:xfrm>
+          <a:prstGeom prst="roundRect">
+            <a:avLst>
+              <a:gd name="adj" fmla="val 7609"/>
+            </a:avLst>
+          </a:prstGeom>
+          <a:solidFill>
+            <a:srgbClr val="143651"/>
+          </a:solidFill>
+          <a:ln/>
+        </p:spPr>
+      </p:sp>
+      <p:sp>
+        <p:nvSpPr>
+          <p:cNvPr id="9" name="Shape 7"/>
+          <p:cNvSpPr/>
+          <p:nvPr/>
+        </p:nvSpPr>
+        <p:spPr>
+          <a:xfrm>
+            <a:off x="749808" y="2743200"/>
+            <a:ext cx="365760" cy="365760"/>
+          </a:xfrm>
+          <a:prstGeom prst="ellipse">
+            <a:avLst/>
+          </a:prstGeom>
+          <a:solidFill>
+            <a:srgbClr val="455A64"/>
+          </a:solidFill>
+          <a:ln/>
+          <a:effectLst>
+            <a:outerShdw sx="100000" sy="100000" kx="0" ky="0" algn="bl" rotWithShape="0" blurRad="88900" dist="25400" dir="5400000">
+              <a:srgbClr val="22303C">
+                <a:alpha val="12000"/>
+              </a:srgbClr>
+            </a:outerShdw>
+          </a:effectLst>
+        </p:spPr>
+      </p:sp>
+      <p:sp>
+        <p:nvSpPr>
+          <p:cNvPr id="10" name="Text 8"/>
+          <p:cNvSpPr/>
+          <p:nvPr/>
+        </p:nvSpPr>
+        <p:spPr>
+          <a:xfrm>
+            <a:off x="749808" y="2743200"/>
+            <a:ext cx="365760" cy="365760"/>
+          </a:xfrm>
+          <a:prstGeom prst="rect">
+            <a:avLst/>
+          </a:prstGeom>
+          <a:noFill/>
+          <a:ln/>
+        </p:spPr>
+        <p:txBody>
+          <a:bodyPr wrap="square" lIns="0" tIns="0" rIns="0" bIns="0" rtlCol="0" anchor="ctr"/>
+          <a:lstStyle/>
+          <a:p>
+            <a:pPr algn="ctr" indent="0" marL="0">
+              <a:buNone/>
+            </a:pPr>
+            <a:r>
+              <a:rPr lang="en-US" sz="1500" b="1" dirty="0">
+                <a:solidFill>
+                  <a:srgbClr val="FFFFFF"/>
+                </a:solidFill>
+                <a:latin typeface="Calibri" pitchFamily="34" charset="0"/>
+                <a:ea typeface="Calibri" pitchFamily="34" charset="-122"/>
+                <a:cs typeface="Calibri" pitchFamily="34" charset="-120"/>
+              </a:rPr>
+              <a:t>2</a:t>
+            </a:r>
+            <a:endParaRPr lang="en-US" sz="1500" dirty="0"/>
+          </a:p>
+        </p:txBody>
+      </p:sp>
+      <p:sp>
+        <p:nvSpPr>
+          <p:cNvPr id="11" name="Text 9"/>
+          <p:cNvSpPr/>
+          <p:nvPr/>
+        </p:nvSpPr>
+        <p:spPr>
+          <a:xfrm>
+            <a:off x="1280160" y="2505456"/>
+            <a:ext cx="10143439" cy="841248"/>
+          </a:xfrm>
+          <a:prstGeom prst="rect">
+            <a:avLst/>
+          </a:prstGeom>
+          <a:noFill/>
+          <a:ln/>
+        </p:spPr>
+        <p:txBody>
+          <a:bodyPr wrap="square" lIns="0" tIns="0" rIns="0" bIns="0" rtlCol="0" anchor="ctr"/>
+          <a:lstStyle/>
+          <a:p>
+            <a:pPr algn="l" indent="0" marL="0">
+              <a:buNone/>
+            </a:pPr>
+            <a:r>
+              <a:rPr lang="en-US" sz="1350" dirty="0">
+                <a:solidFill>
+                  <a:srgbClr val="E7EEF4"/>
+                </a:solidFill>
+                <a:latin typeface="Calibri" pitchFamily="34" charset="0"/>
+                <a:ea typeface="Calibri" pitchFamily="34" charset="-122"/>
+                <a:cs typeface="Calibri" pitchFamily="34" charset="-120"/>
+              </a:rPr>
+              <a:t>HL7 carries messages and LOINC standardizes test identity; mapping errors (units/codes/ranges) silently corrupt results.</a:t>
+            </a:r>
+            <a:endParaRPr lang="en-US" sz="1350" dirty="0"/>
+          </a:p>
+        </p:txBody>
+      </p:sp>
+      <p:sp>
+        <p:nvSpPr>
+          <p:cNvPr id="12" name="Shape 10"/>
+          <p:cNvSpPr/>
+          <p:nvPr/>
+        </p:nvSpPr>
+        <p:spPr>
+          <a:xfrm>
+            <a:off x="566928" y="3493008"/>
+            <a:ext cx="11057839" cy="841248"/>
+          </a:xfrm>
+          <a:prstGeom prst="roundRect">
+            <a:avLst>
+              <a:gd name="adj" fmla="val 7609"/>
+            </a:avLst>
+          </a:prstGeom>
+          <a:solidFill>
+            <a:srgbClr val="143651"/>
+          </a:solidFill>
+          <a:ln/>
+        </p:spPr>
+      </p:sp>
+      <p:sp>
+        <p:nvSpPr>
+          <p:cNvPr id="13" name="Shape 11"/>
+          <p:cNvSpPr/>
+          <p:nvPr/>
+        </p:nvSpPr>
+        <p:spPr>
+          <a:xfrm>
+            <a:off x="749808" y="3730752"/>
+            <a:ext cx="365760" cy="365760"/>
+          </a:xfrm>
+          <a:prstGeom prst="ellipse">
+            <a:avLst/>
+          </a:prstGeom>
+          <a:solidFill>
+            <a:srgbClr val="455A64"/>
+          </a:solidFill>
+          <a:ln/>
+          <a:effectLst>
+            <a:outerShdw sx="100000" sy="100000" kx="0" ky="0" algn="bl" rotWithShape="0" blurRad="88900" dist="25400" dir="5400000">
+              <a:srgbClr val="22303C">
+                <a:alpha val="12000"/>
+              </a:srgbClr>
+            </a:outerShdw>
+          </a:effectLst>
+        </p:spPr>
+      </p:sp>
+      <p:sp>
+        <p:nvSpPr>
+          <p:cNvPr id="14" name="Text 12"/>
+          <p:cNvSpPr/>
+          <p:nvPr/>
+        </p:nvSpPr>
+        <p:spPr>
+          <a:xfrm>
+            <a:off x="749808" y="3730752"/>
+            <a:ext cx="365760" cy="365760"/>
+          </a:xfrm>
+          <a:prstGeom prst="rect">
+            <a:avLst/>
+          </a:prstGeom>
+          <a:noFill/>
+          <a:ln/>
+        </p:spPr>
+        <p:txBody>
+          <a:bodyPr wrap="square" lIns="0" tIns="0" rIns="0" bIns="0" rtlCol="0" anchor="ctr"/>
+          <a:lstStyle/>
+          <a:p>
+            <a:pPr algn="ctr" indent="0" marL="0">
+              <a:buNone/>
+            </a:pPr>
+            <a:r>
+              <a:rPr lang="en-US" sz="1500" b="1" dirty="0">
+                <a:solidFill>
+                  <a:srgbClr val="FFFFFF"/>
+                </a:solidFill>
+                <a:latin typeface="Calibri" pitchFamily="34" charset="0"/>
+                <a:ea typeface="Calibri" pitchFamily="34" charset="-122"/>
+                <a:cs typeface="Calibri" pitchFamily="34" charset="-120"/>
+              </a:rPr>
+              <a:t>3</a:t>
+            </a:r>
+            <a:endParaRPr lang="en-US" sz="1500" dirty="0"/>
+          </a:p>
+        </p:txBody>
+      </p:sp>
+      <p:sp>
+        <p:nvSpPr>
+          <p:cNvPr id="15" name="Text 13"/>
+          <p:cNvSpPr/>
+          <p:nvPr/>
+        </p:nvSpPr>
+        <p:spPr>
+          <a:xfrm>
+            <a:off x="1280160" y="3493008"/>
+            <a:ext cx="10143439" cy="841248"/>
+          </a:xfrm>
+          <a:prstGeom prst="rect">
+            <a:avLst/>
+          </a:prstGeom>
+          <a:noFill/>
+          <a:ln/>
+        </p:spPr>
+        <p:txBody>
+          <a:bodyPr wrap="square" lIns="0" tIns="0" rIns="0" bIns="0" rtlCol="0" anchor="ctr"/>
+          <a:lstStyle/>
+          <a:p>
+            <a:pPr algn="l" indent="0" marL="0">
+              <a:buNone/>
+            </a:pPr>
+            <a:r>
+              <a:rPr lang="en-US" sz="1350" dirty="0">
+                <a:solidFill>
+                  <a:srgbClr val="E7EEF4"/>
+                </a:solidFill>
+                <a:latin typeface="Calibri" pitchFamily="34" charset="0"/>
+                <a:ea typeface="Calibri" pitchFamily="34" charset="-122"/>
+                <a:cs typeface="Calibri" pitchFamily="34" charset="-120"/>
+              </a:rPr>
+              <a:t>Middleware enables rules, delta checks, and autoverification — which must be validated and monitored.</a:t>
+            </a:r>
+            <a:endParaRPr lang="en-US" sz="1350" dirty="0"/>
+          </a:p>
+        </p:txBody>
+      </p:sp>
+      <p:sp>
+        <p:nvSpPr>
+          <p:cNvPr id="16" name="Shape 14"/>
+          <p:cNvSpPr/>
+          <p:nvPr/>
+        </p:nvSpPr>
+        <p:spPr>
+          <a:xfrm>
+            <a:off x="566928" y="4480560"/>
+            <a:ext cx="11057839" cy="841248"/>
+          </a:xfrm>
+          <a:prstGeom prst="roundRect">
+            <a:avLst>
+              <a:gd name="adj" fmla="val 7609"/>
+            </a:avLst>
+          </a:prstGeom>
+          <a:solidFill>
+            <a:srgbClr val="143651"/>
+          </a:solidFill>
+          <a:ln/>
+        </p:spPr>
+      </p:sp>
+      <p:sp>
+        <p:nvSpPr>
+          <p:cNvPr id="17" name="Shape 15"/>
+          <p:cNvSpPr/>
+          <p:nvPr/>
+        </p:nvSpPr>
+        <p:spPr>
+          <a:xfrm>
+            <a:off x="749808" y="4718304"/>
+            <a:ext cx="365760" cy="365760"/>
+          </a:xfrm>
+          <a:prstGeom prst="ellipse">
+            <a:avLst/>
+          </a:prstGeom>
+          <a:solidFill>
+            <a:srgbClr val="455A64"/>
+          </a:solidFill>
+          <a:ln/>
+          <a:effectLst>
+            <a:outerShdw sx="100000" sy="100000" kx="0" ky="0" algn="bl" rotWithShape="0" blurRad="88900" dist="25400" dir="5400000">
+              <a:srgbClr val="22303C">
+                <a:alpha val="12000"/>
+              </a:srgbClr>
+            </a:outerShdw>
+          </a:effectLst>
+        </p:spPr>
+      </p:sp>
+      <p:sp>
+        <p:nvSpPr>
+          <p:cNvPr id="18" name="Text 16"/>
+          <p:cNvSpPr/>
+          <p:nvPr/>
+        </p:nvSpPr>
+        <p:spPr>
+          <a:xfrm>
+            <a:off x="749808" y="4718304"/>
+            <a:ext cx="365760" cy="365760"/>
+          </a:xfrm>
+          <a:prstGeom prst="rect">
+            <a:avLst/>
+          </a:prstGeom>
+          <a:noFill/>
+          <a:ln/>
+        </p:spPr>
+        <p:txBody>
+          <a:bodyPr wrap="square" lIns="0" tIns="0" rIns="0" bIns="0" rtlCol="0" anchor="ctr"/>
+          <a:lstStyle/>
+          <a:p>
+            <a:pPr algn="ctr" indent="0" marL="0">
+              <a:buNone/>
+            </a:pPr>
+            <a:r>
+              <a:rPr lang="en-US" sz="1500" b="1" dirty="0">
+                <a:solidFill>
+                  <a:srgbClr val="FFFFFF"/>
+                </a:solidFill>
+                <a:latin typeface="Calibri" pitchFamily="34" charset="0"/>
+                <a:ea typeface="Calibri" pitchFamily="34" charset="-122"/>
+                <a:cs typeface="Calibri" pitchFamily="34" charset="-120"/>
+              </a:rPr>
+              <a:t>4</a:t>
+            </a:r>
+            <a:endParaRPr lang="en-US" sz="1500" dirty="0"/>
+          </a:p>
+        </p:txBody>
+      </p:sp>
+      <p:sp>
+        <p:nvSpPr>
+          <p:cNvPr id="19" name="Text 17"/>
+          <p:cNvSpPr/>
+          <p:nvPr/>
+        </p:nvSpPr>
+        <p:spPr>
+          <a:xfrm>
+            <a:off x="1280160" y="4480560"/>
+            <a:ext cx="10143439" cy="841248"/>
+          </a:xfrm>
+          <a:prstGeom prst="rect">
+            <a:avLst/>
+          </a:prstGeom>
+          <a:noFill/>
+          <a:ln/>
+        </p:spPr>
+        <p:txBody>
+          <a:bodyPr wrap="square" lIns="0" tIns="0" rIns="0" bIns="0" rtlCol="0" anchor="ctr"/>
+          <a:lstStyle/>
+          <a:p>
+            <a:pPr algn="l" indent="0" marL="0">
+              <a:buNone/>
+            </a:pPr>
+            <a:r>
+              <a:rPr lang="en-US" sz="1350" dirty="0">
+                <a:solidFill>
+                  <a:srgbClr val="E7EEF4"/>
+                </a:solidFill>
+                <a:latin typeface="Calibri" pitchFamily="34" charset="0"/>
+                <a:ea typeface="Calibri" pitchFamily="34" charset="-122"/>
+                <a:cs typeface="Calibri" pitchFamily="34" charset="-120"/>
+              </a:rPr>
+              <a:t>Delta checks and critical-value workflows protect result integrity; corrected reports need flags and audit trails.</a:t>
+            </a:r>
+            <a:endParaRPr lang="en-US" sz="1350" dirty="0"/>
+          </a:p>
+        </p:txBody>
+      </p:sp>
+      <p:sp>
+        <p:nvSpPr>
+          <p:cNvPr id="20" name="Shape 18"/>
+          <p:cNvSpPr/>
+          <p:nvPr/>
+        </p:nvSpPr>
+        <p:spPr>
+          <a:xfrm>
+            <a:off x="566928" y="5468112"/>
+            <a:ext cx="11057839" cy="841248"/>
+          </a:xfrm>
+          <a:prstGeom prst="roundRect">
+            <a:avLst>
+              <a:gd name="adj" fmla="val 7609"/>
+            </a:avLst>
+          </a:prstGeom>
+          <a:solidFill>
+            <a:srgbClr val="143651"/>
+          </a:solidFill>
+          <a:ln/>
+        </p:spPr>
+      </p:sp>
+      <p:sp>
+        <p:nvSpPr>
+          <p:cNvPr id="21" name="Shape 19"/>
+          <p:cNvSpPr/>
+          <p:nvPr/>
+        </p:nvSpPr>
+        <p:spPr>
+          <a:xfrm>
+            <a:off x="749808" y="5705856"/>
+            <a:ext cx="365760" cy="365760"/>
+          </a:xfrm>
+          <a:prstGeom prst="ellipse">
+            <a:avLst/>
+          </a:prstGeom>
+          <a:solidFill>
+            <a:srgbClr val="455A64"/>
+          </a:solidFill>
+          <a:ln/>
+          <a:effectLst>
+            <a:outerShdw sx="100000" sy="100000" kx="0" ky="0" algn="bl" rotWithShape="0" blurRad="88900" dist="25400" dir="5400000">
+              <a:srgbClr val="22303C">
+                <a:alpha val="12000"/>
+              </a:srgbClr>
+            </a:outerShdw>
+          </a:effectLst>
+        </p:spPr>
+      </p:sp>
+      <p:sp>
+        <p:nvSpPr>
+          <p:cNvPr id="22" name="Text 20"/>
+          <p:cNvSpPr/>
+          <p:nvPr/>
+        </p:nvSpPr>
+        <p:spPr>
+          <a:xfrm>
+            <a:off x="749808" y="5705856"/>
+            <a:ext cx="365760" cy="365760"/>
+          </a:xfrm>
+          <a:prstGeom prst="rect">
+            <a:avLst/>
+          </a:prstGeom>
+          <a:noFill/>
+          <a:ln/>
+        </p:spPr>
+        <p:txBody>
+          <a:bodyPr wrap="square" lIns="0" tIns="0" rIns="0" bIns="0" rtlCol="0" anchor="ctr"/>
+          <a:lstStyle/>
+          <a:p>
+            <a:pPr algn="ctr" indent="0" marL="0">
+              <a:buNone/>
+            </a:pPr>
+            <a:r>
+              <a:rPr lang="en-US" sz="1500" b="1" dirty="0">
+                <a:solidFill>
+                  <a:srgbClr val="FFFFFF"/>
+                </a:solidFill>
+                <a:latin typeface="Calibri" pitchFamily="34" charset="0"/>
+                <a:ea typeface="Calibri" pitchFamily="34" charset="-122"/>
+                <a:cs typeface="Calibri" pitchFamily="34" charset="-120"/>
+              </a:rPr>
+              <a:t>5</a:t>
+            </a:r>
+            <a:endParaRPr lang="en-US" sz="1500" dirty="0"/>
+          </a:p>
+        </p:txBody>
+      </p:sp>
+      <p:sp>
+        <p:nvSpPr>
+          <p:cNvPr id="23" name="Text 21"/>
+          <p:cNvSpPr/>
+          <p:nvPr/>
+        </p:nvSpPr>
+        <p:spPr>
+          <a:xfrm>
+            <a:off x="1280160" y="5468112"/>
+            <a:ext cx="10143439" cy="841248"/>
+          </a:xfrm>
+          <a:prstGeom prst="rect">
+            <a:avLst/>
+          </a:prstGeom>
+          <a:noFill/>
+          <a:ln/>
+        </p:spPr>
+        <p:txBody>
+          <a:bodyPr wrap="square" lIns="0" tIns="0" rIns="0" bIns="0" rtlCol="0" anchor="ctr"/>
+          <a:lstStyle/>
+          <a:p>
+            <a:pPr algn="l" indent="0" marL="0">
+              <a:buNone/>
+            </a:pPr>
+            <a:r>
+              <a:rPr lang="en-US" sz="1350" dirty="0">
+                <a:solidFill>
+                  <a:srgbClr val="E7EEF4"/>
+                </a:solidFill>
+                <a:latin typeface="Calibri" pitchFamily="34" charset="0"/>
+                <a:ea typeface="Calibri" pitchFamily="34" charset="-122"/>
+                <a:cs typeface="Calibri" pitchFamily="34" charset="-120"/>
+              </a:rPr>
+              <a:t>Protect data (access control, audit, encryption) and maintain validated downtime/disaster-recovery procedures.</a:t>
+            </a:r>
+            <a:endParaRPr lang="en-US" sz="1350" dirty="0"/>
+          </a:p>
+        </p:txBody>
+      </p:sp>
+      <p:sp>
+        <p:nvSpPr>
+          <p:cNvPr id="24" name="Text 22"/>
+          <p:cNvSpPr/>
+          <p:nvPr/>
+        </p:nvSpPr>
+        <p:spPr>
+          <a:xfrm>
+            <a:off x="566928" y="6473952"/>
+            <a:ext cx="8229600" cy="274320"/>
+          </a:xfrm>
+          <a:prstGeom prst="rect">
+            <a:avLst/>
+          </a:prstGeom>
+          <a:noFill/>
+          <a:ln/>
+        </p:spPr>
+        <p:txBody>
+          <a:bodyPr wrap="square" lIns="0" tIns="0" rIns="0" bIns="0" rtlCol="0" anchor="ctr"/>
+          <a:lstStyle/>
+          <a:p>
+            <a:pPr indent="0" marL="0">
+              <a:buNone/>
+            </a:pPr>
+            <a:r>
+              <a:rPr lang="en-US" sz="850" dirty="0">
+                <a:solidFill>
+                  <a:srgbClr val="5E7488"/>
+                </a:solidFill>
+                <a:latin typeface="Calibri" pitchFamily="34" charset="0"/>
+                <a:ea typeface="Calibri" pitchFamily="34" charset="-122"/>
+                <a:cs typeface="Calibri" pitchFamily="34" charset="-120"/>
+              </a:rPr>
+              <a:t>Makassed General Hospital  ·  Department of Laboratory Medicine</a:t>
+            </a:r>
+            <a:endParaRPr lang="en-US" sz="850" dirty="0"/>
+          </a:p>
+        </p:txBody>
+      </p:sp>
+      <p:sp>
+        <p:nvSpPr>
+          <p:cNvPr id="25" name="Text 23"/>
+          <p:cNvSpPr/>
+          <p:nvPr/>
+        </p:nvSpPr>
+        <p:spPr>
+          <a:xfrm>
+            <a:off x="11002975" y="6473952"/>
+            <a:ext cx="640080" cy="274320"/>
+          </a:xfrm>
+          <a:prstGeom prst="rect">
+            <a:avLst/>
+          </a:prstGeom>
+          <a:noFill/>
+          <a:ln/>
+        </p:spPr>
+        <p:txBody>
+          <a:bodyPr wrap="square" lIns="0" tIns="0" rIns="0" bIns="0" rtlCol="0" anchor="ctr"/>
+          <a:lstStyle/>
+          <a:p>
+            <a:pPr algn="r" indent="0" marL="0">
+              <a:buNone/>
+            </a:pPr>
+            <a:r>
+              <a:rPr lang="en-US" sz="850" b="1" dirty="0">
+                <a:solidFill>
+                  <a:srgbClr val="455A64"/>
+                </a:solidFill>
+                <a:latin typeface="Calibri" pitchFamily="34" charset="0"/>
+                <a:ea typeface="Calibri" pitchFamily="34" charset="-122"/>
+                <a:cs typeface="Calibri" pitchFamily="34" charset="-120"/>
+              </a:rPr>
+              <a:t>21</a:t>
+            </a:r>
+            <a:endParaRPr lang="en-US" sz="850" dirty="0"/>
+          </a:p>
+        </p:txBody>
+      </p:sp>
+    </p:spTree>
+  </p:cSld>
+  <p:clrMapOvr>
+    <a:masterClrMapping/>
+  </p:clrMapOvr>
+</p:sld>
+</file>
+
+<file path=ppt/slides/slide25.xml><?xml version="1.0" encoding="utf-8"?>
+<p:sld xmlns:a="http://schemas.openxmlformats.org/drawingml/2006/main" xmlns:r="http://schemas.openxmlformats.org/officeDocument/2006/relationships" xmlns:p="http://schemas.openxmlformats.org/presentationml/2006/main">
+  <p:cSld name="Slide 25">
+    <p:bg>
+      <p:bgPr>
+        <a:solidFill>
+          <a:srgbClr val="FFFFFF"/>
+        </a:solidFill>
+      </p:bgPr>
+    </p:bg>
+    <p:spTree>
+      <p:nvGrpSpPr>
+        <p:cNvPr id="1" name=""/>
+        <p:cNvGrpSpPr/>
+        <p:nvPr/>
+      </p:nvGrpSpPr>
+      <p:grpSpPr>
+        <a:xfrm>
+          <a:off x="0" y="0"/>
+          <a:ext cx="0" cy="0"/>
+          <a:chOff x="0" y="0"/>
+          <a:chExt cx="0" cy="0"/>
+        </a:xfrm>
+      </p:grpSpPr>
+      <p:sp>
+        <p:nvSpPr>
+          <p:cNvPr id="2" name="Text 0"/>
+          <p:cNvSpPr/>
+          <p:nvPr/>
+        </p:nvSpPr>
+        <p:spPr>
+          <a:xfrm>
+            <a:off x="566928" y="329184"/>
+            <a:ext cx="10515600" cy="310896"/>
+          </a:xfrm>
+          <a:prstGeom prst="rect">
+            <a:avLst/>
+          </a:prstGeom>
+          <a:noFill/>
+          <a:ln/>
+        </p:spPr>
+        <p:txBody>
+          <a:bodyPr wrap="square" lIns="0" tIns="0" rIns="0" bIns="0" rtlCol="0" anchor="ctr"/>
+          <a:lstStyle/>
+          <a:p>
+            <a:pPr algn="l" indent="0" marL="0">
+              <a:buNone/>
+            </a:pPr>
+            <a:r>
+              <a:rPr lang="en-US" sz="1100" b="1" spc="150" kern="0" dirty="0">
+                <a:solidFill>
+                  <a:srgbClr val="455A64"/>
+                </a:solidFill>
+                <a:latin typeface="Calibri" pitchFamily="34" charset="0"/>
+                <a:ea typeface="Calibri" pitchFamily="34" charset="-122"/>
+                <a:cs typeface="Calibri" pitchFamily="34" charset="-120"/>
+              </a:rPr>
               <a:t>LAB MANAGEMENT &amp; QUALITY   ·   REFERENCES &amp; FURTHER READING</a:t>
             </a:r>
             <a:endParaRPr lang="en-US" sz="1100" dirty="0"/>
@@ -8550,7 +11492,7 @@
                 <a:ea typeface="Calibri" pitchFamily="34" charset="-122"/>
                 <a:cs typeface="Calibri" pitchFamily="34" charset="-120"/>
               </a:rPr>
-              <a:t>1.   Pantanowitz L, Tuthill JM, Balis UGJ. Pathology Informatics: Theory and Practice. ASCP Press, 2012.</a:t>
+              <a:t>1.   Henricks WH, et al. Laboratory informatics (CAP resources).</a:t>
             </a:r>
             <a:endParaRPr lang="en-US" sz="1150" dirty="0"/>
           </a:p>
@@ -8570,7 +11512,7 @@
                 <a:ea typeface="Calibri" pitchFamily="34" charset="-122"/>
                 <a:cs typeface="Calibri" pitchFamily="34" charset="-120"/>
               </a:rPr>
-              <a:t>2.   Henricks WH, et al. Laboratory informatics standards and HL7 (CAP resources).</a:t>
+              <a:t>2.   Pantanowitz L, et al. Pathology Informatics: Theory and Practice.</a:t>
             </a:r>
             <a:endParaRPr lang="en-US" sz="1150" dirty="0"/>
           </a:p>
@@ -8590,7 +11532,7 @@
                 <a:ea typeface="Calibri" pitchFamily="34" charset="-122"/>
                 <a:cs typeface="Calibri" pitchFamily="34" charset="-120"/>
               </a:rPr>
-              <a:t>3.   Regenstrief Institute. LOINC; SNOMED International. SNOMED CT.</a:t>
+              <a:t>3.   HL7 and LOINC standards documentation.</a:t>
             </a:r>
             <a:endParaRPr lang="en-US" sz="1150" dirty="0"/>
           </a:p>
@@ -8610,7 +11552,7 @@
                 <a:ea typeface="Calibri" pitchFamily="34" charset="-122"/>
                 <a:cs typeface="Calibri" pitchFamily="34" charset="-120"/>
               </a:rPr>
-              <a:t>4.   CAP Laboratory General checklist: information systems and data integrity.</a:t>
+              <a:t>4.   CLSI AUTO standards (autoverification and interfaces).</a:t>
             </a:r>
             <a:endParaRPr lang="en-US" sz="1150" dirty="0"/>
           </a:p>
@@ -8716,7 +11658,7 @@
                 <a:ea typeface="Calibri" pitchFamily="34" charset="-122"/>
                 <a:cs typeface="Calibri" pitchFamily="34" charset="-120"/>
               </a:rPr>
-              <a:t>17</a:t>
+              <a:t>22</a:t>
             </a:r>
             <a:endParaRPr lang="en-US" sz="850" dirty="0"/>
           </a:p>
@@ -8960,7 +11902,7 @@
                 <a:ea typeface="Calibri" pitchFamily="34" charset="-122"/>
                 <a:cs typeface="Calibri" pitchFamily="34" charset="-120"/>
               </a:rPr>
-              <a:t>Describe LIS architecture and result routing.</a:t>
+              <a:t>Describe LIS functions across the testing workflow.</a:t>
             </a:r>
             <a:endParaRPr lang="en-US" sz="1350" dirty="0"/>
           </a:p>
@@ -9094,7 +12036,7 @@
                 <a:ea typeface="Calibri" pitchFamily="34" charset="-122"/>
                 <a:cs typeface="Calibri" pitchFamily="34" charset="-120"/>
               </a:rPr>
-              <a:t>Explain middleware and autoverification.</a:t>
+              <a:t>Explain interfaces and standards (HL7; LOINC; unidirectional vs bidirectional).</a:t>
             </a:r>
             <a:endParaRPr lang="en-US" sz="1350" dirty="0"/>
           </a:p>
@@ -9228,7 +12170,7 @@
                 <a:ea typeface="Calibri" pitchFamily="34" charset="-122"/>
                 <a:cs typeface="Calibri" pitchFamily="34" charset="-120"/>
               </a:rPr>
-              <a:t>Recognize interface (HL7) issues and data-integrity risks.</a:t>
+              <a:t>Describe middleware and autoverification.</a:t>
             </a:r>
             <a:endParaRPr lang="en-US" sz="1350" dirty="0"/>
           </a:p>
@@ -9362,7 +12304,7 @@
                 <a:ea typeface="Calibri" pitchFamily="34" charset="-122"/>
                 <a:cs typeface="Calibri" pitchFamily="34" charset="-120"/>
               </a:rPr>
-              <a:t>Apply standard vocabularies (LOINC, SNOMED).</a:t>
+              <a:t>Apply result-integrity and critical-value workflows.</a:t>
             </a:r>
             <a:endParaRPr lang="en-US" sz="1350" dirty="0"/>
           </a:p>
@@ -9496,7 +12438,7 @@
                 <a:ea typeface="Calibri" pitchFamily="34" charset="-122"/>
                 <a:cs typeface="Calibri" pitchFamily="34" charset="-120"/>
               </a:rPr>
-              <a:t>Outline downtime and contingency planning.</a:t>
+              <a:t>Recognize informatics failure modes.</a:t>
             </a:r>
             <a:endParaRPr lang="en-US" sz="1350" dirty="0"/>
           </a:p>
@@ -9630,7 +12572,7 @@
                 <a:ea typeface="Calibri" pitchFamily="34" charset="-122"/>
                 <a:cs typeface="Calibri" pitchFamily="34" charset="-120"/>
               </a:rPr>
-              <a:t>Connect informatics to result quality and safety.</a:t>
+              <a:t>State data security and integrity principles.</a:t>
             </a:r>
             <a:endParaRPr lang="en-US" sz="1350" dirty="0"/>
           </a:p>
@@ -9980,7 +12922,7 @@
                 <a:ea typeface="Calibri" pitchFamily="34" charset="-122"/>
                 <a:cs typeface="Calibri" pitchFamily="34" charset="-120"/>
               </a:rPr>
-              <a:t>LIS architecture</a:t>
+              <a:t>LIS workflow</a:t>
             </a:r>
             <a:pPr algn="l" indent="0" marL="0">
               <a:buNone/>
@@ -9994,7 +12936,7 @@
                 <a:ea typeface="Calibri" pitchFamily="34" charset="-122"/>
                 <a:cs typeface="Calibri" pitchFamily="34" charset="-120"/>
               </a:rPr>
-              <a:t>   —  the result lifecycle</a:t>
+              <a:t>   —  order to result</a:t>
             </a:r>
             <a:endParaRPr lang="en-US" sz="1400" dirty="0"/>
           </a:p>
@@ -10121,7 +13063,7 @@
                 <a:ea typeface="Calibri" pitchFamily="34" charset="-122"/>
                 <a:cs typeface="Calibri" pitchFamily="34" charset="-120"/>
               </a:rPr>
-              <a:t>Middleware &amp; autoverification</a:t>
+              <a:t>Interfaces &amp; standards</a:t>
             </a:r>
             <a:pPr algn="l" indent="0" marL="0">
               <a:buNone/>
@@ -10135,7 +13077,7 @@
                 <a:ea typeface="Calibri" pitchFamily="34" charset="-122"/>
                 <a:cs typeface="Calibri" pitchFamily="34" charset="-120"/>
               </a:rPr>
-              <a:t>   —  rules and release</a:t>
+              <a:t>   —  HL7, LOINC</a:t>
             </a:r>
             <a:endParaRPr lang="en-US" sz="1400" dirty="0"/>
           </a:p>
@@ -10269,7 +13211,7 @@
                 <a:ea typeface="Calibri" pitchFamily="34" charset="-122"/>
                 <a:cs typeface="Calibri" pitchFamily="34" charset="-120"/>
               </a:rPr>
-              <a:t>Interfaces &amp; integrity</a:t>
+              <a:t>Middleware &amp; autoverification</a:t>
             </a:r>
             <a:pPr algn="l" indent="0" marL="0">
               <a:buNone/>
@@ -10283,7 +13225,7 @@
                 <a:ea typeface="Calibri" pitchFamily="34" charset="-122"/>
                 <a:cs typeface="Calibri" pitchFamily="34" charset="-120"/>
               </a:rPr>
-              <a:t>   —  HL7, mapping, vocabularies</a:t>
+              <a:t>   —  rules engines</a:t>
             </a:r>
             <a:endParaRPr lang="en-US" sz="1400" dirty="0"/>
           </a:p>
@@ -10410,7 +13352,7 @@
                 <a:ea typeface="Calibri" pitchFamily="34" charset="-122"/>
                 <a:cs typeface="Calibri" pitchFamily="34" charset="-120"/>
               </a:rPr>
-              <a:t>Downtime &amp; safety</a:t>
+              <a:t>Integrity &amp; failures</a:t>
             </a:r>
             <a:pPr algn="l" indent="0" marL="0">
               <a:buNone/>
@@ -10424,7 +13366,7 @@
                 <a:ea typeface="Calibri" pitchFamily="34" charset="-122"/>
                 <a:cs typeface="Calibri" pitchFamily="34" charset="-120"/>
               </a:rPr>
-              <a:t>   —  contingency planning</a:t>
+              <a:t>   —  safe data flow</a:t>
             </a:r>
             <a:endParaRPr lang="en-US" sz="1400" dirty="0"/>
           </a:p>
@@ -10558,7 +13500,7 @@
                 <a:ea typeface="Calibri" pitchFamily="34" charset="-122"/>
                 <a:cs typeface="Calibri" pitchFamily="34" charset="-120"/>
               </a:rPr>
-              <a:t>Cases &amp; board</a:t>
+              <a:t>Cases &amp; board review</a:t>
             </a:r>
             <a:endParaRPr lang="en-US" sz="1400" dirty="0"/>
           </a:p>
@@ -10857,7 +13799,7 @@
                 <a:ea typeface="Calibri" pitchFamily="34" charset="-122"/>
                 <a:cs typeface="Calibri" pitchFamily="34" charset="-120"/>
               </a:rPr>
-              <a:t>The Result Lifecycle</a:t>
+              <a:t>The LIS &amp; Interfaces</a:t>
             </a:r>
             <a:endParaRPr lang="en-US" sz="3800" dirty="0"/>
           </a:p>
@@ -10928,7 +13870,7 @@
                 <a:ea typeface="Calibri" pitchFamily="34" charset="-122"/>
                 <a:cs typeface="Calibri" pitchFamily="34" charset="-120"/>
               </a:rPr>
-              <a:t>LAB MANAGEMENT &amp; QUALITY   ·   INFORMATICS</a:t>
+              <a:t>LAB MANAGEMENT &amp; QUALITY   ·   DATA FLOW</a:t>
             </a:r>
             <a:endParaRPr lang="en-US" sz="1100" dirty="0"/>
           </a:p>
@@ -10967,7 +13909,7 @@
                 <a:ea typeface="Calibri" pitchFamily="34" charset="-122"/>
                 <a:cs typeface="Calibri" pitchFamily="34" charset="-120"/>
               </a:rPr>
-              <a:t>From Instrument to the Chart</a:t>
+              <a:t>How Data Moves: Order to Result</a:t>
             </a:r>
             <a:endParaRPr lang="en-US" sz="3000" dirty="0"/>
           </a:p>
@@ -10981,12 +13923,12 @@
         </p:nvSpPr>
         <p:spPr>
           <a:xfrm>
-            <a:off x="1066648" y="1481328"/>
-            <a:ext cx="10058400" cy="3886200"/>
+            <a:off x="883768" y="1481328"/>
+            <a:ext cx="10424160" cy="4343400"/>
           </a:xfrm>
           <a:prstGeom prst="roundRect">
             <a:avLst>
-              <a:gd name="adj" fmla="val 2118"/>
+              <a:gd name="adj" fmla="val 1895"/>
             </a:avLst>
           </a:prstGeom>
           <a:solidFill>
@@ -11023,8 +13965,8 @@
         </p:blipFill>
         <p:spPr>
           <a:xfrm>
-            <a:off x="1194664" y="1609344"/>
-            <a:ext cx="9802368" cy="3630168"/>
+            <a:off x="1011784" y="1609344"/>
+            <a:ext cx="10168128" cy="4087368"/>
           </a:xfrm>
           <a:prstGeom prst="rect">
             <a:avLst/>
@@ -11039,7 +13981,7 @@
         </p:nvSpPr>
         <p:spPr>
           <a:xfrm>
-            <a:off x="566928" y="5440680"/>
+            <a:off x="566928" y="5897880"/>
             <a:ext cx="11057839" cy="365760"/>
           </a:xfrm>
           <a:prstGeom prst="rect">
@@ -11064,7 +14006,7 @@
                 <a:ea typeface="Calibri" pitchFamily="34" charset="-122"/>
                 <a:cs typeface="Calibri" pitchFamily="34" charset="-120"/>
               </a:rPr>
-              <a:t>Original schematic. Results flow instrument → middleware → LIS → EHR over interfaces; each hop is a place for error and a place for control.</a:t>
+              <a:t>Original schematic. Orders, instruments, middleware, LIS, and EHR connect through interfaces — each a potential failure point.</a:t>
             </a:r>
             <a:endParaRPr lang="en-US" sz="1150" dirty="0"/>
           </a:p>
@@ -11241,7 +14183,7 @@
                 <a:ea typeface="Calibri" pitchFamily="34" charset="-122"/>
                 <a:cs typeface="Calibri" pitchFamily="34" charset="-120"/>
               </a:rPr>
-              <a:t>LAB MANAGEMENT &amp; QUALITY   ·   ARCHITECTURE</a:t>
+              <a:t>LAB MANAGEMENT &amp; QUALITY   ·   LIS</a:t>
             </a:r>
             <a:endParaRPr lang="en-US" sz="1100" dirty="0"/>
           </a:p>
@@ -11280,7 +14222,7 @@
                 <a:ea typeface="Calibri" pitchFamily="34" charset="-122"/>
                 <a:cs typeface="Calibri" pitchFamily="34" charset="-120"/>
               </a:rPr>
-              <a:t>LIS and Middleware</a:t>
+              <a:t>What the LIS Does</a:t>
             </a:r>
             <a:endParaRPr lang="en-US" sz="3000" dirty="0"/>
           </a:p>
@@ -11348,7 +14290,7 @@
                 <a:ea typeface="Calibri" pitchFamily="34" charset="-122"/>
                 <a:cs typeface="Calibri" pitchFamily="34" charset="-120"/>
               </a:rPr>
-              <a:t>THE LIS</a:t>
+              <a:t>CORE FUNCTIONS</a:t>
             </a:r>
             <a:endParaRPr lang="en-US" sz="1200" dirty="0"/>
           </a:p>
@@ -11391,7 +14333,7 @@
                 <a:ea typeface="Calibri" pitchFamily="34" charset="-122"/>
                 <a:cs typeface="Calibri" pitchFamily="34" charset="-120"/>
               </a:rPr>
-              <a:t>Manages orders, specimens, results, reference ranges, and reporting.</a:t>
+              <a:t>Order entry, specimen tracking, result storage, reporting, and QC management.</a:t>
             </a:r>
             <a:endParaRPr lang="en-US" sz="1250" dirty="0"/>
           </a:p>
@@ -11412,7 +14354,7 @@
                 <a:ea typeface="Calibri" pitchFamily="34" charset="-122"/>
                 <a:cs typeface="Calibri" pitchFamily="34" charset="-120"/>
               </a:rPr>
-              <a:t>Maintains the patient/test master files that drive correct interpretation.</a:t>
+              <a:t>Maintains the test catalog and reference ranges.</a:t>
             </a:r>
             <a:endParaRPr lang="en-US" sz="1250" dirty="0"/>
           </a:p>
@@ -11433,7 +14375,7 @@
                 <a:ea typeface="Calibri" pitchFamily="34" charset="-122"/>
                 <a:cs typeface="Calibri" pitchFamily="34" charset="-120"/>
               </a:rPr>
-              <a:t>Stores the authoritative result record and audit trail.</a:t>
+              <a:t>Supports billing and workload.</a:t>
             </a:r>
             <a:endParaRPr lang="en-US" sz="1250" dirty="0"/>
           </a:p>
@@ -11454,7 +14396,7 @@
                 <a:ea typeface="Calibri" pitchFamily="34" charset="-122"/>
                 <a:cs typeface="Calibri" pitchFamily="34" charset="-120"/>
               </a:rPr>
-              <a:t>Interfaces with the EHR, instruments, and other systems.</a:t>
+              <a:t>System of record for laboratory data.</a:t>
             </a:r>
             <a:endParaRPr lang="en-US" sz="1250" dirty="0"/>
           </a:p>
@@ -11477,7 +14419,7 @@
             </a:avLst>
           </a:prstGeom>
           <a:solidFill>
-            <a:srgbClr val="ECEFF1"/>
+            <a:srgbClr val="E6EAED"/>
           </a:solidFill>
           <a:ln/>
           <a:effectLst>
@@ -11522,7 +14464,7 @@
                 <a:ea typeface="Calibri" pitchFamily="34" charset="-122"/>
                 <a:cs typeface="Calibri" pitchFamily="34" charset="-120"/>
               </a:rPr>
-              <a:t>MIDDLEWARE</a:t>
+              <a:t>INTEGRATION</a:t>
             </a:r>
             <a:endParaRPr lang="en-US" sz="1200" dirty="0"/>
           </a:p>
@@ -11565,7 +14507,7 @@
                 <a:ea typeface="Calibri" pitchFamily="34" charset="-122"/>
                 <a:cs typeface="Calibri" pitchFamily="34" charset="-120"/>
               </a:rPr>
-              <a:t>Sits between instruments and the LIS to apply rules: autoverification, reflex testing, delta checks, and QC handling.</a:t>
+              <a:t>The LIS connects instruments, middleware, and the EHR.</a:t>
             </a:r>
             <a:endParaRPr lang="en-US" sz="1250" dirty="0"/>
           </a:p>
@@ -11586,7 +14528,7 @@
                 <a:ea typeface="Calibri" pitchFamily="34" charset="-122"/>
                 <a:cs typeface="Calibri" pitchFamily="34" charset="-120"/>
               </a:rPr>
-              <a:t>Offloads decision logic and standardizes workflows.</a:t>
+              <a:t>Accurate result delivery depends on these links.</a:t>
             </a:r>
             <a:endParaRPr lang="en-US" sz="1250" dirty="0"/>
           </a:p>
@@ -11607,7 +14549,7 @@
                 <a:ea typeface="Calibri" pitchFamily="34" charset="-122"/>
                 <a:cs typeface="Calibri" pitchFamily="34" charset="-120"/>
               </a:rPr>
-              <a:t>Can hold/flag results needing review before they reach the LIS.</a:t>
+              <a:t>Configuration errors propagate widely.</a:t>
             </a:r>
             <a:endParaRPr lang="en-US" sz="1250" dirty="0"/>
           </a:p>
@@ -11628,7 +14570,7 @@
                 <a:ea typeface="Calibri" pitchFamily="34" charset="-122"/>
                 <a:cs typeface="Calibri" pitchFamily="34" charset="-120"/>
               </a:rPr>
-              <a:t>Rules must be built, validated, and version-controlled.</a:t>
+              <a:t>Change control is essential.</a:t>
             </a:r>
             <a:endParaRPr lang="en-US" sz="1250" dirty="0"/>
           </a:p>
@@ -11751,6 +14693,570 @@
 <file path=ppt/slides/slide8.xml><?xml version="1.0" encoding="utf-8"?>
 <p:sld xmlns:a="http://schemas.openxmlformats.org/drawingml/2006/main" xmlns:r="http://schemas.openxmlformats.org/officeDocument/2006/relationships" xmlns:p="http://schemas.openxmlformats.org/presentationml/2006/main">
   <p:cSld name="Slide 8">
+    <p:bg>
+      <p:bgPr>
+        <a:solidFill>
+          <a:srgbClr val="FFFFFF"/>
+        </a:solidFill>
+      </p:bgPr>
+    </p:bg>
+    <p:spTree>
+      <p:nvGrpSpPr>
+        <p:cNvPr id="1" name=""/>
+        <p:cNvGrpSpPr/>
+        <p:nvPr/>
+      </p:nvGrpSpPr>
+      <p:grpSpPr>
+        <a:xfrm>
+          <a:off x="0" y="0"/>
+          <a:ext cx="0" cy="0"/>
+          <a:chOff x="0" y="0"/>
+          <a:chExt cx="0" cy="0"/>
+        </a:xfrm>
+      </p:grpSpPr>
+      <p:sp>
+        <p:nvSpPr>
+          <p:cNvPr id="2" name="Text 0"/>
+          <p:cNvSpPr/>
+          <p:nvPr/>
+        </p:nvSpPr>
+        <p:spPr>
+          <a:xfrm>
+            <a:off x="566928" y="329184"/>
+            <a:ext cx="10515600" cy="310896"/>
+          </a:xfrm>
+          <a:prstGeom prst="rect">
+            <a:avLst/>
+          </a:prstGeom>
+          <a:noFill/>
+          <a:ln/>
+        </p:spPr>
+        <p:txBody>
+          <a:bodyPr wrap="square" lIns="0" tIns="0" rIns="0" bIns="0" rtlCol="0" anchor="ctr"/>
+          <a:lstStyle/>
+          <a:p>
+            <a:pPr algn="l" indent="0" marL="0">
+              <a:buNone/>
+            </a:pPr>
+            <a:r>
+              <a:rPr lang="en-US" sz="1100" b="1" spc="150" kern="0" dirty="0">
+                <a:solidFill>
+                  <a:srgbClr val="455A64"/>
+                </a:solidFill>
+                <a:latin typeface="Calibri" pitchFamily="34" charset="0"/>
+                <a:ea typeface="Calibri" pitchFamily="34" charset="-122"/>
+                <a:cs typeface="Calibri" pitchFamily="34" charset="-120"/>
+              </a:rPr>
+              <a:t>LAB MANAGEMENT &amp; QUALITY   ·   INTERFACES</a:t>
+            </a:r>
+            <a:endParaRPr lang="en-US" sz="1100" dirty="0"/>
+          </a:p>
+        </p:txBody>
+      </p:sp>
+      <p:sp>
+        <p:nvSpPr>
+          <p:cNvPr id="3" name="Text 1"/>
+          <p:cNvSpPr/>
+          <p:nvPr/>
+        </p:nvSpPr>
+        <p:spPr>
+          <a:xfrm>
+            <a:off x="566928" y="713232"/>
+            <a:ext cx="11064240" cy="749808"/>
+          </a:xfrm>
+          <a:prstGeom prst="rect">
+            <a:avLst/>
+          </a:prstGeom>
+          <a:noFill/>
+          <a:ln/>
+        </p:spPr>
+        <p:txBody>
+          <a:bodyPr wrap="square" lIns="0" tIns="0" rIns="0" bIns="0" rtlCol="0" anchor="ctr"/>
+          <a:lstStyle/>
+          <a:p>
+            <a:pPr algn="l" indent="0" marL="0">
+              <a:buNone/>
+            </a:pPr>
+            <a:r>
+              <a:rPr lang="en-US" sz="3000" b="1" dirty="0">
+                <a:solidFill>
+                  <a:srgbClr val="0E3A5F"/>
+                </a:solidFill>
+                <a:latin typeface="Calibri" pitchFamily="34" charset="0"/>
+                <a:ea typeface="Calibri" pitchFamily="34" charset="-122"/>
+                <a:cs typeface="Calibri" pitchFamily="34" charset="-120"/>
+              </a:rPr>
+              <a:t>Interfaces &amp; Standards</a:t>
+            </a:r>
+            <a:endParaRPr lang="en-US" sz="3000" dirty="0"/>
+          </a:p>
+        </p:txBody>
+      </p:sp>
+      <p:sp>
+        <p:nvSpPr>
+          <p:cNvPr id="4" name="Shape 2"/>
+          <p:cNvSpPr/>
+          <p:nvPr/>
+        </p:nvSpPr>
+        <p:spPr>
+          <a:xfrm>
+            <a:off x="566928" y="1517904"/>
+            <a:ext cx="5346040" cy="4114800"/>
+          </a:xfrm>
+          <a:prstGeom prst="roundRect">
+            <a:avLst>
+              <a:gd name="adj" fmla="val 2000"/>
+            </a:avLst>
+          </a:prstGeom>
+          <a:solidFill>
+            <a:srgbClr val="ECEFF1"/>
+          </a:solidFill>
+          <a:ln/>
+          <a:effectLst>
+            <a:outerShdw sx="100000" sy="100000" kx="0" ky="0" algn="bl" rotWithShape="0" blurRad="88900" dist="25400" dir="5400000">
+              <a:srgbClr val="22303C">
+                <a:alpha val="12000"/>
+              </a:srgbClr>
+            </a:outerShdw>
+          </a:effectLst>
+        </p:spPr>
+      </p:sp>
+      <p:sp>
+        <p:nvSpPr>
+          <p:cNvPr id="5" name="Text 3"/>
+          <p:cNvSpPr/>
+          <p:nvPr/>
+        </p:nvSpPr>
+        <p:spPr>
+          <a:xfrm>
+            <a:off x="804672" y="1682496"/>
+            <a:ext cx="4888840" cy="274320"/>
+          </a:xfrm>
+          <a:prstGeom prst="rect">
+            <a:avLst/>
+          </a:prstGeom>
+          <a:noFill/>
+          <a:ln/>
+        </p:spPr>
+        <p:txBody>
+          <a:bodyPr wrap="square" lIns="0" tIns="0" rIns="0" bIns="0" rtlCol="0" anchor="ctr"/>
+          <a:lstStyle/>
+          <a:p>
+            <a:pPr indent="0" marL="0">
+              <a:buNone/>
+            </a:pPr>
+            <a:r>
+              <a:rPr lang="en-US" sz="1200" b="1" spc="100" kern="0" dirty="0">
+                <a:solidFill>
+                  <a:srgbClr val="2C3A41"/>
+                </a:solidFill>
+                <a:latin typeface="Calibri" pitchFamily="34" charset="0"/>
+                <a:ea typeface="Calibri" pitchFamily="34" charset="-122"/>
+                <a:cs typeface="Calibri" pitchFamily="34" charset="-120"/>
+              </a:rPr>
+              <a:t>STANDARDS</a:t>
+            </a:r>
+            <a:endParaRPr lang="en-US" sz="1200" dirty="0"/>
+          </a:p>
+        </p:txBody>
+      </p:sp>
+      <p:sp>
+        <p:nvSpPr>
+          <p:cNvPr id="6" name="Text 4"/>
+          <p:cNvSpPr/>
+          <p:nvPr/>
+        </p:nvSpPr>
+        <p:spPr>
+          <a:xfrm>
+            <a:off x="804672" y="2029968"/>
+            <a:ext cx="4870552" cy="3474720"/>
+          </a:xfrm>
+          <a:prstGeom prst="rect">
+            <a:avLst/>
+          </a:prstGeom>
+          <a:noFill/>
+          <a:ln/>
+        </p:spPr>
+        <p:txBody>
+          <a:bodyPr wrap="square" lIns="0" tIns="0" rIns="0" bIns="0" rtlCol="0" anchor="t"/>
+          <a:lstStyle/>
+          <a:p>
+            <a:pPr algn="l" marL="177800" indent="-177800">
+              <a:spcAft>
+                <a:spcPts val="900"/>
+              </a:spcAft>
+              <a:buSzPct val="100000"/>
+              <a:buChar char="•"/>
+            </a:pPr>
+            <a:r>
+              <a:rPr lang="en-US" sz="1250" b="1" dirty="0">
+                <a:solidFill>
+                  <a:srgbClr val="1B2A38"/>
+                </a:solidFill>
+                <a:latin typeface="Calibri" pitchFamily="34" charset="0"/>
+                <a:ea typeface="Calibri" pitchFamily="34" charset="-122"/>
+                <a:cs typeface="Calibri" pitchFamily="34" charset="-120"/>
+              </a:rPr>
+              <a:t>HL7 messaging moves orders and results; LOINC standardizes test identity.</a:t>
+            </a:r>
+            <a:endParaRPr lang="en-US" sz="1250" dirty="0"/>
+          </a:p>
+          <a:p>
+            <a:pPr algn="l" marL="177800" indent="-177800">
+              <a:spcAft>
+                <a:spcPts val="900"/>
+              </a:spcAft>
+              <a:buSzPct val="100000"/>
+              <a:buChar char="•"/>
+            </a:pPr>
+            <a:r>
+              <a:rPr lang="en-US" sz="1250" dirty="0">
+                <a:solidFill>
+                  <a:srgbClr val="33444F"/>
+                </a:solidFill>
+                <a:latin typeface="Calibri" pitchFamily="34" charset="0"/>
+                <a:ea typeface="Calibri" pitchFamily="34" charset="-122"/>
+                <a:cs typeface="Calibri" pitchFamily="34" charset="-120"/>
+              </a:rPr>
+              <a:t>Unidirectional vs bidirectional instrument interfaces.</a:t>
+            </a:r>
+            <a:endParaRPr lang="en-US" sz="1250" dirty="0"/>
+          </a:p>
+          <a:p>
+            <a:pPr algn="l" marL="177800" indent="-177800">
+              <a:spcAft>
+                <a:spcPts val="900"/>
+              </a:spcAft>
+              <a:buSzPct val="100000"/>
+              <a:buChar char="•"/>
+            </a:pPr>
+            <a:r>
+              <a:rPr lang="en-US" sz="1250" dirty="0">
+                <a:solidFill>
+                  <a:srgbClr val="33444F"/>
+                </a:solidFill>
+                <a:latin typeface="Calibri" pitchFamily="34" charset="0"/>
+                <a:ea typeface="Calibri" pitchFamily="34" charset="-122"/>
+                <a:cs typeface="Calibri" pitchFamily="34" charset="-120"/>
+              </a:rPr>
+              <a:t>Correct mapping (units, codes, ranges) is critical.</a:t>
+            </a:r>
+            <a:endParaRPr lang="en-US" sz="1250" dirty="0"/>
+          </a:p>
+          <a:p>
+            <a:pPr algn="l" marL="177800" indent="-177800">
+              <a:spcAft>
+                <a:spcPts val="900"/>
+              </a:spcAft>
+              <a:buSzPct val="100000"/>
+              <a:buChar char="•"/>
+            </a:pPr>
+            <a:r>
+              <a:rPr lang="en-US" sz="1250" dirty="0">
+                <a:solidFill>
+                  <a:srgbClr val="33444F"/>
+                </a:solidFill>
+                <a:latin typeface="Calibri" pitchFamily="34" charset="0"/>
+                <a:ea typeface="Calibri" pitchFamily="34" charset="-122"/>
+                <a:cs typeface="Calibri" pitchFamily="34" charset="-120"/>
+              </a:rPr>
+              <a:t>Validate interfaces before go-live and after changes.</a:t>
+            </a:r>
+            <a:endParaRPr lang="en-US" sz="1250" dirty="0"/>
+          </a:p>
+        </p:txBody>
+      </p:sp>
+      <p:sp>
+        <p:nvSpPr>
+          <p:cNvPr id="7" name="Shape 5"/>
+          <p:cNvSpPr/>
+          <p:nvPr/>
+        </p:nvSpPr>
+        <p:spPr>
+          <a:xfrm>
+            <a:off x="6278728" y="1517904"/>
+            <a:ext cx="5346040" cy="4114800"/>
+          </a:xfrm>
+          <a:prstGeom prst="roundRect">
+            <a:avLst>
+              <a:gd name="adj" fmla="val 2000"/>
+            </a:avLst>
+          </a:prstGeom>
+          <a:solidFill>
+            <a:srgbClr val="E6EAED"/>
+          </a:solidFill>
+          <a:ln/>
+          <a:effectLst>
+            <a:outerShdw sx="100000" sy="100000" kx="0" ky="0" algn="bl" rotWithShape="0" blurRad="88900" dist="25400" dir="5400000">
+              <a:srgbClr val="22303C">
+                <a:alpha val="12000"/>
+              </a:srgbClr>
+            </a:outerShdw>
+          </a:effectLst>
+        </p:spPr>
+      </p:sp>
+      <p:sp>
+        <p:nvSpPr>
+          <p:cNvPr id="8" name="Text 6"/>
+          <p:cNvSpPr/>
+          <p:nvPr/>
+        </p:nvSpPr>
+        <p:spPr>
+          <a:xfrm>
+            <a:off x="6516472" y="1682496"/>
+            <a:ext cx="4888840" cy="274320"/>
+          </a:xfrm>
+          <a:prstGeom prst="rect">
+            <a:avLst/>
+          </a:prstGeom>
+          <a:noFill/>
+          <a:ln/>
+        </p:spPr>
+        <p:txBody>
+          <a:bodyPr wrap="square" lIns="0" tIns="0" rIns="0" bIns="0" rtlCol="0" anchor="ctr"/>
+          <a:lstStyle/>
+          <a:p>
+            <a:pPr indent="0" marL="0">
+              <a:buNone/>
+            </a:pPr>
+            <a:r>
+              <a:rPr lang="en-US" sz="1200" b="1" spc="100" kern="0" dirty="0">
+                <a:solidFill>
+                  <a:srgbClr val="2C3A41"/>
+                </a:solidFill>
+                <a:latin typeface="Calibri" pitchFamily="34" charset="0"/>
+                <a:ea typeface="Calibri" pitchFamily="34" charset="-122"/>
+                <a:cs typeface="Calibri" pitchFamily="34" charset="-120"/>
+              </a:rPr>
+              <a:t>WHERE ERRORS HIDE</a:t>
+            </a:r>
+            <a:endParaRPr lang="en-US" sz="1200" dirty="0"/>
+          </a:p>
+        </p:txBody>
+      </p:sp>
+      <p:sp>
+        <p:nvSpPr>
+          <p:cNvPr id="9" name="Text 7"/>
+          <p:cNvSpPr/>
+          <p:nvPr/>
+        </p:nvSpPr>
+        <p:spPr>
+          <a:xfrm>
+            <a:off x="6516472" y="2029968"/>
+            <a:ext cx="4870552" cy="3474720"/>
+          </a:xfrm>
+          <a:prstGeom prst="rect">
+            <a:avLst/>
+          </a:prstGeom>
+          <a:noFill/>
+          <a:ln/>
+        </p:spPr>
+        <p:txBody>
+          <a:bodyPr wrap="square" lIns="0" tIns="0" rIns="0" bIns="0" rtlCol="0" anchor="t"/>
+          <a:lstStyle/>
+          <a:p>
+            <a:pPr algn="l" marL="177800" indent="-177800">
+              <a:spcAft>
+                <a:spcPts val="900"/>
+              </a:spcAft>
+              <a:buSzPct val="100000"/>
+              <a:buChar char="•"/>
+            </a:pPr>
+            <a:r>
+              <a:rPr lang="en-US" sz="1250" b="1" dirty="0">
+                <a:solidFill>
+                  <a:srgbClr val="1B2A38"/>
+                </a:solidFill>
+                <a:latin typeface="Calibri" pitchFamily="34" charset="0"/>
+                <a:ea typeface="Calibri" pitchFamily="34" charset="-122"/>
+                <a:cs typeface="Calibri" pitchFamily="34" charset="-120"/>
+              </a:rPr>
+              <a:t>Mapping errors (wrong unit, code, or reference range) silently corrupt results.</a:t>
+            </a:r>
+            <a:endParaRPr lang="en-US" sz="1250" dirty="0"/>
+          </a:p>
+          <a:p>
+            <a:pPr algn="l" marL="177800" indent="-177800">
+              <a:spcAft>
+                <a:spcPts val="900"/>
+              </a:spcAft>
+              <a:buSzPct val="100000"/>
+              <a:buChar char="•"/>
+            </a:pPr>
+            <a:r>
+              <a:rPr lang="en-US" sz="1250" dirty="0">
+                <a:solidFill>
+                  <a:srgbClr val="33444F"/>
+                </a:solidFill>
+                <a:latin typeface="Calibri" pitchFamily="34" charset="0"/>
+                <a:ea typeface="Calibri" pitchFamily="34" charset="-122"/>
+                <a:cs typeface="Calibri" pitchFamily="34" charset="-120"/>
+              </a:rPr>
+              <a:t>Truncated or mis-routed messages.</a:t>
+            </a:r>
+            <a:endParaRPr lang="en-US" sz="1250" dirty="0"/>
+          </a:p>
+          <a:p>
+            <a:pPr algn="l" marL="177800" indent="-177800">
+              <a:spcAft>
+                <a:spcPts val="900"/>
+              </a:spcAft>
+              <a:buSzPct val="100000"/>
+              <a:buChar char="•"/>
+            </a:pPr>
+            <a:r>
+              <a:rPr lang="en-US" sz="1250" dirty="0">
+                <a:solidFill>
+                  <a:srgbClr val="33444F"/>
+                </a:solidFill>
+                <a:latin typeface="Calibri" pitchFamily="34" charset="0"/>
+                <a:ea typeface="Calibri" pitchFamily="34" charset="-122"/>
+                <a:cs typeface="Calibri" pitchFamily="34" charset="-120"/>
+              </a:rPr>
+              <a:t>Time-zone and identifier mismatches.</a:t>
+            </a:r>
+            <a:endParaRPr lang="en-US" sz="1250" dirty="0"/>
+          </a:p>
+          <a:p>
+            <a:pPr algn="l" marL="177800" indent="-177800">
+              <a:spcAft>
+                <a:spcPts val="900"/>
+              </a:spcAft>
+              <a:buSzPct val="100000"/>
+              <a:buChar char="•"/>
+            </a:pPr>
+            <a:r>
+              <a:rPr lang="en-US" sz="1250" dirty="0">
+                <a:solidFill>
+                  <a:srgbClr val="33444F"/>
+                </a:solidFill>
+                <a:latin typeface="Calibri" pitchFamily="34" charset="0"/>
+                <a:ea typeface="Calibri" pitchFamily="34" charset="-122"/>
+                <a:cs typeface="Calibri" pitchFamily="34" charset="-120"/>
+              </a:rPr>
+              <a:t>Test thoroughly across the full message set.</a:t>
+            </a:r>
+            <a:endParaRPr lang="en-US" sz="1250" dirty="0"/>
+          </a:p>
+        </p:txBody>
+      </p:sp>
+      <p:sp>
+        <p:nvSpPr>
+          <p:cNvPr id="10" name="Text 8"/>
+          <p:cNvSpPr/>
+          <p:nvPr/>
+        </p:nvSpPr>
+        <p:spPr>
+          <a:xfrm>
+            <a:off x="566928" y="6473952"/>
+            <a:ext cx="7772400" cy="274320"/>
+          </a:xfrm>
+          <a:prstGeom prst="rect">
+            <a:avLst/>
+          </a:prstGeom>
+          <a:noFill/>
+          <a:ln/>
+        </p:spPr>
+        <p:txBody>
+          <a:bodyPr wrap="square" lIns="0" tIns="0" rIns="0" bIns="0" rtlCol="0" anchor="ctr"/>
+          <a:lstStyle/>
+          <a:p>
+            <a:pPr algn="l" indent="0" marL="0">
+              <a:buNone/>
+            </a:pPr>
+            <a:r>
+              <a:rPr lang="en-US" sz="850" dirty="0">
+                <a:solidFill>
+                  <a:srgbClr val="9AA8B4"/>
+                </a:solidFill>
+                <a:latin typeface="Calibri" pitchFamily="34" charset="0"/>
+                <a:ea typeface="Calibri" pitchFamily="34" charset="-122"/>
+                <a:cs typeface="Calibri" pitchFamily="34" charset="-120"/>
+              </a:rPr>
+              <a:t>Makassed General Hospital  ·  Department of Laboratory Medicine</a:t>
+            </a:r>
+            <a:endParaRPr lang="en-US" sz="850" dirty="0"/>
+          </a:p>
+        </p:txBody>
+      </p:sp>
+      <p:sp>
+        <p:nvSpPr>
+          <p:cNvPr id="11" name="Text 9"/>
+          <p:cNvSpPr/>
+          <p:nvPr/>
+        </p:nvSpPr>
+        <p:spPr>
+          <a:xfrm>
+            <a:off x="9814255" y="6473952"/>
+            <a:ext cx="1828800" cy="274320"/>
+          </a:xfrm>
+          <a:prstGeom prst="rect">
+            <a:avLst/>
+          </a:prstGeom>
+          <a:noFill/>
+          <a:ln/>
+        </p:spPr>
+        <p:txBody>
+          <a:bodyPr wrap="square" lIns="0" tIns="0" rIns="0" bIns="0" rtlCol="0" anchor="ctr"/>
+          <a:lstStyle/>
+          <a:p>
+            <a:pPr algn="r" indent="0" marL="0">
+              <a:buNone/>
+            </a:pPr>
+            <a:r>
+              <a:rPr lang="en-US" sz="850" dirty="0">
+                <a:solidFill>
+                  <a:srgbClr val="9AA8B4"/>
+                </a:solidFill>
+                <a:latin typeface="Calibri" pitchFamily="34" charset="0"/>
+                <a:ea typeface="Calibri" pitchFamily="34" charset="-122"/>
+                <a:cs typeface="Calibri" pitchFamily="34" charset="-120"/>
+              </a:rPr>
+              <a:t>CP Lecture Series</a:t>
+            </a:r>
+            <a:pPr algn="r" indent="0" marL="0">
+              <a:buNone/>
+            </a:pPr>
+            <a:r>
+              <a:rPr lang="en-US" sz="850" dirty="0">
+                <a:solidFill>
+                  <a:srgbClr val="DCE4EC"/>
+                </a:solidFill>
+                <a:latin typeface="Calibri" pitchFamily="34" charset="0"/>
+                <a:ea typeface="Calibri" pitchFamily="34" charset="-122"/>
+                <a:cs typeface="Calibri" pitchFamily="34" charset="-120"/>
+              </a:rPr>
+              <a:t>   ·   </a:t>
+            </a:r>
+            <a:pPr algn="r" indent="0" marL="0">
+              <a:buNone/>
+            </a:pPr>
+            <a:r>
+              <a:rPr lang="en-US" sz="850" b="1" dirty="0">
+                <a:solidFill>
+                  <a:srgbClr val="455A64"/>
+                </a:solidFill>
+                <a:latin typeface="Calibri" pitchFamily="34" charset="0"/>
+                <a:ea typeface="Calibri" pitchFamily="34" charset="-122"/>
+                <a:cs typeface="Calibri" pitchFamily="34" charset="-120"/>
+              </a:rPr>
+              <a:t>7</a:t>
+            </a:r>
+            <a:endParaRPr lang="en-US" sz="850" dirty="0"/>
+          </a:p>
+        </p:txBody>
+      </p:sp>
+    </p:spTree>
+  </p:cSld>
+  <p:clrMapOvr>
+    <a:masterClrMapping/>
+  </p:clrMapOvr>
+</p:sld>
+</file>
+
+<file path=ppt/slides/slide9.xml><?xml version="1.0" encoding="utf-8"?>
+<p:sld xmlns:a="http://schemas.openxmlformats.org/drawingml/2006/main" xmlns:r="http://schemas.openxmlformats.org/officeDocument/2006/relationships" xmlns:p="http://schemas.openxmlformats.org/presentationml/2006/main">
+  <p:cSld name="Slide 9">
     <p:bg>
       <p:bgPr>
         <a:solidFill>
@@ -11927,573 +15433,9 @@
                 <a:ea typeface="Calibri" pitchFamily="34" charset="-122"/>
                 <a:cs typeface="Calibri" pitchFamily="34" charset="-120"/>
               </a:rPr>
-              <a:t>Autoverification, Interfaces &amp; Downtime</a:t>
+              <a:t>Middleware, Autoverification &amp; Integrity</a:t>
             </a:r>
             <a:endParaRPr lang="en-US" sz="3800" dirty="0"/>
-          </a:p>
-        </p:txBody>
-      </p:sp>
-    </p:spTree>
-  </p:cSld>
-  <p:clrMapOvr>
-    <a:masterClrMapping/>
-  </p:clrMapOvr>
-</p:sld>
-</file>
-
-<file path=ppt/slides/slide9.xml><?xml version="1.0" encoding="utf-8"?>
-<p:sld xmlns:a="http://schemas.openxmlformats.org/drawingml/2006/main" xmlns:r="http://schemas.openxmlformats.org/officeDocument/2006/relationships" xmlns:p="http://schemas.openxmlformats.org/presentationml/2006/main">
-  <p:cSld name="Slide 9">
-    <p:bg>
-      <p:bgPr>
-        <a:solidFill>
-          <a:srgbClr val="FFFFFF"/>
-        </a:solidFill>
-      </p:bgPr>
-    </p:bg>
-    <p:spTree>
-      <p:nvGrpSpPr>
-        <p:cNvPr id="1" name=""/>
-        <p:cNvGrpSpPr/>
-        <p:nvPr/>
-      </p:nvGrpSpPr>
-      <p:grpSpPr>
-        <a:xfrm>
-          <a:off x="0" y="0"/>
-          <a:ext cx="0" cy="0"/>
-          <a:chOff x="0" y="0"/>
-          <a:chExt cx="0" cy="0"/>
-        </a:xfrm>
-      </p:grpSpPr>
-      <p:sp>
-        <p:nvSpPr>
-          <p:cNvPr id="2" name="Text 0"/>
-          <p:cNvSpPr/>
-          <p:nvPr/>
-        </p:nvSpPr>
-        <p:spPr>
-          <a:xfrm>
-            <a:off x="566928" y="329184"/>
-            <a:ext cx="10515600" cy="310896"/>
-          </a:xfrm>
-          <a:prstGeom prst="rect">
-            <a:avLst/>
-          </a:prstGeom>
-          <a:noFill/>
-          <a:ln/>
-        </p:spPr>
-        <p:txBody>
-          <a:bodyPr wrap="square" lIns="0" tIns="0" rIns="0" bIns="0" rtlCol="0" anchor="ctr"/>
-          <a:lstStyle/>
-          <a:p>
-            <a:pPr algn="l" indent="0" marL="0">
-              <a:buNone/>
-            </a:pPr>
-            <a:r>
-              <a:rPr lang="en-US" sz="1100" b="1" spc="150" kern="0" dirty="0">
-                <a:solidFill>
-                  <a:srgbClr val="455A64"/>
-                </a:solidFill>
-                <a:latin typeface="Calibri" pitchFamily="34" charset="0"/>
-                <a:ea typeface="Calibri" pitchFamily="34" charset="-122"/>
-                <a:cs typeface="Calibri" pitchFamily="34" charset="-120"/>
-              </a:rPr>
-              <a:t>LAB MANAGEMENT &amp; QUALITY   ·   AUTOVERIFICATION</a:t>
-            </a:r>
-            <a:endParaRPr lang="en-US" sz="1100" dirty="0"/>
-          </a:p>
-        </p:txBody>
-      </p:sp>
-      <p:sp>
-        <p:nvSpPr>
-          <p:cNvPr id="3" name="Text 1"/>
-          <p:cNvSpPr/>
-          <p:nvPr/>
-        </p:nvSpPr>
-        <p:spPr>
-          <a:xfrm>
-            <a:off x="566928" y="713232"/>
-            <a:ext cx="11064240" cy="749808"/>
-          </a:xfrm>
-          <a:prstGeom prst="rect">
-            <a:avLst/>
-          </a:prstGeom>
-          <a:noFill/>
-          <a:ln/>
-        </p:spPr>
-        <p:txBody>
-          <a:bodyPr wrap="square" lIns="0" tIns="0" rIns="0" bIns="0" rtlCol="0" anchor="ctr"/>
-          <a:lstStyle/>
-          <a:p>
-            <a:pPr algn="l" indent="0" marL="0">
-              <a:buNone/>
-            </a:pPr>
-            <a:r>
-              <a:rPr lang="en-US" sz="3000" b="1" dirty="0">
-                <a:solidFill>
-                  <a:srgbClr val="0E3A5F"/>
-                </a:solidFill>
-                <a:latin typeface="Calibri" pitchFamily="34" charset="0"/>
-                <a:ea typeface="Calibri" pitchFamily="34" charset="-122"/>
-                <a:cs typeface="Calibri" pitchFamily="34" charset="-120"/>
-              </a:rPr>
-              <a:t>Releasing Results Safely</a:t>
-            </a:r>
-            <a:endParaRPr lang="en-US" sz="3000" dirty="0"/>
-          </a:p>
-        </p:txBody>
-      </p:sp>
-      <p:sp>
-        <p:nvSpPr>
-          <p:cNvPr id="4" name="Shape 2"/>
-          <p:cNvSpPr/>
-          <p:nvPr/>
-        </p:nvSpPr>
-        <p:spPr>
-          <a:xfrm>
-            <a:off x="566928" y="1517904"/>
-            <a:ext cx="5346040" cy="4114800"/>
-          </a:xfrm>
-          <a:prstGeom prst="roundRect">
-            <a:avLst>
-              <a:gd name="adj" fmla="val 2000"/>
-            </a:avLst>
-          </a:prstGeom>
-          <a:solidFill>
-            <a:srgbClr val="ECEFF1"/>
-          </a:solidFill>
-          <a:ln/>
-          <a:effectLst>
-            <a:outerShdw sx="100000" sy="100000" kx="0" ky="0" algn="bl" rotWithShape="0" blurRad="88900" dist="25400" dir="5400000">
-              <a:srgbClr val="22303C">
-                <a:alpha val="12000"/>
-              </a:srgbClr>
-            </a:outerShdw>
-          </a:effectLst>
-        </p:spPr>
-      </p:sp>
-      <p:sp>
-        <p:nvSpPr>
-          <p:cNvPr id="5" name="Text 3"/>
-          <p:cNvSpPr/>
-          <p:nvPr/>
-        </p:nvSpPr>
-        <p:spPr>
-          <a:xfrm>
-            <a:off x="804672" y="1682496"/>
-            <a:ext cx="4888840" cy="274320"/>
-          </a:xfrm>
-          <a:prstGeom prst="rect">
-            <a:avLst/>
-          </a:prstGeom>
-          <a:noFill/>
-          <a:ln/>
-        </p:spPr>
-        <p:txBody>
-          <a:bodyPr wrap="square" lIns="0" tIns="0" rIns="0" bIns="0" rtlCol="0" anchor="ctr"/>
-          <a:lstStyle/>
-          <a:p>
-            <a:pPr indent="0" marL="0">
-              <a:buNone/>
-            </a:pPr>
-            <a:r>
-              <a:rPr lang="en-US" sz="1200" b="1" spc="100" kern="0" dirty="0">
-                <a:solidFill>
-                  <a:srgbClr val="2C3A41"/>
-                </a:solidFill>
-                <a:latin typeface="Calibri" pitchFamily="34" charset="0"/>
-                <a:ea typeface="Calibri" pitchFamily="34" charset="-122"/>
-                <a:cs typeface="Calibri" pitchFamily="34" charset="-120"/>
-              </a:rPr>
-              <a:t>HOW AUTOVERIFICATION WORKS</a:t>
-            </a:r>
-            <a:endParaRPr lang="en-US" sz="1200" dirty="0"/>
-          </a:p>
-        </p:txBody>
-      </p:sp>
-      <p:sp>
-        <p:nvSpPr>
-          <p:cNvPr id="6" name="Text 4"/>
-          <p:cNvSpPr/>
-          <p:nvPr/>
-        </p:nvSpPr>
-        <p:spPr>
-          <a:xfrm>
-            <a:off x="804672" y="2029968"/>
-            <a:ext cx="4870552" cy="3474720"/>
-          </a:xfrm>
-          <a:prstGeom prst="rect">
-            <a:avLst/>
-          </a:prstGeom>
-          <a:noFill/>
-          <a:ln/>
-        </p:spPr>
-        <p:txBody>
-          <a:bodyPr wrap="square" lIns="0" tIns="0" rIns="0" bIns="0" rtlCol="0" anchor="t"/>
-          <a:lstStyle/>
-          <a:p>
-            <a:pPr algn="l" marL="177800" indent="-177800">
-              <a:spcAft>
-                <a:spcPts val="900"/>
-              </a:spcAft>
-              <a:buSzPct val="100000"/>
-              <a:buChar char="•"/>
-            </a:pPr>
-            <a:r>
-              <a:rPr lang="en-US" sz="1250" b="1" dirty="0">
-                <a:solidFill>
-                  <a:srgbClr val="1B2A38"/>
-                </a:solidFill>
-                <a:latin typeface="Calibri" pitchFamily="34" charset="0"/>
-                <a:ea typeface="Calibri" pitchFamily="34" charset="-122"/>
-                <a:cs typeface="Calibri" pitchFamily="34" charset="-120"/>
-              </a:rPr>
-              <a:t>Rules auto-release results that pass QC, are within defined limits, and have no flags — freeing staff for exceptions.</a:t>
-            </a:r>
-            <a:endParaRPr lang="en-US" sz="1250" dirty="0"/>
-          </a:p>
-          <a:p>
-            <a:pPr algn="l" marL="177800" indent="-177800">
-              <a:spcAft>
-                <a:spcPts val="900"/>
-              </a:spcAft>
-              <a:buSzPct val="100000"/>
-              <a:buChar char="•"/>
-            </a:pPr>
-            <a:r>
-              <a:rPr lang="en-US" sz="1250" dirty="0">
-                <a:solidFill>
-                  <a:srgbClr val="33444F"/>
-                </a:solidFill>
-                <a:latin typeface="Calibri" pitchFamily="34" charset="0"/>
-                <a:ea typeface="Calibri" pitchFamily="34" charset="-122"/>
-                <a:cs typeface="Calibri" pitchFamily="34" charset="-120"/>
-              </a:rPr>
-              <a:t>Results that fail any rule are held for human review.</a:t>
-            </a:r>
-            <a:endParaRPr lang="en-US" sz="1250" dirty="0"/>
-          </a:p>
-          <a:p>
-            <a:pPr algn="l" marL="177800" indent="-177800">
-              <a:spcAft>
-                <a:spcPts val="900"/>
-              </a:spcAft>
-              <a:buSzPct val="100000"/>
-              <a:buChar char="•"/>
-            </a:pPr>
-            <a:r>
-              <a:rPr lang="en-US" sz="1250" dirty="0">
-                <a:solidFill>
-                  <a:srgbClr val="33444F"/>
-                </a:solidFill>
-                <a:latin typeface="Calibri" pitchFamily="34" charset="0"/>
-                <a:ea typeface="Calibri" pitchFamily="34" charset="-122"/>
-                <a:cs typeface="Calibri" pitchFamily="34" charset="-120"/>
-              </a:rPr>
-              <a:t>Rules encode delta checks, critical limits, and absurd-value checks.</a:t>
-            </a:r>
-            <a:endParaRPr lang="en-US" sz="1250" dirty="0"/>
-          </a:p>
-          <a:p>
-            <a:pPr algn="l" marL="177800" indent="-177800">
-              <a:spcAft>
-                <a:spcPts val="900"/>
-              </a:spcAft>
-              <a:buSzPct val="100000"/>
-              <a:buChar char="•"/>
-            </a:pPr>
-            <a:r>
-              <a:rPr lang="en-US" sz="1250" dirty="0">
-                <a:solidFill>
-                  <a:srgbClr val="33444F"/>
-                </a:solidFill>
-                <a:latin typeface="Calibri" pitchFamily="34" charset="0"/>
-                <a:ea typeface="Calibri" pitchFamily="34" charset="-122"/>
-                <a:cs typeface="Calibri" pitchFamily="34" charset="-120"/>
-              </a:rPr>
-              <a:t>Validate rules before go-live and after changes.</a:t>
-            </a:r>
-            <a:endParaRPr lang="en-US" sz="1250" dirty="0"/>
-          </a:p>
-        </p:txBody>
-      </p:sp>
-      <p:sp>
-        <p:nvSpPr>
-          <p:cNvPr id="7" name="Shape 5"/>
-          <p:cNvSpPr/>
-          <p:nvPr/>
-        </p:nvSpPr>
-        <p:spPr>
-          <a:xfrm>
-            <a:off x="6278728" y="1517904"/>
-            <a:ext cx="5346040" cy="4114800"/>
-          </a:xfrm>
-          <a:prstGeom prst="roundRect">
-            <a:avLst>
-              <a:gd name="adj" fmla="val 2000"/>
-            </a:avLst>
-          </a:prstGeom>
-          <a:solidFill>
-            <a:srgbClr val="ECEFF1"/>
-          </a:solidFill>
-          <a:ln/>
-          <a:effectLst>
-            <a:outerShdw sx="100000" sy="100000" kx="0" ky="0" algn="bl" rotWithShape="0" blurRad="88900" dist="25400" dir="5400000">
-              <a:srgbClr val="22303C">
-                <a:alpha val="12000"/>
-              </a:srgbClr>
-            </a:outerShdw>
-          </a:effectLst>
-        </p:spPr>
-      </p:sp>
-      <p:sp>
-        <p:nvSpPr>
-          <p:cNvPr id="8" name="Text 6"/>
-          <p:cNvSpPr/>
-          <p:nvPr/>
-        </p:nvSpPr>
-        <p:spPr>
-          <a:xfrm>
-            <a:off x="6516472" y="1682496"/>
-            <a:ext cx="4888840" cy="274320"/>
-          </a:xfrm>
-          <a:prstGeom prst="rect">
-            <a:avLst/>
-          </a:prstGeom>
-          <a:noFill/>
-          <a:ln/>
-        </p:spPr>
-        <p:txBody>
-          <a:bodyPr wrap="square" lIns="0" tIns="0" rIns="0" bIns="0" rtlCol="0" anchor="ctr"/>
-          <a:lstStyle/>
-          <a:p>
-            <a:pPr indent="0" marL="0">
-              <a:buNone/>
-            </a:pPr>
-            <a:r>
-              <a:rPr lang="en-US" sz="1200" b="1" spc="100" kern="0" dirty="0">
-                <a:solidFill>
-                  <a:srgbClr val="2C3A41"/>
-                </a:solidFill>
-                <a:latin typeface="Calibri" pitchFamily="34" charset="0"/>
-                <a:ea typeface="Calibri" pitchFamily="34" charset="-122"/>
-                <a:cs typeface="Calibri" pitchFamily="34" charset="-120"/>
-              </a:rPr>
-              <a:t>INTERFACES &amp; VOCABULARIES</a:t>
-            </a:r>
-            <a:endParaRPr lang="en-US" sz="1200" dirty="0"/>
-          </a:p>
-        </p:txBody>
-      </p:sp>
-      <p:sp>
-        <p:nvSpPr>
-          <p:cNvPr id="9" name="Text 7"/>
-          <p:cNvSpPr/>
-          <p:nvPr/>
-        </p:nvSpPr>
-        <p:spPr>
-          <a:xfrm>
-            <a:off x="6516472" y="2029968"/>
-            <a:ext cx="4870552" cy="3474720"/>
-          </a:xfrm>
-          <a:prstGeom prst="rect">
-            <a:avLst/>
-          </a:prstGeom>
-          <a:noFill/>
-          <a:ln/>
-        </p:spPr>
-        <p:txBody>
-          <a:bodyPr wrap="square" lIns="0" tIns="0" rIns="0" bIns="0" rtlCol="0" anchor="t"/>
-          <a:lstStyle/>
-          <a:p>
-            <a:pPr algn="l" marL="177800" indent="-177800">
-              <a:spcAft>
-                <a:spcPts val="900"/>
-              </a:spcAft>
-              <a:buSzPct val="100000"/>
-              <a:buChar char="•"/>
-            </a:pPr>
-            <a:r>
-              <a:rPr lang="en-US" sz="1250" b="1" dirty="0">
-                <a:solidFill>
-                  <a:srgbClr val="1B2A38"/>
-                </a:solidFill>
-                <a:latin typeface="Calibri" pitchFamily="34" charset="0"/>
-                <a:ea typeface="Calibri" pitchFamily="34" charset="-122"/>
-                <a:cs typeface="Calibri" pitchFamily="34" charset="-120"/>
-              </a:rPr>
-              <a:t>HL7 messages carry orders/results; mapping errors can mis-route or mislabel data.</a:t>
-            </a:r>
-            <a:endParaRPr lang="en-US" sz="1250" dirty="0"/>
-          </a:p>
-          <a:p>
-            <a:pPr algn="l" marL="177800" indent="-177800">
-              <a:spcAft>
-                <a:spcPts val="900"/>
-              </a:spcAft>
-              <a:buSzPct val="100000"/>
-              <a:buChar char="•"/>
-            </a:pPr>
-            <a:r>
-              <a:rPr lang="en-US" sz="1250" dirty="0">
-                <a:solidFill>
-                  <a:srgbClr val="33444F"/>
-                </a:solidFill>
-                <a:latin typeface="Calibri" pitchFamily="34" charset="0"/>
-                <a:ea typeface="Calibri" pitchFamily="34" charset="-122"/>
-                <a:cs typeface="Calibri" pitchFamily="34" charset="-120"/>
-              </a:rPr>
-              <a:t>Validate every interface, unit, and reference-range mapping.</a:t>
-            </a:r>
-            <a:endParaRPr lang="en-US" sz="1250" dirty="0"/>
-          </a:p>
-          <a:p>
-            <a:pPr algn="l" marL="177800" indent="-177800">
-              <a:spcAft>
-                <a:spcPts val="900"/>
-              </a:spcAft>
-              <a:buSzPct val="100000"/>
-              <a:buChar char="•"/>
-            </a:pPr>
-            <a:r>
-              <a:rPr lang="en-US" sz="1250" dirty="0">
-                <a:solidFill>
-                  <a:srgbClr val="33444F"/>
-                </a:solidFill>
-                <a:latin typeface="Calibri" pitchFamily="34" charset="0"/>
-                <a:ea typeface="Calibri" pitchFamily="34" charset="-122"/>
-                <a:cs typeface="Calibri" pitchFamily="34" charset="-120"/>
-              </a:rPr>
-              <a:t>LOINC encodes the test/observation; SNOMED CT encodes results/diagnoses — enabling interoperability.</a:t>
-            </a:r>
-            <a:endParaRPr lang="en-US" sz="1250" dirty="0"/>
-          </a:p>
-          <a:p>
-            <a:pPr algn="l" marL="177800" indent="-177800">
-              <a:spcAft>
-                <a:spcPts val="900"/>
-              </a:spcAft>
-              <a:buSzPct val="100000"/>
-              <a:buChar char="•"/>
-            </a:pPr>
-            <a:r>
-              <a:rPr lang="en-US" sz="1250" dirty="0">
-                <a:solidFill>
-                  <a:srgbClr val="33444F"/>
-                </a:solidFill>
-                <a:latin typeface="Calibri" pitchFamily="34" charset="0"/>
-                <a:ea typeface="Calibri" pitchFamily="34" charset="-122"/>
-                <a:cs typeface="Calibri" pitchFamily="34" charset="-120"/>
-              </a:rPr>
-              <a:t>Test interface changes in a controlled environment before production.</a:t>
-            </a:r>
-            <a:endParaRPr lang="en-US" sz="1250" dirty="0"/>
-          </a:p>
-        </p:txBody>
-      </p:sp>
-      <p:sp>
-        <p:nvSpPr>
-          <p:cNvPr id="10" name="Text 8"/>
-          <p:cNvSpPr/>
-          <p:nvPr/>
-        </p:nvSpPr>
-        <p:spPr>
-          <a:xfrm>
-            <a:off x="566928" y="6473952"/>
-            <a:ext cx="7772400" cy="274320"/>
-          </a:xfrm>
-          <a:prstGeom prst="rect">
-            <a:avLst/>
-          </a:prstGeom>
-          <a:noFill/>
-          <a:ln/>
-        </p:spPr>
-        <p:txBody>
-          <a:bodyPr wrap="square" lIns="0" tIns="0" rIns="0" bIns="0" rtlCol="0" anchor="ctr"/>
-          <a:lstStyle/>
-          <a:p>
-            <a:pPr algn="l" indent="0" marL="0">
-              <a:buNone/>
-            </a:pPr>
-            <a:r>
-              <a:rPr lang="en-US" sz="850" dirty="0">
-                <a:solidFill>
-                  <a:srgbClr val="9AA8B4"/>
-                </a:solidFill>
-                <a:latin typeface="Calibri" pitchFamily="34" charset="0"/>
-                <a:ea typeface="Calibri" pitchFamily="34" charset="-122"/>
-                <a:cs typeface="Calibri" pitchFamily="34" charset="-120"/>
-              </a:rPr>
-              <a:t>Makassed General Hospital  ·  Department of Laboratory Medicine</a:t>
-            </a:r>
-            <a:endParaRPr lang="en-US" sz="850" dirty="0"/>
-          </a:p>
-        </p:txBody>
-      </p:sp>
-      <p:sp>
-        <p:nvSpPr>
-          <p:cNvPr id="11" name="Text 9"/>
-          <p:cNvSpPr/>
-          <p:nvPr/>
-        </p:nvSpPr>
-        <p:spPr>
-          <a:xfrm>
-            <a:off x="9814255" y="6473952"/>
-            <a:ext cx="1828800" cy="274320"/>
-          </a:xfrm>
-          <a:prstGeom prst="rect">
-            <a:avLst/>
-          </a:prstGeom>
-          <a:noFill/>
-          <a:ln/>
-        </p:spPr>
-        <p:txBody>
-          <a:bodyPr wrap="square" lIns="0" tIns="0" rIns="0" bIns="0" rtlCol="0" anchor="ctr"/>
-          <a:lstStyle/>
-          <a:p>
-            <a:pPr algn="r" indent="0" marL="0">
-              <a:buNone/>
-            </a:pPr>
-            <a:r>
-              <a:rPr lang="en-US" sz="850" dirty="0">
-                <a:solidFill>
-                  <a:srgbClr val="9AA8B4"/>
-                </a:solidFill>
-                <a:latin typeface="Calibri" pitchFamily="34" charset="0"/>
-                <a:ea typeface="Calibri" pitchFamily="34" charset="-122"/>
-                <a:cs typeface="Calibri" pitchFamily="34" charset="-120"/>
-              </a:rPr>
-              <a:t>CP Lecture Series</a:t>
-            </a:r>
-            <a:pPr algn="r" indent="0" marL="0">
-              <a:buNone/>
-            </a:pPr>
-            <a:r>
-              <a:rPr lang="en-US" sz="850" dirty="0">
-                <a:solidFill>
-                  <a:srgbClr val="DCE4EC"/>
-                </a:solidFill>
-                <a:latin typeface="Calibri" pitchFamily="34" charset="0"/>
-                <a:ea typeface="Calibri" pitchFamily="34" charset="-122"/>
-                <a:cs typeface="Calibri" pitchFamily="34" charset="-120"/>
-              </a:rPr>
-              <a:t>   ·   </a:t>
-            </a:r>
-            <a:pPr algn="r" indent="0" marL="0">
-              <a:buNone/>
-            </a:pPr>
-            <a:r>
-              <a:rPr lang="en-US" sz="850" b="1" dirty="0">
-                <a:solidFill>
-                  <a:srgbClr val="455A64"/>
-                </a:solidFill>
-                <a:latin typeface="Calibri" pitchFamily="34" charset="0"/>
-                <a:ea typeface="Calibri" pitchFamily="34" charset="-122"/>
-                <a:cs typeface="Calibri" pitchFamily="34" charset="-120"/>
-              </a:rPr>
-              <a:t>7</a:t>
-            </a:r>
-            <a:endParaRPr lang="en-US" sz="850" dirty="0"/>
           </a:p>
         </p:txBody>
       </p:sp>

--- a/decks/LabMgmt_04_Informatics-and-LIS.pptx
+++ b/decks/LabMgmt_04_Informatics-and-LIS.pptx
@@ -25,9 +25,13 @@
     <p:sldId id="273" r:id="rId19"/>
     <p:sldId id="274" r:id="rId20"/>
     <p:sldId id="275" r:id="rId21"/>
+    <p:sldId id="284" r:id="rId35"/>
     <p:sldId id="276" r:id="rId22"/>
+    <p:sldId id="283" r:id="rId34"/>
     <p:sldId id="277" r:id="rId23"/>
+    <p:sldId id="282" r:id="rId33"/>
     <p:sldId id="278" r:id="rId24"/>
+    <p:sldId id="281" r:id="rId32"/>
     <p:sldId id="279" r:id="rId25"/>
     <p:sldId id="280" r:id="rId26"/>
   </p:sldIdLst>
@@ -3032,6 +3036,10 @@
           </a:solidFill>
           <a:ln/>
         </p:spPr>
+        <p:txBody>
+          <a:bodyPr/>
+          <a:p/>
+        </p:txBody>
       </p:sp>
       <p:sp>
         <p:nvSpPr>
@@ -3054,6 +3062,10 @@
           </a:solidFill>
           <a:ln/>
         </p:spPr>
+        <p:txBody>
+          <a:bodyPr/>
+          <a:p/>
+        </p:txBody>
       </p:sp>
       <p:sp>
         <p:nvSpPr>
@@ -3076,6 +3088,10 @@
           </a:solidFill>
           <a:ln/>
         </p:spPr>
+        <p:txBody>
+          <a:bodyPr/>
+          <a:p/>
+        </p:txBody>
       </p:sp>
       <p:sp>
         <p:nvSpPr>
@@ -3098,6 +3114,10 @@
           </a:solidFill>
           <a:ln/>
         </p:spPr>
+        <p:txBody>
+          <a:bodyPr/>
+          <a:p/>
+        </p:txBody>
       </p:sp>
       <p:sp>
         <p:nvSpPr>
@@ -3514,6 +3534,10 @@
             </a:outerShdw>
           </a:effectLst>
         </p:spPr>
+        <p:txBody>
+          <a:bodyPr/>
+          <a:p/>
+        </p:txBody>
       </p:sp>
       <p:sp>
         <p:nvSpPr>
@@ -3688,6 +3712,10 @@
             </a:outerShdw>
           </a:effectLst>
         </p:spPr>
+        <p:txBody>
+          <a:bodyPr/>
+          <a:p/>
+        </p:txBody>
       </p:sp>
       <p:sp>
         <p:nvSpPr>
@@ -4078,6 +4106,10 @@
             </a:outerShdw>
           </a:effectLst>
         </p:spPr>
+        <p:txBody>
+          <a:bodyPr/>
+          <a:p/>
+        </p:txBody>
       </p:sp>
       <p:sp>
         <p:nvSpPr>
@@ -4252,6 +4284,10 @@
             </a:outerShdw>
           </a:effectLst>
         </p:spPr>
+        <p:txBody>
+          <a:bodyPr/>
+          <a:p/>
+        </p:txBody>
       </p:sp>
       <p:sp>
         <p:nvSpPr>
@@ -4642,6 +4678,10 @@
             </a:outerShdw>
           </a:effectLst>
         </p:spPr>
+        <p:txBody>
+          <a:bodyPr/>
+          <a:p/>
+        </p:txBody>
       </p:sp>
       <p:sp>
         <p:nvSpPr>
@@ -4816,6 +4856,10 @@
             </a:outerShdw>
           </a:effectLst>
         </p:spPr>
+        <p:txBody>
+          <a:bodyPr/>
+          <a:p/>
+        </p:txBody>
       </p:sp>
       <p:sp>
         <p:nvSpPr>
@@ -5121,6 +5165,10 @@
           </a:solidFill>
           <a:ln/>
         </p:spPr>
+        <p:txBody>
+          <a:bodyPr/>
+          <a:p/>
+        </p:txBody>
       </p:sp>
       <p:sp>
         <p:nvSpPr>
@@ -5143,6 +5191,10 @@
           </a:solidFill>
           <a:ln/>
         </p:spPr>
+        <p:txBody>
+          <a:bodyPr/>
+          <a:p/>
+        </p:txBody>
       </p:sp>
       <p:sp>
         <p:nvSpPr>
@@ -5399,6 +5451,10 @@
             </a:outerShdw>
           </a:effectLst>
         </p:spPr>
+        <p:txBody>
+          <a:bodyPr/>
+          <a:p/>
+        </p:txBody>
       </p:sp>
       <p:sp>
         <p:nvSpPr>
@@ -5509,6 +5565,10 @@
             </a:outerShdw>
           </a:effectLst>
         </p:spPr>
+        <p:txBody>
+          <a:bodyPr/>
+          <a:p/>
+        </p:txBody>
       </p:sp>
       <p:sp>
         <p:nvSpPr>
@@ -5938,6 +5998,10 @@
             </a:outerShdw>
           </a:effectLst>
         </p:spPr>
+        <p:txBody>
+          <a:bodyPr/>
+          <a:p/>
+        </p:txBody>
       </p:sp>
       <p:sp>
         <p:nvSpPr>
@@ -6264,6 +6328,10 @@
             </a:outerShdw>
           </a:effectLst>
         </p:spPr>
+        <p:txBody>
+          <a:bodyPr/>
+          <a:p/>
+        </p:txBody>
       </p:sp>
       <p:sp>
         <p:nvSpPr>
@@ -6374,6 +6442,10 @@
             </a:outerShdw>
           </a:effectLst>
         </p:spPr>
+        <p:txBody>
+          <a:bodyPr/>
+          <a:p/>
+        </p:txBody>
       </p:sp>
       <p:sp>
         <p:nvSpPr>
@@ -6803,6 +6875,10 @@
             </a:outerShdw>
           </a:effectLst>
         </p:spPr>
+        <p:txBody>
+          <a:bodyPr/>
+          <a:p/>
+        </p:txBody>
       </p:sp>
       <p:sp>
         <p:nvSpPr>
@@ -7129,6 +7205,10 @@
             </a:outerShdw>
           </a:effectLst>
         </p:spPr>
+        <p:txBody>
+          <a:bodyPr/>
+          <a:p/>
+        </p:txBody>
       </p:sp>
       <p:sp>
         <p:nvSpPr>
@@ -7239,6 +7319,10 @@
             </a:outerShdw>
           </a:effectLst>
         </p:spPr>
+        <p:txBody>
+          <a:bodyPr/>
+          <a:p/>
+        </p:txBody>
       </p:sp>
       <p:sp>
         <p:nvSpPr>
@@ -7668,6 +7752,10 @@
             </a:outerShdw>
           </a:effectLst>
         </p:spPr>
+        <p:txBody>
+          <a:bodyPr/>
+          <a:p/>
+        </p:txBody>
       </p:sp>
       <p:sp>
         <p:nvSpPr>
@@ -7994,6 +8082,10 @@
             </a:outerShdw>
           </a:effectLst>
         </p:spPr>
+        <p:txBody>
+          <a:bodyPr/>
+          <a:p/>
+        </p:txBody>
       </p:sp>
       <p:sp>
         <p:nvSpPr>
@@ -8101,6 +8193,10 @@
             </a:outerShdw>
           </a:effectLst>
         </p:spPr>
+        <p:txBody>
+          <a:bodyPr/>
+          <a:p/>
+        </p:txBody>
       </p:sp>
       <p:sp>
         <p:nvSpPr>
@@ -8208,6 +8304,10 @@
             </a:outerShdw>
           </a:effectLst>
         </p:spPr>
+        <p:txBody>
+          <a:bodyPr/>
+          <a:p/>
+        </p:txBody>
       </p:sp>
       <p:sp>
         <p:nvSpPr>
@@ -8315,6 +8415,10 @@
             </a:outerShdw>
           </a:effectLst>
         </p:spPr>
+        <p:txBody>
+          <a:bodyPr/>
+          <a:p/>
+        </p:txBody>
       </p:sp>
       <p:sp>
         <p:nvSpPr>
@@ -8707,9 +8811,9 @@
               <a:buNone/>
             </a:pPr>
             <a:r>
-              <a:rPr lang="en-US" sz="1350" b="1" dirty="0">
-                <a:solidFill>
-                  <a:srgbClr val="2C3A41"/>
+              <a:rPr lang="en-US" sz="1350" b="0" dirty="0">
+                <a:solidFill>
+                  <a:srgbClr val="33444F"/>
                 </a:solidFill>
                 <a:latin typeface="Calibri" pitchFamily="34" charset="0"/>
                 <a:ea typeface="Calibri" pitchFamily="34" charset="-122"/>
@@ -8778,130 +8882,6 @@
               <a:t>E. SNOMED procedures</a:t>
             </a:r>
             <a:endParaRPr lang="en-US" sz="1350" dirty="0"/>
-          </a:p>
-        </p:txBody>
-      </p:sp>
-      <p:sp>
-        <p:nvSpPr>
-          <p:cNvPr id="6" name="Shape 4"/>
-          <p:cNvSpPr/>
-          <p:nvPr/>
-        </p:nvSpPr>
-        <p:spPr>
-          <a:xfrm>
-            <a:off x="7201632" y="2395728"/>
-            <a:ext cx="4423136" cy="3246120"/>
-          </a:xfrm>
-          <a:prstGeom prst="roundRect">
-            <a:avLst>
-              <a:gd name="adj" fmla="val 2535"/>
-            </a:avLst>
-          </a:prstGeom>
-          <a:solidFill>
-            <a:srgbClr val="ECEFF1"/>
-          </a:solidFill>
-          <a:ln/>
-          <a:effectLst>
-            <a:outerShdw sx="100000" sy="100000" kx="0" ky="0" algn="bl" rotWithShape="0" blurRad="88900" dist="25400" dir="5400000">
-              <a:srgbClr val="22303C">
-                <a:alpha val="12000"/>
-              </a:srgbClr>
-            </a:outerShdw>
-          </a:effectLst>
-        </p:spPr>
-      </p:sp>
-      <p:sp>
-        <p:nvSpPr>
-          <p:cNvPr id="7" name="Text 5"/>
-          <p:cNvSpPr/>
-          <p:nvPr/>
-        </p:nvSpPr>
-        <p:spPr>
-          <a:xfrm>
-            <a:off x="7439376" y="2578608"/>
-            <a:ext cx="3965936" cy="457200"/>
-          </a:xfrm>
-          <a:prstGeom prst="rect">
-            <a:avLst/>
-          </a:prstGeom>
-          <a:noFill/>
-          <a:ln/>
-        </p:spPr>
-        <p:txBody>
-          <a:bodyPr wrap="square" lIns="0" tIns="0" rIns="0" bIns="0" rtlCol="0" anchor="ctr"/>
-          <a:lstStyle/>
-          <a:p>
-            <a:pPr indent="0" marL="0">
-              <a:buNone/>
-            </a:pPr>
-            <a:r>
-              <a:rPr lang="en-US" sz="1500" b="1" dirty="0">
-                <a:solidFill>
-                  <a:srgbClr val="455A64"/>
-                </a:solidFill>
-                <a:latin typeface="Calibri" pitchFamily="34" charset="0"/>
-                <a:ea typeface="Calibri" pitchFamily="34" charset="-122"/>
-                <a:cs typeface="Calibri" pitchFamily="34" charset="-120"/>
-              </a:rPr>
-              <a:t>ANSWER  </a:t>
-            </a:r>
-            <a:pPr indent="0" marL="0">
-              <a:buNone/>
-            </a:pPr>
-            <a:r>
-              <a:rPr lang="en-US" sz="1500" b="1" dirty="0">
-                <a:solidFill>
-                  <a:srgbClr val="1B2A38"/>
-                </a:solidFill>
-                <a:latin typeface="Calibri" pitchFamily="34" charset="0"/>
-                <a:ea typeface="Calibri" pitchFamily="34" charset="-122"/>
-                <a:cs typeface="Calibri" pitchFamily="34" charset="-120"/>
-              </a:rPr>
-              <a:t>B — LOINC</a:t>
-            </a:r>
-            <a:endParaRPr lang="en-US" sz="1500" dirty="0"/>
-          </a:p>
-        </p:txBody>
-      </p:sp>
-      <p:sp>
-        <p:nvSpPr>
-          <p:cNvPr id="8" name="Text 6"/>
-          <p:cNvSpPr/>
-          <p:nvPr/>
-        </p:nvSpPr>
-        <p:spPr>
-          <a:xfrm>
-            <a:off x="7439376" y="3127248"/>
-            <a:ext cx="3947648" cy="2377440"/>
-          </a:xfrm>
-          <a:prstGeom prst="rect">
-            <a:avLst/>
-          </a:prstGeom>
-          <a:noFill/>
-          <a:ln/>
-        </p:spPr>
-        <p:txBody>
-          <a:bodyPr wrap="square" lIns="0" tIns="0" rIns="0" bIns="0" rtlCol="0" anchor="t"/>
-          <a:lstStyle/>
-          <a:p>
-            <a:pPr algn="l" indent="0" marL="0">
-              <a:lnSpc>
-                <a:spcPct val="108000"/>
-              </a:lnSpc>
-              <a:buNone/>
-            </a:pPr>
-            <a:r>
-              <a:rPr lang="en-US" sz="1250" dirty="0">
-                <a:solidFill>
-                  <a:srgbClr val="33444F"/>
-                </a:solidFill>
-                <a:latin typeface="Calibri" pitchFamily="34" charset="0"/>
-                <a:ea typeface="Calibri" pitchFamily="34" charset="-122"/>
-                <a:cs typeface="Calibri" pitchFamily="34" charset="-120"/>
-              </a:rPr>
-              <a:t>LOINC provides standardized identifiers for laboratory tests; HL7 is the messaging standard that carries them.</a:t>
-            </a:r>
-            <a:endParaRPr lang="en-US" sz="1250" dirty="0"/>
           </a:p>
         </p:txBody>
       </p:sp>
@@ -9211,9 +9191,9 @@
               <a:buNone/>
             </a:pPr>
             <a:r>
-              <a:rPr lang="en-US" sz="1350" b="1" dirty="0">
-                <a:solidFill>
-                  <a:srgbClr val="2C3A41"/>
+              <a:rPr lang="en-US" sz="1350" b="0" dirty="0">
+                <a:solidFill>
+                  <a:srgbClr val="33444F"/>
                 </a:solidFill>
                 <a:latin typeface="Calibri" pitchFamily="34" charset="0"/>
                 <a:ea typeface="Calibri" pitchFamily="34" charset="-122"/>
@@ -9282,130 +9262,6 @@
               <a:t>E. Billing errors</a:t>
             </a:r>
             <a:endParaRPr lang="en-US" sz="1350" dirty="0"/>
-          </a:p>
-        </p:txBody>
-      </p:sp>
-      <p:sp>
-        <p:nvSpPr>
-          <p:cNvPr id="6" name="Shape 4"/>
-          <p:cNvSpPr/>
-          <p:nvPr/>
-        </p:nvSpPr>
-        <p:spPr>
-          <a:xfrm>
-            <a:off x="7201632" y="2395728"/>
-            <a:ext cx="4423136" cy="3246120"/>
-          </a:xfrm>
-          <a:prstGeom prst="roundRect">
-            <a:avLst>
-              <a:gd name="adj" fmla="val 2535"/>
-            </a:avLst>
-          </a:prstGeom>
-          <a:solidFill>
-            <a:srgbClr val="ECEFF1"/>
-          </a:solidFill>
-          <a:ln/>
-          <a:effectLst>
-            <a:outerShdw sx="100000" sy="100000" kx="0" ky="0" algn="bl" rotWithShape="0" blurRad="88900" dist="25400" dir="5400000">
-              <a:srgbClr val="22303C">
-                <a:alpha val="12000"/>
-              </a:srgbClr>
-            </a:outerShdw>
-          </a:effectLst>
-        </p:spPr>
-      </p:sp>
-      <p:sp>
-        <p:nvSpPr>
-          <p:cNvPr id="7" name="Text 5"/>
-          <p:cNvSpPr/>
-          <p:nvPr/>
-        </p:nvSpPr>
-        <p:spPr>
-          <a:xfrm>
-            <a:off x="7439376" y="2578608"/>
-            <a:ext cx="3965936" cy="457200"/>
-          </a:xfrm>
-          <a:prstGeom prst="rect">
-            <a:avLst/>
-          </a:prstGeom>
-          <a:noFill/>
-          <a:ln/>
-        </p:spPr>
-        <p:txBody>
-          <a:bodyPr wrap="square" lIns="0" tIns="0" rIns="0" bIns="0" rtlCol="0" anchor="ctr"/>
-          <a:lstStyle/>
-          <a:p>
-            <a:pPr indent="0" marL="0">
-              <a:buNone/>
-            </a:pPr>
-            <a:r>
-              <a:rPr lang="en-US" sz="1500" b="1" dirty="0">
-                <a:solidFill>
-                  <a:srgbClr val="455A64"/>
-                </a:solidFill>
-                <a:latin typeface="Calibri" pitchFamily="34" charset="0"/>
-                <a:ea typeface="Calibri" pitchFamily="34" charset="-122"/>
-                <a:cs typeface="Calibri" pitchFamily="34" charset="-120"/>
-              </a:rPr>
-              <a:t>ANSWER  </a:t>
-            </a:r>
-            <a:pPr indent="0" marL="0">
-              <a:buNone/>
-            </a:pPr>
-            <a:r>
-              <a:rPr lang="en-US" sz="1500" b="1" dirty="0">
-                <a:solidFill>
-                  <a:srgbClr val="1B2A38"/>
-                </a:solidFill>
-                <a:latin typeface="Calibri" pitchFamily="34" charset="0"/>
-                <a:ea typeface="Calibri" pitchFamily="34" charset="-122"/>
-                <a:cs typeface="Calibri" pitchFamily="34" charset="-120"/>
-              </a:rPr>
-              <a:t>B — Implausible change vs prior</a:t>
-            </a:r>
-            <a:endParaRPr lang="en-US" sz="1500" dirty="0"/>
-          </a:p>
-        </p:txBody>
-      </p:sp>
-      <p:sp>
-        <p:nvSpPr>
-          <p:cNvPr id="8" name="Text 6"/>
-          <p:cNvSpPr/>
-          <p:nvPr/>
-        </p:nvSpPr>
-        <p:spPr>
-          <a:xfrm>
-            <a:off x="7439376" y="3127248"/>
-            <a:ext cx="3947648" cy="2377440"/>
-          </a:xfrm>
-          <a:prstGeom prst="rect">
-            <a:avLst/>
-          </a:prstGeom>
-          <a:noFill/>
-          <a:ln/>
-        </p:spPr>
-        <p:txBody>
-          <a:bodyPr wrap="square" lIns="0" tIns="0" rIns="0" bIns="0" rtlCol="0" anchor="t"/>
-          <a:lstStyle/>
-          <a:p>
-            <a:pPr algn="l" indent="0" marL="0">
-              <a:lnSpc>
-                <a:spcPct val="108000"/>
-              </a:lnSpc>
-              <a:buNone/>
-            </a:pPr>
-            <a:r>
-              <a:rPr lang="en-US" sz="1250" dirty="0">
-                <a:solidFill>
-                  <a:srgbClr val="33444F"/>
-                </a:solidFill>
-                <a:latin typeface="Calibri" pitchFamily="34" charset="0"/>
-                <a:ea typeface="Calibri" pitchFamily="34" charset="-122"/>
-                <a:cs typeface="Calibri" pitchFamily="34" charset="-120"/>
-              </a:rPr>
-              <a:t>Delta checks compare current to previous results to flag possible specimen mix-ups or errors.</a:t>
-            </a:r>
-            <a:endParaRPr lang="en-US" sz="1250" dirty="0"/>
           </a:p>
         </p:txBody>
       </p:sp>
@@ -9715,9 +9571,9 @@
               <a:buNone/>
             </a:pPr>
             <a:r>
-              <a:rPr lang="en-US" sz="1350" b="1" dirty="0">
-                <a:solidFill>
-                  <a:srgbClr val="2C3A41"/>
+              <a:rPr lang="en-US" sz="1350" b="0" dirty="0">
+                <a:solidFill>
+                  <a:srgbClr val="33444F"/>
                 </a:solidFill>
                 <a:latin typeface="Calibri" pitchFamily="34" charset="0"/>
                 <a:ea typeface="Calibri" pitchFamily="34" charset="-122"/>
@@ -9786,130 +9642,6 @@
               <a:t>E. Lower cost</a:t>
             </a:r>
             <a:endParaRPr lang="en-US" sz="1350" dirty="0"/>
-          </a:p>
-        </p:txBody>
-      </p:sp>
-      <p:sp>
-        <p:nvSpPr>
-          <p:cNvPr id="6" name="Shape 4"/>
-          <p:cNvSpPr/>
-          <p:nvPr/>
-        </p:nvSpPr>
-        <p:spPr>
-          <a:xfrm>
-            <a:off x="7201632" y="2395728"/>
-            <a:ext cx="4423136" cy="3246120"/>
-          </a:xfrm>
-          <a:prstGeom prst="roundRect">
-            <a:avLst>
-              <a:gd name="adj" fmla="val 2535"/>
-            </a:avLst>
-          </a:prstGeom>
-          <a:solidFill>
-            <a:srgbClr val="ECEFF1"/>
-          </a:solidFill>
-          <a:ln/>
-          <a:effectLst>
-            <a:outerShdw sx="100000" sy="100000" kx="0" ky="0" algn="bl" rotWithShape="0" blurRad="88900" dist="25400" dir="5400000">
-              <a:srgbClr val="22303C">
-                <a:alpha val="12000"/>
-              </a:srgbClr>
-            </a:outerShdw>
-          </a:effectLst>
-        </p:spPr>
-      </p:sp>
-      <p:sp>
-        <p:nvSpPr>
-          <p:cNvPr id="7" name="Text 5"/>
-          <p:cNvSpPr/>
-          <p:nvPr/>
-        </p:nvSpPr>
-        <p:spPr>
-          <a:xfrm>
-            <a:off x="7439376" y="2578608"/>
-            <a:ext cx="3965936" cy="457200"/>
-          </a:xfrm>
-          <a:prstGeom prst="rect">
-            <a:avLst/>
-          </a:prstGeom>
-          <a:noFill/>
-          <a:ln/>
-        </p:spPr>
-        <p:txBody>
-          <a:bodyPr wrap="square" lIns="0" tIns="0" rIns="0" bIns="0" rtlCol="0" anchor="ctr"/>
-          <a:lstStyle/>
-          <a:p>
-            <a:pPr indent="0" marL="0">
-              <a:buNone/>
-            </a:pPr>
-            <a:r>
-              <a:rPr lang="en-US" sz="1500" b="1" dirty="0">
-                <a:solidFill>
-                  <a:srgbClr val="455A64"/>
-                </a:solidFill>
-                <a:latin typeface="Calibri" pitchFamily="34" charset="0"/>
-                <a:ea typeface="Calibri" pitchFamily="34" charset="-122"/>
-                <a:cs typeface="Calibri" pitchFamily="34" charset="-120"/>
-              </a:rPr>
-              <a:t>ANSWER  </a:t>
-            </a:r>
-            <a:pPr indent="0" marL="0">
-              <a:buNone/>
-            </a:pPr>
-            <a:r>
-              <a:rPr lang="en-US" sz="1500" b="1" dirty="0">
-                <a:solidFill>
-                  <a:srgbClr val="1B2A38"/>
-                </a:solidFill>
-                <a:latin typeface="Calibri" pitchFamily="34" charset="0"/>
-                <a:ea typeface="Calibri" pitchFamily="34" charset="-122"/>
-                <a:cs typeface="Calibri" pitchFamily="34" charset="-120"/>
-              </a:rPr>
-              <a:t>B — Silent mapping errors</a:t>
-            </a:r>
-            <a:endParaRPr lang="en-US" sz="1500" dirty="0"/>
-          </a:p>
-        </p:txBody>
-      </p:sp>
-      <p:sp>
-        <p:nvSpPr>
-          <p:cNvPr id="8" name="Text 6"/>
-          <p:cNvSpPr/>
-          <p:nvPr/>
-        </p:nvSpPr>
-        <p:spPr>
-          <a:xfrm>
-            <a:off x="7439376" y="3127248"/>
-            <a:ext cx="3947648" cy="2377440"/>
-          </a:xfrm>
-          <a:prstGeom prst="rect">
-            <a:avLst/>
-          </a:prstGeom>
-          <a:noFill/>
-          <a:ln/>
-        </p:spPr>
-        <p:txBody>
-          <a:bodyPr wrap="square" lIns="0" tIns="0" rIns="0" bIns="0" rtlCol="0" anchor="t"/>
-          <a:lstStyle/>
-          <a:p>
-            <a:pPr algn="l" indent="0" marL="0">
-              <a:lnSpc>
-                <a:spcPct val="108000"/>
-              </a:lnSpc>
-              <a:buNone/>
-            </a:pPr>
-            <a:r>
-              <a:rPr lang="en-US" sz="1250" dirty="0">
-                <a:solidFill>
-                  <a:srgbClr val="33444F"/>
-                </a:solidFill>
-                <a:latin typeface="Calibri" pitchFamily="34" charset="0"/>
-                <a:ea typeface="Calibri" pitchFamily="34" charset="-122"/>
-                <a:cs typeface="Calibri" pitchFamily="34" charset="-120"/>
-              </a:rPr>
-              <a:t>Mapping errors can corrupt results invisibly; interfaces must be revalidated after any change.</a:t>
-            </a:r>
-            <a:endParaRPr lang="en-US" sz="1250" dirty="0"/>
           </a:p>
         </p:txBody>
       </p:sp>
@@ -10219,9 +9951,9 @@
               <a:buNone/>
             </a:pPr>
             <a:r>
-              <a:rPr lang="en-US" sz="1350" b="1" dirty="0">
-                <a:solidFill>
-                  <a:srgbClr val="2C3A41"/>
+              <a:rPr lang="en-US" sz="1350" b="0" dirty="0">
+                <a:solidFill>
+                  <a:srgbClr val="33444F"/>
                 </a:solidFill>
                 <a:latin typeface="Calibri" pitchFamily="34" charset="0"/>
                 <a:ea typeface="Calibri" pitchFamily="34" charset="-122"/>
@@ -10290,130 +10022,6 @@
               <a:t>E. Used only for QC</a:t>
             </a:r>
             <a:endParaRPr lang="en-US" sz="1350" dirty="0"/>
-          </a:p>
-        </p:txBody>
-      </p:sp>
-      <p:sp>
-        <p:nvSpPr>
-          <p:cNvPr id="6" name="Shape 4"/>
-          <p:cNvSpPr/>
-          <p:nvPr/>
-        </p:nvSpPr>
-        <p:spPr>
-          <a:xfrm>
-            <a:off x="7201632" y="2395728"/>
-            <a:ext cx="4423136" cy="3246120"/>
-          </a:xfrm>
-          <a:prstGeom prst="roundRect">
-            <a:avLst>
-              <a:gd name="adj" fmla="val 2535"/>
-            </a:avLst>
-          </a:prstGeom>
-          <a:solidFill>
-            <a:srgbClr val="ECEFF1"/>
-          </a:solidFill>
-          <a:ln/>
-          <a:effectLst>
-            <a:outerShdw sx="100000" sy="100000" kx="0" ky="0" algn="bl" rotWithShape="0" blurRad="88900" dist="25400" dir="5400000">
-              <a:srgbClr val="22303C">
-                <a:alpha val="12000"/>
-              </a:srgbClr>
-            </a:outerShdw>
-          </a:effectLst>
-        </p:spPr>
-      </p:sp>
-      <p:sp>
-        <p:nvSpPr>
-          <p:cNvPr id="7" name="Text 5"/>
-          <p:cNvSpPr/>
-          <p:nvPr/>
-        </p:nvSpPr>
-        <p:spPr>
-          <a:xfrm>
-            <a:off x="7439376" y="2578608"/>
-            <a:ext cx="3965936" cy="457200"/>
-          </a:xfrm>
-          <a:prstGeom prst="rect">
-            <a:avLst/>
-          </a:prstGeom>
-          <a:noFill/>
-          <a:ln/>
-        </p:spPr>
-        <p:txBody>
-          <a:bodyPr wrap="square" lIns="0" tIns="0" rIns="0" bIns="0" rtlCol="0" anchor="ctr"/>
-          <a:lstStyle/>
-          <a:p>
-            <a:pPr indent="0" marL="0">
-              <a:buNone/>
-            </a:pPr>
-            <a:r>
-              <a:rPr lang="en-US" sz="1500" b="1" dirty="0">
-                <a:solidFill>
-                  <a:srgbClr val="455A64"/>
-                </a:solidFill>
-                <a:latin typeface="Calibri" pitchFamily="34" charset="0"/>
-                <a:ea typeface="Calibri" pitchFamily="34" charset="-122"/>
-                <a:cs typeface="Calibri" pitchFamily="34" charset="-120"/>
-              </a:rPr>
-              <a:t>ANSWER  </a:t>
-            </a:r>
-            <a:pPr indent="0" marL="0">
-              <a:buNone/>
-            </a:pPr>
-            <a:r>
-              <a:rPr lang="en-US" sz="1500" b="1" dirty="0">
-                <a:solidFill>
-                  <a:srgbClr val="1B2A38"/>
-                </a:solidFill>
-                <a:latin typeface="Calibri" pitchFamily="34" charset="0"/>
-                <a:ea typeface="Calibri" pitchFamily="34" charset="-122"/>
-                <a:cs typeface="Calibri" pitchFamily="34" charset="-120"/>
-              </a:rPr>
-              <a:t>B — Validated and monitored</a:t>
-            </a:r>
-            <a:endParaRPr lang="en-US" sz="1500" dirty="0"/>
-          </a:p>
-        </p:txBody>
-      </p:sp>
-      <p:sp>
-        <p:nvSpPr>
-          <p:cNvPr id="8" name="Text 6"/>
-          <p:cNvSpPr/>
-          <p:nvPr/>
-        </p:nvSpPr>
-        <p:spPr>
-          <a:xfrm>
-            <a:off x="7439376" y="3127248"/>
-            <a:ext cx="3947648" cy="2377440"/>
-          </a:xfrm>
-          <a:prstGeom prst="rect">
-            <a:avLst/>
-          </a:prstGeom>
-          <a:noFill/>
-          <a:ln/>
-        </p:spPr>
-        <p:txBody>
-          <a:bodyPr wrap="square" lIns="0" tIns="0" rIns="0" bIns="0" rtlCol="0" anchor="t"/>
-          <a:lstStyle/>
-          <a:p>
-            <a:pPr algn="l" indent="0" marL="0">
-              <a:lnSpc>
-                <a:spcPct val="108000"/>
-              </a:lnSpc>
-              <a:buNone/>
-            </a:pPr>
-            <a:r>
-              <a:rPr lang="en-US" sz="1250" dirty="0">
-                <a:solidFill>
-                  <a:srgbClr val="33444F"/>
-                </a:solidFill>
-                <a:latin typeface="Calibri" pitchFamily="34" charset="0"/>
-                <a:ea typeface="Calibri" pitchFamily="34" charset="-122"/>
-                <a:cs typeface="Calibri" pitchFamily="34" charset="-120"/>
-              </a:rPr>
-              <a:t>Autoverification improves efficiency only if rules are validated against exceptions and continually monitored.</a:t>
-            </a:r>
-            <a:endParaRPr lang="en-US" sz="1250" dirty="0"/>
           </a:p>
         </p:txBody>
       </p:sp>
@@ -10654,6 +10262,10 @@
           </a:solidFill>
           <a:ln/>
         </p:spPr>
+        <p:txBody>
+          <a:bodyPr/>
+          <a:p/>
+        </p:txBody>
       </p:sp>
       <p:sp>
         <p:nvSpPr>
@@ -10681,6 +10293,10 @@
             </a:outerShdw>
           </a:effectLst>
         </p:spPr>
+        <p:txBody>
+          <a:bodyPr/>
+          <a:p/>
+        </p:txBody>
       </p:sp>
       <p:sp>
         <p:nvSpPr>
@@ -10781,6 +10397,10 @@
           </a:solidFill>
           <a:ln/>
         </p:spPr>
+        <p:txBody>
+          <a:bodyPr/>
+          <a:p/>
+        </p:txBody>
       </p:sp>
       <p:sp>
         <p:nvSpPr>
@@ -10808,6 +10428,10 @@
             </a:outerShdw>
           </a:effectLst>
         </p:spPr>
+        <p:txBody>
+          <a:bodyPr/>
+          <a:p/>
+        </p:txBody>
       </p:sp>
       <p:sp>
         <p:nvSpPr>
@@ -10908,6 +10532,10 @@
           </a:solidFill>
           <a:ln/>
         </p:spPr>
+        <p:txBody>
+          <a:bodyPr/>
+          <a:p/>
+        </p:txBody>
       </p:sp>
       <p:sp>
         <p:nvSpPr>
@@ -10935,6 +10563,10 @@
             </a:outerShdw>
           </a:effectLst>
         </p:spPr>
+        <p:txBody>
+          <a:bodyPr/>
+          <a:p/>
+        </p:txBody>
       </p:sp>
       <p:sp>
         <p:nvSpPr>
@@ -11035,6 +10667,10 @@
           </a:solidFill>
           <a:ln/>
         </p:spPr>
+        <p:txBody>
+          <a:bodyPr/>
+          <a:p/>
+        </p:txBody>
       </p:sp>
       <p:sp>
         <p:nvSpPr>
@@ -11062,6 +10698,10 @@
             </a:outerShdw>
           </a:effectLst>
         </p:spPr>
+        <p:txBody>
+          <a:bodyPr/>
+          <a:p/>
+        </p:txBody>
       </p:sp>
       <p:sp>
         <p:nvSpPr>
@@ -11162,6 +10802,10 @@
           </a:solidFill>
           <a:ln/>
         </p:spPr>
+        <p:txBody>
+          <a:bodyPr/>
+          <a:p/>
+        </p:txBody>
       </p:sp>
       <p:sp>
         <p:nvSpPr>
@@ -11189,6 +10833,10 @@
             </a:outerShdw>
           </a:effectLst>
         </p:spPr>
+        <p:txBody>
+          <a:bodyPr/>
+          <a:p/>
+        </p:txBody>
       </p:sp>
       <p:sp>
         <p:nvSpPr>
@@ -11672,6 +11320,1982 @@
 </p:sld>
 </file>
 
+<file path=ppt/slides/slide26.xml><?xml version="1.0" encoding="utf-8"?>
+<p:sld xmlns:a="http://schemas.openxmlformats.org/drawingml/2006/main" xmlns:p="http://schemas.openxmlformats.org/presentationml/2006/main" xmlns:r="http://schemas.openxmlformats.org/officeDocument/2006/relationships">
+  <p:cSld>
+    <p:spTree>
+      <p:nvGrpSpPr>
+        <p:cNvPr id="1" name=""/>
+        <p:cNvGrpSpPr/>
+        <p:nvPr/>
+      </p:nvGrpSpPr>
+      <p:grpSpPr/>
+      <p:sp>
+        <p:nvSpPr>
+          <p:cNvPr id="2" name="Text 0"/>
+          <p:cNvSpPr/>
+          <p:nvPr/>
+        </p:nvSpPr>
+        <p:spPr>
+          <a:xfrm>
+            <a:off x="566928" y="329184"/>
+            <a:ext cx="10515600" cy="310896"/>
+          </a:xfrm>
+          <a:prstGeom prst="rect">
+            <a:avLst/>
+          </a:prstGeom>
+          <a:noFill/>
+          <a:ln/>
+        </p:spPr>
+        <p:txBody>
+          <a:bodyPr wrap="square" lIns="0" tIns="0" rIns="0" bIns="0" rtlCol="0" anchor="ctr"/>
+          <a:lstStyle/>
+          <a:p>
+            <a:pPr algn="l" indent="0" marL="0">
+              <a:buNone/>
+            </a:pPr>
+            <a:r>
+              <a:rPr lang="en-US" sz="1100" b="1" spc="150" kern="0" dirty="0">
+                <a:solidFill>
+                  <a:srgbClr val="455A64"/>
+                </a:solidFill>
+                <a:latin typeface="Calibri" pitchFamily="34" charset="0"/>
+                <a:ea typeface="Calibri" pitchFamily="34" charset="-122"/>
+                <a:cs typeface="Calibri" pitchFamily="34" charset="-120"/>
+              </a:rPr>
+              <a:t>LAB MANAGEMENT &amp; QUALITY   ·   BOARD REVIEW  ·  Q4</a:t>
+            </a:r>
+            <a:endParaRPr lang="en-US" sz="1100" dirty="0"/>
+          </a:p>
+        </p:txBody>
+      </p:sp>
+      <p:sp>
+        <p:nvSpPr>
+          <p:cNvPr id="3" name="Text 1"/>
+          <p:cNvSpPr/>
+          <p:nvPr/>
+        </p:nvSpPr>
+        <p:spPr>
+          <a:xfrm>
+            <a:off x="566928" y="713232"/>
+            <a:ext cx="11064240" cy="749808"/>
+          </a:xfrm>
+          <a:prstGeom prst="rect">
+            <a:avLst/>
+          </a:prstGeom>
+          <a:noFill/>
+          <a:ln/>
+        </p:spPr>
+        <p:txBody>
+          <a:bodyPr wrap="square" lIns="0" tIns="0" rIns="0" bIns="0" rtlCol="0" anchor="ctr"/>
+          <a:lstStyle/>
+          <a:p>
+            <a:pPr algn="l" indent="0" marL="0">
+              <a:buNone/>
+            </a:pPr>
+            <a:r>
+              <a:rPr lang="en-US" sz="2600" b="1" dirty="0">
+                <a:solidFill>
+                  <a:srgbClr val="0E3A5F"/>
+                </a:solidFill>
+                <a:latin typeface="Calibri" pitchFamily="34" charset="0"/>
+                <a:ea typeface="Calibri" pitchFamily="34" charset="-122"/>
+                <a:cs typeface="Calibri" pitchFamily="34" charset="-120"/>
+              </a:rPr>
+              <a:t>Board-Style Review</a:t>
+            </a:r>
+            <a:endParaRPr lang="en-US" sz="2600" dirty="0"/>
+          </a:p>
+        </p:txBody>
+      </p:sp>
+      <p:sp>
+        <p:nvSpPr>
+          <p:cNvPr id="4" name="Text 2"/>
+          <p:cNvSpPr/>
+          <p:nvPr/>
+        </p:nvSpPr>
+        <p:spPr>
+          <a:xfrm>
+            <a:off x="566928" y="1417320"/>
+            <a:ext cx="11057839" cy="914400"/>
+          </a:xfrm>
+          <a:prstGeom prst="rect">
+            <a:avLst/>
+          </a:prstGeom>
+          <a:noFill/>
+          <a:ln/>
+        </p:spPr>
+        <p:txBody>
+          <a:bodyPr wrap="square" lIns="0" tIns="0" rIns="0" bIns="0" rtlCol="0" anchor="t"/>
+          <a:lstStyle/>
+          <a:p>
+            <a:pPr algn="l" indent="0" marL="0">
+              <a:lnSpc>
+                <a:spcPct val="105000"/>
+              </a:lnSpc>
+              <a:buNone/>
+            </a:pPr>
+            <a:r>
+              <a:rPr lang="en-US" sz="1450" b="1" dirty="0">
+                <a:solidFill>
+                  <a:srgbClr val="1B2A38"/>
+                </a:solidFill>
+                <a:latin typeface="Calibri" pitchFamily="34" charset="0"/>
+                <a:ea typeface="Calibri" pitchFamily="34" charset="-122"/>
+                <a:cs typeface="Calibri" pitchFamily="34" charset="-120"/>
+              </a:rPr>
+              <a:t>Autoverification rules must be:</a:t>
+            </a:r>
+            <a:endParaRPr lang="en-US" sz="1450" dirty="0"/>
+          </a:p>
+        </p:txBody>
+      </p:sp>
+      <p:sp>
+        <p:nvSpPr>
+          <p:cNvPr id="5" name="Text 3"/>
+          <p:cNvSpPr/>
+          <p:nvPr/>
+        </p:nvSpPr>
+        <p:spPr>
+          <a:xfrm>
+            <a:off x="658368" y="2395728"/>
+            <a:ext cx="6192390" cy="3017520"/>
+          </a:xfrm>
+          <a:prstGeom prst="rect">
+            <a:avLst/>
+          </a:prstGeom>
+          <a:noFill/>
+          <a:ln/>
+        </p:spPr>
+        <p:txBody>
+          <a:bodyPr wrap="square" lIns="0" tIns="0" rIns="0" bIns="0" rtlCol="0" anchor="t"/>
+          <a:lstStyle/>
+          <a:p>
+            <a:pPr algn="l" indent="0" marL="0">
+              <a:spcAft>
+                <a:spcPts val="600"/>
+              </a:spcAft>
+              <a:buNone/>
+            </a:pPr>
+            <a:r>
+              <a:rPr lang="en-US" sz="1350" dirty="0">
+                <a:solidFill>
+                  <a:srgbClr val="33444F"/>
+                </a:solidFill>
+                <a:latin typeface="Calibri" pitchFamily="34" charset="0"/>
+                <a:ea typeface="Calibri" pitchFamily="34" charset="-122"/>
+                <a:cs typeface="Calibri" pitchFamily="34" charset="-120"/>
+              </a:rPr>
+              <a:t>A. Set once and never changed</a:t>
+            </a:r>
+            <a:endParaRPr lang="en-US" sz="1350" dirty="0"/>
+          </a:p>
+          <a:p>
+            <a:pPr algn="l" indent="0" marL="0">
+              <a:spcAft>
+                <a:spcPts val="600"/>
+              </a:spcAft>
+              <a:buNone/>
+            </a:pPr>
+            <a:r>
+              <a:rPr lang="en-US" sz="1350" b="1" dirty="0">
+                <a:solidFill>
+                  <a:srgbClr val="2C3A41"/>
+                </a:solidFill>
+                <a:latin typeface="Calibri" pitchFamily="34" charset="0"/>
+                <a:ea typeface="Calibri" pitchFamily="34" charset="-122"/>
+                <a:cs typeface="Calibri" pitchFamily="34" charset="-120"/>
+              </a:rPr>
+              <a:t>B. Validated and monitored, with exceptions held for review</a:t>
+            </a:r>
+            <a:endParaRPr lang="en-US" sz="1350" dirty="0"/>
+          </a:p>
+          <a:p>
+            <a:pPr algn="l" indent="0" marL="0">
+              <a:spcAft>
+                <a:spcPts val="600"/>
+              </a:spcAft>
+              <a:buNone/>
+            </a:pPr>
+            <a:r>
+              <a:rPr lang="en-US" sz="1350" dirty="0">
+                <a:solidFill>
+                  <a:srgbClr val="33444F"/>
+                </a:solidFill>
+                <a:latin typeface="Calibri" pitchFamily="34" charset="0"/>
+                <a:ea typeface="Calibri" pitchFamily="34" charset="-122"/>
+                <a:cs typeface="Calibri" pitchFamily="34" charset="-120"/>
+              </a:rPr>
+              <a:t>C. Applied to all results without exception</a:t>
+            </a:r>
+            <a:endParaRPr lang="en-US" sz="1350" dirty="0"/>
+          </a:p>
+          <a:p>
+            <a:pPr algn="l" indent="0" marL="0">
+              <a:spcAft>
+                <a:spcPts val="600"/>
+              </a:spcAft>
+              <a:buNone/>
+            </a:pPr>
+            <a:r>
+              <a:rPr lang="en-US" sz="1350" dirty="0">
+                <a:solidFill>
+                  <a:srgbClr val="33444F"/>
+                </a:solidFill>
+                <a:latin typeface="Calibri" pitchFamily="34" charset="0"/>
+                <a:ea typeface="Calibri" pitchFamily="34" charset="-122"/>
+                <a:cs typeface="Calibri" pitchFamily="34" charset="-120"/>
+              </a:rPr>
+              <a:t>D. Hidden from staff</a:t>
+            </a:r>
+            <a:endParaRPr lang="en-US" sz="1350" dirty="0"/>
+          </a:p>
+          <a:p>
+            <a:pPr algn="l" indent="0" marL="0">
+              <a:spcAft>
+                <a:spcPts val="600"/>
+              </a:spcAft>
+              <a:buNone/>
+            </a:pPr>
+            <a:r>
+              <a:rPr lang="en-US" sz="1350" dirty="0">
+                <a:solidFill>
+                  <a:srgbClr val="33444F"/>
+                </a:solidFill>
+                <a:latin typeface="Calibri" pitchFamily="34" charset="0"/>
+                <a:ea typeface="Calibri" pitchFamily="34" charset="-122"/>
+                <a:cs typeface="Calibri" pitchFamily="34" charset="-120"/>
+              </a:rPr>
+              <a:t>E. Used only for QC</a:t>
+            </a:r>
+            <a:endParaRPr lang="en-US" sz="1350" dirty="0"/>
+          </a:p>
+        </p:txBody>
+      </p:sp>
+      <p:sp>
+        <p:nvSpPr>
+          <p:cNvPr id="6" name="Shape 4"/>
+          <p:cNvSpPr/>
+          <p:nvPr/>
+        </p:nvSpPr>
+        <p:spPr>
+          <a:xfrm>
+            <a:off x="7201632" y="2395728"/>
+            <a:ext cx="4423136" cy="3246120"/>
+          </a:xfrm>
+          <a:prstGeom prst="roundRect">
+            <a:avLst>
+              <a:gd name="adj" fmla="val 2535"/>
+            </a:avLst>
+          </a:prstGeom>
+          <a:solidFill>
+            <a:srgbClr val="ECEFF1"/>
+          </a:solidFill>
+          <a:ln/>
+          <a:effectLst>
+            <a:outerShdw sx="100000" sy="100000" kx="0" ky="0" algn="bl" rotWithShape="0" blurRad="88900" dist="25400" dir="5400000">
+              <a:srgbClr val="22303C">
+                <a:alpha val="12000"/>
+              </a:srgbClr>
+            </a:outerShdw>
+          </a:effectLst>
+        </p:spPr>
+        <p:txBody>
+          <a:bodyPr/>
+          <a:p/>
+        </p:txBody>
+      </p:sp>
+      <p:sp>
+        <p:nvSpPr>
+          <p:cNvPr id="7" name="Text 5"/>
+          <p:cNvSpPr/>
+          <p:nvPr/>
+        </p:nvSpPr>
+        <p:spPr>
+          <a:xfrm>
+            <a:off x="7439376" y="2578608"/>
+            <a:ext cx="3965936" cy="457200"/>
+          </a:xfrm>
+          <a:prstGeom prst="rect">
+            <a:avLst/>
+          </a:prstGeom>
+          <a:noFill/>
+          <a:ln/>
+        </p:spPr>
+        <p:txBody>
+          <a:bodyPr wrap="square" lIns="0" tIns="0" rIns="0" bIns="0" rtlCol="0" anchor="ctr"/>
+          <a:lstStyle/>
+          <a:p>
+            <a:pPr indent="0" marL="0">
+              <a:buNone/>
+            </a:pPr>
+            <a:r>
+              <a:rPr lang="en-US" sz="1500" b="1" dirty="0">
+                <a:solidFill>
+                  <a:srgbClr val="455A64"/>
+                </a:solidFill>
+                <a:latin typeface="Calibri" pitchFamily="34" charset="0"/>
+                <a:ea typeface="Calibri" pitchFamily="34" charset="-122"/>
+                <a:cs typeface="Calibri" pitchFamily="34" charset="-120"/>
+              </a:rPr>
+              <a:t>ANSWER  </a:t>
+            </a:r>
+            <a:pPr indent="0" marL="0">
+              <a:buNone/>
+            </a:pPr>
+            <a:r>
+              <a:rPr lang="en-US" sz="1500" b="1" dirty="0">
+                <a:solidFill>
+                  <a:srgbClr val="1B2A38"/>
+                </a:solidFill>
+                <a:latin typeface="Calibri" pitchFamily="34" charset="0"/>
+                <a:ea typeface="Calibri" pitchFamily="34" charset="-122"/>
+                <a:cs typeface="Calibri" pitchFamily="34" charset="-120"/>
+              </a:rPr>
+              <a:t>B — Validated and monitored</a:t>
+            </a:r>
+            <a:endParaRPr lang="en-US" sz="1500" dirty="0"/>
+          </a:p>
+        </p:txBody>
+      </p:sp>
+      <p:sp>
+        <p:nvSpPr>
+          <p:cNvPr id="8" name="Text 6"/>
+          <p:cNvSpPr/>
+          <p:nvPr/>
+        </p:nvSpPr>
+        <p:spPr>
+          <a:xfrm>
+            <a:off x="7439376" y="3127248"/>
+            <a:ext cx="3947648" cy="2377440"/>
+          </a:xfrm>
+          <a:prstGeom prst="rect">
+            <a:avLst/>
+          </a:prstGeom>
+          <a:noFill/>
+          <a:ln/>
+        </p:spPr>
+        <p:txBody>
+          <a:bodyPr wrap="square" lIns="0" tIns="0" rIns="0" bIns="0" rtlCol="0" anchor="t"/>
+          <a:lstStyle/>
+          <a:p>
+            <a:pPr algn="l" indent="0" marL="0">
+              <a:lnSpc>
+                <a:spcPct val="108000"/>
+              </a:lnSpc>
+              <a:buNone/>
+            </a:pPr>
+            <a:r>
+              <a:rPr lang="en-US" sz="1250" dirty="0">
+                <a:solidFill>
+                  <a:srgbClr val="33444F"/>
+                </a:solidFill>
+                <a:latin typeface="Calibri" pitchFamily="34" charset="0"/>
+                <a:ea typeface="Calibri" pitchFamily="34" charset="-122"/>
+                <a:cs typeface="Calibri" pitchFamily="34" charset="-120"/>
+              </a:rPr>
+              <a:t>Autoverification improves efficiency only if rules are validated against exceptions and continually monitored.</a:t>
+            </a:r>
+            <a:endParaRPr lang="en-US" sz="1250" dirty="0"/>
+          </a:p>
+        </p:txBody>
+      </p:sp>
+      <p:sp>
+        <p:nvSpPr>
+          <p:cNvPr id="9" name="Text 7"/>
+          <p:cNvSpPr/>
+          <p:nvPr/>
+        </p:nvSpPr>
+        <p:spPr>
+          <a:xfrm>
+            <a:off x="566928" y="6473952"/>
+            <a:ext cx="7772400" cy="274320"/>
+          </a:xfrm>
+          <a:prstGeom prst="rect">
+            <a:avLst/>
+          </a:prstGeom>
+          <a:noFill/>
+          <a:ln/>
+        </p:spPr>
+        <p:txBody>
+          <a:bodyPr wrap="square" lIns="0" tIns="0" rIns="0" bIns="0" rtlCol="0" anchor="ctr"/>
+          <a:lstStyle/>
+          <a:p>
+            <a:pPr algn="l" indent="0" marL="0">
+              <a:buNone/>
+            </a:pPr>
+            <a:r>
+              <a:rPr lang="en-US" sz="850" dirty="0">
+                <a:solidFill>
+                  <a:srgbClr val="9AA8B4"/>
+                </a:solidFill>
+                <a:latin typeface="Calibri" pitchFamily="34" charset="0"/>
+                <a:ea typeface="Calibri" pitchFamily="34" charset="-122"/>
+                <a:cs typeface="Calibri" pitchFamily="34" charset="-120"/>
+              </a:rPr>
+              <a:t>Makassed General Hospital  ·  Department of Laboratory Medicine</a:t>
+            </a:r>
+            <a:endParaRPr lang="en-US" sz="850" dirty="0"/>
+          </a:p>
+        </p:txBody>
+      </p:sp>
+      <p:sp>
+        <p:nvSpPr>
+          <p:cNvPr id="10" name="Text 8"/>
+          <p:cNvSpPr/>
+          <p:nvPr/>
+        </p:nvSpPr>
+        <p:spPr>
+          <a:xfrm>
+            <a:off x="9814255" y="6473952"/>
+            <a:ext cx="1828800" cy="274320"/>
+          </a:xfrm>
+          <a:prstGeom prst="rect">
+            <a:avLst/>
+          </a:prstGeom>
+          <a:noFill/>
+          <a:ln/>
+        </p:spPr>
+        <p:txBody>
+          <a:bodyPr wrap="square" lIns="0" tIns="0" rIns="0" bIns="0" rtlCol="0" anchor="ctr"/>
+          <a:lstStyle/>
+          <a:p>
+            <a:pPr algn="r" indent="0" marL="0">
+              <a:buNone/>
+            </a:pPr>
+            <a:r>
+              <a:rPr lang="en-US" sz="850" dirty="0">
+                <a:solidFill>
+                  <a:srgbClr val="9AA8B4"/>
+                </a:solidFill>
+                <a:latin typeface="Calibri" pitchFamily="34" charset="0"/>
+                <a:ea typeface="Calibri" pitchFamily="34" charset="-122"/>
+                <a:cs typeface="Calibri" pitchFamily="34" charset="-120"/>
+              </a:rPr>
+              <a:t>CP Lecture Series</a:t>
+            </a:r>
+            <a:pPr algn="r" indent="0" marL="0">
+              <a:buNone/>
+            </a:pPr>
+            <a:r>
+              <a:rPr lang="en-US" sz="850" dirty="0">
+                <a:solidFill>
+                  <a:srgbClr val="DCE4EC"/>
+                </a:solidFill>
+                <a:latin typeface="Calibri" pitchFamily="34" charset="0"/>
+                <a:ea typeface="Calibri" pitchFamily="34" charset="-122"/>
+                <a:cs typeface="Calibri" pitchFamily="34" charset="-120"/>
+              </a:rPr>
+              <a:t>   ·   </a:t>
+            </a:r>
+            <a:pPr algn="r" indent="0" marL="0">
+              <a:buNone/>
+            </a:pPr>
+            <a:r>
+              <a:rPr lang="en-US" sz="850" b="1" dirty="0">
+                <a:solidFill>
+                  <a:srgbClr val="455A64"/>
+                </a:solidFill>
+                <a:latin typeface="Calibri" pitchFamily="34" charset="0"/>
+                <a:ea typeface="Calibri" pitchFamily="34" charset="-122"/>
+                <a:cs typeface="Calibri" pitchFamily="34" charset="-120"/>
+              </a:rPr>
+              <a:t>20</a:t>
+            </a:r>
+            <a:endParaRPr lang="en-US" sz="850" dirty="0"/>
+          </a:p>
+        </p:txBody>
+      </p:sp>
+    </p:spTree>
+  </p:cSld>
+  <p:clrMapOvr>
+    <a:masterClrMapping/>
+  </p:clrMapOvr>
+</p:sld>
+</file>
+
+<file path=ppt/slides/slide27.xml><?xml version="1.0" encoding="utf-8"?>
+<p:sld xmlns:a="http://schemas.openxmlformats.org/drawingml/2006/main" xmlns:p="http://schemas.openxmlformats.org/presentationml/2006/main" xmlns:r="http://schemas.openxmlformats.org/officeDocument/2006/relationships">
+  <p:cSld>
+    <p:spTree>
+      <p:nvGrpSpPr>
+        <p:cNvPr id="1" name=""/>
+        <p:cNvGrpSpPr/>
+        <p:nvPr/>
+      </p:nvGrpSpPr>
+      <p:grpSpPr/>
+      <p:sp>
+        <p:nvSpPr>
+          <p:cNvPr id="2" name="Text 0"/>
+          <p:cNvSpPr/>
+          <p:nvPr/>
+        </p:nvSpPr>
+        <p:spPr>
+          <a:xfrm>
+            <a:off x="566928" y="329184"/>
+            <a:ext cx="10515600" cy="310896"/>
+          </a:xfrm>
+          <a:prstGeom prst="rect">
+            <a:avLst/>
+          </a:prstGeom>
+          <a:noFill/>
+          <a:ln/>
+        </p:spPr>
+        <p:txBody>
+          <a:bodyPr wrap="square" lIns="0" tIns="0" rIns="0" bIns="0" rtlCol="0" anchor="ctr"/>
+          <a:lstStyle/>
+          <a:p>
+            <a:pPr algn="l" indent="0" marL="0">
+              <a:buNone/>
+            </a:pPr>
+            <a:r>
+              <a:rPr lang="en-US" sz="1100" b="1" spc="150" kern="0" dirty="0">
+                <a:solidFill>
+                  <a:srgbClr val="455A64"/>
+                </a:solidFill>
+                <a:latin typeface="Calibri" pitchFamily="34" charset="0"/>
+                <a:ea typeface="Calibri" pitchFamily="34" charset="-122"/>
+                <a:cs typeface="Calibri" pitchFamily="34" charset="-120"/>
+              </a:rPr>
+              <a:t>LAB MANAGEMENT &amp; QUALITY   ·   BOARD REVIEW  ·  Q3</a:t>
+            </a:r>
+            <a:endParaRPr lang="en-US" sz="1100" dirty="0"/>
+          </a:p>
+        </p:txBody>
+      </p:sp>
+      <p:sp>
+        <p:nvSpPr>
+          <p:cNvPr id="3" name="Text 1"/>
+          <p:cNvSpPr/>
+          <p:nvPr/>
+        </p:nvSpPr>
+        <p:spPr>
+          <a:xfrm>
+            <a:off x="566928" y="713232"/>
+            <a:ext cx="11064240" cy="749808"/>
+          </a:xfrm>
+          <a:prstGeom prst="rect">
+            <a:avLst/>
+          </a:prstGeom>
+          <a:noFill/>
+          <a:ln/>
+        </p:spPr>
+        <p:txBody>
+          <a:bodyPr wrap="square" lIns="0" tIns="0" rIns="0" bIns="0" rtlCol="0" anchor="ctr"/>
+          <a:lstStyle/>
+          <a:p>
+            <a:pPr algn="l" indent="0" marL="0">
+              <a:buNone/>
+            </a:pPr>
+            <a:r>
+              <a:rPr lang="en-US" sz="2600" b="1" dirty="0">
+                <a:solidFill>
+                  <a:srgbClr val="0E3A5F"/>
+                </a:solidFill>
+                <a:latin typeface="Calibri" pitchFamily="34" charset="0"/>
+                <a:ea typeface="Calibri" pitchFamily="34" charset="-122"/>
+                <a:cs typeface="Calibri" pitchFamily="34" charset="-120"/>
+              </a:rPr>
+              <a:t>Board-Style Review</a:t>
+            </a:r>
+            <a:endParaRPr lang="en-US" sz="2600" dirty="0"/>
+          </a:p>
+        </p:txBody>
+      </p:sp>
+      <p:sp>
+        <p:nvSpPr>
+          <p:cNvPr id="4" name="Text 2"/>
+          <p:cNvSpPr/>
+          <p:nvPr/>
+        </p:nvSpPr>
+        <p:spPr>
+          <a:xfrm>
+            <a:off x="566928" y="1417320"/>
+            <a:ext cx="11057839" cy="914400"/>
+          </a:xfrm>
+          <a:prstGeom prst="rect">
+            <a:avLst/>
+          </a:prstGeom>
+          <a:noFill/>
+          <a:ln/>
+        </p:spPr>
+        <p:txBody>
+          <a:bodyPr wrap="square" lIns="0" tIns="0" rIns="0" bIns="0" rtlCol="0" anchor="t"/>
+          <a:lstStyle/>
+          <a:p>
+            <a:pPr algn="l" indent="0" marL="0">
+              <a:lnSpc>
+                <a:spcPct val="105000"/>
+              </a:lnSpc>
+              <a:buNone/>
+            </a:pPr>
+            <a:r>
+              <a:rPr lang="en-US" sz="1450" b="1" dirty="0">
+                <a:solidFill>
+                  <a:srgbClr val="1B2A38"/>
+                </a:solidFill>
+                <a:latin typeface="Calibri" pitchFamily="34" charset="0"/>
+                <a:ea typeface="Calibri" pitchFamily="34" charset="-122"/>
+                <a:cs typeface="Calibri" pitchFamily="34" charset="-120"/>
+              </a:rPr>
+              <a:t>The biggest risk after an LIS interface change is:</a:t>
+            </a:r>
+            <a:endParaRPr lang="en-US" sz="1450" dirty="0"/>
+          </a:p>
+        </p:txBody>
+      </p:sp>
+      <p:sp>
+        <p:nvSpPr>
+          <p:cNvPr id="5" name="Text 3"/>
+          <p:cNvSpPr/>
+          <p:nvPr/>
+        </p:nvSpPr>
+        <p:spPr>
+          <a:xfrm>
+            <a:off x="658368" y="2395728"/>
+            <a:ext cx="6192390" cy="3017520"/>
+          </a:xfrm>
+          <a:prstGeom prst="rect">
+            <a:avLst/>
+          </a:prstGeom>
+          <a:noFill/>
+          <a:ln/>
+        </p:spPr>
+        <p:txBody>
+          <a:bodyPr wrap="square" lIns="0" tIns="0" rIns="0" bIns="0" rtlCol="0" anchor="t"/>
+          <a:lstStyle/>
+          <a:p>
+            <a:pPr algn="l" indent="0" marL="0">
+              <a:spcAft>
+                <a:spcPts val="600"/>
+              </a:spcAft>
+              <a:buNone/>
+            </a:pPr>
+            <a:r>
+              <a:rPr lang="en-US" sz="1350" dirty="0">
+                <a:solidFill>
+                  <a:srgbClr val="33444F"/>
+                </a:solidFill>
+                <a:latin typeface="Calibri" pitchFamily="34" charset="0"/>
+                <a:ea typeface="Calibri" pitchFamily="34" charset="-122"/>
+                <a:cs typeface="Calibri" pitchFamily="34" charset="-120"/>
+              </a:rPr>
+              <a:t>A. Faster results</a:t>
+            </a:r>
+            <a:endParaRPr lang="en-US" sz="1350" dirty="0"/>
+          </a:p>
+          <a:p>
+            <a:pPr algn="l" indent="0" marL="0">
+              <a:spcAft>
+                <a:spcPts val="600"/>
+              </a:spcAft>
+              <a:buNone/>
+            </a:pPr>
+            <a:r>
+              <a:rPr lang="en-US" sz="1350" b="1" dirty="0">
+                <a:solidFill>
+                  <a:srgbClr val="2C3A41"/>
+                </a:solidFill>
+                <a:latin typeface="Calibri" pitchFamily="34" charset="0"/>
+                <a:ea typeface="Calibri" pitchFamily="34" charset="-122"/>
+                <a:cs typeface="Calibri" pitchFamily="34" charset="-120"/>
+              </a:rPr>
+              <a:t>B. Silent mapping errors (units/codes/ranges)</a:t>
+            </a:r>
+            <a:endParaRPr lang="en-US" sz="1350" dirty="0"/>
+          </a:p>
+          <a:p>
+            <a:pPr algn="l" indent="0" marL="0">
+              <a:spcAft>
+                <a:spcPts val="600"/>
+              </a:spcAft>
+              <a:buNone/>
+            </a:pPr>
+            <a:r>
+              <a:rPr lang="en-US" sz="1350" dirty="0">
+                <a:solidFill>
+                  <a:srgbClr val="33444F"/>
+                </a:solidFill>
+                <a:latin typeface="Calibri" pitchFamily="34" charset="0"/>
+                <a:ea typeface="Calibri" pitchFamily="34" charset="-122"/>
+                <a:cs typeface="Calibri" pitchFamily="34" charset="-120"/>
+              </a:rPr>
+              <a:t>C. Reduced storage</a:t>
+            </a:r>
+            <a:endParaRPr lang="en-US" sz="1350" dirty="0"/>
+          </a:p>
+          <a:p>
+            <a:pPr algn="l" indent="0" marL="0">
+              <a:spcAft>
+                <a:spcPts val="600"/>
+              </a:spcAft>
+              <a:buNone/>
+            </a:pPr>
+            <a:r>
+              <a:rPr lang="en-US" sz="1350" dirty="0">
+                <a:solidFill>
+                  <a:srgbClr val="33444F"/>
+                </a:solidFill>
+                <a:latin typeface="Calibri" pitchFamily="34" charset="0"/>
+                <a:ea typeface="Calibri" pitchFamily="34" charset="-122"/>
+                <a:cs typeface="Calibri" pitchFamily="34" charset="-120"/>
+              </a:rPr>
+              <a:t>D. Excessive flags</a:t>
+            </a:r>
+            <a:endParaRPr lang="en-US" sz="1350" dirty="0"/>
+          </a:p>
+          <a:p>
+            <a:pPr algn="l" indent="0" marL="0">
+              <a:spcAft>
+                <a:spcPts val="600"/>
+              </a:spcAft>
+              <a:buNone/>
+            </a:pPr>
+            <a:r>
+              <a:rPr lang="en-US" sz="1350" dirty="0">
+                <a:solidFill>
+                  <a:srgbClr val="33444F"/>
+                </a:solidFill>
+                <a:latin typeface="Calibri" pitchFamily="34" charset="0"/>
+                <a:ea typeface="Calibri" pitchFamily="34" charset="-122"/>
+                <a:cs typeface="Calibri" pitchFamily="34" charset="-120"/>
+              </a:rPr>
+              <a:t>E. Lower cost</a:t>
+            </a:r>
+            <a:endParaRPr lang="en-US" sz="1350" dirty="0"/>
+          </a:p>
+        </p:txBody>
+      </p:sp>
+      <p:sp>
+        <p:nvSpPr>
+          <p:cNvPr id="6" name="Shape 4"/>
+          <p:cNvSpPr/>
+          <p:nvPr/>
+        </p:nvSpPr>
+        <p:spPr>
+          <a:xfrm>
+            <a:off x="7201632" y="2395728"/>
+            <a:ext cx="4423136" cy="3246120"/>
+          </a:xfrm>
+          <a:prstGeom prst="roundRect">
+            <a:avLst>
+              <a:gd name="adj" fmla="val 2535"/>
+            </a:avLst>
+          </a:prstGeom>
+          <a:solidFill>
+            <a:srgbClr val="ECEFF1"/>
+          </a:solidFill>
+          <a:ln/>
+          <a:effectLst>
+            <a:outerShdw sx="100000" sy="100000" kx="0" ky="0" algn="bl" rotWithShape="0" blurRad="88900" dist="25400" dir="5400000">
+              <a:srgbClr val="22303C">
+                <a:alpha val="12000"/>
+              </a:srgbClr>
+            </a:outerShdw>
+          </a:effectLst>
+        </p:spPr>
+        <p:txBody>
+          <a:bodyPr/>
+          <a:p/>
+        </p:txBody>
+      </p:sp>
+      <p:sp>
+        <p:nvSpPr>
+          <p:cNvPr id="7" name="Text 5"/>
+          <p:cNvSpPr/>
+          <p:nvPr/>
+        </p:nvSpPr>
+        <p:spPr>
+          <a:xfrm>
+            <a:off x="7439376" y="2578608"/>
+            <a:ext cx="3965936" cy="457200"/>
+          </a:xfrm>
+          <a:prstGeom prst="rect">
+            <a:avLst/>
+          </a:prstGeom>
+          <a:noFill/>
+          <a:ln/>
+        </p:spPr>
+        <p:txBody>
+          <a:bodyPr wrap="square" lIns="0" tIns="0" rIns="0" bIns="0" rtlCol="0" anchor="ctr"/>
+          <a:lstStyle/>
+          <a:p>
+            <a:pPr indent="0" marL="0">
+              <a:buNone/>
+            </a:pPr>
+            <a:r>
+              <a:rPr lang="en-US" sz="1500" b="1" dirty="0">
+                <a:solidFill>
+                  <a:srgbClr val="455A64"/>
+                </a:solidFill>
+                <a:latin typeface="Calibri" pitchFamily="34" charset="0"/>
+                <a:ea typeface="Calibri" pitchFamily="34" charset="-122"/>
+                <a:cs typeface="Calibri" pitchFamily="34" charset="-120"/>
+              </a:rPr>
+              <a:t>ANSWER  </a:t>
+            </a:r>
+            <a:pPr indent="0" marL="0">
+              <a:buNone/>
+            </a:pPr>
+            <a:r>
+              <a:rPr lang="en-US" sz="1500" b="1" dirty="0">
+                <a:solidFill>
+                  <a:srgbClr val="1B2A38"/>
+                </a:solidFill>
+                <a:latin typeface="Calibri" pitchFamily="34" charset="0"/>
+                <a:ea typeface="Calibri" pitchFamily="34" charset="-122"/>
+                <a:cs typeface="Calibri" pitchFamily="34" charset="-120"/>
+              </a:rPr>
+              <a:t>B — Silent mapping errors</a:t>
+            </a:r>
+            <a:endParaRPr lang="en-US" sz="1500" dirty="0"/>
+          </a:p>
+        </p:txBody>
+      </p:sp>
+      <p:sp>
+        <p:nvSpPr>
+          <p:cNvPr id="8" name="Text 6"/>
+          <p:cNvSpPr/>
+          <p:nvPr/>
+        </p:nvSpPr>
+        <p:spPr>
+          <a:xfrm>
+            <a:off x="7439376" y="3127248"/>
+            <a:ext cx="3947648" cy="2377440"/>
+          </a:xfrm>
+          <a:prstGeom prst="rect">
+            <a:avLst/>
+          </a:prstGeom>
+          <a:noFill/>
+          <a:ln/>
+        </p:spPr>
+        <p:txBody>
+          <a:bodyPr wrap="square" lIns="0" tIns="0" rIns="0" bIns="0" rtlCol="0" anchor="t"/>
+          <a:lstStyle/>
+          <a:p>
+            <a:pPr algn="l" indent="0" marL="0">
+              <a:lnSpc>
+                <a:spcPct val="108000"/>
+              </a:lnSpc>
+              <a:buNone/>
+            </a:pPr>
+            <a:r>
+              <a:rPr lang="en-US" sz="1250" dirty="0">
+                <a:solidFill>
+                  <a:srgbClr val="33444F"/>
+                </a:solidFill>
+                <a:latin typeface="Calibri" pitchFamily="34" charset="0"/>
+                <a:ea typeface="Calibri" pitchFamily="34" charset="-122"/>
+                <a:cs typeface="Calibri" pitchFamily="34" charset="-120"/>
+              </a:rPr>
+              <a:t>Mapping errors can corrupt results invisibly; interfaces must be revalidated after any change.</a:t>
+            </a:r>
+            <a:endParaRPr lang="en-US" sz="1250" dirty="0"/>
+          </a:p>
+        </p:txBody>
+      </p:sp>
+      <p:sp>
+        <p:nvSpPr>
+          <p:cNvPr id="9" name="Text 7"/>
+          <p:cNvSpPr/>
+          <p:nvPr/>
+        </p:nvSpPr>
+        <p:spPr>
+          <a:xfrm>
+            <a:off x="566928" y="6473952"/>
+            <a:ext cx="7772400" cy="274320"/>
+          </a:xfrm>
+          <a:prstGeom prst="rect">
+            <a:avLst/>
+          </a:prstGeom>
+          <a:noFill/>
+          <a:ln/>
+        </p:spPr>
+        <p:txBody>
+          <a:bodyPr wrap="square" lIns="0" tIns="0" rIns="0" bIns="0" rtlCol="0" anchor="ctr"/>
+          <a:lstStyle/>
+          <a:p>
+            <a:pPr algn="l" indent="0" marL="0">
+              <a:buNone/>
+            </a:pPr>
+            <a:r>
+              <a:rPr lang="en-US" sz="850" dirty="0">
+                <a:solidFill>
+                  <a:srgbClr val="9AA8B4"/>
+                </a:solidFill>
+                <a:latin typeface="Calibri" pitchFamily="34" charset="0"/>
+                <a:ea typeface="Calibri" pitchFamily="34" charset="-122"/>
+                <a:cs typeface="Calibri" pitchFamily="34" charset="-120"/>
+              </a:rPr>
+              <a:t>Makassed General Hospital  ·  Department of Laboratory Medicine</a:t>
+            </a:r>
+            <a:endParaRPr lang="en-US" sz="850" dirty="0"/>
+          </a:p>
+        </p:txBody>
+      </p:sp>
+      <p:sp>
+        <p:nvSpPr>
+          <p:cNvPr id="10" name="Text 8"/>
+          <p:cNvSpPr/>
+          <p:nvPr/>
+        </p:nvSpPr>
+        <p:spPr>
+          <a:xfrm>
+            <a:off x="9814255" y="6473952"/>
+            <a:ext cx="1828800" cy="274320"/>
+          </a:xfrm>
+          <a:prstGeom prst="rect">
+            <a:avLst/>
+          </a:prstGeom>
+          <a:noFill/>
+          <a:ln/>
+        </p:spPr>
+        <p:txBody>
+          <a:bodyPr wrap="square" lIns="0" tIns="0" rIns="0" bIns="0" rtlCol="0" anchor="ctr"/>
+          <a:lstStyle/>
+          <a:p>
+            <a:pPr algn="r" indent="0" marL="0">
+              <a:buNone/>
+            </a:pPr>
+            <a:r>
+              <a:rPr lang="en-US" sz="850" dirty="0">
+                <a:solidFill>
+                  <a:srgbClr val="9AA8B4"/>
+                </a:solidFill>
+                <a:latin typeface="Calibri" pitchFamily="34" charset="0"/>
+                <a:ea typeface="Calibri" pitchFamily="34" charset="-122"/>
+                <a:cs typeface="Calibri" pitchFamily="34" charset="-120"/>
+              </a:rPr>
+              <a:t>CP Lecture Series</a:t>
+            </a:r>
+            <a:pPr algn="r" indent="0" marL="0">
+              <a:buNone/>
+            </a:pPr>
+            <a:r>
+              <a:rPr lang="en-US" sz="850" dirty="0">
+                <a:solidFill>
+                  <a:srgbClr val="DCE4EC"/>
+                </a:solidFill>
+                <a:latin typeface="Calibri" pitchFamily="34" charset="0"/>
+                <a:ea typeface="Calibri" pitchFamily="34" charset="-122"/>
+                <a:cs typeface="Calibri" pitchFamily="34" charset="-120"/>
+              </a:rPr>
+              <a:t>   ·   </a:t>
+            </a:r>
+            <a:pPr algn="r" indent="0" marL="0">
+              <a:buNone/>
+            </a:pPr>
+            <a:r>
+              <a:rPr lang="en-US" sz="850" b="1" dirty="0">
+                <a:solidFill>
+                  <a:srgbClr val="455A64"/>
+                </a:solidFill>
+                <a:latin typeface="Calibri" pitchFamily="34" charset="0"/>
+                <a:ea typeface="Calibri" pitchFamily="34" charset="-122"/>
+                <a:cs typeface="Calibri" pitchFamily="34" charset="-120"/>
+              </a:rPr>
+              <a:t>19</a:t>
+            </a:r>
+            <a:endParaRPr lang="en-US" sz="850" dirty="0"/>
+          </a:p>
+        </p:txBody>
+      </p:sp>
+    </p:spTree>
+  </p:cSld>
+  <p:clrMapOvr>
+    <a:masterClrMapping/>
+  </p:clrMapOvr>
+</p:sld>
+</file>
+
+<file path=ppt/slides/slide28.xml><?xml version="1.0" encoding="utf-8"?>
+<p:sld xmlns:a="http://schemas.openxmlformats.org/drawingml/2006/main" xmlns:p="http://schemas.openxmlformats.org/presentationml/2006/main" xmlns:r="http://schemas.openxmlformats.org/officeDocument/2006/relationships">
+  <p:cSld>
+    <p:spTree>
+      <p:nvGrpSpPr>
+        <p:cNvPr id="1" name=""/>
+        <p:cNvGrpSpPr/>
+        <p:nvPr/>
+      </p:nvGrpSpPr>
+      <p:grpSpPr/>
+      <p:sp>
+        <p:nvSpPr>
+          <p:cNvPr id="2" name="Text 0"/>
+          <p:cNvSpPr/>
+          <p:nvPr/>
+        </p:nvSpPr>
+        <p:spPr>
+          <a:xfrm>
+            <a:off x="566928" y="329184"/>
+            <a:ext cx="10515600" cy="310896"/>
+          </a:xfrm>
+          <a:prstGeom prst="rect">
+            <a:avLst/>
+          </a:prstGeom>
+          <a:noFill/>
+          <a:ln/>
+        </p:spPr>
+        <p:txBody>
+          <a:bodyPr wrap="square" lIns="0" tIns="0" rIns="0" bIns="0" rtlCol="0" anchor="ctr"/>
+          <a:lstStyle/>
+          <a:p>
+            <a:pPr algn="l" indent="0" marL="0">
+              <a:buNone/>
+            </a:pPr>
+            <a:r>
+              <a:rPr lang="en-US" sz="1100" b="1" spc="150" kern="0" dirty="0">
+                <a:solidFill>
+                  <a:srgbClr val="455A64"/>
+                </a:solidFill>
+                <a:latin typeface="Calibri" pitchFamily="34" charset="0"/>
+                <a:ea typeface="Calibri" pitchFamily="34" charset="-122"/>
+                <a:cs typeface="Calibri" pitchFamily="34" charset="-120"/>
+              </a:rPr>
+              <a:t>LAB MANAGEMENT &amp; QUALITY   ·   BOARD REVIEW  ·  Q2</a:t>
+            </a:r>
+            <a:endParaRPr lang="en-US" sz="1100" dirty="0"/>
+          </a:p>
+        </p:txBody>
+      </p:sp>
+      <p:sp>
+        <p:nvSpPr>
+          <p:cNvPr id="3" name="Text 1"/>
+          <p:cNvSpPr/>
+          <p:nvPr/>
+        </p:nvSpPr>
+        <p:spPr>
+          <a:xfrm>
+            <a:off x="566928" y="713232"/>
+            <a:ext cx="11064240" cy="749808"/>
+          </a:xfrm>
+          <a:prstGeom prst="rect">
+            <a:avLst/>
+          </a:prstGeom>
+          <a:noFill/>
+          <a:ln/>
+        </p:spPr>
+        <p:txBody>
+          <a:bodyPr wrap="square" lIns="0" tIns="0" rIns="0" bIns="0" rtlCol="0" anchor="ctr"/>
+          <a:lstStyle/>
+          <a:p>
+            <a:pPr algn="l" indent="0" marL="0">
+              <a:buNone/>
+            </a:pPr>
+            <a:r>
+              <a:rPr lang="en-US" sz="2600" b="1" dirty="0">
+                <a:solidFill>
+                  <a:srgbClr val="0E3A5F"/>
+                </a:solidFill>
+                <a:latin typeface="Calibri" pitchFamily="34" charset="0"/>
+                <a:ea typeface="Calibri" pitchFamily="34" charset="-122"/>
+                <a:cs typeface="Calibri" pitchFamily="34" charset="-120"/>
+              </a:rPr>
+              <a:t>Board-Style Review</a:t>
+            </a:r>
+            <a:endParaRPr lang="en-US" sz="2600" dirty="0"/>
+          </a:p>
+        </p:txBody>
+      </p:sp>
+      <p:sp>
+        <p:nvSpPr>
+          <p:cNvPr id="4" name="Text 2"/>
+          <p:cNvSpPr/>
+          <p:nvPr/>
+        </p:nvSpPr>
+        <p:spPr>
+          <a:xfrm>
+            <a:off x="566928" y="1417320"/>
+            <a:ext cx="11057839" cy="914400"/>
+          </a:xfrm>
+          <a:prstGeom prst="rect">
+            <a:avLst/>
+          </a:prstGeom>
+          <a:noFill/>
+          <a:ln/>
+        </p:spPr>
+        <p:txBody>
+          <a:bodyPr wrap="square" lIns="0" tIns="0" rIns="0" bIns="0" rtlCol="0" anchor="t"/>
+          <a:lstStyle/>
+          <a:p>
+            <a:pPr algn="l" indent="0" marL="0">
+              <a:lnSpc>
+                <a:spcPct val="105000"/>
+              </a:lnSpc>
+              <a:buNone/>
+            </a:pPr>
+            <a:r>
+              <a:rPr lang="en-US" sz="1450" b="1" dirty="0">
+                <a:solidFill>
+                  <a:srgbClr val="1B2A38"/>
+                </a:solidFill>
+                <a:latin typeface="Calibri" pitchFamily="34" charset="0"/>
+                <a:ea typeface="Calibri" pitchFamily="34" charset="-122"/>
+                <a:cs typeface="Calibri" pitchFamily="34" charset="-120"/>
+              </a:rPr>
+              <a:t>A delta check primarily detects:</a:t>
+            </a:r>
+            <a:endParaRPr lang="en-US" sz="1450" dirty="0"/>
+          </a:p>
+        </p:txBody>
+      </p:sp>
+      <p:sp>
+        <p:nvSpPr>
+          <p:cNvPr id="5" name="Text 3"/>
+          <p:cNvSpPr/>
+          <p:nvPr/>
+        </p:nvSpPr>
+        <p:spPr>
+          <a:xfrm>
+            <a:off x="658368" y="2395728"/>
+            <a:ext cx="6192390" cy="3017520"/>
+          </a:xfrm>
+          <a:prstGeom prst="rect">
+            <a:avLst/>
+          </a:prstGeom>
+          <a:noFill/>
+          <a:ln/>
+        </p:spPr>
+        <p:txBody>
+          <a:bodyPr wrap="square" lIns="0" tIns="0" rIns="0" bIns="0" rtlCol="0" anchor="t"/>
+          <a:lstStyle/>
+          <a:p>
+            <a:pPr algn="l" indent="0" marL="0">
+              <a:spcAft>
+                <a:spcPts val="600"/>
+              </a:spcAft>
+              <a:buNone/>
+            </a:pPr>
+            <a:r>
+              <a:rPr lang="en-US" sz="1350" dirty="0">
+                <a:solidFill>
+                  <a:srgbClr val="33444F"/>
+                </a:solidFill>
+                <a:latin typeface="Calibri" pitchFamily="34" charset="0"/>
+                <a:ea typeface="Calibri" pitchFamily="34" charset="-122"/>
+                <a:cs typeface="Calibri" pitchFamily="34" charset="-120"/>
+              </a:rPr>
+              <a:t>A. Calibration drift</a:t>
+            </a:r>
+            <a:endParaRPr lang="en-US" sz="1350" dirty="0"/>
+          </a:p>
+          <a:p>
+            <a:pPr algn="l" indent="0" marL="0">
+              <a:spcAft>
+                <a:spcPts val="600"/>
+              </a:spcAft>
+              <a:buNone/>
+            </a:pPr>
+            <a:r>
+              <a:rPr lang="en-US" sz="1350" b="1" dirty="0">
+                <a:solidFill>
+                  <a:srgbClr val="2C3A41"/>
+                </a:solidFill>
+                <a:latin typeface="Calibri" pitchFamily="34" charset="0"/>
+                <a:ea typeface="Calibri" pitchFamily="34" charset="-122"/>
+                <a:cs typeface="Calibri" pitchFamily="34" charset="-120"/>
+              </a:rPr>
+              <a:t>B. Implausible changes from a patient’s prior result (e.g., mislabeling)</a:t>
+            </a:r>
+            <a:endParaRPr lang="en-US" sz="1350" dirty="0"/>
+          </a:p>
+          <a:p>
+            <a:pPr algn="l" indent="0" marL="0">
+              <a:spcAft>
+                <a:spcPts val="600"/>
+              </a:spcAft>
+              <a:buNone/>
+            </a:pPr>
+            <a:r>
+              <a:rPr lang="en-US" sz="1350" dirty="0">
+                <a:solidFill>
+                  <a:srgbClr val="33444F"/>
+                </a:solidFill>
+                <a:latin typeface="Calibri" pitchFamily="34" charset="0"/>
+                <a:ea typeface="Calibri" pitchFamily="34" charset="-122"/>
+                <a:cs typeface="Calibri" pitchFamily="34" charset="-120"/>
+              </a:rPr>
+              <a:t>C. Reagent expiration</a:t>
+            </a:r>
+            <a:endParaRPr lang="en-US" sz="1350" dirty="0"/>
+          </a:p>
+          <a:p>
+            <a:pPr algn="l" indent="0" marL="0">
+              <a:spcAft>
+                <a:spcPts val="600"/>
+              </a:spcAft>
+              <a:buNone/>
+            </a:pPr>
+            <a:r>
+              <a:rPr lang="en-US" sz="1350" dirty="0">
+                <a:solidFill>
+                  <a:srgbClr val="33444F"/>
+                </a:solidFill>
+                <a:latin typeface="Calibri" pitchFamily="34" charset="0"/>
+                <a:ea typeface="Calibri" pitchFamily="34" charset="-122"/>
+                <a:cs typeface="Calibri" pitchFamily="34" charset="-120"/>
+              </a:rPr>
+              <a:t>D. Interface downtime</a:t>
+            </a:r>
+            <a:endParaRPr lang="en-US" sz="1350" dirty="0"/>
+          </a:p>
+          <a:p>
+            <a:pPr algn="l" indent="0" marL="0">
+              <a:spcAft>
+                <a:spcPts val="600"/>
+              </a:spcAft>
+              <a:buNone/>
+            </a:pPr>
+            <a:r>
+              <a:rPr lang="en-US" sz="1350" dirty="0">
+                <a:solidFill>
+                  <a:srgbClr val="33444F"/>
+                </a:solidFill>
+                <a:latin typeface="Calibri" pitchFamily="34" charset="0"/>
+                <a:ea typeface="Calibri" pitchFamily="34" charset="-122"/>
+                <a:cs typeface="Calibri" pitchFamily="34" charset="-120"/>
+              </a:rPr>
+              <a:t>E. Billing errors</a:t>
+            </a:r>
+            <a:endParaRPr lang="en-US" sz="1350" dirty="0"/>
+          </a:p>
+        </p:txBody>
+      </p:sp>
+      <p:sp>
+        <p:nvSpPr>
+          <p:cNvPr id="6" name="Shape 4"/>
+          <p:cNvSpPr/>
+          <p:nvPr/>
+        </p:nvSpPr>
+        <p:spPr>
+          <a:xfrm>
+            <a:off x="7201632" y="2395728"/>
+            <a:ext cx="4423136" cy="3246120"/>
+          </a:xfrm>
+          <a:prstGeom prst="roundRect">
+            <a:avLst>
+              <a:gd name="adj" fmla="val 2535"/>
+            </a:avLst>
+          </a:prstGeom>
+          <a:solidFill>
+            <a:srgbClr val="ECEFF1"/>
+          </a:solidFill>
+          <a:ln/>
+          <a:effectLst>
+            <a:outerShdw sx="100000" sy="100000" kx="0" ky="0" algn="bl" rotWithShape="0" blurRad="88900" dist="25400" dir="5400000">
+              <a:srgbClr val="22303C">
+                <a:alpha val="12000"/>
+              </a:srgbClr>
+            </a:outerShdw>
+          </a:effectLst>
+        </p:spPr>
+        <p:txBody>
+          <a:bodyPr/>
+          <a:p/>
+        </p:txBody>
+      </p:sp>
+      <p:sp>
+        <p:nvSpPr>
+          <p:cNvPr id="7" name="Text 5"/>
+          <p:cNvSpPr/>
+          <p:nvPr/>
+        </p:nvSpPr>
+        <p:spPr>
+          <a:xfrm>
+            <a:off x="7439376" y="2578608"/>
+            <a:ext cx="3965936" cy="457200"/>
+          </a:xfrm>
+          <a:prstGeom prst="rect">
+            <a:avLst/>
+          </a:prstGeom>
+          <a:noFill/>
+          <a:ln/>
+        </p:spPr>
+        <p:txBody>
+          <a:bodyPr wrap="square" lIns="0" tIns="0" rIns="0" bIns="0" rtlCol="0" anchor="ctr"/>
+          <a:lstStyle/>
+          <a:p>
+            <a:pPr indent="0" marL="0">
+              <a:buNone/>
+            </a:pPr>
+            <a:r>
+              <a:rPr lang="en-US" sz="1500" b="1" dirty="0">
+                <a:solidFill>
+                  <a:srgbClr val="455A64"/>
+                </a:solidFill>
+                <a:latin typeface="Calibri" pitchFamily="34" charset="0"/>
+                <a:ea typeface="Calibri" pitchFamily="34" charset="-122"/>
+                <a:cs typeface="Calibri" pitchFamily="34" charset="-120"/>
+              </a:rPr>
+              <a:t>ANSWER  </a:t>
+            </a:r>
+            <a:pPr indent="0" marL="0">
+              <a:buNone/>
+            </a:pPr>
+            <a:r>
+              <a:rPr lang="en-US" sz="1500" b="1" dirty="0">
+                <a:solidFill>
+                  <a:srgbClr val="1B2A38"/>
+                </a:solidFill>
+                <a:latin typeface="Calibri" pitchFamily="34" charset="0"/>
+                <a:ea typeface="Calibri" pitchFamily="34" charset="-122"/>
+                <a:cs typeface="Calibri" pitchFamily="34" charset="-120"/>
+              </a:rPr>
+              <a:t>B — Implausible change vs prior</a:t>
+            </a:r>
+            <a:endParaRPr lang="en-US" sz="1500" dirty="0"/>
+          </a:p>
+        </p:txBody>
+      </p:sp>
+      <p:sp>
+        <p:nvSpPr>
+          <p:cNvPr id="8" name="Text 6"/>
+          <p:cNvSpPr/>
+          <p:nvPr/>
+        </p:nvSpPr>
+        <p:spPr>
+          <a:xfrm>
+            <a:off x="7439376" y="3127248"/>
+            <a:ext cx="3947648" cy="2377440"/>
+          </a:xfrm>
+          <a:prstGeom prst="rect">
+            <a:avLst/>
+          </a:prstGeom>
+          <a:noFill/>
+          <a:ln/>
+        </p:spPr>
+        <p:txBody>
+          <a:bodyPr wrap="square" lIns="0" tIns="0" rIns="0" bIns="0" rtlCol="0" anchor="t"/>
+          <a:lstStyle/>
+          <a:p>
+            <a:pPr algn="l" indent="0" marL="0">
+              <a:lnSpc>
+                <a:spcPct val="108000"/>
+              </a:lnSpc>
+              <a:buNone/>
+            </a:pPr>
+            <a:r>
+              <a:rPr lang="en-US" sz="1250" dirty="0">
+                <a:solidFill>
+                  <a:srgbClr val="33444F"/>
+                </a:solidFill>
+                <a:latin typeface="Calibri" pitchFamily="34" charset="0"/>
+                <a:ea typeface="Calibri" pitchFamily="34" charset="-122"/>
+                <a:cs typeface="Calibri" pitchFamily="34" charset="-120"/>
+              </a:rPr>
+              <a:t>Delta checks compare current to previous results to flag possible specimen mix-ups or errors.</a:t>
+            </a:r>
+            <a:endParaRPr lang="en-US" sz="1250" dirty="0"/>
+          </a:p>
+        </p:txBody>
+      </p:sp>
+      <p:sp>
+        <p:nvSpPr>
+          <p:cNvPr id="9" name="Text 7"/>
+          <p:cNvSpPr/>
+          <p:nvPr/>
+        </p:nvSpPr>
+        <p:spPr>
+          <a:xfrm>
+            <a:off x="566928" y="6473952"/>
+            <a:ext cx="7772400" cy="274320"/>
+          </a:xfrm>
+          <a:prstGeom prst="rect">
+            <a:avLst/>
+          </a:prstGeom>
+          <a:noFill/>
+          <a:ln/>
+        </p:spPr>
+        <p:txBody>
+          <a:bodyPr wrap="square" lIns="0" tIns="0" rIns="0" bIns="0" rtlCol="0" anchor="ctr"/>
+          <a:lstStyle/>
+          <a:p>
+            <a:pPr algn="l" indent="0" marL="0">
+              <a:buNone/>
+            </a:pPr>
+            <a:r>
+              <a:rPr lang="en-US" sz="850" dirty="0">
+                <a:solidFill>
+                  <a:srgbClr val="9AA8B4"/>
+                </a:solidFill>
+                <a:latin typeface="Calibri" pitchFamily="34" charset="0"/>
+                <a:ea typeface="Calibri" pitchFamily="34" charset="-122"/>
+                <a:cs typeface="Calibri" pitchFamily="34" charset="-120"/>
+              </a:rPr>
+              <a:t>Makassed General Hospital  ·  Department of Laboratory Medicine</a:t>
+            </a:r>
+            <a:endParaRPr lang="en-US" sz="850" dirty="0"/>
+          </a:p>
+        </p:txBody>
+      </p:sp>
+      <p:sp>
+        <p:nvSpPr>
+          <p:cNvPr id="10" name="Text 8"/>
+          <p:cNvSpPr/>
+          <p:nvPr/>
+        </p:nvSpPr>
+        <p:spPr>
+          <a:xfrm>
+            <a:off x="9814255" y="6473952"/>
+            <a:ext cx="1828800" cy="274320"/>
+          </a:xfrm>
+          <a:prstGeom prst="rect">
+            <a:avLst/>
+          </a:prstGeom>
+          <a:noFill/>
+          <a:ln/>
+        </p:spPr>
+        <p:txBody>
+          <a:bodyPr wrap="square" lIns="0" tIns="0" rIns="0" bIns="0" rtlCol="0" anchor="ctr"/>
+          <a:lstStyle/>
+          <a:p>
+            <a:pPr algn="r" indent="0" marL="0">
+              <a:buNone/>
+            </a:pPr>
+            <a:r>
+              <a:rPr lang="en-US" sz="850" dirty="0">
+                <a:solidFill>
+                  <a:srgbClr val="9AA8B4"/>
+                </a:solidFill>
+                <a:latin typeface="Calibri" pitchFamily="34" charset="0"/>
+                <a:ea typeface="Calibri" pitchFamily="34" charset="-122"/>
+                <a:cs typeface="Calibri" pitchFamily="34" charset="-120"/>
+              </a:rPr>
+              <a:t>CP Lecture Series</a:t>
+            </a:r>
+            <a:pPr algn="r" indent="0" marL="0">
+              <a:buNone/>
+            </a:pPr>
+            <a:r>
+              <a:rPr lang="en-US" sz="850" dirty="0">
+                <a:solidFill>
+                  <a:srgbClr val="DCE4EC"/>
+                </a:solidFill>
+                <a:latin typeface="Calibri" pitchFamily="34" charset="0"/>
+                <a:ea typeface="Calibri" pitchFamily="34" charset="-122"/>
+                <a:cs typeface="Calibri" pitchFamily="34" charset="-120"/>
+              </a:rPr>
+              <a:t>   ·   </a:t>
+            </a:r>
+            <a:pPr algn="r" indent="0" marL="0">
+              <a:buNone/>
+            </a:pPr>
+            <a:r>
+              <a:rPr lang="en-US" sz="850" b="1" dirty="0">
+                <a:solidFill>
+                  <a:srgbClr val="455A64"/>
+                </a:solidFill>
+                <a:latin typeface="Calibri" pitchFamily="34" charset="0"/>
+                <a:ea typeface="Calibri" pitchFamily="34" charset="-122"/>
+                <a:cs typeface="Calibri" pitchFamily="34" charset="-120"/>
+              </a:rPr>
+              <a:t>18</a:t>
+            </a:r>
+            <a:endParaRPr lang="en-US" sz="850" dirty="0"/>
+          </a:p>
+        </p:txBody>
+      </p:sp>
+    </p:spTree>
+  </p:cSld>
+  <p:clrMapOvr>
+    <a:masterClrMapping/>
+  </p:clrMapOvr>
+</p:sld>
+</file>
+
+<file path=ppt/slides/slide29.xml><?xml version="1.0" encoding="utf-8"?>
+<p:sld xmlns:a="http://schemas.openxmlformats.org/drawingml/2006/main" xmlns:p="http://schemas.openxmlformats.org/presentationml/2006/main" xmlns:r="http://schemas.openxmlformats.org/officeDocument/2006/relationships">
+  <p:cSld>
+    <p:spTree>
+      <p:nvGrpSpPr>
+        <p:cNvPr id="1" name=""/>
+        <p:cNvGrpSpPr/>
+        <p:nvPr/>
+      </p:nvGrpSpPr>
+      <p:grpSpPr/>
+      <p:sp>
+        <p:nvSpPr>
+          <p:cNvPr id="2" name="Text 0"/>
+          <p:cNvSpPr/>
+          <p:nvPr/>
+        </p:nvSpPr>
+        <p:spPr>
+          <a:xfrm>
+            <a:off x="566928" y="329184"/>
+            <a:ext cx="10515600" cy="310896"/>
+          </a:xfrm>
+          <a:prstGeom prst="rect">
+            <a:avLst/>
+          </a:prstGeom>
+          <a:noFill/>
+          <a:ln/>
+        </p:spPr>
+        <p:txBody>
+          <a:bodyPr wrap="square" lIns="0" tIns="0" rIns="0" bIns="0" rtlCol="0" anchor="ctr"/>
+          <a:lstStyle/>
+          <a:p>
+            <a:pPr algn="l" indent="0" marL="0">
+              <a:buNone/>
+            </a:pPr>
+            <a:r>
+              <a:rPr lang="en-US" sz="1100" b="1" spc="150" kern="0" dirty="0">
+                <a:solidFill>
+                  <a:srgbClr val="455A64"/>
+                </a:solidFill>
+                <a:latin typeface="Calibri" pitchFamily="34" charset="0"/>
+                <a:ea typeface="Calibri" pitchFamily="34" charset="-122"/>
+                <a:cs typeface="Calibri" pitchFamily="34" charset="-120"/>
+              </a:rPr>
+              <a:t>LAB MANAGEMENT &amp; QUALITY   ·   BOARD REVIEW  ·  Q1</a:t>
+            </a:r>
+            <a:endParaRPr lang="en-US" sz="1100" dirty="0"/>
+          </a:p>
+        </p:txBody>
+      </p:sp>
+      <p:sp>
+        <p:nvSpPr>
+          <p:cNvPr id="3" name="Text 1"/>
+          <p:cNvSpPr/>
+          <p:nvPr/>
+        </p:nvSpPr>
+        <p:spPr>
+          <a:xfrm>
+            <a:off x="566928" y="713232"/>
+            <a:ext cx="11064240" cy="749808"/>
+          </a:xfrm>
+          <a:prstGeom prst="rect">
+            <a:avLst/>
+          </a:prstGeom>
+          <a:noFill/>
+          <a:ln/>
+        </p:spPr>
+        <p:txBody>
+          <a:bodyPr wrap="square" lIns="0" tIns="0" rIns="0" bIns="0" rtlCol="0" anchor="ctr"/>
+          <a:lstStyle/>
+          <a:p>
+            <a:pPr algn="l" indent="0" marL="0">
+              <a:buNone/>
+            </a:pPr>
+            <a:r>
+              <a:rPr lang="en-US" sz="2600" b="1" dirty="0">
+                <a:solidFill>
+                  <a:srgbClr val="0E3A5F"/>
+                </a:solidFill>
+                <a:latin typeface="Calibri" pitchFamily="34" charset="0"/>
+                <a:ea typeface="Calibri" pitchFamily="34" charset="-122"/>
+                <a:cs typeface="Calibri" pitchFamily="34" charset="-120"/>
+              </a:rPr>
+              <a:t>Board-Style Review</a:t>
+            </a:r>
+            <a:endParaRPr lang="en-US" sz="2600" dirty="0"/>
+          </a:p>
+        </p:txBody>
+      </p:sp>
+      <p:sp>
+        <p:nvSpPr>
+          <p:cNvPr id="4" name="Text 2"/>
+          <p:cNvSpPr/>
+          <p:nvPr/>
+        </p:nvSpPr>
+        <p:spPr>
+          <a:xfrm>
+            <a:off x="566928" y="1417320"/>
+            <a:ext cx="11057839" cy="914400"/>
+          </a:xfrm>
+          <a:prstGeom prst="rect">
+            <a:avLst/>
+          </a:prstGeom>
+          <a:noFill/>
+          <a:ln/>
+        </p:spPr>
+        <p:txBody>
+          <a:bodyPr wrap="square" lIns="0" tIns="0" rIns="0" bIns="0" rtlCol="0" anchor="t"/>
+          <a:lstStyle/>
+          <a:p>
+            <a:pPr algn="l" indent="0" marL="0">
+              <a:lnSpc>
+                <a:spcPct val="105000"/>
+              </a:lnSpc>
+              <a:buNone/>
+            </a:pPr>
+            <a:r>
+              <a:rPr lang="en-US" sz="1450" b="1" dirty="0">
+                <a:solidFill>
+                  <a:srgbClr val="1B2A38"/>
+                </a:solidFill>
+                <a:latin typeface="Calibri" pitchFamily="34" charset="0"/>
+                <a:ea typeface="Calibri" pitchFamily="34" charset="-122"/>
+                <a:cs typeface="Calibri" pitchFamily="34" charset="-120"/>
+              </a:rPr>
+              <a:t>Which standard is used to uniquely identify laboratory tests for interoperability?</a:t>
+            </a:r>
+            <a:endParaRPr lang="en-US" sz="1450" dirty="0"/>
+          </a:p>
+        </p:txBody>
+      </p:sp>
+      <p:sp>
+        <p:nvSpPr>
+          <p:cNvPr id="5" name="Text 3"/>
+          <p:cNvSpPr/>
+          <p:nvPr/>
+        </p:nvSpPr>
+        <p:spPr>
+          <a:xfrm>
+            <a:off x="658368" y="2395728"/>
+            <a:ext cx="6192390" cy="3017520"/>
+          </a:xfrm>
+          <a:prstGeom prst="rect">
+            <a:avLst/>
+          </a:prstGeom>
+          <a:noFill/>
+          <a:ln/>
+        </p:spPr>
+        <p:txBody>
+          <a:bodyPr wrap="square" lIns="0" tIns="0" rIns="0" bIns="0" rtlCol="0" anchor="t"/>
+          <a:lstStyle/>
+          <a:p>
+            <a:pPr algn="l" indent="0" marL="0">
+              <a:spcAft>
+                <a:spcPts val="600"/>
+              </a:spcAft>
+              <a:buNone/>
+            </a:pPr>
+            <a:r>
+              <a:rPr lang="en-US" sz="1350" dirty="0">
+                <a:solidFill>
+                  <a:srgbClr val="33444F"/>
+                </a:solidFill>
+                <a:latin typeface="Calibri" pitchFamily="34" charset="0"/>
+                <a:ea typeface="Calibri" pitchFamily="34" charset="-122"/>
+                <a:cs typeface="Calibri" pitchFamily="34" charset="-120"/>
+              </a:rPr>
+              <a:t>A. HL7 only</a:t>
+            </a:r>
+            <a:endParaRPr lang="en-US" sz="1350" dirty="0"/>
+          </a:p>
+          <a:p>
+            <a:pPr algn="l" indent="0" marL="0">
+              <a:spcAft>
+                <a:spcPts val="600"/>
+              </a:spcAft>
+              <a:buNone/>
+            </a:pPr>
+            <a:r>
+              <a:rPr lang="en-US" sz="1350" b="1" dirty="0">
+                <a:solidFill>
+                  <a:srgbClr val="2C3A41"/>
+                </a:solidFill>
+                <a:latin typeface="Calibri" pitchFamily="34" charset="0"/>
+                <a:ea typeface="Calibri" pitchFamily="34" charset="-122"/>
+                <a:cs typeface="Calibri" pitchFamily="34" charset="-120"/>
+              </a:rPr>
+              <a:t>B. LOINC</a:t>
+            </a:r>
+            <a:endParaRPr lang="en-US" sz="1350" dirty="0"/>
+          </a:p>
+          <a:p>
+            <a:pPr algn="l" indent="0" marL="0">
+              <a:spcAft>
+                <a:spcPts val="600"/>
+              </a:spcAft>
+              <a:buNone/>
+            </a:pPr>
+            <a:r>
+              <a:rPr lang="en-US" sz="1350" dirty="0">
+                <a:solidFill>
+                  <a:srgbClr val="33444F"/>
+                </a:solidFill>
+                <a:latin typeface="Calibri" pitchFamily="34" charset="0"/>
+                <a:ea typeface="Calibri" pitchFamily="34" charset="-122"/>
+                <a:cs typeface="Calibri" pitchFamily="34" charset="-120"/>
+              </a:rPr>
+              <a:t>C. ICD-10</a:t>
+            </a:r>
+            <a:endParaRPr lang="en-US" sz="1350" dirty="0"/>
+          </a:p>
+          <a:p>
+            <a:pPr algn="l" indent="0" marL="0">
+              <a:spcAft>
+                <a:spcPts val="600"/>
+              </a:spcAft>
+              <a:buNone/>
+            </a:pPr>
+            <a:r>
+              <a:rPr lang="en-US" sz="1350" dirty="0">
+                <a:solidFill>
+                  <a:srgbClr val="33444F"/>
+                </a:solidFill>
+                <a:latin typeface="Calibri" pitchFamily="34" charset="0"/>
+                <a:ea typeface="Calibri" pitchFamily="34" charset="-122"/>
+                <a:cs typeface="Calibri" pitchFamily="34" charset="-120"/>
+              </a:rPr>
+              <a:t>D. CPT</a:t>
+            </a:r>
+            <a:endParaRPr lang="en-US" sz="1350" dirty="0"/>
+          </a:p>
+          <a:p>
+            <a:pPr algn="l" indent="0" marL="0">
+              <a:spcAft>
+                <a:spcPts val="600"/>
+              </a:spcAft>
+              <a:buNone/>
+            </a:pPr>
+            <a:r>
+              <a:rPr lang="en-US" sz="1350" dirty="0">
+                <a:solidFill>
+                  <a:srgbClr val="33444F"/>
+                </a:solidFill>
+                <a:latin typeface="Calibri" pitchFamily="34" charset="0"/>
+                <a:ea typeface="Calibri" pitchFamily="34" charset="-122"/>
+                <a:cs typeface="Calibri" pitchFamily="34" charset="-120"/>
+              </a:rPr>
+              <a:t>E. SNOMED procedures</a:t>
+            </a:r>
+            <a:endParaRPr lang="en-US" sz="1350" dirty="0"/>
+          </a:p>
+        </p:txBody>
+      </p:sp>
+      <p:sp>
+        <p:nvSpPr>
+          <p:cNvPr id="6" name="Shape 4"/>
+          <p:cNvSpPr/>
+          <p:nvPr/>
+        </p:nvSpPr>
+        <p:spPr>
+          <a:xfrm>
+            <a:off x="7201632" y="2395728"/>
+            <a:ext cx="4423136" cy="3246120"/>
+          </a:xfrm>
+          <a:prstGeom prst="roundRect">
+            <a:avLst>
+              <a:gd name="adj" fmla="val 2535"/>
+            </a:avLst>
+          </a:prstGeom>
+          <a:solidFill>
+            <a:srgbClr val="ECEFF1"/>
+          </a:solidFill>
+          <a:ln/>
+          <a:effectLst>
+            <a:outerShdw sx="100000" sy="100000" kx="0" ky="0" algn="bl" rotWithShape="0" blurRad="88900" dist="25400" dir="5400000">
+              <a:srgbClr val="22303C">
+                <a:alpha val="12000"/>
+              </a:srgbClr>
+            </a:outerShdw>
+          </a:effectLst>
+        </p:spPr>
+        <p:txBody>
+          <a:bodyPr/>
+          <a:p/>
+        </p:txBody>
+      </p:sp>
+      <p:sp>
+        <p:nvSpPr>
+          <p:cNvPr id="7" name="Text 5"/>
+          <p:cNvSpPr/>
+          <p:nvPr/>
+        </p:nvSpPr>
+        <p:spPr>
+          <a:xfrm>
+            <a:off x="7439376" y="2578608"/>
+            <a:ext cx="3965936" cy="457200"/>
+          </a:xfrm>
+          <a:prstGeom prst="rect">
+            <a:avLst/>
+          </a:prstGeom>
+          <a:noFill/>
+          <a:ln/>
+        </p:spPr>
+        <p:txBody>
+          <a:bodyPr wrap="square" lIns="0" tIns="0" rIns="0" bIns="0" rtlCol="0" anchor="ctr"/>
+          <a:lstStyle/>
+          <a:p>
+            <a:pPr indent="0" marL="0">
+              <a:buNone/>
+            </a:pPr>
+            <a:r>
+              <a:rPr lang="en-US" sz="1500" b="1" dirty="0">
+                <a:solidFill>
+                  <a:srgbClr val="455A64"/>
+                </a:solidFill>
+                <a:latin typeface="Calibri" pitchFamily="34" charset="0"/>
+                <a:ea typeface="Calibri" pitchFamily="34" charset="-122"/>
+                <a:cs typeface="Calibri" pitchFamily="34" charset="-120"/>
+              </a:rPr>
+              <a:t>ANSWER  </a:t>
+            </a:r>
+            <a:pPr indent="0" marL="0">
+              <a:buNone/>
+            </a:pPr>
+            <a:r>
+              <a:rPr lang="en-US" sz="1500" b="1" dirty="0">
+                <a:solidFill>
+                  <a:srgbClr val="1B2A38"/>
+                </a:solidFill>
+                <a:latin typeface="Calibri" pitchFamily="34" charset="0"/>
+                <a:ea typeface="Calibri" pitchFamily="34" charset="-122"/>
+                <a:cs typeface="Calibri" pitchFamily="34" charset="-120"/>
+              </a:rPr>
+              <a:t>B — LOINC</a:t>
+            </a:r>
+            <a:endParaRPr lang="en-US" sz="1500" dirty="0"/>
+          </a:p>
+        </p:txBody>
+      </p:sp>
+      <p:sp>
+        <p:nvSpPr>
+          <p:cNvPr id="8" name="Text 6"/>
+          <p:cNvSpPr/>
+          <p:nvPr/>
+        </p:nvSpPr>
+        <p:spPr>
+          <a:xfrm>
+            <a:off x="7439376" y="3127248"/>
+            <a:ext cx="3947648" cy="2377440"/>
+          </a:xfrm>
+          <a:prstGeom prst="rect">
+            <a:avLst/>
+          </a:prstGeom>
+          <a:noFill/>
+          <a:ln/>
+        </p:spPr>
+        <p:txBody>
+          <a:bodyPr wrap="square" lIns="0" tIns="0" rIns="0" bIns="0" rtlCol="0" anchor="t"/>
+          <a:lstStyle/>
+          <a:p>
+            <a:pPr algn="l" indent="0" marL="0">
+              <a:lnSpc>
+                <a:spcPct val="108000"/>
+              </a:lnSpc>
+              <a:buNone/>
+            </a:pPr>
+            <a:r>
+              <a:rPr lang="en-US" sz="1250" dirty="0">
+                <a:solidFill>
+                  <a:srgbClr val="33444F"/>
+                </a:solidFill>
+                <a:latin typeface="Calibri" pitchFamily="34" charset="0"/>
+                <a:ea typeface="Calibri" pitchFamily="34" charset="-122"/>
+                <a:cs typeface="Calibri" pitchFamily="34" charset="-120"/>
+              </a:rPr>
+              <a:t>LOINC provides standardized identifiers for laboratory tests; HL7 is the messaging standard that carries them.</a:t>
+            </a:r>
+            <a:endParaRPr lang="en-US" sz="1250" dirty="0"/>
+          </a:p>
+        </p:txBody>
+      </p:sp>
+      <p:sp>
+        <p:nvSpPr>
+          <p:cNvPr id="9" name="Text 7"/>
+          <p:cNvSpPr/>
+          <p:nvPr/>
+        </p:nvSpPr>
+        <p:spPr>
+          <a:xfrm>
+            <a:off x="566928" y="6473952"/>
+            <a:ext cx="7772400" cy="274320"/>
+          </a:xfrm>
+          <a:prstGeom prst="rect">
+            <a:avLst/>
+          </a:prstGeom>
+          <a:noFill/>
+          <a:ln/>
+        </p:spPr>
+        <p:txBody>
+          <a:bodyPr wrap="square" lIns="0" tIns="0" rIns="0" bIns="0" rtlCol="0" anchor="ctr"/>
+          <a:lstStyle/>
+          <a:p>
+            <a:pPr algn="l" indent="0" marL="0">
+              <a:buNone/>
+            </a:pPr>
+            <a:r>
+              <a:rPr lang="en-US" sz="850" dirty="0">
+                <a:solidFill>
+                  <a:srgbClr val="9AA8B4"/>
+                </a:solidFill>
+                <a:latin typeface="Calibri" pitchFamily="34" charset="0"/>
+                <a:ea typeface="Calibri" pitchFamily="34" charset="-122"/>
+                <a:cs typeface="Calibri" pitchFamily="34" charset="-120"/>
+              </a:rPr>
+              <a:t>Makassed General Hospital  ·  Department of Laboratory Medicine</a:t>
+            </a:r>
+            <a:endParaRPr lang="en-US" sz="850" dirty="0"/>
+          </a:p>
+        </p:txBody>
+      </p:sp>
+      <p:sp>
+        <p:nvSpPr>
+          <p:cNvPr id="10" name="Text 8"/>
+          <p:cNvSpPr/>
+          <p:nvPr/>
+        </p:nvSpPr>
+        <p:spPr>
+          <a:xfrm>
+            <a:off x="9814255" y="6473952"/>
+            <a:ext cx="1828800" cy="274320"/>
+          </a:xfrm>
+          <a:prstGeom prst="rect">
+            <a:avLst/>
+          </a:prstGeom>
+          <a:noFill/>
+          <a:ln/>
+        </p:spPr>
+        <p:txBody>
+          <a:bodyPr wrap="square" lIns="0" tIns="0" rIns="0" bIns="0" rtlCol="0" anchor="ctr"/>
+          <a:lstStyle/>
+          <a:p>
+            <a:pPr algn="r" indent="0" marL="0">
+              <a:buNone/>
+            </a:pPr>
+            <a:r>
+              <a:rPr lang="en-US" sz="850" dirty="0">
+                <a:solidFill>
+                  <a:srgbClr val="9AA8B4"/>
+                </a:solidFill>
+                <a:latin typeface="Calibri" pitchFamily="34" charset="0"/>
+                <a:ea typeface="Calibri" pitchFamily="34" charset="-122"/>
+                <a:cs typeface="Calibri" pitchFamily="34" charset="-120"/>
+              </a:rPr>
+              <a:t>CP Lecture Series</a:t>
+            </a:r>
+            <a:pPr algn="r" indent="0" marL="0">
+              <a:buNone/>
+            </a:pPr>
+            <a:r>
+              <a:rPr lang="en-US" sz="850" dirty="0">
+                <a:solidFill>
+                  <a:srgbClr val="DCE4EC"/>
+                </a:solidFill>
+                <a:latin typeface="Calibri" pitchFamily="34" charset="0"/>
+                <a:ea typeface="Calibri" pitchFamily="34" charset="-122"/>
+                <a:cs typeface="Calibri" pitchFamily="34" charset="-120"/>
+              </a:rPr>
+              <a:t>   ·   </a:t>
+            </a:r>
+            <a:pPr algn="r" indent="0" marL="0">
+              <a:buNone/>
+            </a:pPr>
+            <a:r>
+              <a:rPr lang="en-US" sz="850" b="1" dirty="0">
+                <a:solidFill>
+                  <a:srgbClr val="455A64"/>
+                </a:solidFill>
+                <a:latin typeface="Calibri" pitchFamily="34" charset="0"/>
+                <a:ea typeface="Calibri" pitchFamily="34" charset="-122"/>
+                <a:cs typeface="Calibri" pitchFamily="34" charset="-120"/>
+              </a:rPr>
+              <a:t>17</a:t>
+            </a:r>
+            <a:endParaRPr lang="en-US" sz="850" dirty="0"/>
+          </a:p>
+        </p:txBody>
+      </p:sp>
+    </p:spTree>
+  </p:cSld>
+  <p:clrMapOvr>
+    <a:masterClrMapping/>
+  </p:clrMapOvr>
+</p:sld>
+</file>
+
 <file path=ppt/slides/slide3.xml><?xml version="1.0" encoding="utf-8"?>
 <p:sld xmlns:a="http://schemas.openxmlformats.org/drawingml/2006/main" xmlns:r="http://schemas.openxmlformats.org/officeDocument/2006/relationships" xmlns:p="http://schemas.openxmlformats.org/presentationml/2006/main">
   <p:cSld name="Slide 3">
@@ -11802,6 +13426,10 @@
             </a:outerShdw>
           </a:effectLst>
         </p:spPr>
+        <p:txBody>
+          <a:bodyPr/>
+          <a:p/>
+        </p:txBody>
       </p:sp>
       <p:sp>
         <p:nvSpPr>
@@ -11829,6 +13457,10 @@
             </a:outerShdw>
           </a:effectLst>
         </p:spPr>
+        <p:txBody>
+          <a:bodyPr/>
+          <a:p/>
+        </p:txBody>
       </p:sp>
       <p:sp>
         <p:nvSpPr>
@@ -11936,6 +13568,10 @@
             </a:outerShdw>
           </a:effectLst>
         </p:spPr>
+        <p:txBody>
+          <a:bodyPr/>
+          <a:p/>
+        </p:txBody>
       </p:sp>
       <p:sp>
         <p:nvSpPr>
@@ -11963,6 +13599,10 @@
             </a:outerShdw>
           </a:effectLst>
         </p:spPr>
+        <p:txBody>
+          <a:bodyPr/>
+          <a:p/>
+        </p:txBody>
       </p:sp>
       <p:sp>
         <p:nvSpPr>
@@ -12070,6 +13710,10 @@
             </a:outerShdw>
           </a:effectLst>
         </p:spPr>
+        <p:txBody>
+          <a:bodyPr/>
+          <a:p/>
+        </p:txBody>
       </p:sp>
       <p:sp>
         <p:nvSpPr>
@@ -12097,6 +13741,10 @@
             </a:outerShdw>
           </a:effectLst>
         </p:spPr>
+        <p:txBody>
+          <a:bodyPr/>
+          <a:p/>
+        </p:txBody>
       </p:sp>
       <p:sp>
         <p:nvSpPr>
@@ -12204,6 +13852,10 @@
             </a:outerShdw>
           </a:effectLst>
         </p:spPr>
+        <p:txBody>
+          <a:bodyPr/>
+          <a:p/>
+        </p:txBody>
       </p:sp>
       <p:sp>
         <p:nvSpPr>
@@ -12231,6 +13883,10 @@
             </a:outerShdw>
           </a:effectLst>
         </p:spPr>
+        <p:txBody>
+          <a:bodyPr/>
+          <a:p/>
+        </p:txBody>
       </p:sp>
       <p:sp>
         <p:nvSpPr>
@@ -12338,6 +13994,10 @@
             </a:outerShdw>
           </a:effectLst>
         </p:spPr>
+        <p:txBody>
+          <a:bodyPr/>
+          <a:p/>
+        </p:txBody>
       </p:sp>
       <p:sp>
         <p:nvSpPr>
@@ -12365,6 +14025,10 @@
             </a:outerShdw>
           </a:effectLst>
         </p:spPr>
+        <p:txBody>
+          <a:bodyPr/>
+          <a:p/>
+        </p:txBody>
       </p:sp>
       <p:sp>
         <p:nvSpPr>
@@ -12472,6 +14136,10 @@
             </a:outerShdw>
           </a:effectLst>
         </p:spPr>
+        <p:txBody>
+          <a:bodyPr/>
+          <a:p/>
+        </p:txBody>
       </p:sp>
       <p:sp>
         <p:nvSpPr>
@@ -12499,6 +14167,10 @@
             </a:outerShdw>
           </a:effectLst>
         </p:spPr>
+        <p:txBody>
+          <a:bodyPr/>
+          <a:p/>
+        </p:txBody>
       </p:sp>
       <p:sp>
         <p:nvSpPr>
@@ -12822,6 +14494,10 @@
             </a:outerShdw>
           </a:effectLst>
         </p:spPr>
+        <p:txBody>
+          <a:bodyPr/>
+          <a:p/>
+        </p:txBody>
       </p:sp>
       <p:sp>
         <p:nvSpPr>
@@ -12849,6 +14525,10 @@
             </a:outerShdw>
           </a:effectLst>
         </p:spPr>
+        <p:txBody>
+          <a:bodyPr/>
+          <a:p/>
+        </p:txBody>
       </p:sp>
       <p:sp>
         <p:nvSpPr>
@@ -12963,6 +14643,10 @@
           </a:solidFill>
           <a:ln/>
         </p:spPr>
+        <p:txBody>
+          <a:bodyPr/>
+          <a:p/>
+        </p:txBody>
       </p:sp>
       <p:sp>
         <p:nvSpPr>
@@ -12990,6 +14674,10 @@
             </a:outerShdw>
           </a:effectLst>
         </p:spPr>
+        <p:txBody>
+          <a:bodyPr/>
+          <a:p/>
+        </p:txBody>
       </p:sp>
       <p:sp>
         <p:nvSpPr>
@@ -13111,6 +14799,10 @@
             </a:outerShdw>
           </a:effectLst>
         </p:spPr>
+        <p:txBody>
+          <a:bodyPr/>
+          <a:p/>
+        </p:txBody>
       </p:sp>
       <p:sp>
         <p:nvSpPr>
@@ -13138,6 +14830,10 @@
             </a:outerShdw>
           </a:effectLst>
         </p:spPr>
+        <p:txBody>
+          <a:bodyPr/>
+          <a:p/>
+        </p:txBody>
       </p:sp>
       <p:sp>
         <p:nvSpPr>
@@ -13252,6 +14948,10 @@
           </a:solidFill>
           <a:ln/>
         </p:spPr>
+        <p:txBody>
+          <a:bodyPr/>
+          <a:p/>
+        </p:txBody>
       </p:sp>
       <p:sp>
         <p:nvSpPr>
@@ -13279,6 +14979,10 @@
             </a:outerShdw>
           </a:effectLst>
         </p:spPr>
+        <p:txBody>
+          <a:bodyPr/>
+          <a:p/>
+        </p:txBody>
       </p:sp>
       <p:sp>
         <p:nvSpPr>
@@ -13400,6 +15104,10 @@
             </a:outerShdw>
           </a:effectLst>
         </p:spPr>
+        <p:txBody>
+          <a:bodyPr/>
+          <a:p/>
+        </p:txBody>
       </p:sp>
       <p:sp>
         <p:nvSpPr>
@@ -13427,6 +15135,10 @@
             </a:outerShdw>
           </a:effectLst>
         </p:spPr>
+        <p:txBody>
+          <a:bodyPr/>
+          <a:p/>
+        </p:txBody>
       </p:sp>
       <p:sp>
         <p:nvSpPr>
@@ -13665,6 +15377,10 @@
           </a:solidFill>
           <a:ln/>
         </p:spPr>
+        <p:txBody>
+          <a:bodyPr/>
+          <a:p/>
+        </p:txBody>
       </p:sp>
       <p:sp>
         <p:nvSpPr>
@@ -13687,6 +15403,10 @@
           </a:solidFill>
           <a:ln/>
         </p:spPr>
+        <p:txBody>
+          <a:bodyPr/>
+          <a:p/>
+        </p:txBody>
       </p:sp>
       <p:sp>
         <p:nvSpPr>
@@ -13948,6 +15668,10 @@
             </a:outerShdw>
           </a:effectLst>
         </p:spPr>
+        <p:txBody>
+          <a:bodyPr/>
+          <a:p/>
+        </p:txBody>
       </p:sp>
       <p:pic>
         <p:nvPicPr>
@@ -14256,6 +15980,10 @@
             </a:outerShdw>
           </a:effectLst>
         </p:spPr>
+        <p:txBody>
+          <a:bodyPr/>
+          <a:p/>
+        </p:txBody>
       </p:sp>
       <p:sp>
         <p:nvSpPr>
@@ -14430,6 +16158,10 @@
             </a:outerShdw>
           </a:effectLst>
         </p:spPr>
+        <p:txBody>
+          <a:bodyPr/>
+          <a:p/>
+        </p:txBody>
       </p:sp>
       <p:sp>
         <p:nvSpPr>
@@ -14820,6 +16552,10 @@
             </a:outerShdw>
           </a:effectLst>
         </p:spPr>
+        <p:txBody>
+          <a:bodyPr/>
+          <a:p/>
+        </p:txBody>
       </p:sp>
       <p:sp>
         <p:nvSpPr>
@@ -14994,6 +16730,10 @@
             </a:outerShdw>
           </a:effectLst>
         </p:spPr>
+        <p:txBody>
+          <a:bodyPr/>
+          <a:p/>
+        </p:txBody>
       </p:sp>
       <p:sp>
         <p:nvSpPr>
@@ -15299,6 +17039,10 @@
           </a:solidFill>
           <a:ln/>
         </p:spPr>
+        <p:txBody>
+          <a:bodyPr/>
+          <a:p/>
+        </p:txBody>
       </p:sp>
       <p:sp>
         <p:nvSpPr>
@@ -15321,6 +17065,10 @@
           </a:solidFill>
           <a:ln/>
         </p:spPr>
+        <p:txBody>
+          <a:bodyPr/>
+          <a:p/>
+        </p:txBody>
       </p:sp>
       <p:sp>
         <p:nvSpPr>
